--- a/Crypto-Agility_Navigator_Review2.pptx
+++ b/Crypto-Agility_Navigator_Review2.pptx
@@ -24805,7 +24805,7 @@
                 <a:ea typeface="Arial" pitchFamily="34" charset="-122"/>
                 <a:cs typeface="Arial" pitchFamily="34" charset="-120"/>
               </a:rPr>
-              <a:t>MEMBER 1 (AVI DHANDHANIA)</a:t>
+              <a:t>AVI DHANDHANIA (25BCE1207)</a:t>
             </a:r>
             <a:endParaRPr lang="en-US" sz="950" dirty="0"/>
           </a:p>
@@ -25030,7 +25030,7 @@
                 <a:ea typeface="Arial" pitchFamily="34" charset="-122"/>
                 <a:cs typeface="Arial" pitchFamily="34" charset="-120"/>
               </a:rPr>
-              <a:t>TEAM MEMBER 2</a:t>
+              <a:t>ANMOL SALUJA (25BCE1332)</a:t>
             </a:r>
             <a:endParaRPr lang="en-US" sz="950" dirty="0"/>
           </a:p>
@@ -25255,7 +25255,7 @@
                 <a:ea typeface="Arial" pitchFamily="34" charset="-122"/>
                 <a:cs typeface="Arial" pitchFamily="34" charset="-120"/>
               </a:rPr>
-              <a:t>TEAM MEMBER 3</a:t>
+              <a:t>AVIKA TYAGI (25BCE1294)</a:t>
             </a:r>
             <a:endParaRPr lang="en-US" sz="950" dirty="0"/>
           </a:p>

--- a/Crypto-Agility_Navigator_Review2.pptx
+++ b/Crypto-Agility_Navigator_Review2.pptx
@@ -3972,7 +3972,7 @@
     <p:bg>
       <p:bgPr>
         <a:solidFill>
-          <a:srgbClr val="0A0A0A"/>
+          <a:srgbClr val="FFFFFF"/>
         </a:solidFill>
       </p:bgPr>
     </p:bg>
@@ -4017,7 +4017,7 @@
             <a:r>
               <a:rPr lang="en-US" sz="1100" b="1" dirty="0">
                 <a:solidFill>
-                  <a:srgbClr val="9A9A9A"/>
+                  <a:srgbClr val="666666"/>
                 </a:solidFill>
                 <a:latin typeface="Arial" pitchFamily="34" charset="0"/>
                 <a:ea typeface="Arial" pitchFamily="34" charset="-122"/>
@@ -4056,7 +4056,7 @@
             <a:r>
               <a:rPr lang="en-US" sz="3400" b="1" dirty="0">
                 <a:solidFill>
-                  <a:srgbClr val="FFFFFF"/>
+                  <a:srgbClr val="000000"/>
                 </a:solidFill>
                 <a:latin typeface="Arial" pitchFamily="34" charset="0"/>
                 <a:ea typeface="Arial" pitchFamily="34" charset="-122"/>
@@ -4095,7 +4095,7 @@
             <a:r>
               <a:rPr lang="en-US" sz="1500" dirty="0">
                 <a:solidFill>
-                  <a:srgbClr val="D9D9D9"/>
+                  <a:srgbClr val="333333"/>
                 </a:solidFill>
                 <a:latin typeface="Arial" pitchFamily="34" charset="0"/>
                 <a:ea typeface="Arial" pitchFamily="34" charset="-122"/>
@@ -4122,11 +4122,11 @@
             <a:avLst/>
           </a:prstGeom>
           <a:solidFill>
-            <a:srgbClr val="1F1F1F"/>
+            <a:srgbClr val="F8F9FA"/>
           </a:solidFill>
           <a:ln w="12700">
             <a:solidFill>
-              <a:srgbClr val="4A4A4A"/>
+              <a:srgbClr val="E0E0E0"/>
             </a:solidFill>
             <a:prstDash val="solid"/>
           </a:ln>
@@ -4162,7 +4162,7 @@
             <a:r>
               <a:rPr lang="en-US" sz="950" b="1" dirty="0">
                 <a:solidFill>
-                  <a:srgbClr val="FFFFFF"/>
+                  <a:srgbClr val="000000"/>
                 </a:solidFill>
                 <a:latin typeface="Arial" pitchFamily="34" charset="0"/>
                 <a:ea typeface="Arial" pitchFamily="34" charset="-122"/>
@@ -4179,7 +4179,7 @@
             <a:r>
               <a:rPr lang="en-US" sz="950" dirty="0">
                 <a:solidFill>
-                  <a:srgbClr val="D9D9D9"/>
+                  <a:srgbClr val="333333"/>
                 </a:solidFill>
                 <a:latin typeface="Arial" pitchFamily="34" charset="0"/>
                 <a:ea typeface="Arial" pitchFamily="34" charset="-122"/>
@@ -4197,7 +4197,7 @@
             <a:r>
               <a:rPr lang="en-US" sz="950" b="1" dirty="0">
                 <a:solidFill>
-                  <a:srgbClr val="FFFFFF"/>
+                  <a:srgbClr val="000000"/>
                 </a:solidFill>
                 <a:latin typeface="Arial" pitchFamily="34" charset="0"/>
                 <a:ea typeface="Arial" pitchFamily="34" charset="-122"/>
@@ -4214,7 +4214,7 @@
             <a:r>
               <a:rPr lang="en-US" sz="950" dirty="0">
                 <a:solidFill>
-                  <a:srgbClr val="D9D9D9"/>
+                  <a:srgbClr val="333333"/>
                 </a:solidFill>
                 <a:latin typeface="Arial" pitchFamily="34" charset="0"/>
                 <a:ea typeface="Arial" pitchFamily="34" charset="-122"/>
@@ -4232,7 +4232,7 @@
             <a:r>
               <a:rPr lang="en-US" sz="950" b="1" dirty="0">
                 <a:solidFill>
-                  <a:srgbClr val="FFFFFF"/>
+                  <a:srgbClr val="000000"/>
                 </a:solidFill>
                 <a:latin typeface="Arial" pitchFamily="34" charset="0"/>
                 <a:ea typeface="Arial" pitchFamily="34" charset="-122"/>
@@ -4249,7 +4249,7 @@
             <a:r>
               <a:rPr lang="en-US" sz="950" dirty="0">
                 <a:solidFill>
-                  <a:srgbClr val="D9D9D9"/>
+                  <a:srgbClr val="333333"/>
                 </a:solidFill>
                 <a:latin typeface="Arial" pitchFamily="34" charset="0"/>
                 <a:ea typeface="Arial" pitchFamily="34" charset="-122"/>
@@ -4267,7 +4267,7 @@
             <a:r>
               <a:rPr lang="en-US" sz="950" b="1" dirty="0">
                 <a:solidFill>
-                  <a:srgbClr val="FFFFFF"/>
+                  <a:srgbClr val="000000"/>
                 </a:solidFill>
                 <a:latin typeface="Arial" pitchFamily="34" charset="0"/>
                 <a:ea typeface="Arial" pitchFamily="34" charset="-122"/>
@@ -4284,7 +4284,7 @@
             <a:r>
               <a:rPr lang="en-US" sz="950" dirty="0">
                 <a:solidFill>
-                  <a:srgbClr val="9A9A9A"/>
+                  <a:srgbClr val="666666"/>
                 </a:solidFill>
                 <a:latin typeface="Arial" pitchFamily="34" charset="0"/>
                 <a:ea typeface="Arial" pitchFamily="34" charset="-122"/>
@@ -4323,7 +4323,7 @@
             <a:r>
               <a:rPr lang="en-US" sz="850" b="1" dirty="0">
                 <a:solidFill>
-                  <a:srgbClr val="9A9A9A"/>
+                  <a:srgbClr val="666666"/>
                 </a:solidFill>
                 <a:latin typeface="Arial" pitchFamily="34" charset="0"/>
                 <a:ea typeface="Arial" pitchFamily="34" charset="-122"/>
@@ -4349,7 +4349,7 @@
     <p:bg>
       <p:bgPr>
         <a:solidFill>
-          <a:srgbClr val="0A0A0A"/>
+          <a:srgbClr val="FFFFFF"/>
         </a:solidFill>
       </p:bgPr>
     </p:bg>
@@ -4384,7 +4384,7 @@
           <a:noFill/>
           <a:ln w="12700">
             <a:solidFill>
-              <a:srgbClr val="4A4A4A"/>
+              <a:srgbClr val="E0E0E0"/>
             </a:solidFill>
             <a:prstDash val="solid"/>
           </a:ln>
@@ -4417,7 +4417,7 @@
             <a:r>
               <a:rPr lang="en-US" sz="900" b="1" dirty="0">
                 <a:solidFill>
-                  <a:srgbClr val="9A9A9A"/>
+                  <a:srgbClr val="666666"/>
                 </a:solidFill>
                 <a:latin typeface="Arial" pitchFamily="34" charset="0"/>
                 <a:ea typeface="Arial" pitchFamily="34" charset="-122"/>
@@ -4456,7 +4456,7 @@
             <a:r>
               <a:rPr lang="en-US" sz="900" b="1" dirty="0">
                 <a:solidFill>
-                  <a:srgbClr val="9A9A9A"/>
+                  <a:srgbClr val="666666"/>
                 </a:solidFill>
                 <a:latin typeface="Arial" pitchFamily="34" charset="0"/>
                 <a:ea typeface="Arial" pitchFamily="34" charset="-122"/>
@@ -4495,7 +4495,7 @@
             <a:r>
               <a:rPr lang="en-US" sz="1200" b="1" dirty="0">
                 <a:solidFill>
-                  <a:srgbClr val="9A9A9A"/>
+                  <a:srgbClr val="666666"/>
                 </a:solidFill>
                 <a:latin typeface="Arial" pitchFamily="34" charset="0"/>
                 <a:ea typeface="Arial" pitchFamily="34" charset="-122"/>
@@ -4534,7 +4534,7 @@
             <a:r>
               <a:rPr lang="en-US" sz="1800" b="1" dirty="0">
                 <a:solidFill>
-                  <a:srgbClr val="FFFFFF"/>
+                  <a:srgbClr val="000000"/>
                 </a:solidFill>
                 <a:latin typeface="Arial" pitchFamily="34" charset="0"/>
                 <a:ea typeface="Arial" pitchFamily="34" charset="-122"/>
@@ -4563,7 +4563,7 @@
           <a:noFill/>
           <a:ln w="12700">
             <a:solidFill>
-              <a:srgbClr val="4A4A4A"/>
+              <a:srgbClr val="E0E0E0"/>
             </a:solidFill>
             <a:prstDash val="solid"/>
           </a:ln>
@@ -4596,7 +4596,7 @@
             <a:r>
               <a:rPr lang="en-US" sz="850" b="1" dirty="0">
                 <a:solidFill>
-                  <a:srgbClr val="9A9A9A"/>
+                  <a:srgbClr val="666666"/>
                 </a:solidFill>
                 <a:latin typeface="Arial" pitchFamily="34" charset="0"/>
                 <a:ea typeface="Arial" pitchFamily="34" charset="-122"/>
@@ -4635,7 +4635,7 @@
             <a:r>
               <a:rPr lang="en-US" sz="850" b="1" dirty="0">
                 <a:solidFill>
-                  <a:srgbClr val="9A9A9A"/>
+                  <a:srgbClr val="666666"/>
                 </a:solidFill>
                 <a:latin typeface="Arial" pitchFamily="34" charset="0"/>
                 <a:ea typeface="Arial" pitchFamily="34" charset="-122"/>
@@ -4662,11 +4662,11 @@
             <a:avLst/>
           </a:prstGeom>
           <a:solidFill>
-            <a:srgbClr val="1F1F1F"/>
+            <a:srgbClr val="F8F9FA"/>
           </a:solidFill>
           <a:ln w="12700">
             <a:solidFill>
-              <a:srgbClr val="4A4A4A"/>
+              <a:srgbClr val="E0E0E0"/>
             </a:solidFill>
             <a:prstDash val="solid"/>
           </a:ln>
@@ -4699,7 +4699,7 @@
             <a:r>
               <a:rPr lang="en-US" sz="1200" b="1" dirty="0">
                 <a:solidFill>
-                  <a:srgbClr val="4A90E2"/>
+                  <a:srgbClr val="1976D2"/>
                 </a:solidFill>
                 <a:latin typeface="Arial" pitchFamily="34" charset="0"/>
                 <a:ea typeface="Arial" pitchFamily="34" charset="-122"/>
@@ -4738,7 +4738,7 @@
             <a:r>
               <a:rPr lang="en-US" sz="950" b="1" dirty="0">
                 <a:solidFill>
-                  <a:srgbClr val="FFFFFF"/>
+                  <a:srgbClr val="000000"/>
                 </a:solidFill>
                 <a:latin typeface="Arial" pitchFamily="34" charset="0"/>
                 <a:ea typeface="Arial" pitchFamily="34" charset="-122"/>
@@ -4780,7 +4780,7 @@
             <a:r>
               <a:rPr lang="en-US" sz="800" dirty="0">
                 <a:solidFill>
-                  <a:srgbClr val="D9D9D9"/>
+                  <a:srgbClr val="333333"/>
                 </a:solidFill>
                 <a:latin typeface="Arial" pitchFamily="34" charset="0"/>
                 <a:ea typeface="Arial" pitchFamily="34" charset="-122"/>
@@ -4819,7 +4819,7 @@
             <a:r>
               <a:rPr lang="en-US" sz="800" b="1" dirty="0">
                 <a:solidFill>
-                  <a:srgbClr val="4EAF51"/>
+                  <a:srgbClr val="2E7D32"/>
                 </a:solidFill>
                 <a:latin typeface="Arial" pitchFamily="34" charset="0"/>
                 <a:ea typeface="Arial" pitchFamily="34" charset="-122"/>
@@ -4846,11 +4846,11 @@
             <a:avLst/>
           </a:prstGeom>
           <a:solidFill>
-            <a:srgbClr val="1F1F1F"/>
+            <a:srgbClr val="F8F9FA"/>
           </a:solidFill>
           <a:ln w="12700">
             <a:solidFill>
-              <a:srgbClr val="4A4A4A"/>
+              <a:srgbClr val="E0E0E0"/>
             </a:solidFill>
             <a:prstDash val="solid"/>
           </a:ln>
@@ -4883,7 +4883,7 @@
             <a:r>
               <a:rPr lang="en-US" sz="1200" b="1" dirty="0">
                 <a:solidFill>
-                  <a:srgbClr val="4A90E2"/>
+                  <a:srgbClr val="1976D2"/>
                 </a:solidFill>
                 <a:latin typeface="Arial" pitchFamily="34" charset="0"/>
                 <a:ea typeface="Arial" pitchFamily="34" charset="-122"/>
@@ -4922,7 +4922,7 @@
             <a:r>
               <a:rPr lang="en-US" sz="950" b="1" dirty="0">
                 <a:solidFill>
-                  <a:srgbClr val="FFFFFF"/>
+                  <a:srgbClr val="000000"/>
                 </a:solidFill>
                 <a:latin typeface="Arial" pitchFamily="34" charset="0"/>
                 <a:ea typeface="Arial" pitchFamily="34" charset="-122"/>
@@ -4964,7 +4964,7 @@
             <a:r>
               <a:rPr lang="en-US" sz="800" dirty="0">
                 <a:solidFill>
-                  <a:srgbClr val="D9D9D9"/>
+                  <a:srgbClr val="333333"/>
                 </a:solidFill>
                 <a:latin typeface="Arial" pitchFamily="34" charset="0"/>
                 <a:ea typeface="Arial" pitchFamily="34" charset="-122"/>
@@ -5003,7 +5003,7 @@
             <a:r>
               <a:rPr lang="en-US" sz="800" b="1" dirty="0">
                 <a:solidFill>
-                  <a:srgbClr val="4EAF51"/>
+                  <a:srgbClr val="2E7D32"/>
                 </a:solidFill>
                 <a:latin typeface="Arial" pitchFamily="34" charset="0"/>
                 <a:ea typeface="Arial" pitchFamily="34" charset="-122"/>
@@ -5030,11 +5030,11 @@
             <a:avLst/>
           </a:prstGeom>
           <a:solidFill>
-            <a:srgbClr val="1F1F1F"/>
+            <a:srgbClr val="F8F9FA"/>
           </a:solidFill>
           <a:ln w="12700">
             <a:solidFill>
-              <a:srgbClr val="4A4A4A"/>
+              <a:srgbClr val="E0E0E0"/>
             </a:solidFill>
             <a:prstDash val="solid"/>
           </a:ln>
@@ -5067,7 +5067,7 @@
             <a:r>
               <a:rPr lang="en-US" sz="1200" b="1" dirty="0">
                 <a:solidFill>
-                  <a:srgbClr val="4A90E2"/>
+                  <a:srgbClr val="1976D2"/>
                 </a:solidFill>
                 <a:latin typeface="Arial" pitchFamily="34" charset="0"/>
                 <a:ea typeface="Arial" pitchFamily="34" charset="-122"/>
@@ -5106,7 +5106,7 @@
             <a:r>
               <a:rPr lang="en-US" sz="950" b="1" dirty="0">
                 <a:solidFill>
-                  <a:srgbClr val="FFFFFF"/>
+                  <a:srgbClr val="000000"/>
                 </a:solidFill>
                 <a:latin typeface="Arial" pitchFamily="34" charset="0"/>
                 <a:ea typeface="Arial" pitchFamily="34" charset="-122"/>
@@ -5148,7 +5148,7 @@
             <a:r>
               <a:rPr lang="en-US" sz="800" dirty="0">
                 <a:solidFill>
-                  <a:srgbClr val="D9D9D9"/>
+                  <a:srgbClr val="333333"/>
                 </a:solidFill>
                 <a:latin typeface="Arial" pitchFamily="34" charset="0"/>
                 <a:ea typeface="Arial" pitchFamily="34" charset="-122"/>
@@ -5187,7 +5187,7 @@
             <a:r>
               <a:rPr lang="en-US" sz="800" b="1" dirty="0">
                 <a:solidFill>
-                  <a:srgbClr val="4EAF51"/>
+                  <a:srgbClr val="2E7D32"/>
                 </a:solidFill>
                 <a:latin typeface="Arial" pitchFamily="34" charset="0"/>
                 <a:ea typeface="Arial" pitchFamily="34" charset="-122"/>
@@ -5214,11 +5214,11 @@
             <a:avLst/>
           </a:prstGeom>
           <a:solidFill>
-            <a:srgbClr val="1F1F1F"/>
+            <a:srgbClr val="F8F9FA"/>
           </a:solidFill>
           <a:ln w="12700">
             <a:solidFill>
-              <a:srgbClr val="4A4A4A"/>
+              <a:srgbClr val="E0E0E0"/>
             </a:solidFill>
             <a:prstDash val="solid"/>
           </a:ln>
@@ -5251,7 +5251,7 @@
             <a:r>
               <a:rPr lang="en-US" sz="1200" b="1" dirty="0">
                 <a:solidFill>
-                  <a:srgbClr val="4A90E2"/>
+                  <a:srgbClr val="1976D2"/>
                 </a:solidFill>
                 <a:latin typeface="Arial" pitchFamily="34" charset="0"/>
                 <a:ea typeface="Arial" pitchFamily="34" charset="-122"/>
@@ -5290,7 +5290,7 @@
             <a:r>
               <a:rPr lang="en-US" sz="950" b="1" dirty="0">
                 <a:solidFill>
-                  <a:srgbClr val="FFFFFF"/>
+                  <a:srgbClr val="000000"/>
                 </a:solidFill>
                 <a:latin typeface="Arial" pitchFamily="34" charset="0"/>
                 <a:ea typeface="Arial" pitchFamily="34" charset="-122"/>
@@ -5332,7 +5332,7 @@
             <a:r>
               <a:rPr lang="en-US" sz="800" dirty="0">
                 <a:solidFill>
-                  <a:srgbClr val="D9D9D9"/>
+                  <a:srgbClr val="333333"/>
                 </a:solidFill>
                 <a:latin typeface="Arial" pitchFamily="34" charset="0"/>
                 <a:ea typeface="Arial" pitchFamily="34" charset="-122"/>
@@ -5371,7 +5371,7 @@
             <a:r>
               <a:rPr lang="en-US" sz="800" b="1" dirty="0">
                 <a:solidFill>
-                  <a:srgbClr val="4EAF51"/>
+                  <a:srgbClr val="2E7D32"/>
                 </a:solidFill>
                 <a:latin typeface="Arial" pitchFamily="34" charset="0"/>
                 <a:ea typeface="Arial" pitchFamily="34" charset="-122"/>
@@ -5397,7 +5397,7 @@
     <p:bg>
       <p:bgPr>
         <a:solidFill>
-          <a:srgbClr val="0A0A0A"/>
+          <a:srgbClr val="FFFFFF"/>
         </a:solidFill>
       </p:bgPr>
     </p:bg>
@@ -5432,7 +5432,7 @@
           <a:noFill/>
           <a:ln w="12700">
             <a:solidFill>
-              <a:srgbClr val="4A4A4A"/>
+              <a:srgbClr val="E0E0E0"/>
             </a:solidFill>
             <a:prstDash val="solid"/>
           </a:ln>
@@ -5465,7 +5465,7 @@
             <a:r>
               <a:rPr lang="en-US" sz="900" b="1" dirty="0">
                 <a:solidFill>
-                  <a:srgbClr val="9A9A9A"/>
+                  <a:srgbClr val="666666"/>
                 </a:solidFill>
                 <a:latin typeface="Arial" pitchFamily="34" charset="0"/>
                 <a:ea typeface="Arial" pitchFamily="34" charset="-122"/>
@@ -5504,7 +5504,7 @@
             <a:r>
               <a:rPr lang="en-US" sz="900" b="1" dirty="0">
                 <a:solidFill>
-                  <a:srgbClr val="9A9A9A"/>
+                  <a:srgbClr val="666666"/>
                 </a:solidFill>
                 <a:latin typeface="Arial" pitchFamily="34" charset="0"/>
                 <a:ea typeface="Arial" pitchFamily="34" charset="-122"/>
@@ -5543,7 +5543,7 @@
             <a:r>
               <a:rPr lang="en-US" sz="1200" b="1" dirty="0">
                 <a:solidFill>
-                  <a:srgbClr val="9A9A9A"/>
+                  <a:srgbClr val="666666"/>
                 </a:solidFill>
                 <a:latin typeface="Arial" pitchFamily="34" charset="0"/>
                 <a:ea typeface="Arial" pitchFamily="34" charset="-122"/>
@@ -5582,7 +5582,7 @@
             <a:r>
               <a:rPr lang="en-US" sz="1800" b="1" dirty="0">
                 <a:solidFill>
-                  <a:srgbClr val="FFFFFF"/>
+                  <a:srgbClr val="000000"/>
                 </a:solidFill>
                 <a:latin typeface="Arial" pitchFamily="34" charset="0"/>
                 <a:ea typeface="Arial" pitchFamily="34" charset="-122"/>
@@ -5611,7 +5611,7 @@
           <a:noFill/>
           <a:ln w="12700">
             <a:solidFill>
-              <a:srgbClr val="4A4A4A"/>
+              <a:srgbClr val="E0E0E0"/>
             </a:solidFill>
             <a:prstDash val="solid"/>
           </a:ln>
@@ -5644,7 +5644,7 @@
             <a:r>
               <a:rPr lang="en-US" sz="850" b="1" dirty="0">
                 <a:solidFill>
-                  <a:srgbClr val="9A9A9A"/>
+                  <a:srgbClr val="666666"/>
                 </a:solidFill>
                 <a:latin typeface="Arial" pitchFamily="34" charset="0"/>
                 <a:ea typeface="Arial" pitchFamily="34" charset="-122"/>
@@ -5683,7 +5683,7 @@
             <a:r>
               <a:rPr lang="en-US" sz="850" b="1" dirty="0">
                 <a:solidFill>
-                  <a:srgbClr val="9A9A9A"/>
+                  <a:srgbClr val="666666"/>
                 </a:solidFill>
                 <a:latin typeface="Arial" pitchFamily="34" charset="0"/>
                 <a:ea typeface="Arial" pitchFamily="34" charset="-122"/>
@@ -5710,11 +5710,11 @@
             <a:avLst/>
           </a:prstGeom>
           <a:solidFill>
-            <a:srgbClr val="1F1F1F"/>
+            <a:srgbClr val="F8F9FA"/>
           </a:solidFill>
           <a:ln w="12700">
             <a:solidFill>
-              <a:srgbClr val="4A4A4A"/>
+              <a:srgbClr val="E0E0E0"/>
             </a:solidFill>
             <a:prstDash val="solid"/>
           </a:ln>
@@ -5747,7 +5747,7 @@
             <a:r>
               <a:rPr lang="en-US" sz="1200" b="1" dirty="0">
                 <a:solidFill>
-                  <a:srgbClr val="4A90E2"/>
+                  <a:srgbClr val="1976D2"/>
                 </a:solidFill>
                 <a:latin typeface="Arial" pitchFamily="34" charset="0"/>
                 <a:ea typeface="Arial" pitchFamily="34" charset="-122"/>
@@ -5786,7 +5786,7 @@
             <a:r>
               <a:rPr lang="en-US" sz="950" b="1" dirty="0">
                 <a:solidFill>
-                  <a:srgbClr val="FFFFFF"/>
+                  <a:srgbClr val="000000"/>
                 </a:solidFill>
                 <a:latin typeface="Arial" pitchFamily="34" charset="0"/>
                 <a:ea typeface="Arial" pitchFamily="34" charset="-122"/>
@@ -5828,7 +5828,7 @@
             <a:r>
               <a:rPr lang="en-US" sz="800" dirty="0">
                 <a:solidFill>
-                  <a:srgbClr val="D9D9D9"/>
+                  <a:srgbClr val="333333"/>
                 </a:solidFill>
                 <a:latin typeface="Arial" pitchFamily="34" charset="0"/>
                 <a:ea typeface="Arial" pitchFamily="34" charset="-122"/>
@@ -5867,7 +5867,7 @@
             <a:r>
               <a:rPr lang="en-US" sz="800" b="1" dirty="0">
                 <a:solidFill>
-                  <a:srgbClr val="4EAF51"/>
+                  <a:srgbClr val="2E7D32"/>
                 </a:solidFill>
                 <a:latin typeface="Arial" pitchFamily="34" charset="0"/>
                 <a:ea typeface="Arial" pitchFamily="34" charset="-122"/>
@@ -5894,11 +5894,11 @@
             <a:avLst/>
           </a:prstGeom>
           <a:solidFill>
-            <a:srgbClr val="1F1F1F"/>
+            <a:srgbClr val="F8F9FA"/>
           </a:solidFill>
           <a:ln w="12700">
             <a:solidFill>
-              <a:srgbClr val="4A4A4A"/>
+              <a:srgbClr val="E0E0E0"/>
             </a:solidFill>
             <a:prstDash val="solid"/>
           </a:ln>
@@ -5931,7 +5931,7 @@
             <a:r>
               <a:rPr lang="en-US" sz="1200" b="1" dirty="0">
                 <a:solidFill>
-                  <a:srgbClr val="4A90E2"/>
+                  <a:srgbClr val="1976D2"/>
                 </a:solidFill>
                 <a:latin typeface="Arial" pitchFamily="34" charset="0"/>
                 <a:ea typeface="Arial" pitchFamily="34" charset="-122"/>
@@ -5970,7 +5970,7 @@
             <a:r>
               <a:rPr lang="en-US" sz="950" b="1" dirty="0">
                 <a:solidFill>
-                  <a:srgbClr val="FFFFFF"/>
+                  <a:srgbClr val="000000"/>
                 </a:solidFill>
                 <a:latin typeface="Arial" pitchFamily="34" charset="0"/>
                 <a:ea typeface="Arial" pitchFamily="34" charset="-122"/>
@@ -6012,7 +6012,7 @@
             <a:r>
               <a:rPr lang="en-US" sz="800" dirty="0">
                 <a:solidFill>
-                  <a:srgbClr val="D9D9D9"/>
+                  <a:srgbClr val="333333"/>
                 </a:solidFill>
                 <a:latin typeface="Arial" pitchFamily="34" charset="0"/>
                 <a:ea typeface="Arial" pitchFamily="34" charset="-122"/>
@@ -6051,7 +6051,7 @@
             <a:r>
               <a:rPr lang="en-US" sz="800" b="1" dirty="0">
                 <a:solidFill>
-                  <a:srgbClr val="4EAF51"/>
+                  <a:srgbClr val="2E7D32"/>
                 </a:solidFill>
                 <a:latin typeface="Arial" pitchFamily="34" charset="0"/>
                 <a:ea typeface="Arial" pitchFamily="34" charset="-122"/>
@@ -6078,11 +6078,11 @@
             <a:avLst/>
           </a:prstGeom>
           <a:solidFill>
-            <a:srgbClr val="1F1F1F"/>
+            <a:srgbClr val="F8F9FA"/>
           </a:solidFill>
           <a:ln w="12700">
             <a:solidFill>
-              <a:srgbClr val="4A4A4A"/>
+              <a:srgbClr val="E0E0E0"/>
             </a:solidFill>
             <a:prstDash val="solid"/>
           </a:ln>
@@ -6115,7 +6115,7 @@
             <a:r>
               <a:rPr lang="en-US" sz="1200" b="1" dirty="0">
                 <a:solidFill>
-                  <a:srgbClr val="4A90E2"/>
+                  <a:srgbClr val="1976D2"/>
                 </a:solidFill>
                 <a:latin typeface="Arial" pitchFamily="34" charset="0"/>
                 <a:ea typeface="Arial" pitchFamily="34" charset="-122"/>
@@ -6154,7 +6154,7 @@
             <a:r>
               <a:rPr lang="en-US" sz="950" b="1" dirty="0">
                 <a:solidFill>
-                  <a:srgbClr val="FFFFFF"/>
+                  <a:srgbClr val="000000"/>
                 </a:solidFill>
                 <a:latin typeface="Arial" pitchFamily="34" charset="0"/>
                 <a:ea typeface="Arial" pitchFamily="34" charset="-122"/>
@@ -6196,7 +6196,7 @@
             <a:r>
               <a:rPr lang="en-US" sz="800" dirty="0">
                 <a:solidFill>
-                  <a:srgbClr val="D9D9D9"/>
+                  <a:srgbClr val="333333"/>
                 </a:solidFill>
                 <a:latin typeface="Arial" pitchFamily="34" charset="0"/>
                 <a:ea typeface="Arial" pitchFamily="34" charset="-122"/>
@@ -6235,7 +6235,7 @@
             <a:r>
               <a:rPr lang="en-US" sz="800" b="1" dirty="0">
                 <a:solidFill>
-                  <a:srgbClr val="4EAF51"/>
+                  <a:srgbClr val="2E7D32"/>
                 </a:solidFill>
                 <a:latin typeface="Arial" pitchFamily="34" charset="0"/>
                 <a:ea typeface="Arial" pitchFamily="34" charset="-122"/>
@@ -6262,11 +6262,11 @@
             <a:avLst/>
           </a:prstGeom>
           <a:solidFill>
-            <a:srgbClr val="1F1F1F"/>
+            <a:srgbClr val="F8F9FA"/>
           </a:solidFill>
           <a:ln w="12700">
             <a:solidFill>
-              <a:srgbClr val="4A4A4A"/>
+              <a:srgbClr val="E0E0E0"/>
             </a:solidFill>
             <a:prstDash val="solid"/>
           </a:ln>
@@ -6299,7 +6299,7 @@
             <a:r>
               <a:rPr lang="en-US" sz="1200" b="1" dirty="0">
                 <a:solidFill>
-                  <a:srgbClr val="4A90E2"/>
+                  <a:srgbClr val="1976D2"/>
                 </a:solidFill>
                 <a:latin typeface="Arial" pitchFamily="34" charset="0"/>
                 <a:ea typeface="Arial" pitchFamily="34" charset="-122"/>
@@ -6338,7 +6338,7 @@
             <a:r>
               <a:rPr lang="en-US" sz="950" b="1" dirty="0">
                 <a:solidFill>
-                  <a:srgbClr val="FFFFFF"/>
+                  <a:srgbClr val="000000"/>
                 </a:solidFill>
                 <a:latin typeface="Arial" pitchFamily="34" charset="0"/>
                 <a:ea typeface="Arial" pitchFamily="34" charset="-122"/>
@@ -6380,7 +6380,7 @@
             <a:r>
               <a:rPr lang="en-US" sz="800" dirty="0">
                 <a:solidFill>
-                  <a:srgbClr val="D9D9D9"/>
+                  <a:srgbClr val="333333"/>
                 </a:solidFill>
                 <a:latin typeface="Arial" pitchFamily="34" charset="0"/>
                 <a:ea typeface="Arial" pitchFamily="34" charset="-122"/>
@@ -6419,7 +6419,7 @@
             <a:r>
               <a:rPr lang="en-US" sz="800" b="1" dirty="0">
                 <a:solidFill>
-                  <a:srgbClr val="4EAF51"/>
+                  <a:srgbClr val="2E7D32"/>
                 </a:solidFill>
                 <a:latin typeface="Arial" pitchFamily="34" charset="0"/>
                 <a:ea typeface="Arial" pitchFamily="34" charset="-122"/>
@@ -6445,7 +6445,7 @@
     <p:bg>
       <p:bgPr>
         <a:solidFill>
-          <a:srgbClr val="0A0A0A"/>
+          <a:srgbClr val="FFFFFF"/>
         </a:solidFill>
       </p:bgPr>
     </p:bg>
@@ -6480,7 +6480,7 @@
           <a:noFill/>
           <a:ln w="12700">
             <a:solidFill>
-              <a:srgbClr val="4A4A4A"/>
+              <a:srgbClr val="E0E0E0"/>
             </a:solidFill>
             <a:prstDash val="solid"/>
           </a:ln>
@@ -6513,7 +6513,7 @@
             <a:r>
               <a:rPr lang="en-US" sz="900" b="1" dirty="0">
                 <a:solidFill>
-                  <a:srgbClr val="9A9A9A"/>
+                  <a:srgbClr val="666666"/>
                 </a:solidFill>
                 <a:latin typeface="Arial" pitchFamily="34" charset="0"/>
                 <a:ea typeface="Arial" pitchFamily="34" charset="-122"/>
@@ -6552,7 +6552,7 @@
             <a:r>
               <a:rPr lang="en-US" sz="900" b="1" dirty="0">
                 <a:solidFill>
-                  <a:srgbClr val="9A9A9A"/>
+                  <a:srgbClr val="666666"/>
                 </a:solidFill>
                 <a:latin typeface="Arial" pitchFamily="34" charset="0"/>
                 <a:ea typeface="Arial" pitchFamily="34" charset="-122"/>
@@ -6591,7 +6591,7 @@
             <a:r>
               <a:rPr lang="en-US" sz="1200" b="1" dirty="0">
                 <a:solidFill>
-                  <a:srgbClr val="9A9A9A"/>
+                  <a:srgbClr val="666666"/>
                 </a:solidFill>
                 <a:latin typeface="Arial" pitchFamily="34" charset="0"/>
                 <a:ea typeface="Arial" pitchFamily="34" charset="-122"/>
@@ -6630,7 +6630,7 @@
             <a:r>
               <a:rPr lang="en-US" sz="1800" b="1" dirty="0">
                 <a:solidFill>
-                  <a:srgbClr val="FFFFFF"/>
+                  <a:srgbClr val="000000"/>
                 </a:solidFill>
                 <a:latin typeface="Arial" pitchFamily="34" charset="0"/>
                 <a:ea typeface="Arial" pitchFamily="34" charset="-122"/>
@@ -6659,7 +6659,7 @@
           <a:noFill/>
           <a:ln w="12700">
             <a:solidFill>
-              <a:srgbClr val="4A4A4A"/>
+              <a:srgbClr val="E0E0E0"/>
             </a:solidFill>
             <a:prstDash val="solid"/>
           </a:ln>
@@ -6692,7 +6692,7 @@
             <a:r>
               <a:rPr lang="en-US" sz="850" b="1" dirty="0">
                 <a:solidFill>
-                  <a:srgbClr val="9A9A9A"/>
+                  <a:srgbClr val="666666"/>
                 </a:solidFill>
                 <a:latin typeface="Arial" pitchFamily="34" charset="0"/>
                 <a:ea typeface="Arial" pitchFamily="34" charset="-122"/>
@@ -6731,7 +6731,7 @@
             <a:r>
               <a:rPr lang="en-US" sz="850" b="1" dirty="0">
                 <a:solidFill>
-                  <a:srgbClr val="9A9A9A"/>
+                  <a:srgbClr val="666666"/>
                 </a:solidFill>
                 <a:latin typeface="Arial" pitchFamily="34" charset="0"/>
                 <a:ea typeface="Arial" pitchFamily="34" charset="-122"/>
@@ -6758,11 +6758,11 @@
             <a:avLst/>
           </a:prstGeom>
           <a:solidFill>
-            <a:srgbClr val="1F1F1F"/>
+            <a:srgbClr val="F8F9FA"/>
           </a:solidFill>
           <a:ln w="12700">
             <a:solidFill>
-              <a:srgbClr val="4A4A4A"/>
+              <a:srgbClr val="E0E0E0"/>
             </a:solidFill>
             <a:prstDash val="solid"/>
           </a:ln>
@@ -6795,7 +6795,7 @@
             <a:r>
               <a:rPr lang="en-US" sz="900" b="1" dirty="0">
                 <a:solidFill>
-                  <a:srgbClr val="FFFFFF"/>
+                  <a:srgbClr val="000000"/>
                 </a:solidFill>
                 <a:latin typeface="Arial" pitchFamily="34" charset="0"/>
                 <a:ea typeface="Arial" pitchFamily="34" charset="-122"/>
@@ -6837,7 +6837,7 @@
             <a:r>
               <a:rPr lang="en-US" sz="780" dirty="0">
                 <a:solidFill>
-                  <a:srgbClr val="D9D9D9"/>
+                  <a:srgbClr val="333333"/>
                 </a:solidFill>
                 <a:latin typeface="Arial" pitchFamily="34" charset="0"/>
                 <a:ea typeface="Arial" pitchFamily="34" charset="-122"/>
@@ -6864,11 +6864,11 @@
             <a:avLst/>
           </a:prstGeom>
           <a:solidFill>
-            <a:srgbClr val="1F1F1F"/>
+            <a:srgbClr val="F8F9FA"/>
           </a:solidFill>
           <a:ln w="12700">
             <a:solidFill>
-              <a:srgbClr val="4A4A4A"/>
+              <a:srgbClr val="E0E0E0"/>
             </a:solidFill>
             <a:prstDash val="solid"/>
           </a:ln>
@@ -6901,7 +6901,7 @@
             <a:r>
               <a:rPr lang="en-US" sz="900" b="1" dirty="0">
                 <a:solidFill>
-                  <a:srgbClr val="FFFFFF"/>
+                  <a:srgbClr val="000000"/>
                 </a:solidFill>
                 <a:latin typeface="Arial" pitchFamily="34" charset="0"/>
                 <a:ea typeface="Arial" pitchFamily="34" charset="-122"/>
@@ -6943,7 +6943,7 @@
             <a:r>
               <a:rPr lang="en-US" sz="780" dirty="0">
                 <a:solidFill>
-                  <a:srgbClr val="D9D9D9"/>
+                  <a:srgbClr val="333333"/>
                 </a:solidFill>
                 <a:latin typeface="Arial" pitchFamily="34" charset="0"/>
                 <a:ea typeface="Arial" pitchFamily="34" charset="-122"/>
@@ -6970,11 +6970,11 @@
             <a:avLst/>
           </a:prstGeom>
           <a:solidFill>
-            <a:srgbClr val="1F1F1F"/>
+            <a:srgbClr val="F8F9FA"/>
           </a:solidFill>
           <a:ln w="12700">
             <a:solidFill>
-              <a:srgbClr val="4A4A4A"/>
+              <a:srgbClr val="E0E0E0"/>
             </a:solidFill>
             <a:prstDash val="solid"/>
           </a:ln>
@@ -7007,7 +7007,7 @@
             <a:r>
               <a:rPr lang="en-US" sz="900" b="1" dirty="0">
                 <a:solidFill>
-                  <a:srgbClr val="FFFFFF"/>
+                  <a:srgbClr val="000000"/>
                 </a:solidFill>
                 <a:latin typeface="Arial" pitchFamily="34" charset="0"/>
                 <a:ea typeface="Arial" pitchFamily="34" charset="-122"/>
@@ -7049,7 +7049,7 @@
             <a:r>
               <a:rPr lang="en-US" sz="780" dirty="0">
                 <a:solidFill>
-                  <a:srgbClr val="D9D9D9"/>
+                  <a:srgbClr val="333333"/>
                 </a:solidFill>
                 <a:latin typeface="Arial" pitchFamily="34" charset="0"/>
                 <a:ea typeface="Arial" pitchFamily="34" charset="-122"/>
@@ -7076,11 +7076,11 @@
             <a:avLst/>
           </a:prstGeom>
           <a:solidFill>
-            <a:srgbClr val="1F1F1F"/>
+            <a:srgbClr val="F8F9FA"/>
           </a:solidFill>
           <a:ln w="12700">
             <a:solidFill>
-              <a:srgbClr val="4A4A4A"/>
+              <a:srgbClr val="E0E0E0"/>
             </a:solidFill>
             <a:prstDash val="solid"/>
           </a:ln>
@@ -7113,7 +7113,7 @@
             <a:r>
               <a:rPr lang="en-US" sz="900" b="1" dirty="0">
                 <a:solidFill>
-                  <a:srgbClr val="FFFFFF"/>
+                  <a:srgbClr val="000000"/>
                 </a:solidFill>
                 <a:latin typeface="Arial" pitchFamily="34" charset="0"/>
                 <a:ea typeface="Arial" pitchFamily="34" charset="-122"/>
@@ -7155,7 +7155,7 @@
             <a:r>
               <a:rPr lang="en-US" sz="780" dirty="0">
                 <a:solidFill>
-                  <a:srgbClr val="D9D9D9"/>
+                  <a:srgbClr val="333333"/>
                 </a:solidFill>
                 <a:latin typeface="Arial" pitchFamily="34" charset="0"/>
                 <a:ea typeface="Arial" pitchFamily="34" charset="-122"/>
@@ -7182,11 +7182,11 @@
             <a:avLst/>
           </a:prstGeom>
           <a:solidFill>
-            <a:srgbClr val="1F1F1F"/>
+            <a:srgbClr val="F8F9FA"/>
           </a:solidFill>
           <a:ln w="12700">
             <a:solidFill>
-              <a:srgbClr val="4A4A4A"/>
+              <a:srgbClr val="E0E0E0"/>
             </a:solidFill>
             <a:prstDash val="solid"/>
           </a:ln>
@@ -7219,7 +7219,7 @@
             <a:r>
               <a:rPr lang="en-US" sz="900" b="1" dirty="0">
                 <a:solidFill>
-                  <a:srgbClr val="FFFFFF"/>
+                  <a:srgbClr val="000000"/>
                 </a:solidFill>
                 <a:latin typeface="Arial" pitchFamily="34" charset="0"/>
                 <a:ea typeface="Arial" pitchFamily="34" charset="-122"/>
@@ -7261,7 +7261,7 @@
             <a:r>
               <a:rPr lang="en-US" sz="780" dirty="0">
                 <a:solidFill>
-                  <a:srgbClr val="D9D9D9"/>
+                  <a:srgbClr val="333333"/>
                 </a:solidFill>
                 <a:latin typeface="Arial" pitchFamily="34" charset="0"/>
                 <a:ea typeface="Arial" pitchFamily="34" charset="-122"/>
@@ -7288,11 +7288,11 @@
             <a:avLst/>
           </a:prstGeom>
           <a:solidFill>
-            <a:srgbClr val="1F1F1F"/>
+            <a:srgbClr val="F8F9FA"/>
           </a:solidFill>
           <a:ln w="12700">
             <a:solidFill>
-              <a:srgbClr val="4A4A4A"/>
+              <a:srgbClr val="E0E0E0"/>
             </a:solidFill>
             <a:prstDash val="solid"/>
           </a:ln>
@@ -7325,7 +7325,7 @@
             <a:r>
               <a:rPr lang="en-US" sz="900" b="1" dirty="0">
                 <a:solidFill>
-                  <a:srgbClr val="FFFFFF"/>
+                  <a:srgbClr val="000000"/>
                 </a:solidFill>
                 <a:latin typeface="Arial" pitchFamily="34" charset="0"/>
                 <a:ea typeface="Arial" pitchFamily="34" charset="-122"/>
@@ -7367,7 +7367,7 @@
             <a:r>
               <a:rPr lang="en-US" sz="780" dirty="0">
                 <a:solidFill>
-                  <a:srgbClr val="D9D9D9"/>
+                  <a:srgbClr val="333333"/>
                 </a:solidFill>
                 <a:latin typeface="Arial" pitchFamily="34" charset="0"/>
                 <a:ea typeface="Arial" pitchFamily="34" charset="-122"/>
@@ -7393,7 +7393,7 @@
     <p:bg>
       <p:bgPr>
         <a:solidFill>
-          <a:srgbClr val="0A0A0A"/>
+          <a:srgbClr val="FFFFFF"/>
         </a:solidFill>
       </p:bgPr>
     </p:bg>
@@ -7428,7 +7428,7 @@
           <a:noFill/>
           <a:ln w="12700">
             <a:solidFill>
-              <a:srgbClr val="4A4A4A"/>
+              <a:srgbClr val="E0E0E0"/>
             </a:solidFill>
             <a:prstDash val="solid"/>
           </a:ln>
@@ -7461,7 +7461,7 @@
             <a:r>
               <a:rPr lang="en-US" sz="900" b="1" dirty="0">
                 <a:solidFill>
-                  <a:srgbClr val="9A9A9A"/>
+                  <a:srgbClr val="666666"/>
                 </a:solidFill>
                 <a:latin typeface="Arial" pitchFamily="34" charset="0"/>
                 <a:ea typeface="Arial" pitchFamily="34" charset="-122"/>
@@ -7500,7 +7500,7 @@
             <a:r>
               <a:rPr lang="en-US" sz="900" b="1" dirty="0">
                 <a:solidFill>
-                  <a:srgbClr val="9A9A9A"/>
+                  <a:srgbClr val="666666"/>
                 </a:solidFill>
                 <a:latin typeface="Arial" pitchFamily="34" charset="0"/>
                 <a:ea typeface="Arial" pitchFamily="34" charset="-122"/>
@@ -7539,7 +7539,7 @@
             <a:r>
               <a:rPr lang="en-US" sz="1200" b="1" dirty="0">
                 <a:solidFill>
-                  <a:srgbClr val="9A9A9A"/>
+                  <a:srgbClr val="666666"/>
                 </a:solidFill>
                 <a:latin typeface="Arial" pitchFamily="34" charset="0"/>
                 <a:ea typeface="Arial" pitchFamily="34" charset="-122"/>
@@ -7578,7 +7578,7 @@
             <a:r>
               <a:rPr lang="en-US" sz="1800" b="1" dirty="0">
                 <a:solidFill>
-                  <a:srgbClr val="FFFFFF"/>
+                  <a:srgbClr val="000000"/>
                 </a:solidFill>
                 <a:latin typeface="Arial" pitchFamily="34" charset="0"/>
                 <a:ea typeface="Arial" pitchFamily="34" charset="-122"/>
@@ -7607,7 +7607,7 @@
           <a:noFill/>
           <a:ln w="12700">
             <a:solidFill>
-              <a:srgbClr val="4A4A4A"/>
+              <a:srgbClr val="E0E0E0"/>
             </a:solidFill>
             <a:prstDash val="solid"/>
           </a:ln>
@@ -7640,7 +7640,7 @@
             <a:r>
               <a:rPr lang="en-US" sz="850" b="1" dirty="0">
                 <a:solidFill>
-                  <a:srgbClr val="9A9A9A"/>
+                  <a:srgbClr val="666666"/>
                 </a:solidFill>
                 <a:latin typeface="Arial" pitchFamily="34" charset="0"/>
                 <a:ea typeface="Arial" pitchFamily="34" charset="-122"/>
@@ -7679,7 +7679,7 @@
             <a:r>
               <a:rPr lang="en-US" sz="850" b="1" dirty="0">
                 <a:solidFill>
-                  <a:srgbClr val="9A9A9A"/>
+                  <a:srgbClr val="666666"/>
                 </a:solidFill>
                 <a:latin typeface="Arial" pitchFamily="34" charset="0"/>
                 <a:ea typeface="Arial" pitchFamily="34" charset="-122"/>
@@ -7706,11 +7706,11 @@
             <a:avLst/>
           </a:prstGeom>
           <a:solidFill>
-            <a:srgbClr val="1F1F1F"/>
+            <a:srgbClr val="F8F9FA"/>
           </a:solidFill>
           <a:ln w="12700">
             <a:solidFill>
-              <a:srgbClr val="4A4A4A"/>
+              <a:srgbClr val="E0E0E0"/>
             </a:solidFill>
             <a:prstDash val="solid"/>
           </a:ln>
@@ -7743,7 +7743,7 @@
             <a:r>
               <a:rPr lang="en-US" sz="1800" b="1" dirty="0">
                 <a:solidFill>
-                  <a:srgbClr val="4A90E2"/>
+                  <a:srgbClr val="1976D2"/>
                 </a:solidFill>
                 <a:latin typeface="Arial" pitchFamily="34" charset="0"/>
                 <a:ea typeface="Arial" pitchFamily="34" charset="-122"/>
@@ -7782,7 +7782,7 @@
             <a:r>
               <a:rPr lang="en-US" sz="1000" b="1" dirty="0">
                 <a:solidFill>
-                  <a:srgbClr val="FFFFFF"/>
+                  <a:srgbClr val="000000"/>
                 </a:solidFill>
                 <a:latin typeface="Arial" pitchFamily="34" charset="0"/>
                 <a:ea typeface="Arial" pitchFamily="34" charset="-122"/>
@@ -7824,7 +7824,7 @@
             <a:r>
               <a:rPr lang="en-US" sz="800" dirty="0">
                 <a:solidFill>
-                  <a:srgbClr val="D9D9D9"/>
+                  <a:srgbClr val="333333"/>
                 </a:solidFill>
                 <a:latin typeface="Arial" pitchFamily="34" charset="0"/>
                 <a:ea typeface="Arial" pitchFamily="34" charset="-122"/>
@@ -7844,7 +7844,7 @@
             <a:r>
               <a:rPr lang="en-US" sz="800" dirty="0">
                 <a:solidFill>
-                  <a:srgbClr val="D9D9D9"/>
+                  <a:srgbClr val="333333"/>
                 </a:solidFill>
                 <a:latin typeface="Arial" pitchFamily="34" charset="0"/>
                 <a:ea typeface="Arial" pitchFamily="34" charset="-122"/>
@@ -7883,7 +7883,7 @@
             <a:r>
               <a:rPr lang="en-US" sz="750" b="1" dirty="0">
                 <a:solidFill>
-                  <a:srgbClr val="9A9A9A"/>
+                  <a:srgbClr val="666666"/>
                 </a:solidFill>
                 <a:latin typeface="Arial" pitchFamily="34" charset="0"/>
                 <a:ea typeface="Arial" pitchFamily="34" charset="-122"/>
@@ -7922,7 +7922,7 @@
             <a:r>
               <a:rPr lang="en-US" sz="850" b="1" dirty="0">
                 <a:solidFill>
-                  <a:srgbClr val="4EAF51"/>
+                  <a:srgbClr val="2E7D32"/>
                 </a:solidFill>
                 <a:latin typeface="Arial" pitchFamily="34" charset="0"/>
                 <a:ea typeface="Arial" pitchFamily="34" charset="-122"/>
@@ -7949,11 +7949,11 @@
             <a:avLst/>
           </a:prstGeom>
           <a:solidFill>
-            <a:srgbClr val="1F1F1F"/>
+            <a:srgbClr val="F8F9FA"/>
           </a:solidFill>
           <a:ln w="12700">
             <a:solidFill>
-              <a:srgbClr val="4A4A4A"/>
+              <a:srgbClr val="E0E0E0"/>
             </a:solidFill>
             <a:prstDash val="solid"/>
           </a:ln>
@@ -7986,7 +7986,7 @@
             <a:r>
               <a:rPr lang="en-US" sz="1800" b="1" dirty="0">
                 <a:solidFill>
-                  <a:srgbClr val="4A90E2"/>
+                  <a:srgbClr val="1976D2"/>
                 </a:solidFill>
                 <a:latin typeface="Arial" pitchFamily="34" charset="0"/>
                 <a:ea typeface="Arial" pitchFamily="34" charset="-122"/>
@@ -8025,7 +8025,7 @@
             <a:r>
               <a:rPr lang="en-US" sz="1000" b="1" dirty="0">
                 <a:solidFill>
-                  <a:srgbClr val="FFFFFF"/>
+                  <a:srgbClr val="000000"/>
                 </a:solidFill>
                 <a:latin typeface="Arial" pitchFamily="34" charset="0"/>
                 <a:ea typeface="Arial" pitchFamily="34" charset="-122"/>
@@ -8067,7 +8067,7 @@
             <a:r>
               <a:rPr lang="en-US" sz="800" dirty="0">
                 <a:solidFill>
-                  <a:srgbClr val="D9D9D9"/>
+                  <a:srgbClr val="333333"/>
                 </a:solidFill>
                 <a:latin typeface="Arial" pitchFamily="34" charset="0"/>
                 <a:ea typeface="Arial" pitchFamily="34" charset="-122"/>
@@ -8087,7 +8087,7 @@
             <a:r>
               <a:rPr lang="en-US" sz="800" dirty="0">
                 <a:solidFill>
-                  <a:srgbClr val="D9D9D9"/>
+                  <a:srgbClr val="333333"/>
                 </a:solidFill>
                 <a:latin typeface="Arial" pitchFamily="34" charset="0"/>
                 <a:ea typeface="Arial" pitchFamily="34" charset="-122"/>
@@ -8107,7 +8107,7 @@
             <a:r>
               <a:rPr lang="en-US" sz="800" dirty="0">
                 <a:solidFill>
-                  <a:srgbClr val="D9D9D9"/>
+                  <a:srgbClr val="333333"/>
                 </a:solidFill>
                 <a:latin typeface="Arial" pitchFamily="34" charset="0"/>
                 <a:ea typeface="Arial" pitchFamily="34" charset="-122"/>
@@ -8146,7 +8146,7 @@
             <a:r>
               <a:rPr lang="en-US" sz="750" b="1" dirty="0">
                 <a:solidFill>
-                  <a:srgbClr val="9A9A9A"/>
+                  <a:srgbClr val="666666"/>
                 </a:solidFill>
                 <a:latin typeface="Arial" pitchFamily="34" charset="0"/>
                 <a:ea typeface="Arial" pitchFamily="34" charset="-122"/>
@@ -8185,7 +8185,7 @@
             <a:r>
               <a:rPr lang="en-US" sz="850" b="1" dirty="0">
                 <a:solidFill>
-                  <a:srgbClr val="4EAF51"/>
+                  <a:srgbClr val="2E7D32"/>
                 </a:solidFill>
                 <a:latin typeface="Arial" pitchFamily="34" charset="0"/>
                 <a:ea typeface="Arial" pitchFamily="34" charset="-122"/>
@@ -8212,11 +8212,11 @@
             <a:avLst/>
           </a:prstGeom>
           <a:solidFill>
-            <a:srgbClr val="1F1F1F"/>
+            <a:srgbClr val="F8F9FA"/>
           </a:solidFill>
           <a:ln w="12700">
             <a:solidFill>
-              <a:srgbClr val="4A4A4A"/>
+              <a:srgbClr val="E0E0E0"/>
             </a:solidFill>
             <a:prstDash val="solid"/>
           </a:ln>
@@ -8249,7 +8249,7 @@
             <a:r>
               <a:rPr lang="en-US" sz="1800" b="1" dirty="0">
                 <a:solidFill>
-                  <a:srgbClr val="4A90E2"/>
+                  <a:srgbClr val="1976D2"/>
                 </a:solidFill>
                 <a:latin typeface="Arial" pitchFamily="34" charset="0"/>
                 <a:ea typeface="Arial" pitchFamily="34" charset="-122"/>
@@ -8288,7 +8288,7 @@
             <a:r>
               <a:rPr lang="en-US" sz="1000" b="1" dirty="0">
                 <a:solidFill>
-                  <a:srgbClr val="FFFFFF"/>
+                  <a:srgbClr val="000000"/>
                 </a:solidFill>
                 <a:latin typeface="Arial" pitchFamily="34" charset="0"/>
                 <a:ea typeface="Arial" pitchFamily="34" charset="-122"/>
@@ -8330,7 +8330,7 @@
             <a:r>
               <a:rPr lang="en-US" sz="800" dirty="0">
                 <a:solidFill>
-                  <a:srgbClr val="D9D9D9"/>
+                  <a:srgbClr val="333333"/>
                 </a:solidFill>
                 <a:latin typeface="Arial" pitchFamily="34" charset="0"/>
                 <a:ea typeface="Arial" pitchFamily="34" charset="-122"/>
@@ -8350,7 +8350,7 @@
             <a:r>
               <a:rPr lang="en-US" sz="800" dirty="0">
                 <a:solidFill>
-                  <a:srgbClr val="D9D9D9"/>
+                  <a:srgbClr val="333333"/>
                 </a:solidFill>
                 <a:latin typeface="Arial" pitchFamily="34" charset="0"/>
                 <a:ea typeface="Arial" pitchFamily="34" charset="-122"/>
@@ -8370,7 +8370,7 @@
             <a:r>
               <a:rPr lang="en-US" sz="800" dirty="0">
                 <a:solidFill>
-                  <a:srgbClr val="D9D9D9"/>
+                  <a:srgbClr val="333333"/>
                 </a:solidFill>
                 <a:latin typeface="Arial" pitchFamily="34" charset="0"/>
                 <a:ea typeface="Arial" pitchFamily="34" charset="-122"/>
@@ -8409,7 +8409,7 @@
             <a:r>
               <a:rPr lang="en-US" sz="750" b="1" dirty="0">
                 <a:solidFill>
-                  <a:srgbClr val="9A9A9A"/>
+                  <a:srgbClr val="666666"/>
                 </a:solidFill>
                 <a:latin typeface="Arial" pitchFamily="34" charset="0"/>
                 <a:ea typeface="Arial" pitchFamily="34" charset="-122"/>
@@ -8448,7 +8448,7 @@
             <a:r>
               <a:rPr lang="en-US" sz="850" b="1" dirty="0">
                 <a:solidFill>
-                  <a:srgbClr val="4EAF51"/>
+                  <a:srgbClr val="2E7D32"/>
                 </a:solidFill>
                 <a:latin typeface="Arial" pitchFamily="34" charset="0"/>
                 <a:ea typeface="Arial" pitchFamily="34" charset="-122"/>
@@ -8475,11 +8475,11 @@
             <a:avLst/>
           </a:prstGeom>
           <a:solidFill>
-            <a:srgbClr val="1F1F1F"/>
+            <a:srgbClr val="F8F9FA"/>
           </a:solidFill>
           <a:ln w="12700">
             <a:solidFill>
-              <a:srgbClr val="4A4A4A"/>
+              <a:srgbClr val="E0E0E0"/>
             </a:solidFill>
             <a:prstDash val="solid"/>
           </a:ln>
@@ -8512,7 +8512,7 @@
             <a:r>
               <a:rPr lang="en-US" sz="1800" b="1" dirty="0">
                 <a:solidFill>
-                  <a:srgbClr val="4A90E2"/>
+                  <a:srgbClr val="1976D2"/>
                 </a:solidFill>
                 <a:latin typeface="Arial" pitchFamily="34" charset="0"/>
                 <a:ea typeface="Arial" pitchFamily="34" charset="-122"/>
@@ -8551,7 +8551,7 @@
             <a:r>
               <a:rPr lang="en-US" sz="1000" b="1" dirty="0">
                 <a:solidFill>
-                  <a:srgbClr val="FFFFFF"/>
+                  <a:srgbClr val="000000"/>
                 </a:solidFill>
                 <a:latin typeface="Arial" pitchFamily="34" charset="0"/>
                 <a:ea typeface="Arial" pitchFamily="34" charset="-122"/>
@@ -8593,7 +8593,7 @@
             <a:r>
               <a:rPr lang="en-US" sz="800" dirty="0">
                 <a:solidFill>
-                  <a:srgbClr val="D9D9D9"/>
+                  <a:srgbClr val="333333"/>
                 </a:solidFill>
                 <a:latin typeface="Arial" pitchFamily="34" charset="0"/>
                 <a:ea typeface="Arial" pitchFamily="34" charset="-122"/>
@@ -8613,7 +8613,7 @@
             <a:r>
               <a:rPr lang="en-US" sz="800" dirty="0">
                 <a:solidFill>
-                  <a:srgbClr val="D9D9D9"/>
+                  <a:srgbClr val="333333"/>
                 </a:solidFill>
                 <a:latin typeface="Arial" pitchFamily="34" charset="0"/>
                 <a:ea typeface="Arial" pitchFamily="34" charset="-122"/>
@@ -8652,7 +8652,7 @@
             <a:r>
               <a:rPr lang="en-US" sz="750" b="1" dirty="0">
                 <a:solidFill>
-                  <a:srgbClr val="9A9A9A"/>
+                  <a:srgbClr val="666666"/>
                 </a:solidFill>
                 <a:latin typeface="Arial" pitchFamily="34" charset="0"/>
                 <a:ea typeface="Arial" pitchFamily="34" charset="-122"/>
@@ -8691,7 +8691,7 @@
             <a:r>
               <a:rPr lang="en-US" sz="850" b="1" dirty="0">
                 <a:solidFill>
-                  <a:srgbClr val="4EAF51"/>
+                  <a:srgbClr val="2E7D32"/>
                 </a:solidFill>
                 <a:latin typeface="Arial" pitchFamily="34" charset="0"/>
                 <a:ea typeface="Arial" pitchFamily="34" charset="-122"/>
@@ -8717,7 +8717,7 @@
     <p:bg>
       <p:bgPr>
         <a:solidFill>
-          <a:srgbClr val="0A0A0A"/>
+          <a:srgbClr val="FFFFFF"/>
         </a:solidFill>
       </p:bgPr>
     </p:bg>
@@ -8752,7 +8752,7 @@
           <a:noFill/>
           <a:ln w="12700">
             <a:solidFill>
-              <a:srgbClr val="4A4A4A"/>
+              <a:srgbClr val="E0E0E0"/>
             </a:solidFill>
             <a:prstDash val="solid"/>
           </a:ln>
@@ -8785,7 +8785,7 @@
             <a:r>
               <a:rPr lang="en-US" sz="900" b="1" dirty="0">
                 <a:solidFill>
-                  <a:srgbClr val="9A9A9A"/>
+                  <a:srgbClr val="666666"/>
                 </a:solidFill>
                 <a:latin typeface="Arial" pitchFamily="34" charset="0"/>
                 <a:ea typeface="Arial" pitchFamily="34" charset="-122"/>
@@ -8824,7 +8824,7 @@
             <a:r>
               <a:rPr lang="en-US" sz="900" b="1" dirty="0">
                 <a:solidFill>
-                  <a:srgbClr val="9A9A9A"/>
+                  <a:srgbClr val="666666"/>
                 </a:solidFill>
                 <a:latin typeface="Arial" pitchFamily="34" charset="0"/>
                 <a:ea typeface="Arial" pitchFamily="34" charset="-122"/>
@@ -8863,7 +8863,7 @@
             <a:r>
               <a:rPr lang="en-US" sz="1200" b="1" dirty="0">
                 <a:solidFill>
-                  <a:srgbClr val="9A9A9A"/>
+                  <a:srgbClr val="666666"/>
                 </a:solidFill>
                 <a:latin typeface="Arial" pitchFamily="34" charset="0"/>
                 <a:ea typeface="Arial" pitchFamily="34" charset="-122"/>
@@ -8902,7 +8902,7 @@
             <a:r>
               <a:rPr lang="en-US" sz="1800" b="1" dirty="0">
                 <a:solidFill>
-                  <a:srgbClr val="FFFFFF"/>
+                  <a:srgbClr val="000000"/>
                 </a:solidFill>
                 <a:latin typeface="Arial" pitchFamily="34" charset="0"/>
                 <a:ea typeface="Arial" pitchFamily="34" charset="-122"/>
@@ -8931,7 +8931,7 @@
           <a:noFill/>
           <a:ln w="12700">
             <a:solidFill>
-              <a:srgbClr val="4A4A4A"/>
+              <a:srgbClr val="E0E0E0"/>
             </a:solidFill>
             <a:prstDash val="solid"/>
           </a:ln>
@@ -8964,7 +8964,7 @@
             <a:r>
               <a:rPr lang="en-US" sz="850" b="1" dirty="0">
                 <a:solidFill>
-                  <a:srgbClr val="9A9A9A"/>
+                  <a:srgbClr val="666666"/>
                 </a:solidFill>
                 <a:latin typeface="Arial" pitchFamily="34" charset="0"/>
                 <a:ea typeface="Arial" pitchFamily="34" charset="-122"/>
@@ -9003,7 +9003,7 @@
             <a:r>
               <a:rPr lang="en-US" sz="850" b="1" dirty="0">
                 <a:solidFill>
-                  <a:srgbClr val="9A9A9A"/>
+                  <a:srgbClr val="666666"/>
                 </a:solidFill>
                 <a:latin typeface="Arial" pitchFamily="34" charset="0"/>
                 <a:ea typeface="Arial" pitchFamily="34" charset="-122"/>
@@ -9030,11 +9030,11 @@
             <a:avLst/>
           </a:prstGeom>
           <a:solidFill>
-            <a:srgbClr val="1F1F1F"/>
+            <a:srgbClr val="F8F9FA"/>
           </a:solidFill>
           <a:ln w="12700">
             <a:solidFill>
-              <a:srgbClr val="4A4A4A"/>
+              <a:srgbClr val="E0E0E0"/>
             </a:solidFill>
             <a:prstDash val="solid"/>
           </a:ln>
@@ -9055,11 +9055,11 @@
             <a:avLst/>
           </a:prstGeom>
           <a:solidFill>
-            <a:srgbClr val="1F1F1F"/>
+            <a:srgbClr val="F8F9FA"/>
           </a:solidFill>
           <a:ln w="12700">
             <a:solidFill>
-              <a:srgbClr val="4A4A4A"/>
+              <a:srgbClr val="E0E0E0"/>
             </a:solidFill>
             <a:prstDash val="solid"/>
           </a:ln>
@@ -9092,7 +9092,7 @@
             <a:r>
               <a:rPr lang="en-US" sz="1100" b="1" dirty="0">
                 <a:solidFill>
-                  <a:srgbClr val="FFFFFF"/>
+                  <a:srgbClr val="000000"/>
                 </a:solidFill>
                 <a:latin typeface="Arial" pitchFamily="34" charset="0"/>
                 <a:ea typeface="Arial" pitchFamily="34" charset="-122"/>
@@ -9134,7 +9134,7 @@
             <a:r>
               <a:rPr lang="en-US" sz="850" b="1" dirty="0">
                 <a:solidFill>
-                  <a:srgbClr val="FFFFFF"/>
+                  <a:srgbClr val="000000"/>
                 </a:solidFill>
                 <a:latin typeface="Arial" pitchFamily="34" charset="0"/>
                 <a:ea typeface="Arial" pitchFamily="34" charset="-122"/>
@@ -9152,7 +9152,7 @@
             <a:r>
               <a:rPr lang="en-US" sz="850" dirty="0">
                 <a:solidFill>
-                  <a:srgbClr val="D9D9D9"/>
+                  <a:srgbClr val="333333"/>
                 </a:solidFill>
                 <a:latin typeface="Arial" pitchFamily="34" charset="0"/>
                 <a:ea typeface="Arial" pitchFamily="34" charset="-122"/>
@@ -9170,7 +9170,7 @@
             <a:r>
               <a:rPr lang="en-US" sz="850" b="1" dirty="0">
                 <a:solidFill>
-                  <a:srgbClr val="FFFFFF"/>
+                  <a:srgbClr val="000000"/>
                 </a:solidFill>
                 <a:latin typeface="Arial" pitchFamily="34" charset="0"/>
                 <a:ea typeface="Arial" pitchFamily="34" charset="-122"/>
@@ -9188,7 +9188,7 @@
             <a:r>
               <a:rPr lang="en-US" sz="850" dirty="0">
                 <a:solidFill>
-                  <a:srgbClr val="D9D9D9"/>
+                  <a:srgbClr val="333333"/>
                 </a:solidFill>
                 <a:latin typeface="Arial" pitchFamily="34" charset="0"/>
                 <a:ea typeface="Arial" pitchFamily="34" charset="-122"/>
@@ -9206,7 +9206,7 @@
             <a:r>
               <a:rPr lang="en-US" sz="850" b="1" dirty="0">
                 <a:solidFill>
-                  <a:srgbClr val="FFFFFF"/>
+                  <a:srgbClr val="000000"/>
                 </a:solidFill>
                 <a:latin typeface="Arial" pitchFamily="34" charset="0"/>
                 <a:ea typeface="Arial" pitchFamily="34" charset="-122"/>
@@ -9224,7 +9224,7 @@
             <a:r>
               <a:rPr lang="en-US" sz="850" dirty="0">
                 <a:solidFill>
-                  <a:srgbClr val="D9D9D9"/>
+                  <a:srgbClr val="333333"/>
                 </a:solidFill>
                 <a:latin typeface="Arial" pitchFamily="34" charset="0"/>
                 <a:ea typeface="Arial" pitchFamily="34" charset="-122"/>
@@ -9263,7 +9263,7 @@
             <a:r>
               <a:rPr lang="en-US" sz="1100" b="1" dirty="0">
                 <a:solidFill>
-                  <a:srgbClr val="FFFFFF"/>
+                  <a:srgbClr val="000000"/>
                 </a:solidFill>
                 <a:latin typeface="Arial" pitchFamily="34" charset="0"/>
                 <a:ea typeface="Arial" pitchFamily="34" charset="-122"/>
@@ -9305,7 +9305,7 @@
             <a:r>
               <a:rPr lang="en-US" sz="850" b="1" dirty="0">
                 <a:solidFill>
-                  <a:srgbClr val="E05252"/>
+                  <a:srgbClr val="D32F2F"/>
                 </a:solidFill>
                 <a:latin typeface="Arial" pitchFamily="34" charset="0"/>
                 <a:ea typeface="Arial" pitchFamily="34" charset="-122"/>
@@ -9323,7 +9323,7 @@
             <a:r>
               <a:rPr lang="en-US" sz="850" dirty="0">
                 <a:solidFill>
-                  <a:srgbClr val="D9D9D9"/>
+                  <a:srgbClr val="333333"/>
                 </a:solidFill>
                 <a:latin typeface="Arial" pitchFamily="34" charset="0"/>
                 <a:ea typeface="Arial" pitchFamily="34" charset="-122"/>
@@ -9341,7 +9341,7 @@
             <a:r>
               <a:rPr lang="en-US" sz="850" b="1" dirty="0">
                 <a:solidFill>
-                  <a:srgbClr val="FFFFFF"/>
+                  <a:srgbClr val="000000"/>
                 </a:solidFill>
                 <a:latin typeface="Arial" pitchFamily="34" charset="0"/>
                 <a:ea typeface="Arial" pitchFamily="34" charset="-122"/>
@@ -9359,7 +9359,7 @@
             <a:r>
               <a:rPr lang="en-US" sz="850" dirty="0">
                 <a:solidFill>
-                  <a:srgbClr val="D9D9D9"/>
+                  <a:srgbClr val="333333"/>
                 </a:solidFill>
                 <a:latin typeface="Arial" pitchFamily="34" charset="0"/>
                 <a:ea typeface="Arial" pitchFamily="34" charset="-122"/>
@@ -9377,7 +9377,7 @@
             <a:r>
               <a:rPr lang="en-US" sz="850" b="1" dirty="0">
                 <a:solidFill>
-                  <a:srgbClr val="FFFFFF"/>
+                  <a:srgbClr val="000000"/>
                 </a:solidFill>
                 <a:latin typeface="Arial" pitchFamily="34" charset="0"/>
                 <a:ea typeface="Arial" pitchFamily="34" charset="-122"/>
@@ -9395,7 +9395,7 @@
             <a:r>
               <a:rPr lang="en-US" sz="850" dirty="0">
                 <a:solidFill>
-                  <a:srgbClr val="D9D9D9"/>
+                  <a:srgbClr val="333333"/>
                 </a:solidFill>
                 <a:latin typeface="Arial" pitchFamily="34" charset="0"/>
                 <a:ea typeface="Arial" pitchFamily="34" charset="-122"/>
@@ -9413,7 +9413,7 @@
             <a:r>
               <a:rPr lang="en-US" sz="850" b="1" dirty="0">
                 <a:solidFill>
-                  <a:srgbClr val="4EAF51"/>
+                  <a:srgbClr val="2E7D32"/>
                 </a:solidFill>
                 <a:latin typeface="Arial" pitchFamily="34" charset="0"/>
                 <a:ea typeface="Arial" pitchFamily="34" charset="-122"/>
@@ -9430,7 +9430,7 @@
             <a:r>
               <a:rPr lang="en-US" sz="850" dirty="0">
                 <a:solidFill>
-                  <a:srgbClr val="D9D9D9"/>
+                  <a:srgbClr val="333333"/>
                 </a:solidFill>
                 <a:latin typeface="Arial" pitchFamily="34" charset="0"/>
                 <a:ea typeface="Arial" pitchFamily="34" charset="-122"/>
@@ -9456,7 +9456,7 @@
     <p:bg>
       <p:bgPr>
         <a:solidFill>
-          <a:srgbClr val="0A0A0A"/>
+          <a:srgbClr val="FFFFFF"/>
         </a:solidFill>
       </p:bgPr>
     </p:bg>
@@ -9491,7 +9491,7 @@
           <a:noFill/>
           <a:ln w="12700">
             <a:solidFill>
-              <a:srgbClr val="4A4A4A"/>
+              <a:srgbClr val="E0E0E0"/>
             </a:solidFill>
             <a:prstDash val="solid"/>
           </a:ln>
@@ -9524,7 +9524,7 @@
             <a:r>
               <a:rPr lang="en-US" sz="900" b="1" dirty="0">
                 <a:solidFill>
-                  <a:srgbClr val="9A9A9A"/>
+                  <a:srgbClr val="666666"/>
                 </a:solidFill>
                 <a:latin typeface="Arial" pitchFamily="34" charset="0"/>
                 <a:ea typeface="Arial" pitchFamily="34" charset="-122"/>
@@ -9563,7 +9563,7 @@
             <a:r>
               <a:rPr lang="en-US" sz="900" b="1" dirty="0">
                 <a:solidFill>
-                  <a:srgbClr val="9A9A9A"/>
+                  <a:srgbClr val="666666"/>
                 </a:solidFill>
                 <a:latin typeface="Arial" pitchFamily="34" charset="0"/>
                 <a:ea typeface="Arial" pitchFamily="34" charset="-122"/>
@@ -9602,7 +9602,7 @@
             <a:r>
               <a:rPr lang="en-US" sz="1200" b="1" dirty="0">
                 <a:solidFill>
-                  <a:srgbClr val="9A9A9A"/>
+                  <a:srgbClr val="666666"/>
                 </a:solidFill>
                 <a:latin typeface="Arial" pitchFamily="34" charset="0"/>
                 <a:ea typeface="Arial" pitchFamily="34" charset="-122"/>
@@ -9641,7 +9641,7 @@
             <a:r>
               <a:rPr lang="en-US" sz="1800" b="1" dirty="0">
                 <a:solidFill>
-                  <a:srgbClr val="FFFFFF"/>
+                  <a:srgbClr val="000000"/>
                 </a:solidFill>
                 <a:latin typeface="Arial" pitchFamily="34" charset="0"/>
                 <a:ea typeface="Arial" pitchFamily="34" charset="-122"/>
@@ -9670,7 +9670,7 @@
           <a:noFill/>
           <a:ln w="12700">
             <a:solidFill>
-              <a:srgbClr val="4A4A4A"/>
+              <a:srgbClr val="E0E0E0"/>
             </a:solidFill>
             <a:prstDash val="solid"/>
           </a:ln>
@@ -9703,7 +9703,7 @@
             <a:r>
               <a:rPr lang="en-US" sz="850" b="1" dirty="0">
                 <a:solidFill>
-                  <a:srgbClr val="9A9A9A"/>
+                  <a:srgbClr val="666666"/>
                 </a:solidFill>
                 <a:latin typeface="Arial" pitchFamily="34" charset="0"/>
                 <a:ea typeface="Arial" pitchFamily="34" charset="-122"/>
@@ -9742,7 +9742,7 @@
             <a:r>
               <a:rPr lang="en-US" sz="850" b="1" dirty="0">
                 <a:solidFill>
-                  <a:srgbClr val="9A9A9A"/>
+                  <a:srgbClr val="666666"/>
                 </a:solidFill>
                 <a:latin typeface="Arial" pitchFamily="34" charset="0"/>
                 <a:ea typeface="Arial" pitchFamily="34" charset="-122"/>
@@ -9769,11 +9769,11 @@
             <a:avLst/>
           </a:prstGeom>
           <a:solidFill>
-            <a:srgbClr val="1F1F1F"/>
+            <a:srgbClr val="F8F9FA"/>
           </a:solidFill>
           <a:ln w="12700">
             <a:solidFill>
-              <a:srgbClr val="4A4A4A"/>
+              <a:srgbClr val="E0E0E0"/>
             </a:solidFill>
             <a:prstDash val="solid"/>
           </a:ln>
@@ -9794,11 +9794,11 @@
             <a:avLst/>
           </a:prstGeom>
           <a:solidFill>
-            <a:srgbClr val="1F1F1F"/>
+            <a:srgbClr val="F8F9FA"/>
           </a:solidFill>
           <a:ln w="12700">
             <a:solidFill>
-              <a:srgbClr val="4A4A4A"/>
+              <a:srgbClr val="E0E0E0"/>
             </a:solidFill>
             <a:prstDash val="solid"/>
           </a:ln>
@@ -9831,7 +9831,7 @@
             <a:r>
               <a:rPr lang="en-US" sz="1100" b="1" dirty="0">
                 <a:solidFill>
-                  <a:srgbClr val="FFFFFF"/>
+                  <a:srgbClr val="000000"/>
                 </a:solidFill>
                 <a:latin typeface="Arial" pitchFamily="34" charset="0"/>
                 <a:ea typeface="Arial" pitchFamily="34" charset="-122"/>
@@ -9873,7 +9873,7 @@
             <a:r>
               <a:rPr lang="en-US" sz="820" b="1" dirty="0">
                 <a:solidFill>
-                  <a:srgbClr val="FFFFFF"/>
+                  <a:srgbClr val="000000"/>
                 </a:solidFill>
                 <a:latin typeface="Arial" pitchFamily="34" charset="0"/>
                 <a:ea typeface="Arial" pitchFamily="34" charset="-122"/>
@@ -9891,7 +9891,7 @@
             <a:r>
               <a:rPr lang="en-US" sz="820" dirty="0">
                 <a:solidFill>
-                  <a:srgbClr val="D9D9D9"/>
+                  <a:srgbClr val="333333"/>
                 </a:solidFill>
                 <a:latin typeface="Arial" pitchFamily="34" charset="0"/>
                 <a:ea typeface="Arial" pitchFamily="34" charset="-122"/>
@@ -9909,7 +9909,7 @@
             <a:r>
               <a:rPr lang="en-US" sz="820" b="1" dirty="0">
                 <a:solidFill>
-                  <a:srgbClr val="FFFFFF"/>
+                  <a:srgbClr val="000000"/>
                 </a:solidFill>
                 <a:latin typeface="Arial" pitchFamily="34" charset="0"/>
                 <a:ea typeface="Arial" pitchFamily="34" charset="-122"/>
@@ -9927,7 +9927,7 @@
             <a:r>
               <a:rPr lang="en-US" sz="820" dirty="0">
                 <a:solidFill>
-                  <a:srgbClr val="D9D9D9"/>
+                  <a:srgbClr val="333333"/>
                 </a:solidFill>
                 <a:latin typeface="Arial" pitchFamily="34" charset="0"/>
                 <a:ea typeface="Arial" pitchFamily="34" charset="-122"/>
@@ -9945,7 +9945,7 @@
             <a:r>
               <a:rPr lang="en-US" sz="820" b="1" dirty="0">
                 <a:solidFill>
-                  <a:srgbClr val="4A90E2"/>
+                  <a:srgbClr val="1976D2"/>
                 </a:solidFill>
                 <a:latin typeface="Arial" pitchFamily="34" charset="0"/>
                 <a:ea typeface="Arial" pitchFamily="34" charset="-122"/>
@@ -9963,7 +9963,7 @@
             <a:r>
               <a:rPr lang="en-US" sz="820" dirty="0">
                 <a:solidFill>
-                  <a:srgbClr val="D9D9D9"/>
+                  <a:srgbClr val="333333"/>
                 </a:solidFill>
                 <a:latin typeface="Arial" pitchFamily="34" charset="0"/>
                 <a:ea typeface="Arial" pitchFamily="34" charset="-122"/>
@@ -9983,7 +9983,7 @@
             <a:r>
               <a:rPr lang="en-US" sz="820" dirty="0">
                 <a:solidFill>
-                  <a:srgbClr val="D9D9D9"/>
+                  <a:srgbClr val="333333"/>
                 </a:solidFill>
                 <a:latin typeface="Arial" pitchFamily="34" charset="0"/>
                 <a:ea typeface="Arial" pitchFamily="34" charset="-122"/>
@@ -10003,7 +10003,7 @@
             <a:r>
               <a:rPr lang="en-US" sz="820" dirty="0">
                 <a:solidFill>
-                  <a:srgbClr val="D9D9D9"/>
+                  <a:srgbClr val="333333"/>
                 </a:solidFill>
                 <a:latin typeface="Arial" pitchFamily="34" charset="0"/>
                 <a:ea typeface="Arial" pitchFamily="34" charset="-122"/>
@@ -10023,7 +10023,7 @@
             <a:r>
               <a:rPr lang="en-US" sz="820" dirty="0">
                 <a:solidFill>
-                  <a:srgbClr val="D9D9D9"/>
+                  <a:srgbClr val="333333"/>
                 </a:solidFill>
                 <a:latin typeface="Arial" pitchFamily="34" charset="0"/>
                 <a:ea typeface="Arial" pitchFamily="34" charset="-122"/>
@@ -10062,7 +10062,7 @@
             <a:r>
               <a:rPr lang="en-US" sz="1100" b="1" dirty="0">
                 <a:solidFill>
-                  <a:srgbClr val="FFFFFF"/>
+                  <a:srgbClr val="000000"/>
                 </a:solidFill>
                 <a:latin typeface="Arial" pitchFamily="34" charset="0"/>
                 <a:ea typeface="Arial" pitchFamily="34" charset="-122"/>
@@ -10104,7 +10104,7 @@
             <a:r>
               <a:rPr lang="en-US" sz="820" b="1" dirty="0">
                 <a:solidFill>
-                  <a:srgbClr val="FFFFFF"/>
+                  <a:srgbClr val="000000"/>
                 </a:solidFill>
                 <a:latin typeface="Arial" pitchFamily="34" charset="0"/>
                 <a:ea typeface="Arial" pitchFamily="34" charset="-122"/>
@@ -10122,7 +10122,7 @@
             <a:r>
               <a:rPr lang="en-US" sz="820" dirty="0">
                 <a:solidFill>
-                  <a:srgbClr val="D9D9D9"/>
+                  <a:srgbClr val="333333"/>
                 </a:solidFill>
                 <a:latin typeface="Arial" pitchFamily="34" charset="0"/>
                 <a:ea typeface="Arial" pitchFamily="34" charset="-122"/>
@@ -10140,7 +10140,7 @@
             <a:r>
               <a:rPr lang="en-US" sz="820" b="1" dirty="0">
                 <a:solidFill>
-                  <a:srgbClr val="4A90E2"/>
+                  <a:srgbClr val="1976D2"/>
                 </a:solidFill>
                 <a:latin typeface="Arial" pitchFamily="34" charset="0"/>
                 <a:ea typeface="Arial" pitchFamily="34" charset="-122"/>
@@ -10158,7 +10158,7 @@
             <a:r>
               <a:rPr lang="en-US" sz="820" dirty="0">
                 <a:solidFill>
-                  <a:srgbClr val="D9D9D9"/>
+                  <a:srgbClr val="333333"/>
                 </a:solidFill>
                 <a:latin typeface="Arial" pitchFamily="34" charset="0"/>
                 <a:ea typeface="Arial" pitchFamily="34" charset="-122"/>
@@ -10176,7 +10176,7 @@
             <a:r>
               <a:rPr lang="en-US" sz="820" dirty="0">
                 <a:solidFill>
-                  <a:srgbClr val="D9D9D9"/>
+                  <a:srgbClr val="333333"/>
                 </a:solidFill>
                 <a:latin typeface="Arial" pitchFamily="34" charset="0"/>
                 <a:ea typeface="Arial" pitchFamily="34" charset="-122"/>
@@ -10194,7 +10194,7 @@
             <a:r>
               <a:rPr lang="en-US" sz="820" dirty="0">
                 <a:solidFill>
-                  <a:srgbClr val="D9D9D9"/>
+                  <a:srgbClr val="333333"/>
                 </a:solidFill>
                 <a:latin typeface="Arial" pitchFamily="34" charset="0"/>
                 <a:ea typeface="Arial" pitchFamily="34" charset="-122"/>
@@ -10212,7 +10212,7 @@
             <a:r>
               <a:rPr lang="en-US" sz="820" dirty="0">
                 <a:solidFill>
-                  <a:srgbClr val="D9D9D9"/>
+                  <a:srgbClr val="333333"/>
                 </a:solidFill>
                 <a:latin typeface="Arial" pitchFamily="34" charset="0"/>
                 <a:ea typeface="Arial" pitchFamily="34" charset="-122"/>
@@ -10230,7 +10230,7 @@
             <a:r>
               <a:rPr lang="en-US" sz="820" b="1" dirty="0">
                 <a:solidFill>
-                  <a:srgbClr val="FFFFFF"/>
+                  <a:srgbClr val="000000"/>
                 </a:solidFill>
                 <a:latin typeface="Arial" pitchFamily="34" charset="0"/>
                 <a:ea typeface="Arial" pitchFamily="34" charset="-122"/>
@@ -10256,7 +10256,7 @@
     <p:bg>
       <p:bgPr>
         <a:solidFill>
-          <a:srgbClr val="0A0A0A"/>
+          <a:srgbClr val="FFFFFF"/>
         </a:solidFill>
       </p:bgPr>
     </p:bg>
@@ -10291,7 +10291,7 @@
           <a:noFill/>
           <a:ln w="12700">
             <a:solidFill>
-              <a:srgbClr val="4A4A4A"/>
+              <a:srgbClr val="E0E0E0"/>
             </a:solidFill>
             <a:prstDash val="solid"/>
           </a:ln>
@@ -10324,7 +10324,7 @@
             <a:r>
               <a:rPr lang="en-US" sz="900" b="1" dirty="0">
                 <a:solidFill>
-                  <a:srgbClr val="9A9A9A"/>
+                  <a:srgbClr val="666666"/>
                 </a:solidFill>
                 <a:latin typeface="Arial" pitchFamily="34" charset="0"/>
                 <a:ea typeface="Arial" pitchFamily="34" charset="-122"/>
@@ -10363,7 +10363,7 @@
             <a:r>
               <a:rPr lang="en-US" sz="900" b="1" dirty="0">
                 <a:solidFill>
-                  <a:srgbClr val="9A9A9A"/>
+                  <a:srgbClr val="666666"/>
                 </a:solidFill>
                 <a:latin typeface="Arial" pitchFamily="34" charset="0"/>
                 <a:ea typeface="Arial" pitchFamily="34" charset="-122"/>
@@ -10402,7 +10402,7 @@
             <a:r>
               <a:rPr lang="en-US" sz="1200" b="1" dirty="0">
                 <a:solidFill>
-                  <a:srgbClr val="9A9A9A"/>
+                  <a:srgbClr val="666666"/>
                 </a:solidFill>
                 <a:latin typeface="Arial" pitchFamily="34" charset="0"/>
                 <a:ea typeface="Arial" pitchFamily="34" charset="-122"/>
@@ -10441,7 +10441,7 @@
             <a:r>
               <a:rPr lang="en-US" sz="1800" b="1" dirty="0">
                 <a:solidFill>
-                  <a:srgbClr val="FFFFFF"/>
+                  <a:srgbClr val="000000"/>
                 </a:solidFill>
                 <a:latin typeface="Arial" pitchFamily="34" charset="0"/>
                 <a:ea typeface="Arial" pitchFamily="34" charset="-122"/>
@@ -10470,7 +10470,7 @@
           <a:noFill/>
           <a:ln w="12700">
             <a:solidFill>
-              <a:srgbClr val="4A4A4A"/>
+              <a:srgbClr val="E0E0E0"/>
             </a:solidFill>
             <a:prstDash val="solid"/>
           </a:ln>
@@ -10503,7 +10503,7 @@
             <a:r>
               <a:rPr lang="en-US" sz="850" b="1" dirty="0">
                 <a:solidFill>
-                  <a:srgbClr val="9A9A9A"/>
+                  <a:srgbClr val="666666"/>
                 </a:solidFill>
                 <a:latin typeface="Arial" pitchFamily="34" charset="0"/>
                 <a:ea typeface="Arial" pitchFamily="34" charset="-122"/>
@@ -10542,7 +10542,7 @@
             <a:r>
               <a:rPr lang="en-US" sz="850" b="1" dirty="0">
                 <a:solidFill>
-                  <a:srgbClr val="9A9A9A"/>
+                  <a:srgbClr val="666666"/>
                 </a:solidFill>
                 <a:latin typeface="Arial" pitchFamily="34" charset="0"/>
                 <a:ea typeface="Arial" pitchFamily="34" charset="-122"/>
@@ -10569,11 +10569,11 @@
             <a:avLst/>
           </a:prstGeom>
           <a:solidFill>
-            <a:srgbClr val="1F1F1F"/>
+            <a:srgbClr val="F8F9FA"/>
           </a:solidFill>
           <a:ln w="12700">
             <a:solidFill>
-              <a:srgbClr val="4A4A4A"/>
+              <a:srgbClr val="E0E0E0"/>
             </a:solidFill>
             <a:prstDash val="solid"/>
           </a:ln>
@@ -10606,7 +10606,7 @@
             <a:r>
               <a:rPr lang="en-US" sz="950" b="1" dirty="0">
                 <a:solidFill>
-                  <a:srgbClr val="4A90E2"/>
+                  <a:srgbClr val="1976D2"/>
                 </a:solidFill>
                 <a:latin typeface="Arial" pitchFamily="34" charset="0"/>
                 <a:ea typeface="Arial" pitchFamily="34" charset="-122"/>
@@ -10645,7 +10645,7 @@
             <a:r>
               <a:rPr lang="en-US" sz="750" b="1" dirty="0">
                 <a:solidFill>
-                  <a:srgbClr val="9A9A9A"/>
+                  <a:srgbClr val="666666"/>
                 </a:solidFill>
                 <a:latin typeface="Arial" pitchFamily="34" charset="0"/>
                 <a:ea typeface="Arial" pitchFamily="34" charset="-122"/>
@@ -10684,7 +10684,7 @@
             <a:r>
               <a:rPr lang="en-US" sz="850" b="1" dirty="0">
                 <a:solidFill>
-                  <a:srgbClr val="FFFFFF"/>
+                  <a:srgbClr val="000000"/>
                 </a:solidFill>
                 <a:latin typeface="Arial" pitchFamily="34" charset="0"/>
                 <a:ea typeface="Arial" pitchFamily="34" charset="-122"/>
@@ -10726,7 +10726,7 @@
             <a:r>
               <a:rPr lang="en-US" sz="800" dirty="0">
                 <a:solidFill>
-                  <a:srgbClr val="D9D9D9"/>
+                  <a:srgbClr val="333333"/>
                 </a:solidFill>
                 <a:latin typeface="Arial" pitchFamily="34" charset="0"/>
                 <a:ea typeface="Arial" pitchFamily="34" charset="-122"/>
@@ -10765,7 +10765,7 @@
             <a:r>
               <a:rPr lang="en-US" sz="800" b="1" dirty="0">
                 <a:solidFill>
-                  <a:srgbClr val="4EAF51"/>
+                  <a:srgbClr val="2E7D32"/>
                 </a:solidFill>
                 <a:latin typeface="Arial" pitchFamily="34" charset="0"/>
                 <a:ea typeface="Arial" pitchFamily="34" charset="-122"/>
@@ -10792,11 +10792,11 @@
             <a:avLst/>
           </a:prstGeom>
           <a:solidFill>
-            <a:srgbClr val="1F1F1F"/>
+            <a:srgbClr val="F8F9FA"/>
           </a:solidFill>
           <a:ln w="12700">
             <a:solidFill>
-              <a:srgbClr val="4A4A4A"/>
+              <a:srgbClr val="E0E0E0"/>
             </a:solidFill>
             <a:prstDash val="solid"/>
           </a:ln>
@@ -10829,7 +10829,7 @@
             <a:r>
               <a:rPr lang="en-US" sz="950" b="1" dirty="0">
                 <a:solidFill>
-                  <a:srgbClr val="4A90E2"/>
+                  <a:srgbClr val="1976D2"/>
                 </a:solidFill>
                 <a:latin typeface="Arial" pitchFamily="34" charset="0"/>
                 <a:ea typeface="Arial" pitchFamily="34" charset="-122"/>
@@ -10868,7 +10868,7 @@
             <a:r>
               <a:rPr lang="en-US" sz="750" b="1" dirty="0">
                 <a:solidFill>
-                  <a:srgbClr val="9A9A9A"/>
+                  <a:srgbClr val="666666"/>
                 </a:solidFill>
                 <a:latin typeface="Arial" pitchFamily="34" charset="0"/>
                 <a:ea typeface="Arial" pitchFamily="34" charset="-122"/>
@@ -10907,7 +10907,7 @@
             <a:r>
               <a:rPr lang="en-US" sz="850" b="1" dirty="0">
                 <a:solidFill>
-                  <a:srgbClr val="FFFFFF"/>
+                  <a:srgbClr val="000000"/>
                 </a:solidFill>
                 <a:latin typeface="Arial" pitchFamily="34" charset="0"/>
                 <a:ea typeface="Arial" pitchFamily="34" charset="-122"/>
@@ -10949,7 +10949,7 @@
             <a:r>
               <a:rPr lang="en-US" sz="800" dirty="0">
                 <a:solidFill>
-                  <a:srgbClr val="D9D9D9"/>
+                  <a:srgbClr val="333333"/>
                 </a:solidFill>
                 <a:latin typeface="Arial" pitchFamily="34" charset="0"/>
                 <a:ea typeface="Arial" pitchFamily="34" charset="-122"/>
@@ -10988,7 +10988,7 @@
             <a:r>
               <a:rPr lang="en-US" sz="800" b="1" dirty="0">
                 <a:solidFill>
-                  <a:srgbClr val="4EAF51"/>
+                  <a:srgbClr val="2E7D32"/>
                 </a:solidFill>
                 <a:latin typeface="Arial" pitchFamily="34" charset="0"/>
                 <a:ea typeface="Arial" pitchFamily="34" charset="-122"/>
@@ -11015,11 +11015,11 @@
             <a:avLst/>
           </a:prstGeom>
           <a:solidFill>
-            <a:srgbClr val="1F1F1F"/>
+            <a:srgbClr val="F8F9FA"/>
           </a:solidFill>
           <a:ln w="12700">
             <a:solidFill>
-              <a:srgbClr val="4A4A4A"/>
+              <a:srgbClr val="E0E0E0"/>
             </a:solidFill>
             <a:prstDash val="solid"/>
           </a:ln>
@@ -11052,7 +11052,7 @@
             <a:r>
               <a:rPr lang="en-US" sz="950" b="1" dirty="0">
                 <a:solidFill>
-                  <a:srgbClr val="4A90E2"/>
+                  <a:srgbClr val="1976D2"/>
                 </a:solidFill>
                 <a:latin typeface="Arial" pitchFamily="34" charset="0"/>
                 <a:ea typeface="Arial" pitchFamily="34" charset="-122"/>
@@ -11091,7 +11091,7 @@
             <a:r>
               <a:rPr lang="en-US" sz="750" b="1" dirty="0">
                 <a:solidFill>
-                  <a:srgbClr val="9A9A9A"/>
+                  <a:srgbClr val="666666"/>
                 </a:solidFill>
                 <a:latin typeface="Arial" pitchFamily="34" charset="0"/>
                 <a:ea typeface="Arial" pitchFamily="34" charset="-122"/>
@@ -11130,7 +11130,7 @@
             <a:r>
               <a:rPr lang="en-US" sz="850" b="1" dirty="0">
                 <a:solidFill>
-                  <a:srgbClr val="FFFFFF"/>
+                  <a:srgbClr val="000000"/>
                 </a:solidFill>
                 <a:latin typeface="Arial" pitchFamily="34" charset="0"/>
                 <a:ea typeface="Arial" pitchFamily="34" charset="-122"/>
@@ -11172,7 +11172,7 @@
             <a:r>
               <a:rPr lang="en-US" sz="800" dirty="0">
                 <a:solidFill>
-                  <a:srgbClr val="D9D9D9"/>
+                  <a:srgbClr val="333333"/>
                 </a:solidFill>
                 <a:latin typeface="Arial" pitchFamily="34" charset="0"/>
                 <a:ea typeface="Arial" pitchFamily="34" charset="-122"/>
@@ -11211,7 +11211,7 @@
             <a:r>
               <a:rPr lang="en-US" sz="800" b="1" dirty="0">
                 <a:solidFill>
-                  <a:srgbClr val="4EAF51"/>
+                  <a:srgbClr val="2E7D32"/>
                 </a:solidFill>
                 <a:latin typeface="Arial" pitchFamily="34" charset="0"/>
                 <a:ea typeface="Arial" pitchFamily="34" charset="-122"/>
@@ -11238,11 +11238,11 @@
             <a:avLst/>
           </a:prstGeom>
           <a:solidFill>
-            <a:srgbClr val="1F1F1F"/>
+            <a:srgbClr val="F8F9FA"/>
           </a:solidFill>
           <a:ln w="12700">
             <a:solidFill>
-              <a:srgbClr val="4A4A4A"/>
+              <a:srgbClr val="E0E0E0"/>
             </a:solidFill>
             <a:prstDash val="solid"/>
           </a:ln>
@@ -11275,7 +11275,7 @@
             <a:r>
               <a:rPr lang="en-US" sz="950" b="1" dirty="0">
                 <a:solidFill>
-                  <a:srgbClr val="4A90E2"/>
+                  <a:srgbClr val="1976D2"/>
                 </a:solidFill>
                 <a:latin typeface="Arial" pitchFamily="34" charset="0"/>
                 <a:ea typeface="Arial" pitchFamily="34" charset="-122"/>
@@ -11314,7 +11314,7 @@
             <a:r>
               <a:rPr lang="en-US" sz="750" b="1" dirty="0">
                 <a:solidFill>
-                  <a:srgbClr val="9A9A9A"/>
+                  <a:srgbClr val="666666"/>
                 </a:solidFill>
                 <a:latin typeface="Arial" pitchFamily="34" charset="0"/>
                 <a:ea typeface="Arial" pitchFamily="34" charset="-122"/>
@@ -11353,7 +11353,7 @@
             <a:r>
               <a:rPr lang="en-US" sz="850" b="1" dirty="0">
                 <a:solidFill>
-                  <a:srgbClr val="FFFFFF"/>
+                  <a:srgbClr val="000000"/>
                 </a:solidFill>
                 <a:latin typeface="Arial" pitchFamily="34" charset="0"/>
                 <a:ea typeface="Arial" pitchFamily="34" charset="-122"/>
@@ -11395,7 +11395,7 @@
             <a:r>
               <a:rPr lang="en-US" sz="800" dirty="0">
                 <a:solidFill>
-                  <a:srgbClr val="D9D9D9"/>
+                  <a:srgbClr val="333333"/>
                 </a:solidFill>
                 <a:latin typeface="Arial" pitchFamily="34" charset="0"/>
                 <a:ea typeface="Arial" pitchFamily="34" charset="-122"/>
@@ -11434,7 +11434,7 @@
             <a:r>
               <a:rPr lang="en-US" sz="800" b="1" dirty="0">
                 <a:solidFill>
-                  <a:srgbClr val="4EAF51"/>
+                  <a:srgbClr val="2E7D32"/>
                 </a:solidFill>
                 <a:latin typeface="Arial" pitchFamily="34" charset="0"/>
                 <a:ea typeface="Arial" pitchFamily="34" charset="-122"/>
@@ -11460,7 +11460,7 @@
     <p:bg>
       <p:bgPr>
         <a:solidFill>
-          <a:srgbClr val="0A0A0A"/>
+          <a:srgbClr val="FFFFFF"/>
         </a:solidFill>
       </p:bgPr>
     </p:bg>
@@ -11495,7 +11495,7 @@
           <a:noFill/>
           <a:ln w="12700">
             <a:solidFill>
-              <a:srgbClr val="4A4A4A"/>
+              <a:srgbClr val="E0E0E0"/>
             </a:solidFill>
             <a:prstDash val="solid"/>
           </a:ln>
@@ -11528,7 +11528,7 @@
             <a:r>
               <a:rPr lang="en-US" sz="900" b="1" dirty="0">
                 <a:solidFill>
-                  <a:srgbClr val="9A9A9A"/>
+                  <a:srgbClr val="666666"/>
                 </a:solidFill>
                 <a:latin typeface="Arial" pitchFamily="34" charset="0"/>
                 <a:ea typeface="Arial" pitchFamily="34" charset="-122"/>
@@ -11567,7 +11567,7 @@
             <a:r>
               <a:rPr lang="en-US" sz="900" b="1" dirty="0">
                 <a:solidFill>
-                  <a:srgbClr val="9A9A9A"/>
+                  <a:srgbClr val="666666"/>
                 </a:solidFill>
                 <a:latin typeface="Arial" pitchFamily="34" charset="0"/>
                 <a:ea typeface="Arial" pitchFamily="34" charset="-122"/>
@@ -11606,7 +11606,7 @@
             <a:r>
               <a:rPr lang="en-US" sz="1200" b="1" dirty="0">
                 <a:solidFill>
-                  <a:srgbClr val="9A9A9A"/>
+                  <a:srgbClr val="666666"/>
                 </a:solidFill>
                 <a:latin typeface="Arial" pitchFamily="34" charset="0"/>
                 <a:ea typeface="Arial" pitchFamily="34" charset="-122"/>
@@ -11645,7 +11645,7 @@
             <a:r>
               <a:rPr lang="en-US" sz="1800" b="1" dirty="0">
                 <a:solidFill>
-                  <a:srgbClr val="FFFFFF"/>
+                  <a:srgbClr val="000000"/>
                 </a:solidFill>
                 <a:latin typeface="Arial" pitchFamily="34" charset="0"/>
                 <a:ea typeface="Arial" pitchFamily="34" charset="-122"/>
@@ -11674,7 +11674,7 @@
           <a:noFill/>
           <a:ln w="12700">
             <a:solidFill>
-              <a:srgbClr val="4A4A4A"/>
+              <a:srgbClr val="E0E0E0"/>
             </a:solidFill>
             <a:prstDash val="solid"/>
           </a:ln>
@@ -11707,7 +11707,7 @@
             <a:r>
               <a:rPr lang="en-US" sz="850" b="1" dirty="0">
                 <a:solidFill>
-                  <a:srgbClr val="9A9A9A"/>
+                  <a:srgbClr val="666666"/>
                 </a:solidFill>
                 <a:latin typeface="Arial" pitchFamily="34" charset="0"/>
                 <a:ea typeface="Arial" pitchFamily="34" charset="-122"/>
@@ -11746,7 +11746,7 @@
             <a:r>
               <a:rPr lang="en-US" sz="850" b="1" dirty="0">
                 <a:solidFill>
-                  <a:srgbClr val="9A9A9A"/>
+                  <a:srgbClr val="666666"/>
                 </a:solidFill>
                 <a:latin typeface="Arial" pitchFamily="34" charset="0"/>
                 <a:ea typeface="Arial" pitchFamily="34" charset="-122"/>
@@ -11773,11 +11773,11 @@
             <a:avLst/>
           </a:prstGeom>
           <a:solidFill>
-            <a:srgbClr val="1F1F1F"/>
+            <a:srgbClr val="F8F9FA"/>
           </a:solidFill>
           <a:ln w="12700">
             <a:solidFill>
-              <a:srgbClr val="4A4A4A"/>
+              <a:srgbClr val="E0E0E0"/>
             </a:solidFill>
             <a:prstDash val="solid"/>
           </a:ln>
@@ -11798,11 +11798,11 @@
             <a:avLst/>
           </a:prstGeom>
           <a:solidFill>
-            <a:srgbClr val="1F1F1F"/>
+            <a:srgbClr val="F8F9FA"/>
           </a:solidFill>
           <a:ln w="12700">
             <a:solidFill>
-              <a:srgbClr val="4A4A4A"/>
+              <a:srgbClr val="E0E0E0"/>
             </a:solidFill>
             <a:prstDash val="solid"/>
           </a:ln>
@@ -11835,7 +11835,7 @@
             <a:r>
               <a:rPr lang="en-US" sz="1100" b="1" dirty="0">
                 <a:solidFill>
-                  <a:srgbClr val="FFFFFF"/>
+                  <a:srgbClr val="000000"/>
                 </a:solidFill>
                 <a:latin typeface="Arial" pitchFamily="34" charset="0"/>
                 <a:ea typeface="Arial" pitchFamily="34" charset="-122"/>
@@ -11877,7 +11877,7 @@
             <a:r>
               <a:rPr lang="en-US" sz="950" b="1" dirty="0">
                 <a:solidFill>
-                  <a:srgbClr val="4A90E2"/>
+                  <a:srgbClr val="1976D2"/>
                 </a:solidFill>
                 <a:latin typeface="Arial" pitchFamily="34" charset="0"/>
                 <a:ea typeface="Arial" pitchFamily="34" charset="-122"/>
@@ -11895,7 +11895,7 @@
             <a:r>
               <a:rPr lang="en-US" sz="820" b="1" dirty="0">
                 <a:solidFill>
-                  <a:srgbClr val="FFFFFF"/>
+                  <a:srgbClr val="000000"/>
                 </a:solidFill>
                 <a:latin typeface="Arial" pitchFamily="34" charset="0"/>
                 <a:ea typeface="Arial" pitchFamily="34" charset="-122"/>
@@ -11912,7 +11912,7 @@
             <a:r>
               <a:rPr lang="en-US" sz="820" dirty="0">
                 <a:solidFill>
-                  <a:srgbClr val="D9D9D9"/>
+                  <a:srgbClr val="333333"/>
                 </a:solidFill>
                 <a:latin typeface="Arial" pitchFamily="34" charset="0"/>
                 <a:ea typeface="Arial" pitchFamily="34" charset="-122"/>
@@ -11930,7 +11930,7 @@
             <a:r>
               <a:rPr lang="en-US" sz="820" b="1" dirty="0">
                 <a:solidFill>
-                  <a:srgbClr val="FFFFFF"/>
+                  <a:srgbClr val="000000"/>
                 </a:solidFill>
                 <a:latin typeface="Arial" pitchFamily="34" charset="0"/>
                 <a:ea typeface="Arial" pitchFamily="34" charset="-122"/>
@@ -11947,7 +11947,7 @@
             <a:r>
               <a:rPr lang="en-US" sz="820" dirty="0">
                 <a:solidFill>
-                  <a:srgbClr val="D9D9D9"/>
+                  <a:srgbClr val="333333"/>
                 </a:solidFill>
                 <a:latin typeface="Arial" pitchFamily="34" charset="0"/>
                 <a:ea typeface="Arial" pitchFamily="34" charset="-122"/>
@@ -11965,7 +11965,7 @@
             <a:r>
               <a:rPr lang="en-US" sz="820" b="1" dirty="0">
                 <a:solidFill>
-                  <a:srgbClr val="FFFFFF"/>
+                  <a:srgbClr val="000000"/>
                 </a:solidFill>
                 <a:latin typeface="Arial" pitchFamily="34" charset="0"/>
                 <a:ea typeface="Arial" pitchFamily="34" charset="-122"/>
@@ -11982,7 +11982,7 @@
             <a:r>
               <a:rPr lang="en-US" sz="820" dirty="0">
                 <a:solidFill>
-                  <a:srgbClr val="D9D9D9"/>
+                  <a:srgbClr val="333333"/>
                 </a:solidFill>
                 <a:latin typeface="Arial" pitchFamily="34" charset="0"/>
                 <a:ea typeface="Arial" pitchFamily="34" charset="-122"/>
@@ -12000,7 +12000,7 @@
             <a:r>
               <a:rPr lang="en-US" sz="820" b="1" dirty="0">
                 <a:solidFill>
-                  <a:srgbClr val="FFFFFF"/>
+                  <a:srgbClr val="000000"/>
                 </a:solidFill>
                 <a:latin typeface="Arial" pitchFamily="34" charset="0"/>
                 <a:ea typeface="Arial" pitchFamily="34" charset="-122"/>
@@ -12017,7 +12017,7 @@
             <a:r>
               <a:rPr lang="en-US" sz="820" dirty="0">
                 <a:solidFill>
-                  <a:srgbClr val="D9D9D9"/>
+                  <a:srgbClr val="333333"/>
                 </a:solidFill>
                 <a:latin typeface="Arial" pitchFamily="34" charset="0"/>
                 <a:ea typeface="Arial" pitchFamily="34" charset="-122"/>
@@ -12035,7 +12035,7 @@
             <a:r>
               <a:rPr lang="en-US" sz="820" b="1" dirty="0">
                 <a:solidFill>
-                  <a:srgbClr val="E05252"/>
+                  <a:srgbClr val="D32F2F"/>
                 </a:solidFill>
                 <a:latin typeface="Arial" pitchFamily="34" charset="0"/>
                 <a:ea typeface="Arial" pitchFamily="34" charset="-122"/>
@@ -12074,7 +12074,7 @@
             <a:r>
               <a:rPr lang="en-US" sz="1100" b="1" dirty="0">
                 <a:solidFill>
-                  <a:srgbClr val="FFFFFF"/>
+                  <a:srgbClr val="000000"/>
                 </a:solidFill>
                 <a:latin typeface="Arial" pitchFamily="34" charset="0"/>
                 <a:ea typeface="Arial" pitchFamily="34" charset="-122"/>
@@ -12116,7 +12116,7 @@
             <a:r>
               <a:rPr lang="en-US" sz="820" b="1" dirty="0">
                 <a:solidFill>
-                  <a:srgbClr val="4EAF51"/>
+                  <a:srgbClr val="2E7D32"/>
                 </a:solidFill>
                 <a:latin typeface="Arial" pitchFamily="34" charset="0"/>
                 <a:ea typeface="Arial" pitchFamily="34" charset="-122"/>
@@ -12134,7 +12134,7 @@
             <a:r>
               <a:rPr lang="en-US" sz="820" b="1" dirty="0">
                 <a:solidFill>
-                  <a:srgbClr val="FFFFFF"/>
+                  <a:srgbClr val="000000"/>
                 </a:solidFill>
                 <a:latin typeface="Arial" pitchFamily="34" charset="0"/>
                 <a:ea typeface="Arial" pitchFamily="34" charset="-122"/>
@@ -12152,7 +12152,7 @@
             <a:r>
               <a:rPr lang="en-US" sz="820" dirty="0">
                 <a:solidFill>
-                  <a:srgbClr val="D9D9D9"/>
+                  <a:srgbClr val="333333"/>
                 </a:solidFill>
                 <a:latin typeface="Arial" pitchFamily="34" charset="0"/>
                 <a:ea typeface="Arial" pitchFamily="34" charset="-122"/>
@@ -12170,7 +12170,7 @@
             <a:r>
               <a:rPr lang="en-US" sz="820" b="1" dirty="0">
                 <a:solidFill>
-                  <a:srgbClr val="FFFFFF"/>
+                  <a:srgbClr val="000000"/>
                 </a:solidFill>
                 <a:latin typeface="Arial" pitchFamily="34" charset="0"/>
                 <a:ea typeface="Arial" pitchFamily="34" charset="-122"/>
@@ -12188,7 +12188,7 @@
             <a:r>
               <a:rPr lang="en-US" sz="820" dirty="0">
                 <a:solidFill>
-                  <a:srgbClr val="D9D9D9"/>
+                  <a:srgbClr val="333333"/>
                 </a:solidFill>
                 <a:latin typeface="Arial" pitchFamily="34" charset="0"/>
                 <a:ea typeface="Arial" pitchFamily="34" charset="-122"/>
@@ -12206,7 +12206,7 @@
             <a:r>
               <a:rPr lang="en-US" sz="820" b="1" dirty="0">
                 <a:solidFill>
-                  <a:srgbClr val="FFFFFF"/>
+                  <a:srgbClr val="000000"/>
                 </a:solidFill>
                 <a:latin typeface="Arial" pitchFamily="34" charset="0"/>
                 <a:ea typeface="Arial" pitchFamily="34" charset="-122"/>
@@ -12224,7 +12224,7 @@
             <a:r>
               <a:rPr lang="en-US" sz="820" dirty="0">
                 <a:solidFill>
-                  <a:srgbClr val="D9D9D9"/>
+                  <a:srgbClr val="333333"/>
                 </a:solidFill>
                 <a:latin typeface="Arial" pitchFamily="34" charset="0"/>
                 <a:ea typeface="Arial" pitchFamily="34" charset="-122"/>
@@ -12250,7 +12250,7 @@
     <p:bg>
       <p:bgPr>
         <a:solidFill>
-          <a:srgbClr val="0A0A0A"/>
+          <a:srgbClr val="FFFFFF"/>
         </a:solidFill>
       </p:bgPr>
     </p:bg>
@@ -12285,7 +12285,7 @@
           <a:noFill/>
           <a:ln w="12700">
             <a:solidFill>
-              <a:srgbClr val="4A4A4A"/>
+              <a:srgbClr val="E0E0E0"/>
             </a:solidFill>
             <a:prstDash val="solid"/>
           </a:ln>
@@ -12318,7 +12318,7 @@
             <a:r>
               <a:rPr lang="en-US" sz="900" b="1" dirty="0">
                 <a:solidFill>
-                  <a:srgbClr val="9A9A9A"/>
+                  <a:srgbClr val="666666"/>
                 </a:solidFill>
                 <a:latin typeface="Arial" pitchFamily="34" charset="0"/>
                 <a:ea typeface="Arial" pitchFamily="34" charset="-122"/>
@@ -12357,7 +12357,7 @@
             <a:r>
               <a:rPr lang="en-US" sz="900" b="1" dirty="0">
                 <a:solidFill>
-                  <a:srgbClr val="9A9A9A"/>
+                  <a:srgbClr val="666666"/>
                 </a:solidFill>
                 <a:latin typeface="Arial" pitchFamily="34" charset="0"/>
                 <a:ea typeface="Arial" pitchFamily="34" charset="-122"/>
@@ -12396,7 +12396,7 @@
             <a:r>
               <a:rPr lang="en-US" sz="1200" b="1" dirty="0">
                 <a:solidFill>
-                  <a:srgbClr val="9A9A9A"/>
+                  <a:srgbClr val="666666"/>
                 </a:solidFill>
                 <a:latin typeface="Arial" pitchFamily="34" charset="0"/>
                 <a:ea typeface="Arial" pitchFamily="34" charset="-122"/>
@@ -12435,7 +12435,7 @@
             <a:r>
               <a:rPr lang="en-US" sz="1800" b="1" dirty="0">
                 <a:solidFill>
-                  <a:srgbClr val="FFFFFF"/>
+                  <a:srgbClr val="000000"/>
                 </a:solidFill>
                 <a:latin typeface="Arial" pitchFamily="34" charset="0"/>
                 <a:ea typeface="Arial" pitchFamily="34" charset="-122"/>
@@ -12464,7 +12464,7 @@
           <a:noFill/>
           <a:ln w="12700">
             <a:solidFill>
-              <a:srgbClr val="4A4A4A"/>
+              <a:srgbClr val="E0E0E0"/>
             </a:solidFill>
             <a:prstDash val="solid"/>
           </a:ln>
@@ -12497,7 +12497,7 @@
             <a:r>
               <a:rPr lang="en-US" sz="850" b="1" dirty="0">
                 <a:solidFill>
-                  <a:srgbClr val="9A9A9A"/>
+                  <a:srgbClr val="666666"/>
                 </a:solidFill>
                 <a:latin typeface="Arial" pitchFamily="34" charset="0"/>
                 <a:ea typeface="Arial" pitchFamily="34" charset="-122"/>
@@ -12536,7 +12536,7 @@
             <a:r>
               <a:rPr lang="en-US" sz="850" b="1" dirty="0">
                 <a:solidFill>
-                  <a:srgbClr val="9A9A9A"/>
+                  <a:srgbClr val="666666"/>
                 </a:solidFill>
                 <a:latin typeface="Arial" pitchFamily="34" charset="0"/>
                 <a:ea typeface="Arial" pitchFamily="34" charset="-122"/>
@@ -12563,11 +12563,11 @@
             <a:avLst/>
           </a:prstGeom>
           <a:solidFill>
-            <a:srgbClr val="1F1F1F"/>
+            <a:srgbClr val="F8F9FA"/>
           </a:solidFill>
           <a:ln w="12700">
             <a:solidFill>
-              <a:srgbClr val="4A4A4A"/>
+              <a:srgbClr val="E0E0E0"/>
             </a:solidFill>
             <a:prstDash val="solid"/>
           </a:ln>
@@ -12588,11 +12588,11 @@
             <a:avLst/>
           </a:prstGeom>
           <a:solidFill>
-            <a:srgbClr val="1F1F1F"/>
+            <a:srgbClr val="F8F9FA"/>
           </a:solidFill>
           <a:ln w="12700">
             <a:solidFill>
-              <a:srgbClr val="4A4A4A"/>
+              <a:srgbClr val="E0E0E0"/>
             </a:solidFill>
             <a:prstDash val="solid"/>
           </a:ln>
@@ -12625,7 +12625,7 @@
             <a:r>
               <a:rPr lang="en-US" sz="1100" b="1" dirty="0">
                 <a:solidFill>
-                  <a:srgbClr val="FFFFFF"/>
+                  <a:srgbClr val="000000"/>
                 </a:solidFill>
                 <a:latin typeface="Arial" pitchFamily="34" charset="0"/>
                 <a:ea typeface="Arial" pitchFamily="34" charset="-122"/>
@@ -12667,7 +12667,7 @@
             <a:r>
               <a:rPr lang="en-US" sz="820" b="1" dirty="0">
                 <a:solidFill>
-                  <a:srgbClr val="9A9A9A"/>
+                  <a:srgbClr val="666666"/>
                 </a:solidFill>
                 <a:latin typeface="Arial" pitchFamily="34" charset="0"/>
                 <a:ea typeface="Arial" pitchFamily="34" charset="-122"/>
@@ -12685,7 +12685,7 @@
             <a:r>
               <a:rPr lang="en-US" sz="820" b="1" dirty="0">
                 <a:solidFill>
-                  <a:srgbClr val="4A90E2"/>
+                  <a:srgbClr val="1976D2"/>
                 </a:solidFill>
                 <a:latin typeface="Arial" pitchFamily="34" charset="0"/>
                 <a:ea typeface="Arial" pitchFamily="34" charset="-122"/>
@@ -12703,7 +12703,7 @@
             <a:r>
               <a:rPr lang="en-US" sz="820" dirty="0">
                 <a:solidFill>
-                  <a:srgbClr val="D9D9D9"/>
+                  <a:srgbClr val="333333"/>
                 </a:solidFill>
                 <a:latin typeface="Arial" pitchFamily="34" charset="0"/>
                 <a:ea typeface="Arial" pitchFamily="34" charset="-122"/>
@@ -12721,7 +12721,7 @@
             <a:r>
               <a:rPr lang="en-US" sz="820" b="1" dirty="0">
                 <a:solidFill>
-                  <a:srgbClr val="4A90E2"/>
+                  <a:srgbClr val="1976D2"/>
                 </a:solidFill>
                 <a:latin typeface="Arial" pitchFamily="34" charset="0"/>
                 <a:ea typeface="Arial" pitchFamily="34" charset="-122"/>
@@ -12739,7 +12739,7 @@
             <a:r>
               <a:rPr lang="en-US" sz="820" dirty="0">
                 <a:solidFill>
-                  <a:srgbClr val="D9D9D9"/>
+                  <a:srgbClr val="333333"/>
                 </a:solidFill>
                 <a:latin typeface="Arial" pitchFamily="34" charset="0"/>
                 <a:ea typeface="Arial" pitchFamily="34" charset="-122"/>
@@ -12757,7 +12757,7 @@
             <a:r>
               <a:rPr lang="en-US" sz="820" b="1" dirty="0">
                 <a:solidFill>
-                  <a:srgbClr val="4A90E2"/>
+                  <a:srgbClr val="1976D2"/>
                 </a:solidFill>
                 <a:latin typeface="Arial" pitchFamily="34" charset="0"/>
                 <a:ea typeface="Arial" pitchFamily="34" charset="-122"/>
@@ -12775,7 +12775,7 @@
             <a:r>
               <a:rPr lang="en-US" sz="820" dirty="0">
                 <a:solidFill>
-                  <a:srgbClr val="D9D9D9"/>
+                  <a:srgbClr val="333333"/>
                 </a:solidFill>
                 <a:latin typeface="Arial" pitchFamily="34" charset="0"/>
                 <a:ea typeface="Arial" pitchFamily="34" charset="-122"/>
@@ -12814,7 +12814,7 @@
             <a:r>
               <a:rPr lang="en-US" sz="1100" b="1" dirty="0">
                 <a:solidFill>
-                  <a:srgbClr val="FFFFFF"/>
+                  <a:srgbClr val="000000"/>
                 </a:solidFill>
                 <a:latin typeface="Arial" pitchFamily="34" charset="0"/>
                 <a:ea typeface="Arial" pitchFamily="34" charset="-122"/>
@@ -12856,7 +12856,7 @@
             <a:r>
               <a:rPr lang="en-US" sz="820" b="1" dirty="0">
                 <a:solidFill>
-                  <a:srgbClr val="9A9A9A"/>
+                  <a:srgbClr val="666666"/>
                 </a:solidFill>
                 <a:latin typeface="Arial" pitchFamily="34" charset="0"/>
                 <a:ea typeface="Arial" pitchFamily="34" charset="-122"/>
@@ -12874,7 +12874,7 @@
             <a:r>
               <a:rPr lang="en-US" sz="780" dirty="0">
                 <a:solidFill>
-                  <a:srgbClr val="D9D9D9"/>
+                  <a:srgbClr val="333333"/>
                 </a:solidFill>
                 <a:latin typeface="Courier New" pitchFamily="34" charset="0"/>
                 <a:ea typeface="Courier New" pitchFamily="34" charset="-122"/>
@@ -12894,7 +12894,7 @@
             <a:r>
               <a:rPr lang="en-US" sz="820" b="1" dirty="0">
                 <a:solidFill>
-                  <a:srgbClr val="4EAF51"/>
+                  <a:srgbClr val="2E7D32"/>
                 </a:solidFill>
                 <a:latin typeface="Arial" pitchFamily="34" charset="0"/>
                 <a:ea typeface="Arial" pitchFamily="34" charset="-122"/>
@@ -12912,7 +12912,7 @@
             <a:r>
               <a:rPr lang="en-US" sz="780" dirty="0">
                 <a:solidFill>
-                  <a:srgbClr val="FFFFFF"/>
+                  <a:srgbClr val="000000"/>
                 </a:solidFill>
                 <a:latin typeface="Courier New" pitchFamily="34" charset="0"/>
                 <a:ea typeface="Courier New" pitchFamily="34" charset="-122"/>
@@ -12932,7 +12932,7 @@
             <a:r>
               <a:rPr lang="en-US" sz="780" dirty="0">
                 <a:solidFill>
-                  <a:srgbClr val="FFFFFF"/>
+                  <a:srgbClr val="000000"/>
                 </a:solidFill>
                 <a:latin typeface="Courier New" pitchFamily="34" charset="0"/>
                 <a:ea typeface="Courier New" pitchFamily="34" charset="-122"/>
@@ -12952,7 +12952,7 @@
             <a:r>
               <a:rPr lang="en-US" sz="780" dirty="0">
                 <a:solidFill>
-                  <a:srgbClr val="FFFFFF"/>
+                  <a:srgbClr val="000000"/>
                 </a:solidFill>
                 <a:latin typeface="Courier New" pitchFamily="34" charset="0"/>
                 <a:ea typeface="Courier New" pitchFamily="34" charset="-122"/>
@@ -12972,7 +12972,7 @@
             <a:r>
               <a:rPr lang="en-US" sz="780" dirty="0">
                 <a:solidFill>
-                  <a:srgbClr val="FFFFFF"/>
+                  <a:srgbClr val="000000"/>
                 </a:solidFill>
                 <a:latin typeface="Courier New" pitchFamily="34" charset="0"/>
                 <a:ea typeface="Courier New" pitchFamily="34" charset="-122"/>
@@ -12992,7 +12992,7 @@
             <a:r>
               <a:rPr lang="en-US" sz="780" dirty="0">
                 <a:solidFill>
-                  <a:srgbClr val="FFFFFF"/>
+                  <a:srgbClr val="000000"/>
                 </a:solidFill>
                 <a:latin typeface="Courier New" pitchFamily="34" charset="0"/>
                 <a:ea typeface="Courier New" pitchFamily="34" charset="-122"/>
@@ -13018,7 +13018,7 @@
     <p:bg>
       <p:bgPr>
         <a:solidFill>
-          <a:srgbClr val="0A0A0A"/>
+          <a:srgbClr val="FFFFFF"/>
         </a:solidFill>
       </p:bgPr>
     </p:bg>
@@ -13053,7 +13053,7 @@
           <a:noFill/>
           <a:ln w="12700">
             <a:solidFill>
-              <a:srgbClr val="4A4A4A"/>
+              <a:srgbClr val="E0E0E0"/>
             </a:solidFill>
             <a:prstDash val="solid"/>
           </a:ln>
@@ -13086,7 +13086,7 @@
             <a:r>
               <a:rPr lang="en-US" sz="900" b="1" dirty="0">
                 <a:solidFill>
-                  <a:srgbClr val="9A9A9A"/>
+                  <a:srgbClr val="666666"/>
                 </a:solidFill>
                 <a:latin typeface="Arial" pitchFamily="34" charset="0"/>
                 <a:ea typeface="Arial" pitchFamily="34" charset="-122"/>
@@ -13125,7 +13125,7 @@
             <a:r>
               <a:rPr lang="en-US" sz="900" b="1" dirty="0">
                 <a:solidFill>
-                  <a:srgbClr val="9A9A9A"/>
+                  <a:srgbClr val="666666"/>
                 </a:solidFill>
                 <a:latin typeface="Arial" pitchFamily="34" charset="0"/>
                 <a:ea typeface="Arial" pitchFamily="34" charset="-122"/>
@@ -13164,7 +13164,7 @@
             <a:r>
               <a:rPr lang="en-US" sz="1200" b="1" dirty="0">
                 <a:solidFill>
-                  <a:srgbClr val="9A9A9A"/>
+                  <a:srgbClr val="666666"/>
                 </a:solidFill>
                 <a:latin typeface="Arial" pitchFamily="34" charset="0"/>
                 <a:ea typeface="Arial" pitchFamily="34" charset="-122"/>
@@ -13203,7 +13203,7 @@
             <a:r>
               <a:rPr lang="en-US" sz="1800" b="1" dirty="0">
                 <a:solidFill>
-                  <a:srgbClr val="FFFFFF"/>
+                  <a:srgbClr val="000000"/>
                 </a:solidFill>
                 <a:latin typeface="Arial" pitchFamily="34" charset="0"/>
                 <a:ea typeface="Arial" pitchFamily="34" charset="-122"/>
@@ -13232,7 +13232,7 @@
           <a:noFill/>
           <a:ln w="12700">
             <a:solidFill>
-              <a:srgbClr val="4A4A4A"/>
+              <a:srgbClr val="E0E0E0"/>
             </a:solidFill>
             <a:prstDash val="solid"/>
           </a:ln>
@@ -13265,7 +13265,7 @@
             <a:r>
               <a:rPr lang="en-US" sz="850" b="1" dirty="0">
                 <a:solidFill>
-                  <a:srgbClr val="9A9A9A"/>
+                  <a:srgbClr val="666666"/>
                 </a:solidFill>
                 <a:latin typeface="Arial" pitchFamily="34" charset="0"/>
                 <a:ea typeface="Arial" pitchFamily="34" charset="-122"/>
@@ -13304,7 +13304,7 @@
             <a:r>
               <a:rPr lang="en-US" sz="850" b="1" dirty="0">
                 <a:solidFill>
-                  <a:srgbClr val="9A9A9A"/>
+                  <a:srgbClr val="666666"/>
                 </a:solidFill>
                 <a:latin typeface="Arial" pitchFamily="34" charset="0"/>
                 <a:ea typeface="Arial" pitchFamily="34" charset="-122"/>
@@ -13331,11 +13331,11 @@
             <a:avLst/>
           </a:prstGeom>
           <a:solidFill>
-            <a:srgbClr val="1F1F1F"/>
+            <a:srgbClr val="F8F9FA"/>
           </a:solidFill>
           <a:ln w="12700">
             <a:solidFill>
-              <a:srgbClr val="4A4A4A"/>
+              <a:srgbClr val="E0E0E0"/>
             </a:solidFill>
             <a:prstDash val="solid"/>
           </a:ln>
@@ -13371,7 +13371,7 @@
             <a:r>
               <a:rPr lang="en-US" sz="1000" b="1" dirty="0">
                 <a:solidFill>
-                  <a:srgbClr val="FFFFFF"/>
+                  <a:srgbClr val="000000"/>
                 </a:solidFill>
                 <a:latin typeface="Arial" pitchFamily="34" charset="0"/>
                 <a:ea typeface="Arial" pitchFamily="34" charset="-122"/>
@@ -13389,7 +13389,7 @@
             <a:r>
               <a:rPr lang="en-US" sz="950" b="1" dirty="0">
                 <a:solidFill>
-                  <a:srgbClr val="4EAF51"/>
+                  <a:srgbClr val="2E7D32"/>
                 </a:solidFill>
                 <a:latin typeface="Arial" pitchFamily="34" charset="0"/>
                 <a:ea typeface="Arial" pitchFamily="34" charset="-122"/>
@@ -13407,7 +13407,7 @@
             <a:r>
               <a:rPr lang="en-US" sz="850" dirty="0">
                 <a:solidFill>
-                  <a:srgbClr val="D9D9D9"/>
+                  <a:srgbClr val="333333"/>
                 </a:solidFill>
                 <a:latin typeface="Arial" pitchFamily="34" charset="0"/>
                 <a:ea typeface="Arial" pitchFamily="34" charset="-122"/>
@@ -13425,7 +13425,7 @@
             <a:r>
               <a:rPr lang="en-US" sz="850" dirty="0">
                 <a:solidFill>
-                  <a:srgbClr val="D9D9D9"/>
+                  <a:srgbClr val="333333"/>
                 </a:solidFill>
                 <a:latin typeface="Arial" pitchFamily="34" charset="0"/>
                 <a:ea typeface="Arial" pitchFamily="34" charset="-122"/>
@@ -13443,7 +13443,7 @@
             <a:r>
               <a:rPr lang="en-US" sz="850" dirty="0">
                 <a:solidFill>
-                  <a:srgbClr val="D9D9D9"/>
+                  <a:srgbClr val="333333"/>
                 </a:solidFill>
                 <a:latin typeface="Arial" pitchFamily="34" charset="0"/>
                 <a:ea typeface="Arial" pitchFamily="34" charset="-122"/>
@@ -13461,7 +13461,7 @@
             <a:r>
               <a:rPr lang="en-US" sz="950" b="1" dirty="0">
                 <a:solidFill>
-                  <a:srgbClr val="E05252"/>
+                  <a:srgbClr val="D32F2F"/>
                 </a:solidFill>
                 <a:latin typeface="Arial" pitchFamily="34" charset="0"/>
                 <a:ea typeface="Arial" pitchFamily="34" charset="-122"/>
@@ -13479,7 +13479,7 @@
             <a:r>
               <a:rPr lang="en-US" sz="850" dirty="0">
                 <a:solidFill>
-                  <a:srgbClr val="D9D9D9"/>
+                  <a:srgbClr val="333333"/>
                 </a:solidFill>
                 <a:latin typeface="Arial" pitchFamily="34" charset="0"/>
                 <a:ea typeface="Arial" pitchFamily="34" charset="-122"/>
@@ -13497,7 +13497,7 @@
             <a:r>
               <a:rPr lang="en-US" sz="950" b="1" dirty="0">
                 <a:solidFill>
-                  <a:srgbClr val="E05252"/>
+                  <a:srgbClr val="D32F2F"/>
                 </a:solidFill>
                 <a:latin typeface="Arial" pitchFamily="34" charset="0"/>
                 <a:ea typeface="Arial" pitchFamily="34" charset="-122"/>
@@ -13515,7 +13515,7 @@
             <a:r>
               <a:rPr lang="en-US" sz="850" dirty="0">
                 <a:solidFill>
-                  <a:srgbClr val="D9D9D9"/>
+                  <a:srgbClr val="333333"/>
                 </a:solidFill>
                 <a:latin typeface="Arial" pitchFamily="34" charset="0"/>
                 <a:ea typeface="Arial" pitchFamily="34" charset="-122"/>
@@ -13541,7 +13541,7 @@
     <p:bg>
       <p:bgPr>
         <a:solidFill>
-          <a:srgbClr val="0A0A0A"/>
+          <a:srgbClr val="FFFFFF"/>
         </a:solidFill>
       </p:bgPr>
     </p:bg>
@@ -13576,7 +13576,7 @@
           <a:noFill/>
           <a:ln w="12700">
             <a:solidFill>
-              <a:srgbClr val="4A4A4A"/>
+              <a:srgbClr val="E0E0E0"/>
             </a:solidFill>
             <a:prstDash val="solid"/>
           </a:ln>
@@ -13609,7 +13609,7 @@
             <a:r>
               <a:rPr lang="en-US" sz="900" b="1" dirty="0">
                 <a:solidFill>
-                  <a:srgbClr val="9A9A9A"/>
+                  <a:srgbClr val="666666"/>
                 </a:solidFill>
                 <a:latin typeface="Arial" pitchFamily="34" charset="0"/>
                 <a:ea typeface="Arial" pitchFamily="34" charset="-122"/>
@@ -13648,7 +13648,7 @@
             <a:r>
               <a:rPr lang="en-US" sz="900" b="1" dirty="0">
                 <a:solidFill>
-                  <a:srgbClr val="9A9A9A"/>
+                  <a:srgbClr val="666666"/>
                 </a:solidFill>
                 <a:latin typeface="Arial" pitchFamily="34" charset="0"/>
                 <a:ea typeface="Arial" pitchFamily="34" charset="-122"/>
@@ -13687,7 +13687,7 @@
             <a:r>
               <a:rPr lang="en-US" sz="1200" b="1" dirty="0">
                 <a:solidFill>
-                  <a:srgbClr val="9A9A9A"/>
+                  <a:srgbClr val="666666"/>
                 </a:solidFill>
                 <a:latin typeface="Arial" pitchFamily="34" charset="0"/>
                 <a:ea typeface="Arial" pitchFamily="34" charset="-122"/>
@@ -13726,7 +13726,7 @@
             <a:r>
               <a:rPr lang="en-US" sz="1800" b="1" dirty="0">
                 <a:solidFill>
-                  <a:srgbClr val="FFFFFF"/>
+                  <a:srgbClr val="000000"/>
                 </a:solidFill>
                 <a:latin typeface="Arial" pitchFamily="34" charset="0"/>
                 <a:ea typeface="Arial" pitchFamily="34" charset="-122"/>
@@ -13755,7 +13755,7 @@
           <a:noFill/>
           <a:ln w="12700">
             <a:solidFill>
-              <a:srgbClr val="4A4A4A"/>
+              <a:srgbClr val="E0E0E0"/>
             </a:solidFill>
             <a:prstDash val="solid"/>
           </a:ln>
@@ -13788,7 +13788,7 @@
             <a:r>
               <a:rPr lang="en-US" sz="850" b="1" dirty="0">
                 <a:solidFill>
-                  <a:srgbClr val="9A9A9A"/>
+                  <a:srgbClr val="666666"/>
                 </a:solidFill>
                 <a:latin typeface="Arial" pitchFamily="34" charset="0"/>
                 <a:ea typeface="Arial" pitchFamily="34" charset="-122"/>
@@ -13827,7 +13827,7 @@
             <a:r>
               <a:rPr lang="en-US" sz="850" b="1" dirty="0">
                 <a:solidFill>
-                  <a:srgbClr val="9A9A9A"/>
+                  <a:srgbClr val="666666"/>
                 </a:solidFill>
                 <a:latin typeface="Arial" pitchFamily="34" charset="0"/>
                 <a:ea typeface="Arial" pitchFamily="34" charset="-122"/>
@@ -13854,11 +13854,11 @@
             <a:avLst/>
           </a:prstGeom>
           <a:solidFill>
-            <a:srgbClr val="1F1F1F"/>
+            <a:srgbClr val="F8F9FA"/>
           </a:solidFill>
           <a:ln w="12700">
             <a:solidFill>
-              <a:srgbClr val="4A4A4A"/>
+              <a:srgbClr val="E0E0E0"/>
             </a:solidFill>
             <a:prstDash val="solid"/>
           </a:ln>
@@ -13879,11 +13879,11 @@
             <a:avLst/>
           </a:prstGeom>
           <a:solidFill>
-            <a:srgbClr val="1F1F1F"/>
+            <a:srgbClr val="F8F9FA"/>
           </a:solidFill>
           <a:ln w="12700">
             <a:solidFill>
-              <a:srgbClr val="4A4A4A"/>
+              <a:srgbClr val="E0E0E0"/>
             </a:solidFill>
             <a:prstDash val="solid"/>
           </a:ln>
@@ -13916,7 +13916,7 @@
             <a:r>
               <a:rPr lang="en-US" sz="1100" b="1" dirty="0">
                 <a:solidFill>
-                  <a:srgbClr val="FFFFFF"/>
+                  <a:srgbClr val="000000"/>
                 </a:solidFill>
                 <a:latin typeface="Arial" pitchFamily="34" charset="0"/>
                 <a:ea typeface="Arial" pitchFamily="34" charset="-122"/>
@@ -13958,7 +13958,7 @@
             <a:r>
               <a:rPr lang="en-US" sz="850" b="1" dirty="0">
                 <a:solidFill>
-                  <a:srgbClr val="FFFFFF"/>
+                  <a:srgbClr val="000000"/>
                 </a:solidFill>
                 <a:latin typeface="Arial" pitchFamily="34" charset="0"/>
                 <a:ea typeface="Arial" pitchFamily="34" charset="-122"/>
@@ -13975,7 +13975,7 @@
             <a:r>
               <a:rPr lang="en-US" sz="850" dirty="0">
                 <a:solidFill>
-                  <a:srgbClr val="D9D9D9"/>
+                  <a:srgbClr val="333333"/>
                 </a:solidFill>
                 <a:latin typeface="Arial" pitchFamily="34" charset="0"/>
                 <a:ea typeface="Arial" pitchFamily="34" charset="-122"/>
@@ -13993,7 +13993,7 @@
             <a:r>
               <a:rPr lang="en-US" sz="850" b="1" dirty="0">
                 <a:solidFill>
-                  <a:srgbClr val="FFFFFF"/>
+                  <a:srgbClr val="000000"/>
                 </a:solidFill>
                 <a:latin typeface="Arial" pitchFamily="34" charset="0"/>
                 <a:ea typeface="Arial" pitchFamily="34" charset="-122"/>
@@ -14010,7 +14010,7 @@
             <a:r>
               <a:rPr lang="en-US" sz="850" dirty="0">
                 <a:solidFill>
-                  <a:srgbClr val="D9D9D9"/>
+                  <a:srgbClr val="333333"/>
                 </a:solidFill>
                 <a:latin typeface="Arial" pitchFamily="34" charset="0"/>
                 <a:ea typeface="Arial" pitchFamily="34" charset="-122"/>
@@ -14028,7 +14028,7 @@
             <a:r>
               <a:rPr lang="en-US" sz="850" b="1" dirty="0">
                 <a:solidFill>
-                  <a:srgbClr val="FFFFFF"/>
+                  <a:srgbClr val="000000"/>
                 </a:solidFill>
                 <a:latin typeface="Arial" pitchFamily="34" charset="0"/>
                 <a:ea typeface="Arial" pitchFamily="34" charset="-122"/>
@@ -14045,7 +14045,7 @@
             <a:r>
               <a:rPr lang="en-US" sz="850" dirty="0">
                 <a:solidFill>
-                  <a:srgbClr val="D9D9D9"/>
+                  <a:srgbClr val="333333"/>
                 </a:solidFill>
                 <a:latin typeface="Arial" pitchFamily="34" charset="0"/>
                 <a:ea typeface="Arial" pitchFamily="34" charset="-122"/>
@@ -14063,7 +14063,7 @@
             <a:r>
               <a:rPr lang="en-US" sz="850" b="1" dirty="0">
                 <a:solidFill>
-                  <a:srgbClr val="FFFFFF"/>
+                  <a:srgbClr val="000000"/>
                 </a:solidFill>
                 <a:latin typeface="Arial" pitchFamily="34" charset="0"/>
                 <a:ea typeface="Arial" pitchFamily="34" charset="-122"/>
@@ -14080,7 +14080,7 @@
             <a:r>
               <a:rPr lang="en-US" sz="850" dirty="0">
                 <a:solidFill>
-                  <a:srgbClr val="D9D9D9"/>
+                  <a:srgbClr val="333333"/>
                 </a:solidFill>
                 <a:latin typeface="Arial" pitchFamily="34" charset="0"/>
                 <a:ea typeface="Arial" pitchFamily="34" charset="-122"/>
@@ -14098,7 +14098,7 @@
             <a:r>
               <a:rPr lang="en-US" sz="850" b="1" dirty="0">
                 <a:solidFill>
-                  <a:srgbClr val="FFFFFF"/>
+                  <a:srgbClr val="000000"/>
                 </a:solidFill>
                 <a:latin typeface="Arial" pitchFamily="34" charset="0"/>
                 <a:ea typeface="Arial" pitchFamily="34" charset="-122"/>
@@ -14115,7 +14115,7 @@
             <a:r>
               <a:rPr lang="en-US" sz="850" dirty="0">
                 <a:solidFill>
-                  <a:srgbClr val="D9D9D9"/>
+                  <a:srgbClr val="333333"/>
                 </a:solidFill>
                 <a:latin typeface="Arial" pitchFamily="34" charset="0"/>
                 <a:ea typeface="Arial" pitchFamily="34" charset="-122"/>
@@ -14133,7 +14133,7 @@
             <a:r>
               <a:rPr lang="en-US" sz="850" b="1" dirty="0">
                 <a:solidFill>
-                  <a:srgbClr val="FFFFFF"/>
+                  <a:srgbClr val="000000"/>
                 </a:solidFill>
                 <a:latin typeface="Arial" pitchFamily="34" charset="0"/>
                 <a:ea typeface="Arial" pitchFamily="34" charset="-122"/>
@@ -14150,7 +14150,7 @@
             <a:r>
               <a:rPr lang="en-US" sz="850" dirty="0">
                 <a:solidFill>
-                  <a:srgbClr val="D9D9D9"/>
+                  <a:srgbClr val="333333"/>
                 </a:solidFill>
                 <a:latin typeface="Arial" pitchFamily="34" charset="0"/>
                 <a:ea typeface="Arial" pitchFamily="34" charset="-122"/>
@@ -14168,7 +14168,7 @@
             <a:r>
               <a:rPr lang="en-US" sz="850" b="1" dirty="0">
                 <a:solidFill>
-                  <a:srgbClr val="FFFFFF"/>
+                  <a:srgbClr val="000000"/>
                 </a:solidFill>
                 <a:latin typeface="Arial" pitchFamily="34" charset="0"/>
                 <a:ea typeface="Arial" pitchFamily="34" charset="-122"/>
@@ -14185,7 +14185,7 @@
             <a:r>
               <a:rPr lang="en-US" sz="850" dirty="0">
                 <a:solidFill>
-                  <a:srgbClr val="D9D9D9"/>
+                  <a:srgbClr val="333333"/>
                 </a:solidFill>
                 <a:latin typeface="Arial" pitchFamily="34" charset="0"/>
                 <a:ea typeface="Arial" pitchFamily="34" charset="-122"/>
@@ -14224,7 +14224,7 @@
             <a:r>
               <a:rPr lang="en-US" sz="1100" b="1" dirty="0">
                 <a:solidFill>
-                  <a:srgbClr val="FFFFFF"/>
+                  <a:srgbClr val="000000"/>
                 </a:solidFill>
                 <a:latin typeface="Arial" pitchFamily="34" charset="0"/>
                 <a:ea typeface="Arial" pitchFamily="34" charset="-122"/>
@@ -14266,7 +14266,7 @@
             <a:r>
               <a:rPr lang="en-US" sz="850" b="1" dirty="0">
                 <a:solidFill>
-                  <a:srgbClr val="FFFFFF"/>
+                  <a:srgbClr val="000000"/>
                 </a:solidFill>
                 <a:latin typeface="Arial" pitchFamily="34" charset="0"/>
                 <a:ea typeface="Arial" pitchFamily="34" charset="-122"/>
@@ -14284,7 +14284,7 @@
             <a:r>
               <a:rPr lang="en-US" sz="850" dirty="0">
                 <a:solidFill>
-                  <a:srgbClr val="D9D9D9"/>
+                  <a:srgbClr val="333333"/>
                 </a:solidFill>
                 <a:latin typeface="Arial" pitchFamily="34" charset="0"/>
                 <a:ea typeface="Arial" pitchFamily="34" charset="-122"/>
@@ -14302,7 +14302,7 @@
             <a:r>
               <a:rPr lang="en-US" sz="850" b="1" dirty="0">
                 <a:solidFill>
-                  <a:srgbClr val="FFFFFF"/>
+                  <a:srgbClr val="000000"/>
                 </a:solidFill>
                 <a:latin typeface="Arial" pitchFamily="34" charset="0"/>
                 <a:ea typeface="Arial" pitchFamily="34" charset="-122"/>
@@ -14320,7 +14320,7 @@
             <a:r>
               <a:rPr lang="en-US" sz="850" dirty="0">
                 <a:solidFill>
-                  <a:srgbClr val="D9D9D9"/>
+                  <a:srgbClr val="333333"/>
                 </a:solidFill>
                 <a:latin typeface="Arial" pitchFamily="34" charset="0"/>
                 <a:ea typeface="Arial" pitchFamily="34" charset="-122"/>
@@ -14338,7 +14338,7 @@
             <a:r>
               <a:rPr lang="en-US" sz="850" b="1" dirty="0">
                 <a:solidFill>
-                  <a:srgbClr val="FFFFFF"/>
+                  <a:srgbClr val="000000"/>
                 </a:solidFill>
                 <a:latin typeface="Arial" pitchFamily="34" charset="0"/>
                 <a:ea typeface="Arial" pitchFamily="34" charset="-122"/>
@@ -14356,7 +14356,7 @@
             <a:r>
               <a:rPr lang="en-US" sz="850" dirty="0">
                 <a:solidFill>
-                  <a:srgbClr val="D9D9D9"/>
+                  <a:srgbClr val="333333"/>
                 </a:solidFill>
                 <a:latin typeface="Arial" pitchFamily="34" charset="0"/>
                 <a:ea typeface="Arial" pitchFamily="34" charset="-122"/>
@@ -14374,7 +14374,7 @@
             <a:r>
               <a:rPr lang="en-US" sz="850" b="1" dirty="0">
                 <a:solidFill>
-                  <a:srgbClr val="FFFFFF"/>
+                  <a:srgbClr val="000000"/>
                 </a:solidFill>
                 <a:latin typeface="Arial" pitchFamily="34" charset="0"/>
                 <a:ea typeface="Arial" pitchFamily="34" charset="-122"/>
@@ -14392,7 +14392,7 @@
             <a:r>
               <a:rPr lang="en-US" sz="850" dirty="0">
                 <a:solidFill>
-                  <a:srgbClr val="D9D9D9"/>
+                  <a:srgbClr val="333333"/>
                 </a:solidFill>
                 <a:latin typeface="Arial" pitchFamily="34" charset="0"/>
                 <a:ea typeface="Arial" pitchFamily="34" charset="-122"/>
@@ -14410,7 +14410,7 @@
             <a:r>
               <a:rPr lang="en-US" sz="850" b="1" dirty="0">
                 <a:solidFill>
-                  <a:srgbClr val="FFFFFF"/>
+                  <a:srgbClr val="000000"/>
                 </a:solidFill>
                 <a:latin typeface="Arial" pitchFamily="34" charset="0"/>
                 <a:ea typeface="Arial" pitchFamily="34" charset="-122"/>
@@ -14428,7 +14428,7 @@
             <a:r>
               <a:rPr lang="en-US" sz="850" dirty="0">
                 <a:solidFill>
-                  <a:srgbClr val="D9D9D9"/>
+                  <a:srgbClr val="333333"/>
                 </a:solidFill>
                 <a:latin typeface="Arial" pitchFamily="34" charset="0"/>
                 <a:ea typeface="Arial" pitchFamily="34" charset="-122"/>
@@ -14454,7 +14454,7 @@
     <p:bg>
       <p:bgPr>
         <a:solidFill>
-          <a:srgbClr val="0A0A0A"/>
+          <a:srgbClr val="FFFFFF"/>
         </a:solidFill>
       </p:bgPr>
     </p:bg>
@@ -14489,7 +14489,7 @@
           <a:noFill/>
           <a:ln w="12700">
             <a:solidFill>
-              <a:srgbClr val="4A4A4A"/>
+              <a:srgbClr val="E0E0E0"/>
             </a:solidFill>
             <a:prstDash val="solid"/>
           </a:ln>
@@ -14522,7 +14522,7 @@
             <a:r>
               <a:rPr lang="en-US" sz="900" b="1" dirty="0">
                 <a:solidFill>
-                  <a:srgbClr val="9A9A9A"/>
+                  <a:srgbClr val="666666"/>
                 </a:solidFill>
                 <a:latin typeface="Arial" pitchFamily="34" charset="0"/>
                 <a:ea typeface="Arial" pitchFamily="34" charset="-122"/>
@@ -14561,7 +14561,7 @@
             <a:r>
               <a:rPr lang="en-US" sz="900" b="1" dirty="0">
                 <a:solidFill>
-                  <a:srgbClr val="9A9A9A"/>
+                  <a:srgbClr val="666666"/>
                 </a:solidFill>
                 <a:latin typeface="Arial" pitchFamily="34" charset="0"/>
                 <a:ea typeface="Arial" pitchFamily="34" charset="-122"/>
@@ -14600,7 +14600,7 @@
             <a:r>
               <a:rPr lang="en-US" sz="1200" b="1" dirty="0">
                 <a:solidFill>
-                  <a:srgbClr val="9A9A9A"/>
+                  <a:srgbClr val="666666"/>
                 </a:solidFill>
                 <a:latin typeface="Arial" pitchFamily="34" charset="0"/>
                 <a:ea typeface="Arial" pitchFamily="34" charset="-122"/>
@@ -14639,7 +14639,7 @@
             <a:r>
               <a:rPr lang="en-US" sz="1800" b="1" dirty="0">
                 <a:solidFill>
-                  <a:srgbClr val="FFFFFF"/>
+                  <a:srgbClr val="000000"/>
                 </a:solidFill>
                 <a:latin typeface="Arial" pitchFamily="34" charset="0"/>
                 <a:ea typeface="Arial" pitchFamily="34" charset="-122"/>
@@ -14668,7 +14668,7 @@
           <a:noFill/>
           <a:ln w="12700">
             <a:solidFill>
-              <a:srgbClr val="4A4A4A"/>
+              <a:srgbClr val="E0E0E0"/>
             </a:solidFill>
             <a:prstDash val="solid"/>
           </a:ln>
@@ -14701,7 +14701,7 @@
             <a:r>
               <a:rPr lang="en-US" sz="850" b="1" dirty="0">
                 <a:solidFill>
-                  <a:srgbClr val="9A9A9A"/>
+                  <a:srgbClr val="666666"/>
                 </a:solidFill>
                 <a:latin typeface="Arial" pitchFamily="34" charset="0"/>
                 <a:ea typeface="Arial" pitchFamily="34" charset="-122"/>
@@ -14740,7 +14740,7 @@
             <a:r>
               <a:rPr lang="en-US" sz="850" b="1" dirty="0">
                 <a:solidFill>
-                  <a:srgbClr val="9A9A9A"/>
+                  <a:srgbClr val="666666"/>
                 </a:solidFill>
                 <a:latin typeface="Arial" pitchFamily="34" charset="0"/>
                 <a:ea typeface="Arial" pitchFamily="34" charset="-122"/>
@@ -14767,11 +14767,11 @@
             <a:avLst/>
           </a:prstGeom>
           <a:solidFill>
-            <a:srgbClr val="1F1F1F"/>
+            <a:srgbClr val="F8F9FA"/>
           </a:solidFill>
           <a:ln w="12700">
             <a:solidFill>
-              <a:srgbClr val="4A4A4A"/>
+              <a:srgbClr val="E0E0E0"/>
             </a:solidFill>
             <a:prstDash val="solid"/>
           </a:ln>
@@ -14807,7 +14807,7 @@
             <a:r>
               <a:rPr lang="en-US" sz="1000" b="1" dirty="0">
                 <a:solidFill>
-                  <a:srgbClr val="FFFFFF"/>
+                  <a:srgbClr val="000000"/>
                 </a:solidFill>
                 <a:latin typeface="Arial" pitchFamily="34" charset="0"/>
                 <a:ea typeface="Arial" pitchFamily="34" charset="-122"/>
@@ -14825,7 +14825,7 @@
             <a:r>
               <a:rPr lang="en-US" sz="950" b="1" dirty="0">
                 <a:solidFill>
-                  <a:srgbClr val="4EAF51"/>
+                  <a:srgbClr val="2E7D32"/>
                 </a:solidFill>
                 <a:latin typeface="Arial" pitchFamily="34" charset="0"/>
                 <a:ea typeface="Arial" pitchFamily="34" charset="-122"/>
@@ -14843,7 +14843,7 @@
             <a:r>
               <a:rPr lang="en-US" sz="850" dirty="0">
                 <a:solidFill>
-                  <a:srgbClr val="D9D9D9"/>
+                  <a:srgbClr val="333333"/>
                 </a:solidFill>
                 <a:latin typeface="Arial" pitchFamily="34" charset="0"/>
                 <a:ea typeface="Arial" pitchFamily="34" charset="-122"/>
@@ -14861,7 +14861,7 @@
             <a:r>
               <a:rPr lang="en-US" sz="850" dirty="0">
                 <a:solidFill>
-                  <a:srgbClr val="D9D9D9"/>
+                  <a:srgbClr val="333333"/>
                 </a:solidFill>
                 <a:latin typeface="Arial" pitchFamily="34" charset="0"/>
                 <a:ea typeface="Arial" pitchFamily="34" charset="-122"/>
@@ -14879,7 +14879,7 @@
             <a:r>
               <a:rPr lang="en-US" sz="850" dirty="0">
                 <a:solidFill>
-                  <a:srgbClr val="D9D9D9"/>
+                  <a:srgbClr val="333333"/>
                 </a:solidFill>
                 <a:latin typeface="Arial" pitchFamily="34" charset="0"/>
                 <a:ea typeface="Arial" pitchFamily="34" charset="-122"/>
@@ -14897,7 +14897,7 @@
             <a:r>
               <a:rPr lang="en-US" sz="950" b="1" dirty="0">
                 <a:solidFill>
-                  <a:srgbClr val="E05252"/>
+                  <a:srgbClr val="D32F2F"/>
                 </a:solidFill>
                 <a:latin typeface="Arial" pitchFamily="34" charset="0"/>
                 <a:ea typeface="Arial" pitchFamily="34" charset="-122"/>
@@ -14915,7 +14915,7 @@
             <a:r>
               <a:rPr lang="en-US" sz="850" dirty="0">
                 <a:solidFill>
-                  <a:srgbClr val="D9D9D9"/>
+                  <a:srgbClr val="333333"/>
                 </a:solidFill>
                 <a:latin typeface="Arial" pitchFamily="34" charset="0"/>
                 <a:ea typeface="Arial" pitchFamily="34" charset="-122"/>
@@ -14933,7 +14933,7 @@
             <a:r>
               <a:rPr lang="en-US" sz="950" b="1" dirty="0">
                 <a:solidFill>
-                  <a:srgbClr val="4A90E2"/>
+                  <a:srgbClr val="1976D2"/>
                 </a:solidFill>
                 <a:latin typeface="Arial" pitchFamily="34" charset="0"/>
                 <a:ea typeface="Arial" pitchFamily="34" charset="-122"/>
@@ -14951,7 +14951,7 @@
             <a:r>
               <a:rPr lang="en-US" sz="850" dirty="0">
                 <a:solidFill>
-                  <a:srgbClr val="D9D9D9"/>
+                  <a:srgbClr val="333333"/>
                 </a:solidFill>
                 <a:latin typeface="Arial" pitchFamily="34" charset="0"/>
                 <a:ea typeface="Arial" pitchFamily="34" charset="-122"/>
@@ -14977,7 +14977,7 @@
     <p:bg>
       <p:bgPr>
         <a:solidFill>
-          <a:srgbClr val="0A0A0A"/>
+          <a:srgbClr val="FFFFFF"/>
         </a:solidFill>
       </p:bgPr>
     </p:bg>
@@ -15012,7 +15012,7 @@
           <a:noFill/>
           <a:ln w="12700">
             <a:solidFill>
-              <a:srgbClr val="4A4A4A"/>
+              <a:srgbClr val="E0E0E0"/>
             </a:solidFill>
             <a:prstDash val="solid"/>
           </a:ln>
@@ -15045,7 +15045,7 @@
             <a:r>
               <a:rPr lang="en-US" sz="900" b="1" dirty="0">
                 <a:solidFill>
-                  <a:srgbClr val="9A9A9A"/>
+                  <a:srgbClr val="666666"/>
                 </a:solidFill>
                 <a:latin typeface="Arial" pitchFamily="34" charset="0"/>
                 <a:ea typeface="Arial" pitchFamily="34" charset="-122"/>
@@ -15084,7 +15084,7 @@
             <a:r>
               <a:rPr lang="en-US" sz="900" b="1" dirty="0">
                 <a:solidFill>
-                  <a:srgbClr val="9A9A9A"/>
+                  <a:srgbClr val="666666"/>
                 </a:solidFill>
                 <a:latin typeface="Arial" pitchFamily="34" charset="0"/>
                 <a:ea typeface="Arial" pitchFamily="34" charset="-122"/>
@@ -15123,7 +15123,7 @@
             <a:r>
               <a:rPr lang="en-US" sz="1200" b="1" dirty="0">
                 <a:solidFill>
-                  <a:srgbClr val="9A9A9A"/>
+                  <a:srgbClr val="666666"/>
                 </a:solidFill>
                 <a:latin typeface="Arial" pitchFamily="34" charset="0"/>
                 <a:ea typeface="Arial" pitchFamily="34" charset="-122"/>
@@ -15162,7 +15162,7 @@
             <a:r>
               <a:rPr lang="en-US" sz="1800" b="1" dirty="0">
                 <a:solidFill>
-                  <a:srgbClr val="FFFFFF"/>
+                  <a:srgbClr val="000000"/>
                 </a:solidFill>
                 <a:latin typeface="Arial" pitchFamily="34" charset="0"/>
                 <a:ea typeface="Arial" pitchFamily="34" charset="-122"/>
@@ -15191,7 +15191,7 @@
           <a:noFill/>
           <a:ln w="12700">
             <a:solidFill>
-              <a:srgbClr val="4A4A4A"/>
+              <a:srgbClr val="E0E0E0"/>
             </a:solidFill>
             <a:prstDash val="solid"/>
           </a:ln>
@@ -15224,7 +15224,7 @@
             <a:r>
               <a:rPr lang="en-US" sz="850" b="1" dirty="0">
                 <a:solidFill>
-                  <a:srgbClr val="9A9A9A"/>
+                  <a:srgbClr val="666666"/>
                 </a:solidFill>
                 <a:latin typeface="Arial" pitchFamily="34" charset="0"/>
                 <a:ea typeface="Arial" pitchFamily="34" charset="-122"/>
@@ -15263,7 +15263,7 @@
             <a:r>
               <a:rPr lang="en-US" sz="850" b="1" dirty="0">
                 <a:solidFill>
-                  <a:srgbClr val="9A9A9A"/>
+                  <a:srgbClr val="666666"/>
                 </a:solidFill>
                 <a:latin typeface="Arial" pitchFamily="34" charset="0"/>
                 <a:ea typeface="Arial" pitchFamily="34" charset="-122"/>
@@ -15290,11 +15290,11 @@
             <a:avLst/>
           </a:prstGeom>
           <a:solidFill>
-            <a:srgbClr val="1F1F1F"/>
+            <a:srgbClr val="F8F9FA"/>
           </a:solidFill>
           <a:ln w="12700">
             <a:solidFill>
-              <a:srgbClr val="4A4A4A"/>
+              <a:srgbClr val="E0E0E0"/>
             </a:solidFill>
             <a:prstDash val="solid"/>
           </a:ln>
@@ -15330,7 +15330,7 @@
             <a:r>
               <a:rPr lang="en-US" sz="1000" b="1" dirty="0">
                 <a:solidFill>
-                  <a:srgbClr val="FFFFFF"/>
+                  <a:srgbClr val="000000"/>
                 </a:solidFill>
                 <a:latin typeface="Arial" pitchFamily="34" charset="0"/>
                 <a:ea typeface="Arial" pitchFamily="34" charset="-122"/>
@@ -15348,7 +15348,7 @@
             <a:r>
               <a:rPr lang="en-US" sz="950" b="1" dirty="0">
                 <a:solidFill>
-                  <a:srgbClr val="4EAF51"/>
+                  <a:srgbClr val="2E7D32"/>
                 </a:solidFill>
                 <a:latin typeface="Arial" pitchFamily="34" charset="0"/>
                 <a:ea typeface="Arial" pitchFamily="34" charset="-122"/>
@@ -15366,7 +15366,7 @@
             <a:r>
               <a:rPr lang="en-US" sz="850" dirty="0">
                 <a:solidFill>
-                  <a:srgbClr val="D9D9D9"/>
+                  <a:srgbClr val="333333"/>
                 </a:solidFill>
                 <a:latin typeface="Arial" pitchFamily="34" charset="0"/>
                 <a:ea typeface="Arial" pitchFamily="34" charset="-122"/>
@@ -15384,7 +15384,7 @@
             <a:r>
               <a:rPr lang="en-US" sz="850" dirty="0">
                 <a:solidFill>
-                  <a:srgbClr val="D9D9D9"/>
+                  <a:srgbClr val="333333"/>
                 </a:solidFill>
                 <a:latin typeface="Arial" pitchFamily="34" charset="0"/>
                 <a:ea typeface="Arial" pitchFamily="34" charset="-122"/>
@@ -15402,7 +15402,7 @@
             <a:r>
               <a:rPr lang="en-US" sz="850" dirty="0">
                 <a:solidFill>
-                  <a:srgbClr val="D9D9D9"/>
+                  <a:srgbClr val="333333"/>
                 </a:solidFill>
                 <a:latin typeface="Arial" pitchFamily="34" charset="0"/>
                 <a:ea typeface="Arial" pitchFamily="34" charset="-122"/>
@@ -15420,7 +15420,7 @@
             <a:r>
               <a:rPr lang="en-US" sz="850" dirty="0">
                 <a:solidFill>
-                  <a:srgbClr val="D9D9D9"/>
+                  <a:srgbClr val="333333"/>
                 </a:solidFill>
                 <a:latin typeface="Arial" pitchFamily="34" charset="0"/>
                 <a:ea typeface="Arial" pitchFamily="34" charset="-122"/>
@@ -15438,7 +15438,7 @@
             <a:r>
               <a:rPr lang="en-US" sz="950" b="1" dirty="0">
                 <a:solidFill>
-                  <a:srgbClr val="4A90E2"/>
+                  <a:srgbClr val="1976D2"/>
                 </a:solidFill>
                 <a:latin typeface="Arial" pitchFamily="34" charset="0"/>
                 <a:ea typeface="Arial" pitchFamily="34" charset="-122"/>
@@ -15456,7 +15456,7 @@
             <a:r>
               <a:rPr lang="en-US" sz="850" dirty="0">
                 <a:solidFill>
-                  <a:srgbClr val="D9D9D9"/>
+                  <a:srgbClr val="333333"/>
                 </a:solidFill>
                 <a:latin typeface="Arial" pitchFamily="34" charset="0"/>
                 <a:ea typeface="Arial" pitchFamily="34" charset="-122"/>
@@ -15474,7 +15474,7 @@
             <a:r>
               <a:rPr lang="en-US" sz="950" b="1" dirty="0">
                 <a:solidFill>
-                  <a:srgbClr val="E05252"/>
+                  <a:srgbClr val="D32F2F"/>
                 </a:solidFill>
                 <a:latin typeface="Arial" pitchFamily="34" charset="0"/>
                 <a:ea typeface="Arial" pitchFamily="34" charset="-122"/>
@@ -15492,7 +15492,7 @@
             <a:r>
               <a:rPr lang="en-US" sz="850" dirty="0">
                 <a:solidFill>
-                  <a:srgbClr val="D9D9D9"/>
+                  <a:srgbClr val="333333"/>
                 </a:solidFill>
                 <a:latin typeface="Arial" pitchFamily="34" charset="0"/>
                 <a:ea typeface="Arial" pitchFamily="34" charset="-122"/>
@@ -15518,7 +15518,7 @@
     <p:bg>
       <p:bgPr>
         <a:solidFill>
-          <a:srgbClr val="0A0A0A"/>
+          <a:srgbClr val="FFFFFF"/>
         </a:solidFill>
       </p:bgPr>
     </p:bg>
@@ -15553,7 +15553,7 @@
           <a:noFill/>
           <a:ln w="12700">
             <a:solidFill>
-              <a:srgbClr val="4A4A4A"/>
+              <a:srgbClr val="E0E0E0"/>
             </a:solidFill>
             <a:prstDash val="solid"/>
           </a:ln>
@@ -15586,7 +15586,7 @@
             <a:r>
               <a:rPr lang="en-US" sz="900" b="1" dirty="0">
                 <a:solidFill>
-                  <a:srgbClr val="9A9A9A"/>
+                  <a:srgbClr val="666666"/>
                 </a:solidFill>
                 <a:latin typeface="Arial" pitchFamily="34" charset="0"/>
                 <a:ea typeface="Arial" pitchFamily="34" charset="-122"/>
@@ -15625,7 +15625,7 @@
             <a:r>
               <a:rPr lang="en-US" sz="900" b="1" dirty="0">
                 <a:solidFill>
-                  <a:srgbClr val="9A9A9A"/>
+                  <a:srgbClr val="666666"/>
                 </a:solidFill>
                 <a:latin typeface="Arial" pitchFamily="34" charset="0"/>
                 <a:ea typeface="Arial" pitchFamily="34" charset="-122"/>
@@ -15664,7 +15664,7 @@
             <a:r>
               <a:rPr lang="en-US" sz="1200" b="1" dirty="0">
                 <a:solidFill>
-                  <a:srgbClr val="9A9A9A"/>
+                  <a:srgbClr val="666666"/>
                 </a:solidFill>
                 <a:latin typeface="Arial" pitchFamily="34" charset="0"/>
                 <a:ea typeface="Arial" pitchFamily="34" charset="-122"/>
@@ -15703,7 +15703,7 @@
             <a:r>
               <a:rPr lang="en-US" sz="1800" b="1" dirty="0">
                 <a:solidFill>
-                  <a:srgbClr val="FFFFFF"/>
+                  <a:srgbClr val="000000"/>
                 </a:solidFill>
                 <a:latin typeface="Arial" pitchFamily="34" charset="0"/>
                 <a:ea typeface="Arial" pitchFamily="34" charset="-122"/>
@@ -15732,7 +15732,7 @@
           <a:noFill/>
           <a:ln w="12700">
             <a:solidFill>
-              <a:srgbClr val="4A4A4A"/>
+              <a:srgbClr val="E0E0E0"/>
             </a:solidFill>
             <a:prstDash val="solid"/>
           </a:ln>
@@ -15765,7 +15765,7 @@
             <a:r>
               <a:rPr lang="en-US" sz="850" b="1" dirty="0">
                 <a:solidFill>
-                  <a:srgbClr val="9A9A9A"/>
+                  <a:srgbClr val="666666"/>
                 </a:solidFill>
                 <a:latin typeface="Arial" pitchFamily="34" charset="0"/>
                 <a:ea typeface="Arial" pitchFamily="34" charset="-122"/>
@@ -15804,7 +15804,7 @@
             <a:r>
               <a:rPr lang="en-US" sz="850" b="1" dirty="0">
                 <a:solidFill>
-                  <a:srgbClr val="9A9A9A"/>
+                  <a:srgbClr val="666666"/>
                 </a:solidFill>
                 <a:latin typeface="Arial" pitchFamily="34" charset="0"/>
                 <a:ea typeface="Arial" pitchFamily="34" charset="-122"/>
@@ -15831,11 +15831,11 @@
             <a:avLst/>
           </a:prstGeom>
           <a:solidFill>
-            <a:srgbClr val="1F1F1F"/>
+            <a:srgbClr val="F8F9FA"/>
           </a:solidFill>
           <a:ln w="12700">
             <a:solidFill>
-              <a:srgbClr val="4A4A4A"/>
+              <a:srgbClr val="E0E0E0"/>
             </a:solidFill>
             <a:prstDash val="solid"/>
           </a:ln>
@@ -15856,11 +15856,11 @@
             <a:avLst/>
           </a:prstGeom>
           <a:solidFill>
-            <a:srgbClr val="1F1F1F"/>
+            <a:srgbClr val="F8F9FA"/>
           </a:solidFill>
           <a:ln w="12700">
             <a:solidFill>
-              <a:srgbClr val="4A4A4A"/>
+              <a:srgbClr val="E0E0E0"/>
             </a:solidFill>
             <a:prstDash val="solid"/>
           </a:ln>
@@ -15893,7 +15893,7 @@
             <a:r>
               <a:rPr lang="en-US" sz="1100" b="1" dirty="0">
                 <a:solidFill>
-                  <a:srgbClr val="4EAF51"/>
+                  <a:srgbClr val="2E7D32"/>
                 </a:solidFill>
                 <a:latin typeface="Arial" pitchFamily="34" charset="0"/>
                 <a:ea typeface="Arial" pitchFamily="34" charset="-122"/>
@@ -15935,7 +15935,7 @@
             <a:r>
               <a:rPr lang="en-US" sz="850" b="1" dirty="0">
                 <a:solidFill>
-                  <a:srgbClr val="FFFFFF"/>
+                  <a:srgbClr val="000000"/>
                 </a:solidFill>
                 <a:latin typeface="Arial" pitchFamily="34" charset="0"/>
                 <a:ea typeface="Arial" pitchFamily="34" charset="-122"/>
@@ -15953,7 +15953,7 @@
             <a:r>
               <a:rPr lang="en-US" sz="850" dirty="0">
                 <a:solidFill>
-                  <a:srgbClr val="D9D9D9"/>
+                  <a:srgbClr val="333333"/>
                 </a:solidFill>
                 <a:latin typeface="Arial" pitchFamily="34" charset="0"/>
                 <a:ea typeface="Arial" pitchFamily="34" charset="-122"/>
@@ -15971,7 +15971,7 @@
             <a:r>
               <a:rPr lang="en-US" sz="850" b="1" dirty="0">
                 <a:solidFill>
-                  <a:srgbClr val="FFFFFF"/>
+                  <a:srgbClr val="000000"/>
                 </a:solidFill>
                 <a:latin typeface="Arial" pitchFamily="34" charset="0"/>
                 <a:ea typeface="Arial" pitchFamily="34" charset="-122"/>
@@ -15989,7 +15989,7 @@
             <a:r>
               <a:rPr lang="en-US" sz="850" dirty="0">
                 <a:solidFill>
-                  <a:srgbClr val="D9D9D9"/>
+                  <a:srgbClr val="333333"/>
                 </a:solidFill>
                 <a:latin typeface="Arial" pitchFamily="34" charset="0"/>
                 <a:ea typeface="Arial" pitchFamily="34" charset="-122"/>
@@ -16007,7 +16007,7 @@
             <a:r>
               <a:rPr lang="en-US" sz="850" b="1" dirty="0">
                 <a:solidFill>
-                  <a:srgbClr val="FFFFFF"/>
+                  <a:srgbClr val="000000"/>
                 </a:solidFill>
                 <a:latin typeface="Arial" pitchFamily="34" charset="0"/>
                 <a:ea typeface="Arial" pitchFamily="34" charset="-122"/>
@@ -16025,7 +16025,7 @@
             <a:r>
               <a:rPr lang="en-US" sz="850" dirty="0">
                 <a:solidFill>
-                  <a:srgbClr val="D9D9D9"/>
+                  <a:srgbClr val="333333"/>
                 </a:solidFill>
                 <a:latin typeface="Arial" pitchFamily="34" charset="0"/>
                 <a:ea typeface="Arial" pitchFamily="34" charset="-122"/>
@@ -16064,7 +16064,7 @@
             <a:r>
               <a:rPr lang="en-US" sz="1100" b="1" dirty="0">
                 <a:solidFill>
-                  <a:srgbClr val="E05252"/>
+                  <a:srgbClr val="D32F2F"/>
                 </a:solidFill>
                 <a:latin typeface="Arial" pitchFamily="34" charset="0"/>
                 <a:ea typeface="Arial" pitchFamily="34" charset="-122"/>
@@ -16106,7 +16106,7 @@
             <a:r>
               <a:rPr lang="en-US" sz="850" b="1" dirty="0">
                 <a:solidFill>
-                  <a:srgbClr val="FFFFFF"/>
+                  <a:srgbClr val="000000"/>
                 </a:solidFill>
                 <a:latin typeface="Arial" pitchFamily="34" charset="0"/>
                 <a:ea typeface="Arial" pitchFamily="34" charset="-122"/>
@@ -16124,7 +16124,7 @@
             <a:r>
               <a:rPr lang="en-US" sz="850" dirty="0">
                 <a:solidFill>
-                  <a:srgbClr val="D9D9D9"/>
+                  <a:srgbClr val="333333"/>
                 </a:solidFill>
                 <a:latin typeface="Arial" pitchFamily="34" charset="0"/>
                 <a:ea typeface="Arial" pitchFamily="34" charset="-122"/>
@@ -16142,7 +16142,7 @@
             <a:r>
               <a:rPr lang="en-US" sz="850" b="1" dirty="0">
                 <a:solidFill>
-                  <a:srgbClr val="FFFFFF"/>
+                  <a:srgbClr val="000000"/>
                 </a:solidFill>
                 <a:latin typeface="Arial" pitchFamily="34" charset="0"/>
                 <a:ea typeface="Arial" pitchFamily="34" charset="-122"/>
@@ -16160,7 +16160,7 @@
             <a:r>
               <a:rPr lang="en-US" sz="850" dirty="0">
                 <a:solidFill>
-                  <a:srgbClr val="D9D9D9"/>
+                  <a:srgbClr val="333333"/>
                 </a:solidFill>
                 <a:latin typeface="Arial" pitchFamily="34" charset="0"/>
                 <a:ea typeface="Arial" pitchFamily="34" charset="-122"/>
@@ -16178,7 +16178,7 @@
             <a:r>
               <a:rPr lang="en-US" sz="850" b="1" dirty="0">
                 <a:solidFill>
-                  <a:srgbClr val="FFFFFF"/>
+                  <a:srgbClr val="000000"/>
                 </a:solidFill>
                 <a:latin typeface="Arial" pitchFamily="34" charset="0"/>
                 <a:ea typeface="Arial" pitchFamily="34" charset="-122"/>
@@ -16196,7 +16196,7 @@
             <a:r>
               <a:rPr lang="en-US" sz="850" dirty="0">
                 <a:solidFill>
-                  <a:srgbClr val="D9D9D9"/>
+                  <a:srgbClr val="333333"/>
                 </a:solidFill>
                 <a:latin typeface="Arial" pitchFamily="34" charset="0"/>
                 <a:ea typeface="Arial" pitchFamily="34" charset="-122"/>
@@ -16222,7 +16222,7 @@
     <p:bg>
       <p:bgPr>
         <a:solidFill>
-          <a:srgbClr val="0A0A0A"/>
+          <a:srgbClr val="FFFFFF"/>
         </a:solidFill>
       </p:bgPr>
     </p:bg>
@@ -16257,7 +16257,7 @@
           <a:noFill/>
           <a:ln w="12700">
             <a:solidFill>
-              <a:srgbClr val="4A4A4A"/>
+              <a:srgbClr val="E0E0E0"/>
             </a:solidFill>
             <a:prstDash val="solid"/>
           </a:ln>
@@ -16290,7 +16290,7 @@
             <a:r>
               <a:rPr lang="en-US" sz="900" b="1" dirty="0">
                 <a:solidFill>
-                  <a:srgbClr val="9A9A9A"/>
+                  <a:srgbClr val="666666"/>
                 </a:solidFill>
                 <a:latin typeface="Arial" pitchFamily="34" charset="0"/>
                 <a:ea typeface="Arial" pitchFamily="34" charset="-122"/>
@@ -16329,7 +16329,7 @@
             <a:r>
               <a:rPr lang="en-US" sz="900" b="1" dirty="0">
                 <a:solidFill>
-                  <a:srgbClr val="9A9A9A"/>
+                  <a:srgbClr val="666666"/>
                 </a:solidFill>
                 <a:latin typeface="Arial" pitchFamily="34" charset="0"/>
                 <a:ea typeface="Arial" pitchFamily="34" charset="-122"/>
@@ -16368,7 +16368,7 @@
             <a:r>
               <a:rPr lang="en-US" sz="1200" b="1" dirty="0">
                 <a:solidFill>
-                  <a:srgbClr val="9A9A9A"/>
+                  <a:srgbClr val="666666"/>
                 </a:solidFill>
                 <a:latin typeface="Arial" pitchFamily="34" charset="0"/>
                 <a:ea typeface="Arial" pitchFamily="34" charset="-122"/>
@@ -16407,7 +16407,7 @@
             <a:r>
               <a:rPr lang="en-US" sz="1800" b="1" dirty="0">
                 <a:solidFill>
-                  <a:srgbClr val="FFFFFF"/>
+                  <a:srgbClr val="000000"/>
                 </a:solidFill>
                 <a:latin typeface="Arial" pitchFamily="34" charset="0"/>
                 <a:ea typeface="Arial" pitchFamily="34" charset="-122"/>
@@ -16436,7 +16436,7 @@
           <a:noFill/>
           <a:ln w="12700">
             <a:solidFill>
-              <a:srgbClr val="4A4A4A"/>
+              <a:srgbClr val="E0E0E0"/>
             </a:solidFill>
             <a:prstDash val="solid"/>
           </a:ln>
@@ -16469,7 +16469,7 @@
             <a:r>
               <a:rPr lang="en-US" sz="850" b="1" dirty="0">
                 <a:solidFill>
-                  <a:srgbClr val="9A9A9A"/>
+                  <a:srgbClr val="666666"/>
                 </a:solidFill>
                 <a:latin typeface="Arial" pitchFamily="34" charset="0"/>
                 <a:ea typeface="Arial" pitchFamily="34" charset="-122"/>
@@ -16508,7 +16508,7 @@
             <a:r>
               <a:rPr lang="en-US" sz="850" b="1" dirty="0">
                 <a:solidFill>
-                  <a:srgbClr val="9A9A9A"/>
+                  <a:srgbClr val="666666"/>
                 </a:solidFill>
                 <a:latin typeface="Arial" pitchFamily="34" charset="0"/>
                 <a:ea typeface="Arial" pitchFamily="34" charset="-122"/>
@@ -16535,11 +16535,11 @@
             <a:avLst/>
           </a:prstGeom>
           <a:solidFill>
-            <a:srgbClr val="1F1F1F"/>
+            <a:srgbClr val="F8F9FA"/>
           </a:solidFill>
           <a:ln w="12700">
             <a:solidFill>
-              <a:srgbClr val="4A4A4A"/>
+              <a:srgbClr val="E0E0E0"/>
             </a:solidFill>
             <a:prstDash val="solid"/>
           </a:ln>
@@ -16560,11 +16560,11 @@
             <a:avLst/>
           </a:prstGeom>
           <a:solidFill>
-            <a:srgbClr val="1F1F1F"/>
+            <a:srgbClr val="F8F9FA"/>
           </a:solidFill>
           <a:ln w="12700">
             <a:solidFill>
-              <a:srgbClr val="4A4A4A"/>
+              <a:srgbClr val="E0E0E0"/>
             </a:solidFill>
             <a:prstDash val="solid"/>
           </a:ln>
@@ -16597,7 +16597,7 @@
             <a:r>
               <a:rPr lang="en-US" sz="1100" b="1" dirty="0">
                 <a:solidFill>
-                  <a:srgbClr val="4EAF51"/>
+                  <a:srgbClr val="2E7D32"/>
                 </a:solidFill>
                 <a:latin typeface="Arial" pitchFamily="34" charset="0"/>
                 <a:ea typeface="Arial" pitchFamily="34" charset="-122"/>
@@ -16639,7 +16639,7 @@
             <a:r>
               <a:rPr lang="en-US" sz="850" b="1" dirty="0">
                 <a:solidFill>
-                  <a:srgbClr val="FFFFFF"/>
+                  <a:srgbClr val="000000"/>
                 </a:solidFill>
                 <a:latin typeface="Arial" pitchFamily="34" charset="0"/>
                 <a:ea typeface="Arial" pitchFamily="34" charset="-122"/>
@@ -16657,7 +16657,7 @@
             <a:r>
               <a:rPr lang="en-US" sz="850" dirty="0">
                 <a:solidFill>
-                  <a:srgbClr val="D9D9D9"/>
+                  <a:srgbClr val="333333"/>
                 </a:solidFill>
                 <a:latin typeface="Arial" pitchFamily="34" charset="0"/>
                 <a:ea typeface="Arial" pitchFamily="34" charset="-122"/>
@@ -16675,7 +16675,7 @@
             <a:r>
               <a:rPr lang="en-US" sz="850" b="1" dirty="0">
                 <a:solidFill>
-                  <a:srgbClr val="FFFFFF"/>
+                  <a:srgbClr val="000000"/>
                 </a:solidFill>
                 <a:latin typeface="Arial" pitchFamily="34" charset="0"/>
                 <a:ea typeface="Arial" pitchFamily="34" charset="-122"/>
@@ -16693,7 +16693,7 @@
             <a:r>
               <a:rPr lang="en-US" sz="850" dirty="0">
                 <a:solidFill>
-                  <a:srgbClr val="D9D9D9"/>
+                  <a:srgbClr val="333333"/>
                 </a:solidFill>
                 <a:latin typeface="Arial" pitchFamily="34" charset="0"/>
                 <a:ea typeface="Arial" pitchFamily="34" charset="-122"/>
@@ -16711,7 +16711,7 @@
             <a:r>
               <a:rPr lang="en-US" sz="850" b="1" dirty="0">
                 <a:solidFill>
-                  <a:srgbClr val="FFFFFF"/>
+                  <a:srgbClr val="000000"/>
                 </a:solidFill>
                 <a:latin typeface="Arial" pitchFamily="34" charset="0"/>
                 <a:ea typeface="Arial" pitchFamily="34" charset="-122"/>
@@ -16729,7 +16729,7 @@
             <a:r>
               <a:rPr lang="en-US" sz="850" dirty="0">
                 <a:solidFill>
-                  <a:srgbClr val="D9D9D9"/>
+                  <a:srgbClr val="333333"/>
                 </a:solidFill>
                 <a:latin typeface="Arial" pitchFamily="34" charset="0"/>
                 <a:ea typeface="Arial" pitchFamily="34" charset="-122"/>
@@ -16768,7 +16768,7 @@
             <a:r>
               <a:rPr lang="en-US" sz="1100" b="1" dirty="0">
                 <a:solidFill>
-                  <a:srgbClr val="E05252"/>
+                  <a:srgbClr val="D32F2F"/>
                 </a:solidFill>
                 <a:latin typeface="Arial" pitchFamily="34" charset="0"/>
                 <a:ea typeface="Arial" pitchFamily="34" charset="-122"/>
@@ -16810,7 +16810,7 @@
             <a:r>
               <a:rPr lang="en-US" sz="850" b="1" dirty="0">
                 <a:solidFill>
-                  <a:srgbClr val="FFFFFF"/>
+                  <a:srgbClr val="000000"/>
                 </a:solidFill>
                 <a:latin typeface="Arial" pitchFamily="34" charset="0"/>
                 <a:ea typeface="Arial" pitchFamily="34" charset="-122"/>
@@ -16828,7 +16828,7 @@
             <a:r>
               <a:rPr lang="en-US" sz="850" dirty="0">
                 <a:solidFill>
-                  <a:srgbClr val="D9D9D9"/>
+                  <a:srgbClr val="333333"/>
                 </a:solidFill>
                 <a:latin typeface="Arial" pitchFamily="34" charset="0"/>
                 <a:ea typeface="Arial" pitchFamily="34" charset="-122"/>
@@ -16846,7 +16846,7 @@
             <a:r>
               <a:rPr lang="en-US" sz="850" b="1" dirty="0">
                 <a:solidFill>
-                  <a:srgbClr val="FFFFFF"/>
+                  <a:srgbClr val="000000"/>
                 </a:solidFill>
                 <a:latin typeface="Arial" pitchFamily="34" charset="0"/>
                 <a:ea typeface="Arial" pitchFamily="34" charset="-122"/>
@@ -16864,7 +16864,7 @@
             <a:r>
               <a:rPr lang="en-US" sz="850" dirty="0">
                 <a:solidFill>
-                  <a:srgbClr val="D9D9D9"/>
+                  <a:srgbClr val="333333"/>
                 </a:solidFill>
                 <a:latin typeface="Arial" pitchFamily="34" charset="0"/>
                 <a:ea typeface="Arial" pitchFamily="34" charset="-122"/>
@@ -16882,7 +16882,7 @@
             <a:r>
               <a:rPr lang="en-US" sz="850" b="1" dirty="0">
                 <a:solidFill>
-                  <a:srgbClr val="FFFFFF"/>
+                  <a:srgbClr val="000000"/>
                 </a:solidFill>
                 <a:latin typeface="Arial" pitchFamily="34" charset="0"/>
                 <a:ea typeface="Arial" pitchFamily="34" charset="-122"/>
@@ -16900,7 +16900,7 @@
             <a:r>
               <a:rPr lang="en-US" sz="850" dirty="0">
                 <a:solidFill>
-                  <a:srgbClr val="D9D9D9"/>
+                  <a:srgbClr val="333333"/>
                 </a:solidFill>
                 <a:latin typeface="Arial" pitchFamily="34" charset="0"/>
                 <a:ea typeface="Arial" pitchFamily="34" charset="-122"/>
@@ -16926,7 +16926,7 @@
     <p:bg>
       <p:bgPr>
         <a:solidFill>
-          <a:srgbClr val="0A0A0A"/>
+          <a:srgbClr val="FFFFFF"/>
         </a:solidFill>
       </p:bgPr>
     </p:bg>
@@ -16961,7 +16961,7 @@
           <a:noFill/>
           <a:ln w="12700">
             <a:solidFill>
-              <a:srgbClr val="4A4A4A"/>
+              <a:srgbClr val="E0E0E0"/>
             </a:solidFill>
             <a:prstDash val="solid"/>
           </a:ln>
@@ -16994,7 +16994,7 @@
             <a:r>
               <a:rPr lang="en-US" sz="900" b="1" dirty="0">
                 <a:solidFill>
-                  <a:srgbClr val="9A9A9A"/>
+                  <a:srgbClr val="666666"/>
                 </a:solidFill>
                 <a:latin typeface="Arial" pitchFamily="34" charset="0"/>
                 <a:ea typeface="Arial" pitchFamily="34" charset="-122"/>
@@ -17033,7 +17033,7 @@
             <a:r>
               <a:rPr lang="en-US" sz="900" b="1" dirty="0">
                 <a:solidFill>
-                  <a:srgbClr val="9A9A9A"/>
+                  <a:srgbClr val="666666"/>
                 </a:solidFill>
                 <a:latin typeface="Arial" pitchFamily="34" charset="0"/>
                 <a:ea typeface="Arial" pitchFamily="34" charset="-122"/>
@@ -17072,7 +17072,7 @@
             <a:r>
               <a:rPr lang="en-US" sz="1200" b="1" dirty="0">
                 <a:solidFill>
-                  <a:srgbClr val="9A9A9A"/>
+                  <a:srgbClr val="666666"/>
                 </a:solidFill>
                 <a:latin typeface="Arial" pitchFamily="34" charset="0"/>
                 <a:ea typeface="Arial" pitchFamily="34" charset="-122"/>
@@ -17111,7 +17111,7 @@
             <a:r>
               <a:rPr lang="en-US" sz="1800" b="1" dirty="0">
                 <a:solidFill>
-                  <a:srgbClr val="FFFFFF"/>
+                  <a:srgbClr val="000000"/>
                 </a:solidFill>
                 <a:latin typeface="Arial" pitchFamily="34" charset="0"/>
                 <a:ea typeface="Arial" pitchFamily="34" charset="-122"/>
@@ -17140,7 +17140,7 @@
           <a:noFill/>
           <a:ln w="12700">
             <a:solidFill>
-              <a:srgbClr val="4A4A4A"/>
+              <a:srgbClr val="E0E0E0"/>
             </a:solidFill>
             <a:prstDash val="solid"/>
           </a:ln>
@@ -17173,7 +17173,7 @@
             <a:r>
               <a:rPr lang="en-US" sz="850" b="1" dirty="0">
                 <a:solidFill>
-                  <a:srgbClr val="9A9A9A"/>
+                  <a:srgbClr val="666666"/>
                 </a:solidFill>
                 <a:latin typeface="Arial" pitchFamily="34" charset="0"/>
                 <a:ea typeface="Arial" pitchFamily="34" charset="-122"/>
@@ -17212,7 +17212,7 @@
             <a:r>
               <a:rPr lang="en-US" sz="850" b="1" dirty="0">
                 <a:solidFill>
-                  <a:srgbClr val="9A9A9A"/>
+                  <a:srgbClr val="666666"/>
                 </a:solidFill>
                 <a:latin typeface="Arial" pitchFamily="34" charset="0"/>
                 <a:ea typeface="Arial" pitchFamily="34" charset="-122"/>
@@ -17239,11 +17239,11 @@
             <a:avLst/>
           </a:prstGeom>
           <a:solidFill>
-            <a:srgbClr val="1F1F1F"/>
+            <a:srgbClr val="F8F9FA"/>
           </a:solidFill>
           <a:ln w="12700">
             <a:solidFill>
-              <a:srgbClr val="4A4A4A"/>
+              <a:srgbClr val="E0E0E0"/>
             </a:solidFill>
             <a:prstDash val="solid"/>
           </a:ln>
@@ -17264,11 +17264,11 @@
             <a:avLst/>
           </a:prstGeom>
           <a:solidFill>
-            <a:srgbClr val="1F1F1F"/>
+            <a:srgbClr val="F8F9FA"/>
           </a:solidFill>
           <a:ln w="12700">
             <a:solidFill>
-              <a:srgbClr val="4A4A4A"/>
+              <a:srgbClr val="E0E0E0"/>
             </a:solidFill>
             <a:prstDash val="solid"/>
           </a:ln>
@@ -17301,7 +17301,7 @@
             <a:r>
               <a:rPr lang="en-US" sz="1100" b="1" dirty="0">
                 <a:solidFill>
-                  <a:srgbClr val="FFFFFF"/>
+                  <a:srgbClr val="000000"/>
                 </a:solidFill>
                 <a:latin typeface="Arial" pitchFamily="34" charset="0"/>
                 <a:ea typeface="Arial" pitchFamily="34" charset="-122"/>
@@ -17343,7 +17343,7 @@
             <a:r>
               <a:rPr lang="en-US" sz="820" b="1" dirty="0">
                 <a:solidFill>
-                  <a:srgbClr val="4A90E2"/>
+                  <a:srgbClr val="1976D2"/>
                 </a:solidFill>
                 <a:latin typeface="Courier New" pitchFamily="34" charset="0"/>
                 <a:ea typeface="Courier New" pitchFamily="34" charset="-122"/>
@@ -17361,7 +17361,7 @@
             <a:r>
               <a:rPr lang="en-US" sz="820" dirty="0">
                 <a:solidFill>
-                  <a:srgbClr val="D9D9D9"/>
+                  <a:srgbClr val="333333"/>
                 </a:solidFill>
                 <a:latin typeface="Courier New" pitchFamily="34" charset="0"/>
                 <a:ea typeface="Courier New" pitchFamily="34" charset="-122"/>
@@ -17379,7 +17379,7 @@
             <a:r>
               <a:rPr lang="en-US" sz="820" dirty="0">
                 <a:solidFill>
-                  <a:srgbClr val="D9D9D9"/>
+                  <a:srgbClr val="333333"/>
                 </a:solidFill>
                 <a:latin typeface="Courier New" pitchFamily="34" charset="0"/>
                 <a:ea typeface="Courier New" pitchFamily="34" charset="-122"/>
@@ -17397,7 +17397,7 @@
             <a:r>
               <a:rPr lang="en-US" sz="820" dirty="0">
                 <a:solidFill>
-                  <a:srgbClr val="D9D9D9"/>
+                  <a:srgbClr val="333333"/>
                 </a:solidFill>
                 <a:latin typeface="Courier New" pitchFamily="34" charset="0"/>
                 <a:ea typeface="Courier New" pitchFamily="34" charset="-122"/>
@@ -17415,7 +17415,7 @@
             <a:r>
               <a:rPr lang="en-US" sz="820" dirty="0">
                 <a:solidFill>
-                  <a:srgbClr val="D9D9D9"/>
+                  <a:srgbClr val="333333"/>
                 </a:solidFill>
                 <a:latin typeface="Courier New" pitchFamily="34" charset="0"/>
                 <a:ea typeface="Courier New" pitchFamily="34" charset="-122"/>
@@ -17433,7 +17433,7 @@
             <a:r>
               <a:rPr lang="en-US" sz="820" dirty="0">
                 <a:solidFill>
-                  <a:srgbClr val="D9D9D9"/>
+                  <a:srgbClr val="333333"/>
                 </a:solidFill>
                 <a:latin typeface="Courier New" pitchFamily="34" charset="0"/>
                 <a:ea typeface="Courier New" pitchFamily="34" charset="-122"/>
@@ -17451,7 +17451,7 @@
             <a:r>
               <a:rPr lang="en-US" sz="820" dirty="0">
                 <a:solidFill>
-                  <a:srgbClr val="D9D9D9"/>
+                  <a:srgbClr val="333333"/>
                 </a:solidFill>
                 <a:latin typeface="Courier New" pitchFamily="34" charset="0"/>
                 <a:ea typeface="Courier New" pitchFamily="34" charset="-122"/>
@@ -17469,7 +17469,7 @@
             <a:r>
               <a:rPr lang="en-US" sz="820" b="1" dirty="0">
                 <a:solidFill>
-                  <a:srgbClr val="FFFFFF"/>
+                  <a:srgbClr val="000000"/>
                 </a:solidFill>
                 <a:latin typeface="Arial" pitchFamily="34" charset="0"/>
                 <a:ea typeface="Arial" pitchFamily="34" charset="-122"/>
@@ -17508,7 +17508,7 @@
             <a:r>
               <a:rPr lang="en-US" sz="1100" b="1" dirty="0">
                 <a:solidFill>
-                  <a:srgbClr val="FFFFFF"/>
+                  <a:srgbClr val="000000"/>
                 </a:solidFill>
                 <a:latin typeface="Arial" pitchFamily="34" charset="0"/>
                 <a:ea typeface="Arial" pitchFamily="34" charset="-122"/>
@@ -17550,7 +17550,7 @@
             <a:r>
               <a:rPr lang="en-US" sz="850" b="1" dirty="0">
                 <a:solidFill>
-                  <a:srgbClr val="4EAF51"/>
+                  <a:srgbClr val="2E7D32"/>
                 </a:solidFill>
                 <a:latin typeface="Arial" pitchFamily="34" charset="0"/>
                 <a:ea typeface="Arial" pitchFamily="34" charset="-122"/>
@@ -17568,7 +17568,7 @@
             <a:r>
               <a:rPr lang="en-US" sz="850" dirty="0">
                 <a:solidFill>
-                  <a:srgbClr val="D9D9D9"/>
+                  <a:srgbClr val="333333"/>
                 </a:solidFill>
                 <a:latin typeface="Arial" pitchFamily="34" charset="0"/>
                 <a:ea typeface="Arial" pitchFamily="34" charset="-122"/>
@@ -17586,7 +17586,7 @@
             <a:r>
               <a:rPr lang="en-US" sz="850" b="1" dirty="0">
                 <a:solidFill>
-                  <a:srgbClr val="FFFFFF"/>
+                  <a:srgbClr val="000000"/>
                 </a:solidFill>
                 <a:latin typeface="Arial" pitchFamily="34" charset="0"/>
                 <a:ea typeface="Arial" pitchFamily="34" charset="-122"/>
@@ -17604,7 +17604,7 @@
             <a:r>
               <a:rPr lang="en-US" sz="850" dirty="0">
                 <a:solidFill>
-                  <a:srgbClr val="D9D9D9"/>
+                  <a:srgbClr val="333333"/>
                 </a:solidFill>
                 <a:latin typeface="Arial" pitchFamily="34" charset="0"/>
                 <a:ea typeface="Arial" pitchFamily="34" charset="-122"/>
@@ -17622,7 +17622,7 @@
             <a:r>
               <a:rPr lang="en-US" sz="850" b="1" dirty="0">
                 <a:solidFill>
-                  <a:srgbClr val="FFFFFF"/>
+                  <a:srgbClr val="000000"/>
                 </a:solidFill>
                 <a:latin typeface="Arial" pitchFamily="34" charset="0"/>
                 <a:ea typeface="Arial" pitchFamily="34" charset="-122"/>
@@ -17640,7 +17640,7 @@
             <a:r>
               <a:rPr lang="en-US" sz="850" dirty="0">
                 <a:solidFill>
-                  <a:srgbClr val="D9D9D9"/>
+                  <a:srgbClr val="333333"/>
                 </a:solidFill>
                 <a:latin typeface="Arial" pitchFamily="34" charset="0"/>
                 <a:ea typeface="Arial" pitchFamily="34" charset="-122"/>
@@ -17658,7 +17658,7 @@
             <a:r>
               <a:rPr lang="en-US" sz="850" b="1" dirty="0">
                 <a:solidFill>
-                  <a:srgbClr val="4EAF51"/>
+                  <a:srgbClr val="2E7D32"/>
                 </a:solidFill>
                 <a:latin typeface="Arial" pitchFamily="34" charset="0"/>
                 <a:ea typeface="Arial" pitchFamily="34" charset="-122"/>
@@ -17675,7 +17675,7 @@
             <a:r>
               <a:rPr lang="en-US" sz="850" dirty="0">
                 <a:solidFill>
-                  <a:srgbClr val="D9D9D9"/>
+                  <a:srgbClr val="333333"/>
                 </a:solidFill>
                 <a:latin typeface="Arial" pitchFamily="34" charset="0"/>
                 <a:ea typeface="Arial" pitchFamily="34" charset="-122"/>
@@ -17701,7 +17701,7 @@
     <p:bg>
       <p:bgPr>
         <a:solidFill>
-          <a:srgbClr val="0A0A0A"/>
+          <a:srgbClr val="FFFFFF"/>
         </a:solidFill>
       </p:bgPr>
     </p:bg>
@@ -17736,7 +17736,7 @@
           <a:noFill/>
           <a:ln w="12700">
             <a:solidFill>
-              <a:srgbClr val="4A4A4A"/>
+              <a:srgbClr val="E0E0E0"/>
             </a:solidFill>
             <a:prstDash val="solid"/>
           </a:ln>
@@ -17769,7 +17769,7 @@
             <a:r>
               <a:rPr lang="en-US" sz="900" b="1" dirty="0">
                 <a:solidFill>
-                  <a:srgbClr val="9A9A9A"/>
+                  <a:srgbClr val="666666"/>
                 </a:solidFill>
                 <a:latin typeface="Arial" pitchFamily="34" charset="0"/>
                 <a:ea typeface="Arial" pitchFamily="34" charset="-122"/>
@@ -17808,7 +17808,7 @@
             <a:r>
               <a:rPr lang="en-US" sz="900" b="1" dirty="0">
                 <a:solidFill>
-                  <a:srgbClr val="9A9A9A"/>
+                  <a:srgbClr val="666666"/>
                 </a:solidFill>
                 <a:latin typeface="Arial" pitchFamily="34" charset="0"/>
                 <a:ea typeface="Arial" pitchFamily="34" charset="-122"/>
@@ -17847,7 +17847,7 @@
             <a:r>
               <a:rPr lang="en-US" sz="1200" b="1" dirty="0">
                 <a:solidFill>
-                  <a:srgbClr val="9A9A9A"/>
+                  <a:srgbClr val="666666"/>
                 </a:solidFill>
                 <a:latin typeface="Arial" pitchFamily="34" charset="0"/>
                 <a:ea typeface="Arial" pitchFamily="34" charset="-122"/>
@@ -17886,7 +17886,7 @@
             <a:r>
               <a:rPr lang="en-US" sz="1800" b="1" dirty="0">
                 <a:solidFill>
-                  <a:srgbClr val="FFFFFF"/>
+                  <a:srgbClr val="000000"/>
                 </a:solidFill>
                 <a:latin typeface="Arial" pitchFamily="34" charset="0"/>
                 <a:ea typeface="Arial" pitchFamily="34" charset="-122"/>
@@ -17915,7 +17915,7 @@
           <a:noFill/>
           <a:ln w="12700">
             <a:solidFill>
-              <a:srgbClr val="4A4A4A"/>
+              <a:srgbClr val="E0E0E0"/>
             </a:solidFill>
             <a:prstDash val="solid"/>
           </a:ln>
@@ -17948,7 +17948,7 @@
             <a:r>
               <a:rPr lang="en-US" sz="850" b="1" dirty="0">
                 <a:solidFill>
-                  <a:srgbClr val="9A9A9A"/>
+                  <a:srgbClr val="666666"/>
                 </a:solidFill>
                 <a:latin typeface="Arial" pitchFamily="34" charset="0"/>
                 <a:ea typeface="Arial" pitchFamily="34" charset="-122"/>
@@ -17987,7 +17987,7 @@
             <a:r>
               <a:rPr lang="en-US" sz="850" b="1" dirty="0">
                 <a:solidFill>
-                  <a:srgbClr val="9A9A9A"/>
+                  <a:srgbClr val="666666"/>
                 </a:solidFill>
                 <a:latin typeface="Arial" pitchFamily="34" charset="0"/>
                 <a:ea typeface="Arial" pitchFamily="34" charset="-122"/>
@@ -18014,11 +18014,11 @@
             <a:avLst/>
           </a:prstGeom>
           <a:solidFill>
-            <a:srgbClr val="1F1F1F"/>
+            <a:srgbClr val="F8F9FA"/>
           </a:solidFill>
           <a:ln w="12700">
             <a:solidFill>
-              <a:srgbClr val="4A4A4A"/>
+              <a:srgbClr val="E0E0E0"/>
             </a:solidFill>
             <a:prstDash val="solid"/>
           </a:ln>
@@ -18054,7 +18054,7 @@
             <a:r>
               <a:rPr lang="en-US" sz="820" b="1" dirty="0">
                 <a:solidFill>
-                  <a:srgbClr val="9A9A9A"/>
+                  <a:srgbClr val="666666"/>
                 </a:solidFill>
                 <a:latin typeface="Arial" pitchFamily="34" charset="0"/>
                 <a:ea typeface="Arial" pitchFamily="34" charset="-122"/>
@@ -18072,7 +18072,7 @@
             <a:r>
               <a:rPr lang="en-US" sz="820" dirty="0">
                 <a:solidFill>
-                  <a:srgbClr val="4A90E2"/>
+                  <a:srgbClr val="1976D2"/>
                 </a:solidFill>
                 <a:latin typeface="Courier New" pitchFamily="34" charset="0"/>
                 <a:ea typeface="Courier New" pitchFamily="34" charset="-122"/>
@@ -18090,7 +18090,7 @@
             <a:r>
               <a:rPr lang="en-US" sz="820" b="1" dirty="0">
                 <a:solidFill>
-                  <a:srgbClr val="9A9A9A"/>
+                  <a:srgbClr val="666666"/>
                 </a:solidFill>
                 <a:latin typeface="Arial" pitchFamily="34" charset="0"/>
                 <a:ea typeface="Arial" pitchFamily="34" charset="-122"/>
@@ -18108,7 +18108,7 @@
             <a:r>
               <a:rPr lang="en-US" sz="780" b="1" dirty="0">
                 <a:solidFill>
-                  <a:srgbClr val="FFFFFF"/>
+                  <a:srgbClr val="000000"/>
                 </a:solidFill>
                 <a:latin typeface="Courier New" pitchFamily="34" charset="0"/>
                 <a:ea typeface="Courier New" pitchFamily="34" charset="-122"/>
@@ -18126,7 +18126,7 @@
             <a:r>
               <a:rPr lang="en-US" sz="780" dirty="0">
                 <a:solidFill>
-                  <a:srgbClr val="4A4A4A"/>
+                  <a:srgbClr val="E0E0E0"/>
                 </a:solidFill>
                 <a:latin typeface="Courier New" pitchFamily="34" charset="0"/>
                 <a:ea typeface="Courier New" pitchFamily="34" charset="-122"/>
@@ -18144,7 +18144,7 @@
             <a:r>
               <a:rPr lang="en-US" sz="780" b="1" dirty="0">
                 <a:solidFill>
-                  <a:srgbClr val="E05252"/>
+                  <a:srgbClr val="D32F2F"/>
                 </a:solidFill>
                 <a:latin typeface="Courier New" pitchFamily="34" charset="0"/>
                 <a:ea typeface="Courier New" pitchFamily="34" charset="-122"/>
@@ -18162,7 +18162,7 @@
             <a:r>
               <a:rPr lang="en-US" sz="780" dirty="0">
                 <a:solidFill>
-                  <a:srgbClr val="D9D9D9"/>
+                  <a:srgbClr val="333333"/>
                 </a:solidFill>
                 <a:latin typeface="Courier New" pitchFamily="34" charset="0"/>
                 <a:ea typeface="Courier New" pitchFamily="34" charset="-122"/>
@@ -18180,7 +18180,7 @@
             <a:r>
               <a:rPr lang="en-US" sz="780" dirty="0">
                 <a:solidFill>
-                  <a:srgbClr val="9A9A9A"/>
+                  <a:srgbClr val="666666"/>
                 </a:solidFill>
                 <a:latin typeface="Courier New" pitchFamily="34" charset="0"/>
                 <a:ea typeface="Courier New" pitchFamily="34" charset="-122"/>
@@ -18198,7 +18198,7 @@
             <a:r>
               <a:rPr lang="en-US" sz="850" b="1" dirty="0">
                 <a:solidFill>
-                  <a:srgbClr val="4EAF51"/>
+                  <a:srgbClr val="2E7D32"/>
                 </a:solidFill>
                 <a:latin typeface="Arial" pitchFamily="34" charset="0"/>
                 <a:ea typeface="Arial" pitchFamily="34" charset="-122"/>
@@ -18224,7 +18224,7 @@
     <p:bg>
       <p:bgPr>
         <a:solidFill>
-          <a:srgbClr val="0A0A0A"/>
+          <a:srgbClr val="FFFFFF"/>
         </a:solidFill>
       </p:bgPr>
     </p:bg>
@@ -18259,7 +18259,7 @@
           <a:noFill/>
           <a:ln w="12700">
             <a:solidFill>
-              <a:srgbClr val="4A4A4A"/>
+              <a:srgbClr val="E0E0E0"/>
             </a:solidFill>
             <a:prstDash val="solid"/>
           </a:ln>
@@ -18292,7 +18292,7 @@
             <a:r>
               <a:rPr lang="en-US" sz="900" b="1" dirty="0">
                 <a:solidFill>
-                  <a:srgbClr val="9A9A9A"/>
+                  <a:srgbClr val="666666"/>
                 </a:solidFill>
                 <a:latin typeface="Arial" pitchFamily="34" charset="0"/>
                 <a:ea typeface="Arial" pitchFamily="34" charset="-122"/>
@@ -18331,7 +18331,7 @@
             <a:r>
               <a:rPr lang="en-US" sz="900" b="1" dirty="0">
                 <a:solidFill>
-                  <a:srgbClr val="9A9A9A"/>
+                  <a:srgbClr val="666666"/>
                 </a:solidFill>
                 <a:latin typeface="Arial" pitchFamily="34" charset="0"/>
                 <a:ea typeface="Arial" pitchFamily="34" charset="-122"/>
@@ -18370,7 +18370,7 @@
             <a:r>
               <a:rPr lang="en-US" sz="1200" b="1" dirty="0">
                 <a:solidFill>
-                  <a:srgbClr val="9A9A9A"/>
+                  <a:srgbClr val="666666"/>
                 </a:solidFill>
                 <a:latin typeface="Arial" pitchFamily="34" charset="0"/>
                 <a:ea typeface="Arial" pitchFamily="34" charset="-122"/>
@@ -18409,7 +18409,7 @@
             <a:r>
               <a:rPr lang="en-US" sz="1800" b="1" dirty="0">
                 <a:solidFill>
-                  <a:srgbClr val="FFFFFF"/>
+                  <a:srgbClr val="000000"/>
                 </a:solidFill>
                 <a:latin typeface="Arial" pitchFamily="34" charset="0"/>
                 <a:ea typeface="Arial" pitchFamily="34" charset="-122"/>
@@ -18438,7 +18438,7 @@
           <a:noFill/>
           <a:ln w="12700">
             <a:solidFill>
-              <a:srgbClr val="4A4A4A"/>
+              <a:srgbClr val="E0E0E0"/>
             </a:solidFill>
             <a:prstDash val="solid"/>
           </a:ln>
@@ -18471,7 +18471,7 @@
             <a:r>
               <a:rPr lang="en-US" sz="850" b="1" dirty="0">
                 <a:solidFill>
-                  <a:srgbClr val="9A9A9A"/>
+                  <a:srgbClr val="666666"/>
                 </a:solidFill>
                 <a:latin typeface="Arial" pitchFamily="34" charset="0"/>
                 <a:ea typeface="Arial" pitchFamily="34" charset="-122"/>
@@ -18510,7 +18510,7 @@
             <a:r>
               <a:rPr lang="en-US" sz="850" b="1" dirty="0">
                 <a:solidFill>
-                  <a:srgbClr val="9A9A9A"/>
+                  <a:srgbClr val="666666"/>
                 </a:solidFill>
                 <a:latin typeface="Arial" pitchFamily="34" charset="0"/>
                 <a:ea typeface="Arial" pitchFamily="34" charset="-122"/>
@@ -18537,11 +18537,11 @@
             <a:avLst/>
           </a:prstGeom>
           <a:solidFill>
-            <a:srgbClr val="1F1F1F"/>
+            <a:srgbClr val="F8F9FA"/>
           </a:solidFill>
           <a:ln w="12700">
             <a:solidFill>
-              <a:srgbClr val="4A4A4A"/>
+              <a:srgbClr val="E0E0E0"/>
             </a:solidFill>
             <a:prstDash val="solid"/>
           </a:ln>
@@ -18562,11 +18562,11 @@
             <a:avLst/>
           </a:prstGeom>
           <a:solidFill>
-            <a:srgbClr val="1F1F1F"/>
+            <a:srgbClr val="F8F9FA"/>
           </a:solidFill>
           <a:ln w="12700">
             <a:solidFill>
-              <a:srgbClr val="4A4A4A"/>
+              <a:srgbClr val="E0E0E0"/>
             </a:solidFill>
             <a:prstDash val="solid"/>
           </a:ln>
@@ -18599,7 +18599,7 @@
             <a:r>
               <a:rPr lang="en-US" sz="1100" b="1" dirty="0">
                 <a:solidFill>
-                  <a:srgbClr val="FFFFFF"/>
+                  <a:srgbClr val="000000"/>
                 </a:solidFill>
                 <a:latin typeface="Arial" pitchFamily="34" charset="0"/>
                 <a:ea typeface="Arial" pitchFamily="34" charset="-122"/>
@@ -18641,7 +18641,7 @@
             <a:r>
               <a:rPr lang="en-US" sz="850" b="1" dirty="0">
                 <a:solidFill>
-                  <a:srgbClr val="E05252"/>
+                  <a:srgbClr val="D32F2F"/>
                 </a:solidFill>
                 <a:latin typeface="Arial" pitchFamily="34" charset="0"/>
                 <a:ea typeface="Arial" pitchFamily="34" charset="-122"/>
@@ -18659,7 +18659,7 @@
             <a:r>
               <a:rPr lang="en-US" sz="850" dirty="0">
                 <a:solidFill>
-                  <a:srgbClr val="D9D9D9"/>
+                  <a:srgbClr val="333333"/>
                 </a:solidFill>
                 <a:latin typeface="Arial" pitchFamily="34" charset="0"/>
                 <a:ea typeface="Arial" pitchFamily="34" charset="-122"/>
@@ -18677,7 +18677,7 @@
             <a:r>
               <a:rPr lang="en-US" sz="850" b="1" dirty="0">
                 <a:solidFill>
-                  <a:srgbClr val="4EAF51"/>
+                  <a:srgbClr val="2E7D32"/>
                 </a:solidFill>
                 <a:latin typeface="Arial" pitchFamily="34" charset="0"/>
                 <a:ea typeface="Arial" pitchFamily="34" charset="-122"/>
@@ -18695,7 +18695,7 @@
             <a:r>
               <a:rPr lang="en-US" sz="850" dirty="0">
                 <a:solidFill>
-                  <a:srgbClr val="D9D9D9"/>
+                  <a:srgbClr val="333333"/>
                 </a:solidFill>
                 <a:latin typeface="Arial" pitchFamily="34" charset="0"/>
                 <a:ea typeface="Arial" pitchFamily="34" charset="-122"/>
@@ -18713,7 +18713,7 @@
             <a:r>
               <a:rPr lang="en-US" sz="850" dirty="0">
                 <a:solidFill>
-                  <a:srgbClr val="D9D9D9"/>
+                  <a:srgbClr val="333333"/>
                 </a:solidFill>
                 <a:latin typeface="Arial" pitchFamily="34" charset="0"/>
                 <a:ea typeface="Arial" pitchFamily="34" charset="-122"/>
@@ -18752,7 +18752,7 @@
             <a:r>
               <a:rPr lang="en-US" sz="1100" b="1" dirty="0">
                 <a:solidFill>
-                  <a:srgbClr val="FFFFFF"/>
+                  <a:srgbClr val="000000"/>
                 </a:solidFill>
                 <a:latin typeface="Arial" pitchFamily="34" charset="0"/>
                 <a:ea typeface="Arial" pitchFamily="34" charset="-122"/>
@@ -18794,7 +18794,7 @@
             <a:r>
               <a:rPr lang="en-US" sz="850" b="1" dirty="0">
                 <a:solidFill>
-                  <a:srgbClr val="E05252"/>
+                  <a:srgbClr val="D32F2F"/>
                 </a:solidFill>
                 <a:latin typeface="Arial" pitchFamily="34" charset="0"/>
                 <a:ea typeface="Arial" pitchFamily="34" charset="-122"/>
@@ -18812,7 +18812,7 @@
             <a:r>
               <a:rPr lang="en-US" sz="850" dirty="0">
                 <a:solidFill>
-                  <a:srgbClr val="D9D9D9"/>
+                  <a:srgbClr val="333333"/>
                 </a:solidFill>
                 <a:latin typeface="Arial" pitchFamily="34" charset="0"/>
                 <a:ea typeface="Arial" pitchFamily="34" charset="-122"/>
@@ -18830,7 +18830,7 @@
             <a:r>
               <a:rPr lang="en-US" sz="850" b="1" dirty="0">
                 <a:solidFill>
-                  <a:srgbClr val="4EAF51"/>
+                  <a:srgbClr val="2E7D32"/>
                 </a:solidFill>
                 <a:latin typeface="Arial" pitchFamily="34" charset="0"/>
                 <a:ea typeface="Arial" pitchFamily="34" charset="-122"/>
@@ -18848,7 +18848,7 @@
             <a:r>
               <a:rPr lang="en-US" sz="850" dirty="0">
                 <a:solidFill>
-                  <a:srgbClr val="D9D9D9"/>
+                  <a:srgbClr val="333333"/>
                 </a:solidFill>
                 <a:latin typeface="Arial" pitchFamily="34" charset="0"/>
                 <a:ea typeface="Arial" pitchFamily="34" charset="-122"/>
@@ -18866,7 +18866,7 @@
             <a:r>
               <a:rPr lang="en-US" sz="850" b="1" dirty="0">
                 <a:solidFill>
-                  <a:srgbClr val="FFFFFF"/>
+                  <a:srgbClr val="000000"/>
                 </a:solidFill>
                 <a:latin typeface="Arial" pitchFamily="34" charset="0"/>
                 <a:ea typeface="Arial" pitchFamily="34" charset="-122"/>
@@ -18884,7 +18884,7 @@
             <a:r>
               <a:rPr lang="en-US" sz="850" dirty="0">
                 <a:solidFill>
-                  <a:srgbClr val="D9D9D9"/>
+                  <a:srgbClr val="333333"/>
                 </a:solidFill>
                 <a:latin typeface="Arial" pitchFamily="34" charset="0"/>
                 <a:ea typeface="Arial" pitchFamily="34" charset="-122"/>
@@ -18910,7 +18910,7 @@
     <p:bg>
       <p:bgPr>
         <a:solidFill>
-          <a:srgbClr val="0A0A0A"/>
+          <a:srgbClr val="FFFFFF"/>
         </a:solidFill>
       </p:bgPr>
     </p:bg>
@@ -18945,7 +18945,7 @@
           <a:noFill/>
           <a:ln w="12700">
             <a:solidFill>
-              <a:srgbClr val="4A4A4A"/>
+              <a:srgbClr val="E0E0E0"/>
             </a:solidFill>
             <a:prstDash val="solid"/>
           </a:ln>
@@ -18978,7 +18978,7 @@
             <a:r>
               <a:rPr lang="en-US" sz="900" b="1" dirty="0">
                 <a:solidFill>
-                  <a:srgbClr val="9A9A9A"/>
+                  <a:srgbClr val="666666"/>
                 </a:solidFill>
                 <a:latin typeface="Arial" pitchFamily="34" charset="0"/>
                 <a:ea typeface="Arial" pitchFamily="34" charset="-122"/>
@@ -19017,7 +19017,7 @@
             <a:r>
               <a:rPr lang="en-US" sz="900" b="1" dirty="0">
                 <a:solidFill>
-                  <a:srgbClr val="9A9A9A"/>
+                  <a:srgbClr val="666666"/>
                 </a:solidFill>
                 <a:latin typeface="Arial" pitchFamily="34" charset="0"/>
                 <a:ea typeface="Arial" pitchFamily="34" charset="-122"/>
@@ -19056,7 +19056,7 @@
             <a:r>
               <a:rPr lang="en-US" sz="1200" b="1" dirty="0">
                 <a:solidFill>
-                  <a:srgbClr val="9A9A9A"/>
+                  <a:srgbClr val="666666"/>
                 </a:solidFill>
                 <a:latin typeface="Arial" pitchFamily="34" charset="0"/>
                 <a:ea typeface="Arial" pitchFamily="34" charset="-122"/>
@@ -19095,7 +19095,7 @@
             <a:r>
               <a:rPr lang="en-US" sz="1800" b="1" dirty="0">
                 <a:solidFill>
-                  <a:srgbClr val="FFFFFF"/>
+                  <a:srgbClr val="000000"/>
                 </a:solidFill>
                 <a:latin typeface="Arial" pitchFamily="34" charset="0"/>
                 <a:ea typeface="Arial" pitchFamily="34" charset="-122"/>
@@ -19124,7 +19124,7 @@
           <a:noFill/>
           <a:ln w="12700">
             <a:solidFill>
-              <a:srgbClr val="4A4A4A"/>
+              <a:srgbClr val="E0E0E0"/>
             </a:solidFill>
             <a:prstDash val="solid"/>
           </a:ln>
@@ -19157,7 +19157,7 @@
             <a:r>
               <a:rPr lang="en-US" sz="850" b="1" dirty="0">
                 <a:solidFill>
-                  <a:srgbClr val="9A9A9A"/>
+                  <a:srgbClr val="666666"/>
                 </a:solidFill>
                 <a:latin typeface="Arial" pitchFamily="34" charset="0"/>
                 <a:ea typeface="Arial" pitchFamily="34" charset="-122"/>
@@ -19196,7 +19196,7 @@
             <a:r>
               <a:rPr lang="en-US" sz="850" b="1" dirty="0">
                 <a:solidFill>
-                  <a:srgbClr val="9A9A9A"/>
+                  <a:srgbClr val="666666"/>
                 </a:solidFill>
                 <a:latin typeface="Arial" pitchFamily="34" charset="0"/>
                 <a:ea typeface="Arial" pitchFamily="34" charset="-122"/>
@@ -19223,11 +19223,11 @@
             <a:avLst/>
           </a:prstGeom>
           <a:solidFill>
-            <a:srgbClr val="1F1F1F"/>
+            <a:srgbClr val="F8F9FA"/>
           </a:solidFill>
           <a:ln w="12700">
             <a:solidFill>
-              <a:srgbClr val="4A4A4A"/>
+              <a:srgbClr val="E0E0E0"/>
             </a:solidFill>
             <a:prstDash val="solid"/>
           </a:ln>
@@ -19263,7 +19263,7 @@
             <a:r>
               <a:rPr lang="en-US" sz="950" b="1" dirty="0">
                 <a:solidFill>
-                  <a:srgbClr val="FFFFFF"/>
+                  <a:srgbClr val="000000"/>
                 </a:solidFill>
                 <a:latin typeface="Arial" pitchFamily="34" charset="0"/>
                 <a:ea typeface="Arial" pitchFamily="34" charset="-122"/>
@@ -19281,7 +19281,7 @@
             <a:r>
               <a:rPr lang="en-US" sz="750" dirty="0">
                 <a:solidFill>
-                  <a:srgbClr val="9A9A9A"/>
+                  <a:srgbClr val="666666"/>
                 </a:solidFill>
                 <a:latin typeface="Courier New" pitchFamily="34" charset="0"/>
                 <a:ea typeface="Courier New" pitchFamily="34" charset="-122"/>
@@ -19300,7 +19300,7 @@
             <a:r>
               <a:rPr lang="en-US" sz="750" dirty="0">
                 <a:solidFill>
-                  <a:srgbClr val="9A9A9A"/>
+                  <a:srgbClr val="666666"/>
                 </a:solidFill>
                 <a:latin typeface="Courier New" pitchFamily="34" charset="0"/>
                 <a:ea typeface="Courier New" pitchFamily="34" charset="-122"/>
@@ -19318,7 +19318,7 @@
             <a:r>
               <a:rPr lang="en-US" sz="750" dirty="0">
                 <a:solidFill>
-                  <a:srgbClr val="FFFFFF"/>
+                  <a:srgbClr val="000000"/>
                 </a:solidFill>
                 <a:latin typeface="Courier New" pitchFamily="34" charset="0"/>
                 <a:ea typeface="Courier New" pitchFamily="34" charset="-122"/>
@@ -19336,7 +19336,7 @@
             <a:r>
               <a:rPr lang="en-US" sz="750" dirty="0">
                 <a:solidFill>
-                  <a:srgbClr val="4A90E2"/>
+                  <a:srgbClr val="1976D2"/>
                 </a:solidFill>
                 <a:latin typeface="Courier New" pitchFamily="34" charset="0"/>
                 <a:ea typeface="Courier New" pitchFamily="34" charset="-122"/>
@@ -19356,7 +19356,7 @@
             <a:r>
               <a:rPr lang="en-US" sz="750" b="1" dirty="0">
                 <a:solidFill>
-                  <a:srgbClr val="4EAF51"/>
+                  <a:srgbClr val="2E7D32"/>
                 </a:solidFill>
                 <a:latin typeface="Courier New" pitchFamily="34" charset="0"/>
                 <a:ea typeface="Courier New" pitchFamily="34" charset="-122"/>
@@ -19374,7 +19374,7 @@
             <a:r>
               <a:rPr lang="en-US" sz="750" dirty="0">
                 <a:solidFill>
-                  <a:srgbClr val="4EAF51"/>
+                  <a:srgbClr val="2E7D32"/>
                 </a:solidFill>
                 <a:latin typeface="Courier New" pitchFamily="34" charset="0"/>
                 <a:ea typeface="Courier New" pitchFamily="34" charset="-122"/>
@@ -19396,7 +19396,7 @@
             <a:r>
               <a:rPr lang="en-US" sz="750" dirty="0">
                 <a:solidFill>
-                  <a:srgbClr val="9A9A9A"/>
+                  <a:srgbClr val="666666"/>
                 </a:solidFill>
                 <a:latin typeface="Courier New" pitchFamily="34" charset="0"/>
                 <a:ea typeface="Courier New" pitchFamily="34" charset="-122"/>
@@ -19416,7 +19416,7 @@
             <a:r>
               <a:rPr lang="en-US" sz="750" dirty="0">
                 <a:solidFill>
-                  <a:srgbClr val="9A9A9A"/>
+                  <a:srgbClr val="666666"/>
                 </a:solidFill>
                 <a:latin typeface="Courier New" pitchFamily="34" charset="0"/>
                 <a:ea typeface="Courier New" pitchFamily="34" charset="-122"/>
@@ -19436,7 +19436,7 @@
             <a:r>
               <a:rPr lang="en-US" sz="750" dirty="0">
                 <a:solidFill>
-                  <a:srgbClr val="9A9A9A"/>
+                  <a:srgbClr val="666666"/>
                 </a:solidFill>
                 <a:latin typeface="Courier New" pitchFamily="34" charset="0"/>
                 <a:ea typeface="Courier New" pitchFamily="34" charset="-122"/>
@@ -19462,7 +19462,7 @@
     <p:bg>
       <p:bgPr>
         <a:solidFill>
-          <a:srgbClr val="0A0A0A"/>
+          <a:srgbClr val="FFFFFF"/>
         </a:solidFill>
       </p:bgPr>
     </p:bg>
@@ -19497,7 +19497,7 @@
           <a:noFill/>
           <a:ln w="12700">
             <a:solidFill>
-              <a:srgbClr val="4A4A4A"/>
+              <a:srgbClr val="E0E0E0"/>
             </a:solidFill>
             <a:prstDash val="solid"/>
           </a:ln>
@@ -19530,7 +19530,7 @@
             <a:r>
               <a:rPr lang="en-US" sz="900" b="1" dirty="0">
                 <a:solidFill>
-                  <a:srgbClr val="9A9A9A"/>
+                  <a:srgbClr val="666666"/>
                 </a:solidFill>
                 <a:latin typeface="Arial" pitchFamily="34" charset="0"/>
                 <a:ea typeface="Arial" pitchFamily="34" charset="-122"/>
@@ -19569,7 +19569,7 @@
             <a:r>
               <a:rPr lang="en-US" sz="900" b="1" dirty="0">
                 <a:solidFill>
-                  <a:srgbClr val="9A9A9A"/>
+                  <a:srgbClr val="666666"/>
                 </a:solidFill>
                 <a:latin typeface="Arial" pitchFamily="34" charset="0"/>
                 <a:ea typeface="Arial" pitchFamily="34" charset="-122"/>
@@ -19608,7 +19608,7 @@
             <a:r>
               <a:rPr lang="en-US" sz="1200" b="1" dirty="0">
                 <a:solidFill>
-                  <a:srgbClr val="9A9A9A"/>
+                  <a:srgbClr val="666666"/>
                 </a:solidFill>
                 <a:latin typeface="Arial" pitchFamily="34" charset="0"/>
                 <a:ea typeface="Arial" pitchFamily="34" charset="-122"/>
@@ -19647,7 +19647,7 @@
             <a:r>
               <a:rPr lang="en-US" sz="1800" b="1" dirty="0">
                 <a:solidFill>
-                  <a:srgbClr val="FFFFFF"/>
+                  <a:srgbClr val="000000"/>
                 </a:solidFill>
                 <a:latin typeface="Arial" pitchFamily="34" charset="0"/>
                 <a:ea typeface="Arial" pitchFamily="34" charset="-122"/>
@@ -19676,7 +19676,7 @@
           <a:noFill/>
           <a:ln w="12700">
             <a:solidFill>
-              <a:srgbClr val="4A4A4A"/>
+              <a:srgbClr val="E0E0E0"/>
             </a:solidFill>
             <a:prstDash val="solid"/>
           </a:ln>
@@ -19709,7 +19709,7 @@
             <a:r>
               <a:rPr lang="en-US" sz="850" b="1" dirty="0">
                 <a:solidFill>
-                  <a:srgbClr val="9A9A9A"/>
+                  <a:srgbClr val="666666"/>
                 </a:solidFill>
                 <a:latin typeface="Arial" pitchFamily="34" charset="0"/>
                 <a:ea typeface="Arial" pitchFamily="34" charset="-122"/>
@@ -19748,7 +19748,7 @@
             <a:r>
               <a:rPr lang="en-US" sz="850" b="1" dirty="0">
                 <a:solidFill>
-                  <a:srgbClr val="9A9A9A"/>
+                  <a:srgbClr val="666666"/>
                 </a:solidFill>
                 <a:latin typeface="Arial" pitchFamily="34" charset="0"/>
                 <a:ea typeface="Arial" pitchFamily="34" charset="-122"/>
@@ -19775,11 +19775,11 @@
             <a:avLst/>
           </a:prstGeom>
           <a:solidFill>
-            <a:srgbClr val="1F1F1F"/>
+            <a:srgbClr val="F8F9FA"/>
           </a:solidFill>
           <a:ln w="12700">
             <a:solidFill>
-              <a:srgbClr val="4A4A4A"/>
+              <a:srgbClr val="E0E0E0"/>
             </a:solidFill>
             <a:prstDash val="solid"/>
           </a:ln>
@@ -19815,7 +19815,7 @@
             <a:r>
               <a:rPr lang="en-US" sz="820" b="1" dirty="0">
                 <a:solidFill>
-                  <a:srgbClr val="9A9A9A"/>
+                  <a:srgbClr val="666666"/>
                 </a:solidFill>
                 <a:latin typeface="Arial" pitchFamily="34" charset="0"/>
                 <a:ea typeface="Arial" pitchFamily="34" charset="-122"/>
@@ -19833,7 +19833,7 @@
             <a:r>
               <a:rPr lang="en-US" sz="850" dirty="0">
                 <a:solidFill>
-                  <a:srgbClr val="4A90E2"/>
+                  <a:srgbClr val="1976D2"/>
                 </a:solidFill>
                 <a:latin typeface="Courier New" pitchFamily="34" charset="0"/>
                 <a:ea typeface="Courier New" pitchFamily="34" charset="-122"/>
@@ -19851,7 +19851,7 @@
             <a:r>
               <a:rPr lang="en-US" sz="800" dirty="0">
                 <a:solidFill>
-                  <a:srgbClr val="4EAF51"/>
+                  <a:srgbClr val="2E7D32"/>
                 </a:solidFill>
                 <a:latin typeface="Courier New" pitchFamily="34" charset="0"/>
                 <a:ea typeface="Courier New" pitchFamily="34" charset="-122"/>
@@ -19869,7 +19869,7 @@
             <a:r>
               <a:rPr lang="en-US" sz="800" dirty="0">
                 <a:solidFill>
-                  <a:srgbClr val="4EAF51"/>
+                  <a:srgbClr val="2E7D32"/>
                 </a:solidFill>
                 <a:latin typeface="Courier New" pitchFamily="34" charset="0"/>
                 <a:ea typeface="Courier New" pitchFamily="34" charset="-122"/>
@@ -19887,7 +19887,7 @@
             <a:r>
               <a:rPr lang="en-US" sz="800" dirty="0">
                 <a:solidFill>
-                  <a:srgbClr val="4EAF51"/>
+                  <a:srgbClr val="2E7D32"/>
                 </a:solidFill>
                 <a:latin typeface="Courier New" pitchFamily="34" charset="0"/>
                 <a:ea typeface="Courier New" pitchFamily="34" charset="-122"/>
@@ -19905,7 +19905,7 @@
             <a:r>
               <a:rPr lang="en-US" sz="800" dirty="0">
                 <a:solidFill>
-                  <a:srgbClr val="4EAF51"/>
+                  <a:srgbClr val="2E7D32"/>
                 </a:solidFill>
                 <a:latin typeface="Courier New" pitchFamily="34" charset="0"/>
                 <a:ea typeface="Courier New" pitchFamily="34" charset="-122"/>
@@ -19923,7 +19923,7 @@
             <a:r>
               <a:rPr lang="en-US" sz="800" dirty="0">
                 <a:solidFill>
-                  <a:srgbClr val="4EAF51"/>
+                  <a:srgbClr val="2E7D32"/>
                 </a:solidFill>
                 <a:latin typeface="Courier New" pitchFamily="34" charset="0"/>
                 <a:ea typeface="Courier New" pitchFamily="34" charset="-122"/>
@@ -19941,7 +19941,7 @@
             <a:r>
               <a:rPr lang="en-US" sz="800" dirty="0">
                 <a:solidFill>
-                  <a:srgbClr val="4A4A4A"/>
+                  <a:srgbClr val="E0E0E0"/>
                 </a:solidFill>
                 <a:latin typeface="Courier New" pitchFamily="34" charset="0"/>
                 <a:ea typeface="Courier New" pitchFamily="34" charset="-122"/>
@@ -19959,7 +19959,7 @@
             <a:r>
               <a:rPr lang="en-US" sz="850" b="1" dirty="0">
                 <a:solidFill>
-                  <a:srgbClr val="FFFFFF"/>
+                  <a:srgbClr val="000000"/>
                 </a:solidFill>
                 <a:latin typeface="Courier New" pitchFamily="34" charset="0"/>
                 <a:ea typeface="Courier New" pitchFamily="34" charset="-122"/>
@@ -19977,7 +19977,7 @@
             <a:r>
               <a:rPr lang="en-US" sz="850" b="1" dirty="0">
                 <a:solidFill>
-                  <a:srgbClr val="4EAF51"/>
+                  <a:srgbClr val="2E7D32"/>
                 </a:solidFill>
                 <a:latin typeface="Arial" pitchFamily="34" charset="0"/>
                 <a:ea typeface="Arial" pitchFamily="34" charset="-122"/>
@@ -20003,7 +20003,7 @@
     <p:bg>
       <p:bgPr>
         <a:solidFill>
-          <a:srgbClr val="0A0A0A"/>
+          <a:srgbClr val="FFFFFF"/>
         </a:solidFill>
       </p:bgPr>
     </p:bg>
@@ -20038,7 +20038,7 @@
           <a:noFill/>
           <a:ln w="12700">
             <a:solidFill>
-              <a:srgbClr val="4A4A4A"/>
+              <a:srgbClr val="E0E0E0"/>
             </a:solidFill>
             <a:prstDash val="solid"/>
           </a:ln>
@@ -20071,7 +20071,7 @@
             <a:r>
               <a:rPr lang="en-US" sz="900" b="1" dirty="0">
                 <a:solidFill>
-                  <a:srgbClr val="9A9A9A"/>
+                  <a:srgbClr val="666666"/>
                 </a:solidFill>
                 <a:latin typeface="Arial" pitchFamily="34" charset="0"/>
                 <a:ea typeface="Arial" pitchFamily="34" charset="-122"/>
@@ -20110,7 +20110,7 @@
             <a:r>
               <a:rPr lang="en-US" sz="900" b="1" dirty="0">
                 <a:solidFill>
-                  <a:srgbClr val="9A9A9A"/>
+                  <a:srgbClr val="666666"/>
                 </a:solidFill>
                 <a:latin typeface="Arial" pitchFamily="34" charset="0"/>
                 <a:ea typeface="Arial" pitchFamily="34" charset="-122"/>
@@ -20149,7 +20149,7 @@
             <a:r>
               <a:rPr lang="en-US" sz="1200" b="1" dirty="0">
                 <a:solidFill>
-                  <a:srgbClr val="9A9A9A"/>
+                  <a:srgbClr val="666666"/>
                 </a:solidFill>
                 <a:latin typeface="Arial" pitchFamily="34" charset="0"/>
                 <a:ea typeface="Arial" pitchFamily="34" charset="-122"/>
@@ -20188,7 +20188,7 @@
             <a:r>
               <a:rPr lang="en-US" sz="1800" b="1" dirty="0">
                 <a:solidFill>
-                  <a:srgbClr val="FFFFFF"/>
+                  <a:srgbClr val="000000"/>
                 </a:solidFill>
                 <a:latin typeface="Arial" pitchFamily="34" charset="0"/>
                 <a:ea typeface="Arial" pitchFamily="34" charset="-122"/>
@@ -20217,7 +20217,7 @@
           <a:noFill/>
           <a:ln w="12700">
             <a:solidFill>
-              <a:srgbClr val="4A4A4A"/>
+              <a:srgbClr val="E0E0E0"/>
             </a:solidFill>
             <a:prstDash val="solid"/>
           </a:ln>
@@ -20250,7 +20250,7 @@
             <a:r>
               <a:rPr lang="en-US" sz="850" b="1" dirty="0">
                 <a:solidFill>
-                  <a:srgbClr val="9A9A9A"/>
+                  <a:srgbClr val="666666"/>
                 </a:solidFill>
                 <a:latin typeface="Arial" pitchFamily="34" charset="0"/>
                 <a:ea typeface="Arial" pitchFamily="34" charset="-122"/>
@@ -20289,7 +20289,7 @@
             <a:r>
               <a:rPr lang="en-US" sz="850" b="1" dirty="0">
                 <a:solidFill>
-                  <a:srgbClr val="9A9A9A"/>
+                  <a:srgbClr val="666666"/>
                 </a:solidFill>
                 <a:latin typeface="Arial" pitchFamily="34" charset="0"/>
                 <a:ea typeface="Arial" pitchFamily="34" charset="-122"/>
@@ -20316,11 +20316,11 @@
             <a:avLst/>
           </a:prstGeom>
           <a:solidFill>
-            <a:srgbClr val="1F1F1F"/>
+            <a:srgbClr val="F8F9FA"/>
           </a:solidFill>
           <a:ln w="12700">
             <a:solidFill>
-              <a:srgbClr val="4A4A4A"/>
+              <a:srgbClr val="E0E0E0"/>
             </a:solidFill>
             <a:prstDash val="solid"/>
           </a:ln>
@@ -20353,7 +20353,7 @@
             <a:r>
               <a:rPr lang="en-US" sz="1600" b="1" dirty="0">
                 <a:solidFill>
-                  <a:srgbClr val="4A90E2"/>
+                  <a:srgbClr val="1976D2"/>
                 </a:solidFill>
                 <a:latin typeface="Arial" pitchFamily="34" charset="0"/>
                 <a:ea typeface="Arial" pitchFamily="34" charset="-122"/>
@@ -20392,7 +20392,7 @@
             <a:r>
               <a:rPr lang="en-US" sz="850" b="1" dirty="0">
                 <a:solidFill>
-                  <a:srgbClr val="FFFFFF"/>
+                  <a:srgbClr val="000000"/>
                 </a:solidFill>
                 <a:latin typeface="Arial" pitchFamily="34" charset="0"/>
                 <a:ea typeface="Arial" pitchFamily="34" charset="-122"/>
@@ -20434,7 +20434,7 @@
             <a:r>
               <a:rPr lang="en-US" sz="780" dirty="0">
                 <a:solidFill>
-                  <a:srgbClr val="D9D9D9"/>
+                  <a:srgbClr val="333333"/>
                 </a:solidFill>
                 <a:latin typeface="Arial" pitchFamily="34" charset="0"/>
                 <a:ea typeface="Arial" pitchFamily="34" charset="-122"/>
@@ -20461,11 +20461,11 @@
             <a:avLst/>
           </a:prstGeom>
           <a:solidFill>
-            <a:srgbClr val="1F1F1F"/>
+            <a:srgbClr val="F8F9FA"/>
           </a:solidFill>
           <a:ln w="12700">
             <a:solidFill>
-              <a:srgbClr val="4A4A4A"/>
+              <a:srgbClr val="E0E0E0"/>
             </a:solidFill>
             <a:prstDash val="solid"/>
           </a:ln>
@@ -20498,7 +20498,7 @@
             <a:r>
               <a:rPr lang="en-US" sz="1600" b="1" dirty="0">
                 <a:solidFill>
-                  <a:srgbClr val="4A90E2"/>
+                  <a:srgbClr val="1976D2"/>
                 </a:solidFill>
                 <a:latin typeface="Arial" pitchFamily="34" charset="0"/>
                 <a:ea typeface="Arial" pitchFamily="34" charset="-122"/>
@@ -20537,7 +20537,7 @@
             <a:r>
               <a:rPr lang="en-US" sz="850" b="1" dirty="0">
                 <a:solidFill>
-                  <a:srgbClr val="FFFFFF"/>
+                  <a:srgbClr val="000000"/>
                 </a:solidFill>
                 <a:latin typeface="Arial" pitchFamily="34" charset="0"/>
                 <a:ea typeface="Arial" pitchFamily="34" charset="-122"/>
@@ -20579,7 +20579,7 @@
             <a:r>
               <a:rPr lang="en-US" sz="780" dirty="0">
                 <a:solidFill>
-                  <a:srgbClr val="D9D9D9"/>
+                  <a:srgbClr val="333333"/>
                 </a:solidFill>
                 <a:latin typeface="Arial" pitchFamily="34" charset="0"/>
                 <a:ea typeface="Arial" pitchFamily="34" charset="-122"/>
@@ -20606,11 +20606,11 @@
             <a:avLst/>
           </a:prstGeom>
           <a:solidFill>
-            <a:srgbClr val="1F1F1F"/>
+            <a:srgbClr val="F8F9FA"/>
           </a:solidFill>
           <a:ln w="12700">
             <a:solidFill>
-              <a:srgbClr val="4A4A4A"/>
+              <a:srgbClr val="E0E0E0"/>
             </a:solidFill>
             <a:prstDash val="solid"/>
           </a:ln>
@@ -20643,7 +20643,7 @@
             <a:r>
               <a:rPr lang="en-US" sz="1600" b="1" dirty="0">
                 <a:solidFill>
-                  <a:srgbClr val="4A90E2"/>
+                  <a:srgbClr val="1976D2"/>
                 </a:solidFill>
                 <a:latin typeface="Arial" pitchFamily="34" charset="0"/>
                 <a:ea typeface="Arial" pitchFamily="34" charset="-122"/>
@@ -20682,7 +20682,7 @@
             <a:r>
               <a:rPr lang="en-US" sz="850" b="1" dirty="0">
                 <a:solidFill>
-                  <a:srgbClr val="FFFFFF"/>
+                  <a:srgbClr val="000000"/>
                 </a:solidFill>
                 <a:latin typeface="Arial" pitchFamily="34" charset="0"/>
                 <a:ea typeface="Arial" pitchFamily="34" charset="-122"/>
@@ -20724,7 +20724,7 @@
             <a:r>
               <a:rPr lang="en-US" sz="780" dirty="0">
                 <a:solidFill>
-                  <a:srgbClr val="D9D9D9"/>
+                  <a:srgbClr val="333333"/>
                 </a:solidFill>
                 <a:latin typeface="Arial" pitchFamily="34" charset="0"/>
                 <a:ea typeface="Arial" pitchFamily="34" charset="-122"/>
@@ -20751,11 +20751,11 @@
             <a:avLst/>
           </a:prstGeom>
           <a:solidFill>
-            <a:srgbClr val="1F1F1F"/>
+            <a:srgbClr val="F8F9FA"/>
           </a:solidFill>
           <a:ln w="12700">
             <a:solidFill>
-              <a:srgbClr val="4A4A4A"/>
+              <a:srgbClr val="E0E0E0"/>
             </a:solidFill>
             <a:prstDash val="solid"/>
           </a:ln>
@@ -20788,7 +20788,7 @@
             <a:r>
               <a:rPr lang="en-US" sz="1600" b="1" dirty="0">
                 <a:solidFill>
-                  <a:srgbClr val="4A90E2"/>
+                  <a:srgbClr val="1976D2"/>
                 </a:solidFill>
                 <a:latin typeface="Arial" pitchFamily="34" charset="0"/>
                 <a:ea typeface="Arial" pitchFamily="34" charset="-122"/>
@@ -20827,7 +20827,7 @@
             <a:r>
               <a:rPr lang="en-US" sz="850" b="1" dirty="0">
                 <a:solidFill>
-                  <a:srgbClr val="FFFFFF"/>
+                  <a:srgbClr val="000000"/>
                 </a:solidFill>
                 <a:latin typeface="Arial" pitchFamily="34" charset="0"/>
                 <a:ea typeface="Arial" pitchFamily="34" charset="-122"/>
@@ -20869,7 +20869,7 @@
             <a:r>
               <a:rPr lang="en-US" sz="780" dirty="0">
                 <a:solidFill>
-                  <a:srgbClr val="D9D9D9"/>
+                  <a:srgbClr val="333333"/>
                 </a:solidFill>
                 <a:latin typeface="Arial" pitchFamily="34" charset="0"/>
                 <a:ea typeface="Arial" pitchFamily="34" charset="-122"/>
@@ -20896,11 +20896,11 @@
             <a:avLst/>
           </a:prstGeom>
           <a:solidFill>
-            <a:srgbClr val="1F1F1F"/>
+            <a:srgbClr val="F8F9FA"/>
           </a:solidFill>
           <a:ln w="12700">
             <a:solidFill>
-              <a:srgbClr val="4A4A4A"/>
+              <a:srgbClr val="E0E0E0"/>
             </a:solidFill>
             <a:prstDash val="solid"/>
           </a:ln>
@@ -20933,7 +20933,7 @@
             <a:r>
               <a:rPr lang="en-US" sz="1600" b="1" dirty="0">
                 <a:solidFill>
-                  <a:srgbClr val="4A90E2"/>
+                  <a:srgbClr val="1976D2"/>
                 </a:solidFill>
                 <a:latin typeface="Arial" pitchFamily="34" charset="0"/>
                 <a:ea typeface="Arial" pitchFamily="34" charset="-122"/>
@@ -20972,7 +20972,7 @@
             <a:r>
               <a:rPr lang="en-US" sz="850" b="1" dirty="0">
                 <a:solidFill>
-                  <a:srgbClr val="FFFFFF"/>
+                  <a:srgbClr val="000000"/>
                 </a:solidFill>
                 <a:latin typeface="Arial" pitchFamily="34" charset="0"/>
                 <a:ea typeface="Arial" pitchFamily="34" charset="-122"/>
@@ -21014,7 +21014,7 @@
             <a:r>
               <a:rPr lang="en-US" sz="780" dirty="0">
                 <a:solidFill>
-                  <a:srgbClr val="D9D9D9"/>
+                  <a:srgbClr val="333333"/>
                 </a:solidFill>
                 <a:latin typeface="Arial" pitchFamily="34" charset="0"/>
                 <a:ea typeface="Arial" pitchFamily="34" charset="-122"/>
@@ -21040,7 +21040,7 @@
     <p:bg>
       <p:bgPr>
         <a:solidFill>
-          <a:srgbClr val="0A0A0A"/>
+          <a:srgbClr val="FFFFFF"/>
         </a:solidFill>
       </p:bgPr>
     </p:bg>
@@ -21075,7 +21075,7 @@
           <a:noFill/>
           <a:ln w="12700">
             <a:solidFill>
-              <a:srgbClr val="4A4A4A"/>
+              <a:srgbClr val="E0E0E0"/>
             </a:solidFill>
             <a:prstDash val="solid"/>
           </a:ln>
@@ -21108,7 +21108,7 @@
             <a:r>
               <a:rPr lang="en-US" sz="900" b="1" dirty="0">
                 <a:solidFill>
-                  <a:srgbClr val="9A9A9A"/>
+                  <a:srgbClr val="666666"/>
                 </a:solidFill>
                 <a:latin typeface="Arial" pitchFamily="34" charset="0"/>
                 <a:ea typeface="Arial" pitchFamily="34" charset="-122"/>
@@ -21147,7 +21147,7 @@
             <a:r>
               <a:rPr lang="en-US" sz="900" b="1" dirty="0">
                 <a:solidFill>
-                  <a:srgbClr val="9A9A9A"/>
+                  <a:srgbClr val="666666"/>
                 </a:solidFill>
                 <a:latin typeface="Arial" pitchFamily="34" charset="0"/>
                 <a:ea typeface="Arial" pitchFamily="34" charset="-122"/>
@@ -21186,7 +21186,7 @@
             <a:r>
               <a:rPr lang="en-US" sz="1200" b="1" dirty="0">
                 <a:solidFill>
-                  <a:srgbClr val="9A9A9A"/>
+                  <a:srgbClr val="666666"/>
                 </a:solidFill>
                 <a:latin typeface="Arial" pitchFamily="34" charset="0"/>
                 <a:ea typeface="Arial" pitchFamily="34" charset="-122"/>
@@ -21225,7 +21225,7 @@
             <a:r>
               <a:rPr lang="en-US" sz="1800" b="1" dirty="0">
                 <a:solidFill>
-                  <a:srgbClr val="FFFFFF"/>
+                  <a:srgbClr val="000000"/>
                 </a:solidFill>
                 <a:latin typeface="Arial" pitchFamily="34" charset="0"/>
                 <a:ea typeface="Arial" pitchFamily="34" charset="-122"/>
@@ -21254,7 +21254,7 @@
           <a:noFill/>
           <a:ln w="12700">
             <a:solidFill>
-              <a:srgbClr val="4A4A4A"/>
+              <a:srgbClr val="E0E0E0"/>
             </a:solidFill>
             <a:prstDash val="solid"/>
           </a:ln>
@@ -21287,7 +21287,7 @@
             <a:r>
               <a:rPr lang="en-US" sz="850" b="1" dirty="0">
                 <a:solidFill>
-                  <a:srgbClr val="9A9A9A"/>
+                  <a:srgbClr val="666666"/>
                 </a:solidFill>
                 <a:latin typeface="Arial" pitchFamily="34" charset="0"/>
                 <a:ea typeface="Arial" pitchFamily="34" charset="-122"/>
@@ -21326,7 +21326,7 @@
             <a:r>
               <a:rPr lang="en-US" sz="850" b="1" dirty="0">
                 <a:solidFill>
-                  <a:srgbClr val="9A9A9A"/>
+                  <a:srgbClr val="666666"/>
                 </a:solidFill>
                 <a:latin typeface="Arial" pitchFamily="34" charset="0"/>
                 <a:ea typeface="Arial" pitchFamily="34" charset="-122"/>
@@ -21368,7 +21368,7 @@
             <a:r>
               <a:rPr lang="en-US" sz="1000" dirty="0">
                 <a:solidFill>
-                  <a:srgbClr val="D9D9D9"/>
+                  <a:srgbClr val="333333"/>
                 </a:solidFill>
                 <a:latin typeface="Arial" pitchFamily="34" charset="0"/>
                 <a:ea typeface="Arial" pitchFamily="34" charset="-122"/>
@@ -21395,11 +21395,11 @@
             <a:avLst/>
           </a:prstGeom>
           <a:solidFill>
-            <a:srgbClr val="1F1F1F"/>
+            <a:srgbClr val="F8F9FA"/>
           </a:solidFill>
           <a:ln w="12700">
             <a:solidFill>
-              <a:srgbClr val="4A4A4A"/>
+              <a:srgbClr val="E0E0E0"/>
             </a:solidFill>
             <a:prstDash val="solid"/>
           </a:ln>
@@ -21432,7 +21432,7 @@
             <a:r>
               <a:rPr lang="en-US" sz="1100" b="1" dirty="0">
                 <a:solidFill>
-                  <a:srgbClr val="FFFFFF"/>
+                  <a:srgbClr val="000000"/>
                 </a:solidFill>
                 <a:latin typeface="Arial" pitchFamily="34" charset="0"/>
                 <a:ea typeface="Arial" pitchFamily="34" charset="-122"/>
@@ -21474,7 +21474,7 @@
             <a:r>
               <a:rPr lang="en-US" sz="850" b="1" dirty="0">
                 <a:solidFill>
-                  <a:srgbClr val="4EAF51"/>
+                  <a:srgbClr val="2E7D32"/>
                 </a:solidFill>
                 <a:latin typeface="Arial" pitchFamily="34" charset="0"/>
                 <a:ea typeface="Arial" pitchFamily="34" charset="-122"/>
@@ -21492,7 +21492,7 @@
             <a:r>
               <a:rPr lang="en-US" sz="850" dirty="0">
                 <a:solidFill>
-                  <a:srgbClr val="D9D9D9"/>
+                  <a:srgbClr val="333333"/>
                 </a:solidFill>
                 <a:latin typeface="Arial" pitchFamily="34" charset="0"/>
                 <a:ea typeface="Arial" pitchFamily="34" charset="-122"/>
@@ -21510,7 +21510,7 @@
             <a:r>
               <a:rPr lang="en-US" sz="850" b="1" dirty="0">
                 <a:solidFill>
-                  <a:srgbClr val="E05252"/>
+                  <a:srgbClr val="D32F2F"/>
                 </a:solidFill>
                 <a:latin typeface="Arial" pitchFamily="34" charset="0"/>
                 <a:ea typeface="Arial" pitchFamily="34" charset="-122"/>
@@ -21528,7 +21528,7 @@
             <a:r>
               <a:rPr lang="en-US" sz="850" dirty="0">
                 <a:solidFill>
-                  <a:srgbClr val="D9D9D9"/>
+                  <a:srgbClr val="333333"/>
                 </a:solidFill>
                 <a:latin typeface="Arial" pitchFamily="34" charset="0"/>
                 <a:ea typeface="Arial" pitchFamily="34" charset="-122"/>
@@ -21546,7 +21546,7 @@
             <a:r>
               <a:rPr lang="en-US" sz="850" b="1" dirty="0">
                 <a:solidFill>
-                  <a:srgbClr val="E05252"/>
+                  <a:srgbClr val="D32F2F"/>
                 </a:solidFill>
                 <a:latin typeface="Arial" pitchFamily="34" charset="0"/>
                 <a:ea typeface="Arial" pitchFamily="34" charset="-122"/>
@@ -21564,7 +21564,7 @@
             <a:r>
               <a:rPr lang="en-US" sz="850" dirty="0">
                 <a:solidFill>
-                  <a:srgbClr val="D9D9D9"/>
+                  <a:srgbClr val="333333"/>
                 </a:solidFill>
                 <a:latin typeface="Arial" pitchFamily="34" charset="0"/>
                 <a:ea typeface="Arial" pitchFamily="34" charset="-122"/>
@@ -21590,7 +21590,7 @@
     <p:bg>
       <p:bgPr>
         <a:solidFill>
-          <a:srgbClr val="0A0A0A"/>
+          <a:srgbClr val="FFFFFF"/>
         </a:solidFill>
       </p:bgPr>
     </p:bg>
@@ -21625,7 +21625,7 @@
           <a:noFill/>
           <a:ln w="12700">
             <a:solidFill>
-              <a:srgbClr val="4A4A4A"/>
+              <a:srgbClr val="E0E0E0"/>
             </a:solidFill>
             <a:prstDash val="solid"/>
           </a:ln>
@@ -21658,7 +21658,7 @@
             <a:r>
               <a:rPr lang="en-US" sz="900" b="1" dirty="0">
                 <a:solidFill>
-                  <a:srgbClr val="9A9A9A"/>
+                  <a:srgbClr val="666666"/>
                 </a:solidFill>
                 <a:latin typeface="Arial" pitchFamily="34" charset="0"/>
                 <a:ea typeface="Arial" pitchFamily="34" charset="-122"/>
@@ -21697,7 +21697,7 @@
             <a:r>
               <a:rPr lang="en-US" sz="900" b="1" dirty="0">
                 <a:solidFill>
-                  <a:srgbClr val="9A9A9A"/>
+                  <a:srgbClr val="666666"/>
                 </a:solidFill>
                 <a:latin typeface="Arial" pitchFamily="34" charset="0"/>
                 <a:ea typeface="Arial" pitchFamily="34" charset="-122"/>
@@ -21736,7 +21736,7 @@
             <a:r>
               <a:rPr lang="en-US" sz="1200" b="1" dirty="0">
                 <a:solidFill>
-                  <a:srgbClr val="9A9A9A"/>
+                  <a:srgbClr val="666666"/>
                 </a:solidFill>
                 <a:latin typeface="Arial" pitchFamily="34" charset="0"/>
                 <a:ea typeface="Arial" pitchFamily="34" charset="-122"/>
@@ -21775,7 +21775,7 @@
             <a:r>
               <a:rPr lang="en-US" sz="1800" b="1" dirty="0">
                 <a:solidFill>
-                  <a:srgbClr val="FFFFFF"/>
+                  <a:srgbClr val="000000"/>
                 </a:solidFill>
                 <a:latin typeface="Arial" pitchFamily="34" charset="0"/>
                 <a:ea typeface="Arial" pitchFamily="34" charset="-122"/>
@@ -21804,7 +21804,7 @@
           <a:noFill/>
           <a:ln w="12700">
             <a:solidFill>
-              <a:srgbClr val="4A4A4A"/>
+              <a:srgbClr val="E0E0E0"/>
             </a:solidFill>
             <a:prstDash val="solid"/>
           </a:ln>
@@ -21837,7 +21837,7 @@
             <a:r>
               <a:rPr lang="en-US" sz="850" b="1" dirty="0">
                 <a:solidFill>
-                  <a:srgbClr val="9A9A9A"/>
+                  <a:srgbClr val="666666"/>
                 </a:solidFill>
                 <a:latin typeface="Arial" pitchFamily="34" charset="0"/>
                 <a:ea typeface="Arial" pitchFamily="34" charset="-122"/>
@@ -21876,7 +21876,7 @@
             <a:r>
               <a:rPr lang="en-US" sz="850" b="1" dirty="0">
                 <a:solidFill>
-                  <a:srgbClr val="9A9A9A"/>
+                  <a:srgbClr val="666666"/>
                 </a:solidFill>
                 <a:latin typeface="Arial" pitchFamily="34" charset="0"/>
                 <a:ea typeface="Arial" pitchFamily="34" charset="-122"/>
@@ -21903,11 +21903,11 @@
             <a:avLst/>
           </a:prstGeom>
           <a:solidFill>
-            <a:srgbClr val="1F1F1F"/>
+            <a:srgbClr val="F8F9FA"/>
           </a:solidFill>
           <a:ln w="12700">
             <a:solidFill>
-              <a:srgbClr val="4A4A4A"/>
+              <a:srgbClr val="E0E0E0"/>
             </a:solidFill>
             <a:prstDash val="solid"/>
           </a:ln>
@@ -21928,11 +21928,11 @@
             <a:avLst/>
           </a:prstGeom>
           <a:solidFill>
-            <a:srgbClr val="1F1F1F"/>
+            <a:srgbClr val="F8F9FA"/>
           </a:solidFill>
           <a:ln w="12700">
             <a:solidFill>
-              <a:srgbClr val="4A4A4A"/>
+              <a:srgbClr val="E0E0E0"/>
             </a:solidFill>
             <a:prstDash val="solid"/>
           </a:ln>
@@ -21965,7 +21965,7 @@
             <a:r>
               <a:rPr lang="en-US" sz="1100" b="1" dirty="0">
                 <a:solidFill>
-                  <a:srgbClr val="FFFFFF"/>
+                  <a:srgbClr val="000000"/>
                 </a:solidFill>
                 <a:latin typeface="Arial" pitchFamily="34" charset="0"/>
                 <a:ea typeface="Arial" pitchFamily="34" charset="-122"/>
@@ -22007,7 +22007,7 @@
             <a:r>
               <a:rPr lang="en-US" sz="820" b="1" dirty="0">
                 <a:solidFill>
-                  <a:srgbClr val="FFFFFF"/>
+                  <a:srgbClr val="000000"/>
                 </a:solidFill>
                 <a:latin typeface="Arial" pitchFamily="34" charset="0"/>
                 <a:ea typeface="Arial" pitchFamily="34" charset="-122"/>
@@ -22025,7 +22025,7 @@
             <a:r>
               <a:rPr lang="en-US" sz="820" dirty="0">
                 <a:solidFill>
-                  <a:srgbClr val="D9D9D9"/>
+                  <a:srgbClr val="333333"/>
                 </a:solidFill>
                 <a:latin typeface="Arial" pitchFamily="34" charset="0"/>
                 <a:ea typeface="Arial" pitchFamily="34" charset="-122"/>
@@ -22043,7 +22043,7 @@
             <a:r>
               <a:rPr lang="en-US" sz="820" b="1" dirty="0">
                 <a:solidFill>
-                  <a:srgbClr val="4A90E2"/>
+                  <a:srgbClr val="1976D2"/>
                 </a:solidFill>
                 <a:latin typeface="Courier New" pitchFamily="34" charset="0"/>
                 <a:ea typeface="Courier New" pitchFamily="34" charset="-122"/>
@@ -22061,7 +22061,7 @@
             <a:r>
               <a:rPr lang="en-US" sz="820" b="1" dirty="0">
                 <a:solidFill>
-                  <a:srgbClr val="FFFFFF"/>
+                  <a:srgbClr val="000000"/>
                 </a:solidFill>
                 <a:latin typeface="Arial" pitchFamily="34" charset="0"/>
                 <a:ea typeface="Arial" pitchFamily="34" charset="-122"/>
@@ -22079,7 +22079,7 @@
             <a:r>
               <a:rPr lang="en-US" sz="820" dirty="0">
                 <a:solidFill>
-                  <a:srgbClr val="D9D9D9"/>
+                  <a:srgbClr val="333333"/>
                 </a:solidFill>
                 <a:latin typeface="Arial" pitchFamily="34" charset="0"/>
                 <a:ea typeface="Arial" pitchFamily="34" charset="-122"/>
@@ -22097,7 +22097,7 @@
             <a:r>
               <a:rPr lang="en-US" sz="820" b="1" dirty="0">
                 <a:solidFill>
-                  <a:srgbClr val="FFFFFF"/>
+                  <a:srgbClr val="000000"/>
                 </a:solidFill>
                 <a:latin typeface="Arial" pitchFamily="34" charset="0"/>
                 <a:ea typeface="Arial" pitchFamily="34" charset="-122"/>
@@ -22115,7 +22115,7 @@
             <a:r>
               <a:rPr lang="en-US" sz="820" dirty="0">
                 <a:solidFill>
-                  <a:srgbClr val="D9D9D9"/>
+                  <a:srgbClr val="333333"/>
                 </a:solidFill>
                 <a:latin typeface="Arial" pitchFamily="34" charset="0"/>
                 <a:ea typeface="Arial" pitchFamily="34" charset="-122"/>
@@ -22154,7 +22154,7 @@
             <a:r>
               <a:rPr lang="en-US" sz="1100" b="1" dirty="0">
                 <a:solidFill>
-                  <a:srgbClr val="FFFFFF"/>
+                  <a:srgbClr val="000000"/>
                 </a:solidFill>
                 <a:latin typeface="Arial" pitchFamily="34" charset="0"/>
                 <a:ea typeface="Arial" pitchFamily="34" charset="-122"/>
@@ -22196,7 +22196,7 @@
             <a:r>
               <a:rPr lang="en-US" sz="820" b="1" dirty="0">
                 <a:solidFill>
-                  <a:srgbClr val="4EAF51"/>
+                  <a:srgbClr val="2E7D32"/>
                 </a:solidFill>
                 <a:latin typeface="Arial" pitchFamily="34" charset="0"/>
                 <a:ea typeface="Arial" pitchFamily="34" charset="-122"/>
@@ -22214,7 +22214,7 @@
             <a:r>
               <a:rPr lang="en-US" sz="820" dirty="0">
                 <a:solidFill>
-                  <a:srgbClr val="D9D9D9"/>
+                  <a:srgbClr val="333333"/>
                 </a:solidFill>
                 <a:latin typeface="Arial" pitchFamily="34" charset="0"/>
                 <a:ea typeface="Arial" pitchFamily="34" charset="-122"/>
@@ -22232,7 +22232,7 @@
             <a:r>
               <a:rPr lang="en-US" sz="820" b="1" dirty="0">
                 <a:solidFill>
-                  <a:srgbClr val="FFFFFF"/>
+                  <a:srgbClr val="000000"/>
                 </a:solidFill>
                 <a:latin typeface="Arial" pitchFamily="34" charset="0"/>
                 <a:ea typeface="Arial" pitchFamily="34" charset="-122"/>
@@ -22250,7 +22250,7 @@
             <a:r>
               <a:rPr lang="en-US" sz="820" dirty="0">
                 <a:solidFill>
-                  <a:srgbClr val="D9D9D9"/>
+                  <a:srgbClr val="333333"/>
                 </a:solidFill>
                 <a:latin typeface="Arial" pitchFamily="34" charset="0"/>
                 <a:ea typeface="Arial" pitchFamily="34" charset="-122"/>
@@ -22268,7 +22268,7 @@
             <a:r>
               <a:rPr lang="en-US" sz="820" b="1" dirty="0">
                 <a:solidFill>
-                  <a:srgbClr val="FFFFFF"/>
+                  <a:srgbClr val="000000"/>
                 </a:solidFill>
                 <a:latin typeface="Arial" pitchFamily="34" charset="0"/>
                 <a:ea typeface="Arial" pitchFamily="34" charset="-122"/>
@@ -22286,7 +22286,7 @@
             <a:r>
               <a:rPr lang="en-US" sz="820" dirty="0">
                 <a:solidFill>
-                  <a:srgbClr val="D9D9D9"/>
+                  <a:srgbClr val="333333"/>
                 </a:solidFill>
                 <a:latin typeface="Arial" pitchFamily="34" charset="0"/>
                 <a:ea typeface="Arial" pitchFamily="34" charset="-122"/>
@@ -22312,7 +22312,7 @@
     <p:bg>
       <p:bgPr>
         <a:solidFill>
-          <a:srgbClr val="0A0A0A"/>
+          <a:srgbClr val="FFFFFF"/>
         </a:solidFill>
       </p:bgPr>
     </p:bg>
@@ -22347,7 +22347,7 @@
           <a:noFill/>
           <a:ln w="12700">
             <a:solidFill>
-              <a:srgbClr val="4A4A4A"/>
+              <a:srgbClr val="E0E0E0"/>
             </a:solidFill>
             <a:prstDash val="solid"/>
           </a:ln>
@@ -22380,7 +22380,7 @@
             <a:r>
               <a:rPr lang="en-US" sz="900" b="1" dirty="0">
                 <a:solidFill>
-                  <a:srgbClr val="9A9A9A"/>
+                  <a:srgbClr val="666666"/>
                 </a:solidFill>
                 <a:latin typeface="Arial" pitchFamily="34" charset="0"/>
                 <a:ea typeface="Arial" pitchFamily="34" charset="-122"/>
@@ -22419,7 +22419,7 @@
             <a:r>
               <a:rPr lang="en-US" sz="900" b="1" dirty="0">
                 <a:solidFill>
-                  <a:srgbClr val="9A9A9A"/>
+                  <a:srgbClr val="666666"/>
                 </a:solidFill>
                 <a:latin typeface="Arial" pitchFamily="34" charset="0"/>
                 <a:ea typeface="Arial" pitchFamily="34" charset="-122"/>
@@ -22458,7 +22458,7 @@
             <a:r>
               <a:rPr lang="en-US" sz="1200" b="1" dirty="0">
                 <a:solidFill>
-                  <a:srgbClr val="9A9A9A"/>
+                  <a:srgbClr val="666666"/>
                 </a:solidFill>
                 <a:latin typeface="Arial" pitchFamily="34" charset="0"/>
                 <a:ea typeface="Arial" pitchFamily="34" charset="-122"/>
@@ -22497,7 +22497,7 @@
             <a:r>
               <a:rPr lang="en-US" sz="1800" b="1" dirty="0">
                 <a:solidFill>
-                  <a:srgbClr val="FFFFFF"/>
+                  <a:srgbClr val="000000"/>
                 </a:solidFill>
                 <a:latin typeface="Arial" pitchFamily="34" charset="0"/>
                 <a:ea typeface="Arial" pitchFamily="34" charset="-122"/>
@@ -22526,7 +22526,7 @@
           <a:noFill/>
           <a:ln w="12700">
             <a:solidFill>
-              <a:srgbClr val="4A4A4A"/>
+              <a:srgbClr val="E0E0E0"/>
             </a:solidFill>
             <a:prstDash val="solid"/>
           </a:ln>
@@ -22559,7 +22559,7 @@
             <a:r>
               <a:rPr lang="en-US" sz="850" b="1" dirty="0">
                 <a:solidFill>
-                  <a:srgbClr val="9A9A9A"/>
+                  <a:srgbClr val="666666"/>
                 </a:solidFill>
                 <a:latin typeface="Arial" pitchFamily="34" charset="0"/>
                 <a:ea typeface="Arial" pitchFamily="34" charset="-122"/>
@@ -22598,7 +22598,7 @@
             <a:r>
               <a:rPr lang="en-US" sz="850" b="1" dirty="0">
                 <a:solidFill>
-                  <a:srgbClr val="9A9A9A"/>
+                  <a:srgbClr val="666666"/>
                 </a:solidFill>
                 <a:latin typeface="Arial" pitchFamily="34" charset="0"/>
                 <a:ea typeface="Arial" pitchFamily="34" charset="-122"/>
@@ -22625,11 +22625,11 @@
             <a:avLst/>
           </a:prstGeom>
           <a:solidFill>
-            <a:srgbClr val="1F1F1F"/>
+            <a:srgbClr val="F8F9FA"/>
           </a:solidFill>
           <a:ln w="12700">
             <a:solidFill>
-              <a:srgbClr val="4A4A4A"/>
+              <a:srgbClr val="E0E0E0"/>
             </a:solidFill>
             <a:prstDash val="solid"/>
           </a:ln>
@@ -22665,7 +22665,7 @@
             <a:r>
               <a:rPr lang="en-US" sz="1000" b="1" dirty="0">
                 <a:solidFill>
-                  <a:srgbClr val="FFFFFF"/>
+                  <a:srgbClr val="000000"/>
                 </a:solidFill>
                 <a:latin typeface="Arial" pitchFamily="34" charset="0"/>
                 <a:ea typeface="Arial" pitchFamily="34" charset="-122"/>
@@ -22683,7 +22683,7 @@
             <a:r>
               <a:rPr lang="en-US" sz="850" b="1" dirty="0">
                 <a:solidFill>
-                  <a:srgbClr val="9A9A9A"/>
+                  <a:srgbClr val="666666"/>
                 </a:solidFill>
                 <a:latin typeface="Arial" pitchFamily="34" charset="0"/>
                 <a:ea typeface="Arial" pitchFamily="34" charset="-122"/>
@@ -22701,7 +22701,7 @@
             <a:r>
               <a:rPr lang="en-US" sz="850" dirty="0">
                 <a:solidFill>
-                  <a:srgbClr val="D9D9D9"/>
+                  <a:srgbClr val="333333"/>
                 </a:solidFill>
                 <a:latin typeface="Arial" pitchFamily="34" charset="0"/>
                 <a:ea typeface="Arial" pitchFamily="34" charset="-122"/>
@@ -22719,7 +22719,7 @@
             <a:r>
               <a:rPr lang="en-US" sz="850" b="1" dirty="0">
                 <a:solidFill>
-                  <a:srgbClr val="4EAF51"/>
+                  <a:srgbClr val="2E7D32"/>
                 </a:solidFill>
                 <a:latin typeface="Arial" pitchFamily="34" charset="0"/>
                 <a:ea typeface="Arial" pitchFamily="34" charset="-122"/>
@@ -22737,7 +22737,7 @@
             <a:r>
               <a:rPr lang="en-US" sz="850" b="1" dirty="0">
                 <a:solidFill>
-                  <a:srgbClr val="FFFFFF"/>
+                  <a:srgbClr val="000000"/>
                 </a:solidFill>
                 <a:latin typeface="Arial" pitchFamily="34" charset="0"/>
                 <a:ea typeface="Arial" pitchFamily="34" charset="-122"/>
@@ -22755,7 +22755,7 @@
             <a:r>
               <a:rPr lang="en-US" sz="850" b="1" dirty="0">
                 <a:solidFill>
-                  <a:srgbClr val="E05252"/>
+                  <a:srgbClr val="D32F2F"/>
                 </a:solidFill>
                 <a:latin typeface="Arial" pitchFamily="34" charset="0"/>
                 <a:ea typeface="Arial" pitchFamily="34" charset="-122"/>
@@ -22773,7 +22773,7 @@
             <a:r>
               <a:rPr lang="en-US" sz="850" dirty="0">
                 <a:solidFill>
-                  <a:srgbClr val="D9D9D9"/>
+                  <a:srgbClr val="333333"/>
                 </a:solidFill>
                 <a:latin typeface="Arial" pitchFamily="34" charset="0"/>
                 <a:ea typeface="Arial" pitchFamily="34" charset="-122"/>
@@ -22799,7 +22799,7 @@
     <p:bg>
       <p:bgPr>
         <a:solidFill>
-          <a:srgbClr val="0A0A0A"/>
+          <a:srgbClr val="FFFFFF"/>
         </a:solidFill>
       </p:bgPr>
     </p:bg>
@@ -22834,7 +22834,7 @@
           <a:noFill/>
           <a:ln w="12700">
             <a:solidFill>
-              <a:srgbClr val="4A4A4A"/>
+              <a:srgbClr val="E0E0E0"/>
             </a:solidFill>
             <a:prstDash val="solid"/>
           </a:ln>
@@ -22867,7 +22867,7 @@
             <a:r>
               <a:rPr lang="en-US" sz="900" b="1" dirty="0">
                 <a:solidFill>
-                  <a:srgbClr val="9A9A9A"/>
+                  <a:srgbClr val="666666"/>
                 </a:solidFill>
                 <a:latin typeface="Arial" pitchFamily="34" charset="0"/>
                 <a:ea typeface="Arial" pitchFamily="34" charset="-122"/>
@@ -22906,7 +22906,7 @@
             <a:r>
               <a:rPr lang="en-US" sz="900" b="1" dirty="0">
                 <a:solidFill>
-                  <a:srgbClr val="9A9A9A"/>
+                  <a:srgbClr val="666666"/>
                 </a:solidFill>
                 <a:latin typeface="Arial" pitchFamily="34" charset="0"/>
                 <a:ea typeface="Arial" pitchFamily="34" charset="-122"/>
@@ -22945,7 +22945,7 @@
             <a:r>
               <a:rPr lang="en-US" sz="1200" b="1" dirty="0">
                 <a:solidFill>
-                  <a:srgbClr val="9A9A9A"/>
+                  <a:srgbClr val="666666"/>
                 </a:solidFill>
                 <a:latin typeface="Arial" pitchFamily="34" charset="0"/>
                 <a:ea typeface="Arial" pitchFamily="34" charset="-122"/>
@@ -22984,7 +22984,7 @@
             <a:r>
               <a:rPr lang="en-US" sz="1800" b="1" dirty="0">
                 <a:solidFill>
-                  <a:srgbClr val="FFFFFF"/>
+                  <a:srgbClr val="000000"/>
                 </a:solidFill>
                 <a:latin typeface="Arial" pitchFamily="34" charset="0"/>
                 <a:ea typeface="Arial" pitchFamily="34" charset="-122"/>
@@ -23013,7 +23013,7 @@
           <a:noFill/>
           <a:ln w="12700">
             <a:solidFill>
-              <a:srgbClr val="4A4A4A"/>
+              <a:srgbClr val="E0E0E0"/>
             </a:solidFill>
             <a:prstDash val="solid"/>
           </a:ln>
@@ -23046,7 +23046,7 @@
             <a:r>
               <a:rPr lang="en-US" sz="850" b="1" dirty="0">
                 <a:solidFill>
-                  <a:srgbClr val="9A9A9A"/>
+                  <a:srgbClr val="666666"/>
                 </a:solidFill>
                 <a:latin typeface="Arial" pitchFamily="34" charset="0"/>
                 <a:ea typeface="Arial" pitchFamily="34" charset="-122"/>
@@ -23085,7 +23085,7 @@
             <a:r>
               <a:rPr lang="en-US" sz="850" b="1" dirty="0">
                 <a:solidFill>
-                  <a:srgbClr val="9A9A9A"/>
+                  <a:srgbClr val="666666"/>
                 </a:solidFill>
                 <a:latin typeface="Arial" pitchFamily="34" charset="0"/>
                 <a:ea typeface="Arial" pitchFamily="34" charset="-122"/>
@@ -23112,11 +23112,11 @@
             <a:avLst/>
           </a:prstGeom>
           <a:solidFill>
-            <a:srgbClr val="1F1F1F"/>
+            <a:srgbClr val="F8F9FA"/>
           </a:solidFill>
           <a:ln w="12700">
             <a:solidFill>
-              <a:srgbClr val="4A4A4A"/>
+              <a:srgbClr val="E0E0E0"/>
             </a:solidFill>
             <a:prstDash val="solid"/>
           </a:ln>
@@ -23149,7 +23149,7 @@
             <a:r>
               <a:rPr lang="en-US" sz="850" b="1" dirty="0">
                 <a:solidFill>
-                  <a:srgbClr val="FFFFFF"/>
+                  <a:srgbClr val="000000"/>
                 </a:solidFill>
                 <a:latin typeface="Arial" pitchFamily="34" charset="0"/>
                 <a:ea typeface="Arial" pitchFamily="34" charset="-122"/>
@@ -23188,7 +23188,7 @@
             <a:r>
               <a:rPr lang="en-US" sz="1300" b="1" dirty="0">
                 <a:solidFill>
-                  <a:srgbClr val="FFFFFF"/>
+                  <a:srgbClr val="000000"/>
                 </a:solidFill>
                 <a:latin typeface="Arial" pitchFamily="34" charset="0"/>
                 <a:ea typeface="Arial" pitchFamily="34" charset="-122"/>
@@ -23227,7 +23227,7 @@
             <a:r>
               <a:rPr lang="en-US" sz="750" dirty="0">
                 <a:solidFill>
-                  <a:srgbClr val="9A9A9A"/>
+                  <a:srgbClr val="666666"/>
                 </a:solidFill>
                 <a:latin typeface="Arial" pitchFamily="34" charset="0"/>
                 <a:ea typeface="Arial" pitchFamily="34" charset="-122"/>
@@ -23266,7 +23266,7 @@
             <a:r>
               <a:rPr lang="en-US" sz="750" b="1" dirty="0">
                 <a:solidFill>
-                  <a:srgbClr val="4EAF51"/>
+                  <a:srgbClr val="2E7D32"/>
                 </a:solidFill>
                 <a:latin typeface="Arial" pitchFamily="34" charset="0"/>
                 <a:ea typeface="Arial" pitchFamily="34" charset="-122"/>
@@ -23308,7 +23308,7 @@
             <a:r>
               <a:rPr lang="en-US" sz="720" dirty="0">
                 <a:solidFill>
-                  <a:srgbClr val="D9D9D9"/>
+                  <a:srgbClr val="333333"/>
                 </a:solidFill>
                 <a:latin typeface="Arial" pitchFamily="34" charset="0"/>
                 <a:ea typeface="Arial" pitchFamily="34" charset="-122"/>
@@ -23339,7 +23339,7 @@
           </a:solidFill>
           <a:ln w="25400">
             <a:solidFill>
-              <a:srgbClr val="4A90E2"/>
+              <a:srgbClr val="1976D2"/>
             </a:solidFill>
             <a:prstDash val="solid"/>
           </a:ln>
@@ -23372,7 +23372,7 @@
             <a:r>
               <a:rPr lang="en-US" sz="850" b="1" dirty="0">
                 <a:solidFill>
-                  <a:srgbClr val="4A90E2"/>
+                  <a:srgbClr val="1976D2"/>
                 </a:solidFill>
                 <a:latin typeface="Arial" pitchFamily="34" charset="0"/>
                 <a:ea typeface="Arial" pitchFamily="34" charset="-122"/>
@@ -23411,7 +23411,7 @@
             <a:r>
               <a:rPr lang="en-US" sz="1300" b="1" dirty="0">
                 <a:solidFill>
-                  <a:srgbClr val="FFFFFF"/>
+                  <a:srgbClr val="000000"/>
                 </a:solidFill>
                 <a:latin typeface="Arial" pitchFamily="34" charset="0"/>
                 <a:ea typeface="Arial" pitchFamily="34" charset="-122"/>
@@ -23450,7 +23450,7 @@
             <a:r>
               <a:rPr lang="en-US" sz="750" dirty="0">
                 <a:solidFill>
-                  <a:srgbClr val="9A9A9A"/>
+                  <a:srgbClr val="666666"/>
                 </a:solidFill>
                 <a:latin typeface="Arial" pitchFamily="34" charset="0"/>
                 <a:ea typeface="Arial" pitchFamily="34" charset="-122"/>
@@ -23489,7 +23489,7 @@
             <a:r>
               <a:rPr lang="en-US" sz="750" b="1" dirty="0">
                 <a:solidFill>
-                  <a:srgbClr val="4A90E2"/>
+                  <a:srgbClr val="1976D2"/>
                 </a:solidFill>
                 <a:latin typeface="Arial" pitchFamily="34" charset="0"/>
                 <a:ea typeface="Arial" pitchFamily="34" charset="-122"/>
@@ -23531,7 +23531,7 @@
             <a:r>
               <a:rPr lang="en-US" sz="720" dirty="0">
                 <a:solidFill>
-                  <a:srgbClr val="D9D9D9"/>
+                  <a:srgbClr val="333333"/>
                 </a:solidFill>
                 <a:latin typeface="Arial" pitchFamily="34" charset="0"/>
                 <a:ea typeface="Arial" pitchFamily="34" charset="-122"/>
@@ -23558,11 +23558,11 @@
             <a:avLst/>
           </a:prstGeom>
           <a:solidFill>
-            <a:srgbClr val="1F1F1F"/>
+            <a:srgbClr val="F8F9FA"/>
           </a:solidFill>
           <a:ln w="12700">
             <a:solidFill>
-              <a:srgbClr val="4A4A4A"/>
+              <a:srgbClr val="E0E0E0"/>
             </a:solidFill>
             <a:prstDash val="solid"/>
           </a:ln>
@@ -23595,7 +23595,7 @@
             <a:r>
               <a:rPr lang="en-US" sz="850" b="1" dirty="0">
                 <a:solidFill>
-                  <a:srgbClr val="FFFFFF"/>
+                  <a:srgbClr val="000000"/>
                 </a:solidFill>
                 <a:latin typeface="Arial" pitchFamily="34" charset="0"/>
                 <a:ea typeface="Arial" pitchFamily="34" charset="-122"/>
@@ -23634,7 +23634,7 @@
             <a:r>
               <a:rPr lang="en-US" sz="1300" b="1" dirty="0">
                 <a:solidFill>
-                  <a:srgbClr val="FFFFFF"/>
+                  <a:srgbClr val="000000"/>
                 </a:solidFill>
                 <a:latin typeface="Arial" pitchFamily="34" charset="0"/>
                 <a:ea typeface="Arial" pitchFamily="34" charset="-122"/>
@@ -23673,7 +23673,7 @@
             <a:r>
               <a:rPr lang="en-US" sz="750" dirty="0">
                 <a:solidFill>
-                  <a:srgbClr val="9A9A9A"/>
+                  <a:srgbClr val="666666"/>
                 </a:solidFill>
                 <a:latin typeface="Arial" pitchFamily="34" charset="0"/>
                 <a:ea typeface="Arial" pitchFamily="34" charset="-122"/>
@@ -23712,7 +23712,7 @@
             <a:r>
               <a:rPr lang="en-US" sz="750" b="1" dirty="0">
                 <a:solidFill>
-                  <a:srgbClr val="9A9A9A"/>
+                  <a:srgbClr val="666666"/>
                 </a:solidFill>
                 <a:latin typeface="Arial" pitchFamily="34" charset="0"/>
                 <a:ea typeface="Arial" pitchFamily="34" charset="-122"/>
@@ -23754,7 +23754,7 @@
             <a:r>
               <a:rPr lang="en-US" sz="720" dirty="0">
                 <a:solidFill>
-                  <a:srgbClr val="D9D9D9"/>
+                  <a:srgbClr val="333333"/>
                 </a:solidFill>
                 <a:latin typeface="Arial" pitchFamily="34" charset="0"/>
                 <a:ea typeface="Arial" pitchFamily="34" charset="-122"/>
@@ -23781,11 +23781,11 @@
             <a:avLst/>
           </a:prstGeom>
           <a:solidFill>
-            <a:srgbClr val="1F1F1F"/>
+            <a:srgbClr val="F8F9FA"/>
           </a:solidFill>
           <a:ln w="12700">
             <a:solidFill>
-              <a:srgbClr val="4A4A4A"/>
+              <a:srgbClr val="E0E0E0"/>
             </a:solidFill>
             <a:prstDash val="solid"/>
           </a:ln>
@@ -23818,7 +23818,7 @@
             <a:r>
               <a:rPr lang="en-US" sz="850" b="1" dirty="0">
                 <a:solidFill>
-                  <a:srgbClr val="FFFFFF"/>
+                  <a:srgbClr val="000000"/>
                 </a:solidFill>
                 <a:latin typeface="Arial" pitchFamily="34" charset="0"/>
                 <a:ea typeface="Arial" pitchFamily="34" charset="-122"/>
@@ -23857,7 +23857,7 @@
             <a:r>
               <a:rPr lang="en-US" sz="1300" b="1" dirty="0">
                 <a:solidFill>
-                  <a:srgbClr val="FFFFFF"/>
+                  <a:srgbClr val="000000"/>
                 </a:solidFill>
                 <a:latin typeface="Arial" pitchFamily="34" charset="0"/>
                 <a:ea typeface="Arial" pitchFamily="34" charset="-122"/>
@@ -23896,7 +23896,7 @@
             <a:r>
               <a:rPr lang="en-US" sz="750" dirty="0">
                 <a:solidFill>
-                  <a:srgbClr val="9A9A9A"/>
+                  <a:srgbClr val="666666"/>
                 </a:solidFill>
                 <a:latin typeface="Arial" pitchFamily="34" charset="0"/>
                 <a:ea typeface="Arial" pitchFamily="34" charset="-122"/>
@@ -23935,7 +23935,7 @@
             <a:r>
               <a:rPr lang="en-US" sz="750" b="1" dirty="0">
                 <a:solidFill>
-                  <a:srgbClr val="9A9A9A"/>
+                  <a:srgbClr val="666666"/>
                 </a:solidFill>
                 <a:latin typeface="Arial" pitchFamily="34" charset="0"/>
                 <a:ea typeface="Arial" pitchFamily="34" charset="-122"/>
@@ -23977,7 +23977,7 @@
             <a:r>
               <a:rPr lang="en-US" sz="720" dirty="0">
                 <a:solidFill>
-                  <a:srgbClr val="D9D9D9"/>
+                  <a:srgbClr val="333333"/>
                 </a:solidFill>
                 <a:latin typeface="Arial" pitchFamily="34" charset="0"/>
                 <a:ea typeface="Arial" pitchFamily="34" charset="-122"/>
@@ -24004,11 +24004,11 @@
             <a:avLst/>
           </a:prstGeom>
           <a:solidFill>
-            <a:srgbClr val="1F1F1F"/>
+            <a:srgbClr val="F8F9FA"/>
           </a:solidFill>
           <a:ln w="12700">
             <a:solidFill>
-              <a:srgbClr val="4A4A4A"/>
+              <a:srgbClr val="E0E0E0"/>
             </a:solidFill>
             <a:prstDash val="solid"/>
           </a:ln>
@@ -24041,7 +24041,7 @@
             <a:r>
               <a:rPr lang="en-US" sz="850" b="1" dirty="0">
                 <a:solidFill>
-                  <a:srgbClr val="FFFFFF"/>
+                  <a:srgbClr val="000000"/>
                 </a:solidFill>
                 <a:latin typeface="Arial" pitchFamily="34" charset="0"/>
                 <a:ea typeface="Arial" pitchFamily="34" charset="-122"/>
@@ -24080,7 +24080,7 @@
             <a:r>
               <a:rPr lang="en-US" sz="1300" b="1" dirty="0">
                 <a:solidFill>
-                  <a:srgbClr val="FFFFFF"/>
+                  <a:srgbClr val="000000"/>
                 </a:solidFill>
                 <a:latin typeface="Arial" pitchFamily="34" charset="0"/>
                 <a:ea typeface="Arial" pitchFamily="34" charset="-122"/>
@@ -24119,7 +24119,7 @@
             <a:r>
               <a:rPr lang="en-US" sz="750" dirty="0">
                 <a:solidFill>
-                  <a:srgbClr val="9A9A9A"/>
+                  <a:srgbClr val="666666"/>
                 </a:solidFill>
                 <a:latin typeface="Arial" pitchFamily="34" charset="0"/>
                 <a:ea typeface="Arial" pitchFamily="34" charset="-122"/>
@@ -24158,7 +24158,7 @@
             <a:r>
               <a:rPr lang="en-US" sz="750" b="1" dirty="0">
                 <a:solidFill>
-                  <a:srgbClr val="9A9A9A"/>
+                  <a:srgbClr val="666666"/>
                 </a:solidFill>
                 <a:latin typeface="Arial" pitchFamily="34" charset="0"/>
                 <a:ea typeface="Arial" pitchFamily="34" charset="-122"/>
@@ -24200,7 +24200,7 @@
             <a:r>
               <a:rPr lang="en-US" sz="720" dirty="0">
                 <a:solidFill>
-                  <a:srgbClr val="D9D9D9"/>
+                  <a:srgbClr val="333333"/>
                 </a:solidFill>
                 <a:latin typeface="Arial" pitchFamily="34" charset="0"/>
                 <a:ea typeface="Arial" pitchFamily="34" charset="-122"/>
@@ -24227,11 +24227,11 @@
             <a:avLst/>
           </a:prstGeom>
           <a:solidFill>
-            <a:srgbClr val="1F1F1F"/>
+            <a:srgbClr val="F8F9FA"/>
           </a:solidFill>
           <a:ln w="12700">
             <a:solidFill>
-              <a:srgbClr val="4A4A4A"/>
+              <a:srgbClr val="E0E0E0"/>
             </a:solidFill>
             <a:prstDash val="solid"/>
           </a:ln>
@@ -24264,7 +24264,7 @@
             <a:r>
               <a:rPr lang="en-US" sz="850" b="1" dirty="0">
                 <a:solidFill>
-                  <a:srgbClr val="FFFFFF"/>
+                  <a:srgbClr val="000000"/>
                 </a:solidFill>
                 <a:latin typeface="Arial" pitchFamily="34" charset="0"/>
                 <a:ea typeface="Arial" pitchFamily="34" charset="-122"/>
@@ -24303,7 +24303,7 @@
             <a:r>
               <a:rPr lang="en-US" sz="1300" b="1" dirty="0">
                 <a:solidFill>
-                  <a:srgbClr val="FFFFFF"/>
+                  <a:srgbClr val="000000"/>
                 </a:solidFill>
                 <a:latin typeface="Arial" pitchFamily="34" charset="0"/>
                 <a:ea typeface="Arial" pitchFamily="34" charset="-122"/>
@@ -24342,7 +24342,7 @@
             <a:r>
               <a:rPr lang="en-US" sz="750" dirty="0">
                 <a:solidFill>
-                  <a:srgbClr val="9A9A9A"/>
+                  <a:srgbClr val="666666"/>
                 </a:solidFill>
                 <a:latin typeface="Arial" pitchFamily="34" charset="0"/>
                 <a:ea typeface="Arial" pitchFamily="34" charset="-122"/>
@@ -24381,7 +24381,7 @@
             <a:r>
               <a:rPr lang="en-US" sz="750" b="1" dirty="0">
                 <a:solidFill>
-                  <a:srgbClr val="9A9A9A"/>
+                  <a:srgbClr val="666666"/>
                 </a:solidFill>
                 <a:latin typeface="Arial" pitchFamily="34" charset="0"/>
                 <a:ea typeface="Arial" pitchFamily="34" charset="-122"/>
@@ -24423,7 +24423,7 @@
             <a:r>
               <a:rPr lang="en-US" sz="720" dirty="0">
                 <a:solidFill>
-                  <a:srgbClr val="D9D9D9"/>
+                  <a:srgbClr val="333333"/>
                 </a:solidFill>
                 <a:latin typeface="Arial" pitchFamily="34" charset="0"/>
                 <a:ea typeface="Arial" pitchFamily="34" charset="-122"/>
@@ -24449,7 +24449,7 @@
     <p:bg>
       <p:bgPr>
         <a:solidFill>
-          <a:srgbClr val="0A0A0A"/>
+          <a:srgbClr val="FFFFFF"/>
         </a:solidFill>
       </p:bgPr>
     </p:bg>
@@ -24484,7 +24484,7 @@
           <a:noFill/>
           <a:ln w="12700">
             <a:solidFill>
-              <a:srgbClr val="4A4A4A"/>
+              <a:srgbClr val="E0E0E0"/>
             </a:solidFill>
             <a:prstDash val="solid"/>
           </a:ln>
@@ -24517,7 +24517,7 @@
             <a:r>
               <a:rPr lang="en-US" sz="900" b="1" dirty="0">
                 <a:solidFill>
-                  <a:srgbClr val="9A9A9A"/>
+                  <a:srgbClr val="666666"/>
                 </a:solidFill>
                 <a:latin typeface="Arial" pitchFamily="34" charset="0"/>
                 <a:ea typeface="Arial" pitchFamily="34" charset="-122"/>
@@ -24556,7 +24556,7 @@
             <a:r>
               <a:rPr lang="en-US" sz="900" b="1" dirty="0">
                 <a:solidFill>
-                  <a:srgbClr val="9A9A9A"/>
+                  <a:srgbClr val="666666"/>
                 </a:solidFill>
                 <a:latin typeface="Arial" pitchFamily="34" charset="0"/>
                 <a:ea typeface="Arial" pitchFamily="34" charset="-122"/>
@@ -24595,7 +24595,7 @@
             <a:r>
               <a:rPr lang="en-US" sz="1200" b="1" dirty="0">
                 <a:solidFill>
-                  <a:srgbClr val="9A9A9A"/>
+                  <a:srgbClr val="666666"/>
                 </a:solidFill>
                 <a:latin typeface="Arial" pitchFamily="34" charset="0"/>
                 <a:ea typeface="Arial" pitchFamily="34" charset="-122"/>
@@ -24634,7 +24634,7 @@
             <a:r>
               <a:rPr lang="en-US" sz="1800" b="1" dirty="0">
                 <a:solidFill>
-                  <a:srgbClr val="FFFFFF"/>
+                  <a:srgbClr val="000000"/>
                 </a:solidFill>
                 <a:latin typeface="Arial" pitchFamily="34" charset="0"/>
                 <a:ea typeface="Arial" pitchFamily="34" charset="-122"/>
@@ -24663,7 +24663,7 @@
           <a:noFill/>
           <a:ln w="12700">
             <a:solidFill>
-              <a:srgbClr val="4A4A4A"/>
+              <a:srgbClr val="E0E0E0"/>
             </a:solidFill>
             <a:prstDash val="solid"/>
           </a:ln>
@@ -24696,7 +24696,7 @@
             <a:r>
               <a:rPr lang="en-US" sz="850" b="1" dirty="0">
                 <a:solidFill>
-                  <a:srgbClr val="9A9A9A"/>
+                  <a:srgbClr val="666666"/>
                 </a:solidFill>
                 <a:latin typeface="Arial" pitchFamily="34" charset="0"/>
                 <a:ea typeface="Arial" pitchFamily="34" charset="-122"/>
@@ -24735,7 +24735,7 @@
             <a:r>
               <a:rPr lang="en-US" sz="850" b="1" dirty="0">
                 <a:solidFill>
-                  <a:srgbClr val="9A9A9A"/>
+                  <a:srgbClr val="666666"/>
                 </a:solidFill>
                 <a:latin typeface="Arial" pitchFamily="34" charset="0"/>
                 <a:ea typeface="Arial" pitchFamily="34" charset="-122"/>
@@ -24762,11 +24762,11 @@
             <a:avLst/>
           </a:prstGeom>
           <a:solidFill>
-            <a:srgbClr val="1F1F1F"/>
+            <a:srgbClr val="F8F9FA"/>
           </a:solidFill>
           <a:ln w="12700">
             <a:solidFill>
-              <a:srgbClr val="4A4A4A"/>
+              <a:srgbClr val="E0E0E0"/>
             </a:solidFill>
             <a:prstDash val="solid"/>
           </a:ln>
@@ -24799,7 +24799,7 @@
             <a:r>
               <a:rPr lang="en-US" sz="950" b="1" dirty="0">
                 <a:solidFill>
-                  <a:srgbClr val="4A90E2"/>
+                  <a:srgbClr val="1976D2"/>
                 </a:solidFill>
                 <a:latin typeface="Arial" pitchFamily="34" charset="0"/>
                 <a:ea typeface="Arial" pitchFamily="34" charset="-122"/>
@@ -24838,7 +24838,7 @@
             <a:r>
               <a:rPr lang="en-US" sz="850" b="1" dirty="0">
                 <a:solidFill>
-                  <a:srgbClr val="FFFFFF"/>
+                  <a:srgbClr val="000000"/>
                 </a:solidFill>
                 <a:latin typeface="Arial" pitchFamily="34" charset="0"/>
                 <a:ea typeface="Arial" pitchFamily="34" charset="-122"/>
@@ -24880,7 +24880,7 @@
             <a:r>
               <a:rPr lang="en-US" sz="780" dirty="0">
                 <a:solidFill>
-                  <a:srgbClr val="D9D9D9"/>
+                  <a:srgbClr val="333333"/>
                 </a:solidFill>
                 <a:latin typeface="Arial" pitchFamily="34" charset="0"/>
                 <a:ea typeface="Arial" pitchFamily="34" charset="-122"/>
@@ -24900,7 +24900,7 @@
             <a:r>
               <a:rPr lang="en-US" sz="780" dirty="0">
                 <a:solidFill>
-                  <a:srgbClr val="D9D9D9"/>
+                  <a:srgbClr val="333333"/>
                 </a:solidFill>
                 <a:latin typeface="Arial" pitchFamily="34" charset="0"/>
                 <a:ea typeface="Arial" pitchFamily="34" charset="-122"/>
@@ -24920,7 +24920,7 @@
             <a:r>
               <a:rPr lang="en-US" sz="780" dirty="0">
                 <a:solidFill>
-                  <a:srgbClr val="D9D9D9"/>
+                  <a:srgbClr val="333333"/>
                 </a:solidFill>
                 <a:latin typeface="Arial" pitchFamily="34" charset="0"/>
                 <a:ea typeface="Arial" pitchFamily="34" charset="-122"/>
@@ -24940,7 +24940,7 @@
             <a:r>
               <a:rPr lang="en-US" sz="780" dirty="0">
                 <a:solidFill>
-                  <a:srgbClr val="D9D9D9"/>
+                  <a:srgbClr val="333333"/>
                 </a:solidFill>
                 <a:latin typeface="Arial" pitchFamily="34" charset="0"/>
                 <a:ea typeface="Arial" pitchFamily="34" charset="-122"/>
@@ -24960,7 +24960,7 @@
             <a:r>
               <a:rPr lang="en-US" sz="780" dirty="0">
                 <a:solidFill>
-                  <a:srgbClr val="D9D9D9"/>
+                  <a:srgbClr val="333333"/>
                 </a:solidFill>
                 <a:latin typeface="Arial" pitchFamily="34" charset="0"/>
                 <a:ea typeface="Arial" pitchFamily="34" charset="-122"/>
@@ -24987,11 +24987,11 @@
             <a:avLst/>
           </a:prstGeom>
           <a:solidFill>
-            <a:srgbClr val="1F1F1F"/>
+            <a:srgbClr val="F8F9FA"/>
           </a:solidFill>
           <a:ln w="12700">
             <a:solidFill>
-              <a:srgbClr val="4A4A4A"/>
+              <a:srgbClr val="E0E0E0"/>
             </a:solidFill>
             <a:prstDash val="solid"/>
           </a:ln>
@@ -25024,7 +25024,7 @@
             <a:r>
               <a:rPr lang="en-US" sz="950" b="1" dirty="0">
                 <a:solidFill>
-                  <a:srgbClr val="4A90E2"/>
+                  <a:srgbClr val="1976D2"/>
                 </a:solidFill>
                 <a:latin typeface="Arial" pitchFamily="34" charset="0"/>
                 <a:ea typeface="Arial" pitchFamily="34" charset="-122"/>
@@ -25063,7 +25063,7 @@
             <a:r>
               <a:rPr lang="en-US" sz="850" b="1" dirty="0">
                 <a:solidFill>
-                  <a:srgbClr val="FFFFFF"/>
+                  <a:srgbClr val="000000"/>
                 </a:solidFill>
                 <a:latin typeface="Arial" pitchFamily="34" charset="0"/>
                 <a:ea typeface="Arial" pitchFamily="34" charset="-122"/>
@@ -25105,7 +25105,7 @@
             <a:r>
               <a:rPr lang="en-US" sz="780" dirty="0">
                 <a:solidFill>
-                  <a:srgbClr val="D9D9D9"/>
+                  <a:srgbClr val="333333"/>
                 </a:solidFill>
                 <a:latin typeface="Arial" pitchFamily="34" charset="0"/>
                 <a:ea typeface="Arial" pitchFamily="34" charset="-122"/>
@@ -25125,7 +25125,7 @@
             <a:r>
               <a:rPr lang="en-US" sz="780" dirty="0">
                 <a:solidFill>
-                  <a:srgbClr val="D9D9D9"/>
+                  <a:srgbClr val="333333"/>
                 </a:solidFill>
                 <a:latin typeface="Arial" pitchFamily="34" charset="0"/>
                 <a:ea typeface="Arial" pitchFamily="34" charset="-122"/>
@@ -25145,7 +25145,7 @@
             <a:r>
               <a:rPr lang="en-US" sz="780" dirty="0">
                 <a:solidFill>
-                  <a:srgbClr val="D9D9D9"/>
+                  <a:srgbClr val="333333"/>
                 </a:solidFill>
                 <a:latin typeface="Arial" pitchFamily="34" charset="0"/>
                 <a:ea typeface="Arial" pitchFamily="34" charset="-122"/>
@@ -25165,7 +25165,7 @@
             <a:r>
               <a:rPr lang="en-US" sz="780" dirty="0">
                 <a:solidFill>
-                  <a:srgbClr val="D9D9D9"/>
+                  <a:srgbClr val="333333"/>
                 </a:solidFill>
                 <a:latin typeface="Arial" pitchFamily="34" charset="0"/>
                 <a:ea typeface="Arial" pitchFamily="34" charset="-122"/>
@@ -25185,7 +25185,7 @@
             <a:r>
               <a:rPr lang="en-US" sz="780" dirty="0">
                 <a:solidFill>
-                  <a:srgbClr val="D9D9D9"/>
+                  <a:srgbClr val="333333"/>
                 </a:solidFill>
                 <a:latin typeface="Arial" pitchFamily="34" charset="0"/>
                 <a:ea typeface="Arial" pitchFamily="34" charset="-122"/>
@@ -25212,11 +25212,11 @@
             <a:avLst/>
           </a:prstGeom>
           <a:solidFill>
-            <a:srgbClr val="1F1F1F"/>
+            <a:srgbClr val="F8F9FA"/>
           </a:solidFill>
           <a:ln w="12700">
             <a:solidFill>
-              <a:srgbClr val="4A4A4A"/>
+              <a:srgbClr val="E0E0E0"/>
             </a:solidFill>
             <a:prstDash val="solid"/>
           </a:ln>
@@ -25249,7 +25249,7 @@
             <a:r>
               <a:rPr lang="en-US" sz="950" b="1" dirty="0">
                 <a:solidFill>
-                  <a:srgbClr val="4A90E2"/>
+                  <a:srgbClr val="1976D2"/>
                 </a:solidFill>
                 <a:latin typeface="Arial" pitchFamily="34" charset="0"/>
                 <a:ea typeface="Arial" pitchFamily="34" charset="-122"/>
@@ -25288,7 +25288,7 @@
             <a:r>
               <a:rPr lang="en-US" sz="850" b="1" dirty="0">
                 <a:solidFill>
-                  <a:srgbClr val="FFFFFF"/>
+                  <a:srgbClr val="000000"/>
                 </a:solidFill>
                 <a:latin typeface="Arial" pitchFamily="34" charset="0"/>
                 <a:ea typeface="Arial" pitchFamily="34" charset="-122"/>
@@ -25330,7 +25330,7 @@
             <a:r>
               <a:rPr lang="en-US" sz="780" dirty="0">
                 <a:solidFill>
-                  <a:srgbClr val="D9D9D9"/>
+                  <a:srgbClr val="333333"/>
                 </a:solidFill>
                 <a:latin typeface="Arial" pitchFamily="34" charset="0"/>
                 <a:ea typeface="Arial" pitchFamily="34" charset="-122"/>
@@ -25350,7 +25350,7 @@
             <a:r>
               <a:rPr lang="en-US" sz="780" dirty="0">
                 <a:solidFill>
-                  <a:srgbClr val="D9D9D9"/>
+                  <a:srgbClr val="333333"/>
                 </a:solidFill>
                 <a:latin typeface="Arial" pitchFamily="34" charset="0"/>
                 <a:ea typeface="Arial" pitchFamily="34" charset="-122"/>
@@ -25370,7 +25370,7 @@
             <a:r>
               <a:rPr lang="en-US" sz="780" dirty="0">
                 <a:solidFill>
-                  <a:srgbClr val="D9D9D9"/>
+                  <a:srgbClr val="333333"/>
                 </a:solidFill>
                 <a:latin typeface="Arial" pitchFamily="34" charset="0"/>
                 <a:ea typeface="Arial" pitchFamily="34" charset="-122"/>
@@ -25390,7 +25390,7 @@
             <a:r>
               <a:rPr lang="en-US" sz="780" dirty="0">
                 <a:solidFill>
-                  <a:srgbClr val="D9D9D9"/>
+                  <a:srgbClr val="333333"/>
                 </a:solidFill>
                 <a:latin typeface="Arial" pitchFamily="34" charset="0"/>
                 <a:ea typeface="Arial" pitchFamily="34" charset="-122"/>
@@ -25410,7 +25410,7 @@
             <a:r>
               <a:rPr lang="en-US" sz="780" dirty="0">
                 <a:solidFill>
-                  <a:srgbClr val="D9D9D9"/>
+                  <a:srgbClr val="333333"/>
                 </a:solidFill>
                 <a:latin typeface="Arial" pitchFamily="34" charset="0"/>
                 <a:ea typeface="Arial" pitchFamily="34" charset="-122"/>
@@ -25436,7 +25436,7 @@
     <p:bg>
       <p:bgPr>
         <a:solidFill>
-          <a:srgbClr val="0A0A0A"/>
+          <a:srgbClr val="FFFFFF"/>
         </a:solidFill>
       </p:bgPr>
     </p:bg>
@@ -25471,7 +25471,7 @@
           <a:noFill/>
           <a:ln w="12700">
             <a:solidFill>
-              <a:srgbClr val="4A4A4A"/>
+              <a:srgbClr val="E0E0E0"/>
             </a:solidFill>
             <a:prstDash val="solid"/>
           </a:ln>
@@ -25504,7 +25504,7 @@
             <a:r>
               <a:rPr lang="en-US" sz="900" b="1" dirty="0">
                 <a:solidFill>
-                  <a:srgbClr val="9A9A9A"/>
+                  <a:srgbClr val="666666"/>
                 </a:solidFill>
                 <a:latin typeface="Arial" pitchFamily="34" charset="0"/>
                 <a:ea typeface="Arial" pitchFamily="34" charset="-122"/>
@@ -25543,7 +25543,7 @@
             <a:r>
               <a:rPr lang="en-US" sz="900" b="1" dirty="0">
                 <a:solidFill>
-                  <a:srgbClr val="9A9A9A"/>
+                  <a:srgbClr val="666666"/>
                 </a:solidFill>
                 <a:latin typeface="Arial" pitchFamily="34" charset="0"/>
                 <a:ea typeface="Arial" pitchFamily="34" charset="-122"/>
@@ -25582,7 +25582,7 @@
             <a:r>
               <a:rPr lang="en-US" sz="1200" b="1" dirty="0">
                 <a:solidFill>
-                  <a:srgbClr val="9A9A9A"/>
+                  <a:srgbClr val="666666"/>
                 </a:solidFill>
                 <a:latin typeface="Arial" pitchFamily="34" charset="0"/>
                 <a:ea typeface="Arial" pitchFamily="34" charset="-122"/>
@@ -25621,7 +25621,7 @@
             <a:r>
               <a:rPr lang="en-US" sz="1800" b="1" dirty="0">
                 <a:solidFill>
-                  <a:srgbClr val="FFFFFF"/>
+                  <a:srgbClr val="000000"/>
                 </a:solidFill>
                 <a:latin typeface="Arial" pitchFamily="34" charset="0"/>
                 <a:ea typeface="Arial" pitchFamily="34" charset="-122"/>
@@ -25650,7 +25650,7 @@
           <a:noFill/>
           <a:ln w="12700">
             <a:solidFill>
-              <a:srgbClr val="4A4A4A"/>
+              <a:srgbClr val="E0E0E0"/>
             </a:solidFill>
             <a:prstDash val="solid"/>
           </a:ln>
@@ -25683,7 +25683,7 @@
             <a:r>
               <a:rPr lang="en-US" sz="850" b="1" dirty="0">
                 <a:solidFill>
-                  <a:srgbClr val="9A9A9A"/>
+                  <a:srgbClr val="666666"/>
                 </a:solidFill>
                 <a:latin typeface="Arial" pitchFamily="34" charset="0"/>
                 <a:ea typeface="Arial" pitchFamily="34" charset="-122"/>
@@ -25722,7 +25722,7 @@
             <a:r>
               <a:rPr lang="en-US" sz="850" b="1" dirty="0">
                 <a:solidFill>
-                  <a:srgbClr val="9A9A9A"/>
+                  <a:srgbClr val="666666"/>
                 </a:solidFill>
                 <a:latin typeface="Arial" pitchFamily="34" charset="0"/>
                 <a:ea typeface="Arial" pitchFamily="34" charset="-122"/>
@@ -25749,11 +25749,11 @@
             <a:avLst/>
           </a:prstGeom>
           <a:solidFill>
-            <a:srgbClr val="1F1F1F"/>
+            <a:srgbClr val="F8F9FA"/>
           </a:solidFill>
           <a:ln w="12700">
             <a:solidFill>
-              <a:srgbClr val="4A4A4A"/>
+              <a:srgbClr val="E0E0E0"/>
             </a:solidFill>
             <a:prstDash val="solid"/>
           </a:ln>
@@ -25786,7 +25786,7 @@
             <a:r>
               <a:rPr lang="en-US" sz="1200" b="1" dirty="0">
                 <a:solidFill>
-                  <a:srgbClr val="E05252"/>
+                  <a:srgbClr val="D32F2F"/>
                 </a:solidFill>
                 <a:latin typeface="Arial" pitchFamily="34" charset="0"/>
                 <a:ea typeface="Arial" pitchFamily="34" charset="-122"/>
@@ -25825,7 +25825,7 @@
             <a:r>
               <a:rPr lang="en-US" sz="950" b="1" dirty="0">
                 <a:solidFill>
-                  <a:srgbClr val="FFFFFF"/>
+                  <a:srgbClr val="000000"/>
                 </a:solidFill>
                 <a:latin typeface="Arial" pitchFamily="34" charset="0"/>
                 <a:ea typeface="Arial" pitchFamily="34" charset="-122"/>
@@ -25867,7 +25867,7 @@
             <a:r>
               <a:rPr lang="en-US" sz="750" dirty="0">
                 <a:solidFill>
-                  <a:srgbClr val="E05252"/>
+                  <a:srgbClr val="D32F2F"/>
                 </a:solidFill>
                 <a:latin typeface="Arial" pitchFamily="34" charset="0"/>
                 <a:ea typeface="Arial" pitchFamily="34" charset="-122"/>
@@ -25909,7 +25909,7 @@
             <a:r>
               <a:rPr lang="en-US" sz="780" dirty="0">
                 <a:solidFill>
-                  <a:srgbClr val="D9D9D9"/>
+                  <a:srgbClr val="333333"/>
                 </a:solidFill>
                 <a:latin typeface="Arial" pitchFamily="34" charset="0"/>
                 <a:ea typeface="Arial" pitchFamily="34" charset="-122"/>
@@ -25948,7 +25948,7 @@
             <a:r>
               <a:rPr lang="en-US" sz="800" b="1" dirty="0">
                 <a:solidFill>
-                  <a:srgbClr val="9A9A9A"/>
+                  <a:srgbClr val="666666"/>
                 </a:solidFill>
                 <a:latin typeface="Arial" pitchFamily="34" charset="0"/>
                 <a:ea typeface="Arial" pitchFamily="34" charset="-122"/>
@@ -25975,11 +25975,11 @@
             <a:avLst/>
           </a:prstGeom>
           <a:solidFill>
-            <a:srgbClr val="1F1F1F"/>
+            <a:srgbClr val="F8F9FA"/>
           </a:solidFill>
           <a:ln w="12700">
             <a:solidFill>
-              <a:srgbClr val="4A4A4A"/>
+              <a:srgbClr val="E0E0E0"/>
             </a:solidFill>
             <a:prstDash val="solid"/>
           </a:ln>
@@ -26012,7 +26012,7 @@
             <a:r>
               <a:rPr lang="en-US" sz="1200" b="1" dirty="0">
                 <a:solidFill>
-                  <a:srgbClr val="E05252"/>
+                  <a:srgbClr val="D32F2F"/>
                 </a:solidFill>
                 <a:latin typeface="Arial" pitchFamily="34" charset="0"/>
                 <a:ea typeface="Arial" pitchFamily="34" charset="-122"/>
@@ -26051,7 +26051,7 @@
             <a:r>
               <a:rPr lang="en-US" sz="950" b="1" dirty="0">
                 <a:solidFill>
-                  <a:srgbClr val="FFFFFF"/>
+                  <a:srgbClr val="000000"/>
                 </a:solidFill>
                 <a:latin typeface="Arial" pitchFamily="34" charset="0"/>
                 <a:ea typeface="Arial" pitchFamily="34" charset="-122"/>
@@ -26093,7 +26093,7 @@
             <a:r>
               <a:rPr lang="en-US" sz="750" dirty="0">
                 <a:solidFill>
-                  <a:srgbClr val="E05252"/>
+                  <a:srgbClr val="D32F2F"/>
                 </a:solidFill>
                 <a:latin typeface="Arial" pitchFamily="34" charset="0"/>
                 <a:ea typeface="Arial" pitchFamily="34" charset="-122"/>
@@ -26135,7 +26135,7 @@
             <a:r>
               <a:rPr lang="en-US" sz="780" dirty="0">
                 <a:solidFill>
-                  <a:srgbClr val="D9D9D9"/>
+                  <a:srgbClr val="333333"/>
                 </a:solidFill>
                 <a:latin typeface="Arial" pitchFamily="34" charset="0"/>
                 <a:ea typeface="Arial" pitchFamily="34" charset="-122"/>
@@ -26174,7 +26174,7 @@
             <a:r>
               <a:rPr lang="en-US" sz="800" b="1" dirty="0">
                 <a:solidFill>
-                  <a:srgbClr val="9A9A9A"/>
+                  <a:srgbClr val="666666"/>
                 </a:solidFill>
                 <a:latin typeface="Arial" pitchFamily="34" charset="0"/>
                 <a:ea typeface="Arial" pitchFamily="34" charset="-122"/>
@@ -26201,11 +26201,11 @@
             <a:avLst/>
           </a:prstGeom>
           <a:solidFill>
-            <a:srgbClr val="1F1F1F"/>
+            <a:srgbClr val="F8F9FA"/>
           </a:solidFill>
           <a:ln w="12700">
             <a:solidFill>
-              <a:srgbClr val="4A4A4A"/>
+              <a:srgbClr val="E0E0E0"/>
             </a:solidFill>
             <a:prstDash val="solid"/>
           </a:ln>
@@ -26238,7 +26238,7 @@
             <a:r>
               <a:rPr lang="en-US" sz="1200" b="1" dirty="0">
                 <a:solidFill>
-                  <a:srgbClr val="E05252"/>
+                  <a:srgbClr val="D32F2F"/>
                 </a:solidFill>
                 <a:latin typeface="Arial" pitchFamily="34" charset="0"/>
                 <a:ea typeface="Arial" pitchFamily="34" charset="-122"/>
@@ -26277,7 +26277,7 @@
             <a:r>
               <a:rPr lang="en-US" sz="950" b="1" dirty="0">
                 <a:solidFill>
-                  <a:srgbClr val="FFFFFF"/>
+                  <a:srgbClr val="000000"/>
                 </a:solidFill>
                 <a:latin typeface="Arial" pitchFamily="34" charset="0"/>
                 <a:ea typeface="Arial" pitchFamily="34" charset="-122"/>
@@ -26319,7 +26319,7 @@
             <a:r>
               <a:rPr lang="en-US" sz="750" dirty="0">
                 <a:solidFill>
-                  <a:srgbClr val="E05252"/>
+                  <a:srgbClr val="D32F2F"/>
                 </a:solidFill>
                 <a:latin typeface="Arial" pitchFamily="34" charset="0"/>
                 <a:ea typeface="Arial" pitchFamily="34" charset="-122"/>
@@ -26361,7 +26361,7 @@
             <a:r>
               <a:rPr lang="en-US" sz="780" dirty="0">
                 <a:solidFill>
-                  <a:srgbClr val="D9D9D9"/>
+                  <a:srgbClr val="333333"/>
                 </a:solidFill>
                 <a:latin typeface="Arial" pitchFamily="34" charset="0"/>
                 <a:ea typeface="Arial" pitchFamily="34" charset="-122"/>
@@ -26400,7 +26400,7 @@
             <a:r>
               <a:rPr lang="en-US" sz="800" b="1" dirty="0">
                 <a:solidFill>
-                  <a:srgbClr val="9A9A9A"/>
+                  <a:srgbClr val="666666"/>
                 </a:solidFill>
                 <a:latin typeface="Arial" pitchFamily="34" charset="0"/>
                 <a:ea typeface="Arial" pitchFamily="34" charset="-122"/>
@@ -26427,11 +26427,11 @@
             <a:avLst/>
           </a:prstGeom>
           <a:solidFill>
-            <a:srgbClr val="1F1F1F"/>
+            <a:srgbClr val="F8F9FA"/>
           </a:solidFill>
           <a:ln w="12700">
             <a:solidFill>
-              <a:srgbClr val="4A4A4A"/>
+              <a:srgbClr val="E0E0E0"/>
             </a:solidFill>
             <a:prstDash val="solid"/>
           </a:ln>
@@ -26464,7 +26464,7 @@
             <a:r>
               <a:rPr lang="en-US" sz="1200" b="1" dirty="0">
                 <a:solidFill>
-                  <a:srgbClr val="E05252"/>
+                  <a:srgbClr val="D32F2F"/>
                 </a:solidFill>
                 <a:latin typeface="Arial" pitchFamily="34" charset="0"/>
                 <a:ea typeface="Arial" pitchFamily="34" charset="-122"/>
@@ -26503,7 +26503,7 @@
             <a:r>
               <a:rPr lang="en-US" sz="950" b="1" dirty="0">
                 <a:solidFill>
-                  <a:srgbClr val="FFFFFF"/>
+                  <a:srgbClr val="000000"/>
                 </a:solidFill>
                 <a:latin typeface="Arial" pitchFamily="34" charset="0"/>
                 <a:ea typeface="Arial" pitchFamily="34" charset="-122"/>
@@ -26545,7 +26545,7 @@
             <a:r>
               <a:rPr lang="en-US" sz="750" dirty="0">
                 <a:solidFill>
-                  <a:srgbClr val="E05252"/>
+                  <a:srgbClr val="D32F2F"/>
                 </a:solidFill>
                 <a:latin typeface="Arial" pitchFamily="34" charset="0"/>
                 <a:ea typeface="Arial" pitchFamily="34" charset="-122"/>
@@ -26587,7 +26587,7 @@
             <a:r>
               <a:rPr lang="en-US" sz="780" dirty="0">
                 <a:solidFill>
-                  <a:srgbClr val="D9D9D9"/>
+                  <a:srgbClr val="333333"/>
                 </a:solidFill>
                 <a:latin typeface="Arial" pitchFamily="34" charset="0"/>
                 <a:ea typeface="Arial" pitchFamily="34" charset="-122"/>
@@ -26626,7 +26626,7 @@
             <a:r>
               <a:rPr lang="en-US" sz="800" b="1" dirty="0">
                 <a:solidFill>
-                  <a:srgbClr val="9A9A9A"/>
+                  <a:srgbClr val="666666"/>
                 </a:solidFill>
                 <a:latin typeface="Arial" pitchFamily="34" charset="0"/>
                 <a:ea typeface="Arial" pitchFamily="34" charset="-122"/>
@@ -26652,7 +26652,7 @@
     <p:bg>
       <p:bgPr>
         <a:solidFill>
-          <a:srgbClr val="0A0A0A"/>
+          <a:srgbClr val="FFFFFF"/>
         </a:solidFill>
       </p:bgPr>
     </p:bg>
@@ -26687,7 +26687,7 @@
           <a:noFill/>
           <a:ln w="12700">
             <a:solidFill>
-              <a:srgbClr val="4A4A4A"/>
+              <a:srgbClr val="E0E0E0"/>
             </a:solidFill>
             <a:prstDash val="solid"/>
           </a:ln>
@@ -26720,7 +26720,7 @@
             <a:r>
               <a:rPr lang="en-US" sz="900" b="1" dirty="0">
                 <a:solidFill>
-                  <a:srgbClr val="9A9A9A"/>
+                  <a:srgbClr val="666666"/>
                 </a:solidFill>
                 <a:latin typeface="Arial" pitchFamily="34" charset="0"/>
                 <a:ea typeface="Arial" pitchFamily="34" charset="-122"/>
@@ -26759,7 +26759,7 @@
             <a:r>
               <a:rPr lang="en-US" sz="900" b="1" dirty="0">
                 <a:solidFill>
-                  <a:srgbClr val="9A9A9A"/>
+                  <a:srgbClr val="666666"/>
                 </a:solidFill>
                 <a:latin typeface="Arial" pitchFamily="34" charset="0"/>
                 <a:ea typeface="Arial" pitchFamily="34" charset="-122"/>
@@ -26798,7 +26798,7 @@
             <a:r>
               <a:rPr lang="en-US" sz="1200" b="1" dirty="0">
                 <a:solidFill>
-                  <a:srgbClr val="9A9A9A"/>
+                  <a:srgbClr val="666666"/>
                 </a:solidFill>
                 <a:latin typeface="Arial" pitchFamily="34" charset="0"/>
                 <a:ea typeface="Arial" pitchFamily="34" charset="-122"/>
@@ -26837,7 +26837,7 @@
             <a:r>
               <a:rPr lang="en-US" sz="1800" b="1" dirty="0">
                 <a:solidFill>
-                  <a:srgbClr val="FFFFFF"/>
+                  <a:srgbClr val="000000"/>
                 </a:solidFill>
                 <a:latin typeface="Arial" pitchFamily="34" charset="0"/>
                 <a:ea typeface="Arial" pitchFamily="34" charset="-122"/>
@@ -26866,7 +26866,7 @@
           <a:noFill/>
           <a:ln w="12700">
             <a:solidFill>
-              <a:srgbClr val="4A4A4A"/>
+              <a:srgbClr val="E0E0E0"/>
             </a:solidFill>
             <a:prstDash val="solid"/>
           </a:ln>
@@ -26899,7 +26899,7 @@
             <a:r>
               <a:rPr lang="en-US" sz="850" b="1" dirty="0">
                 <a:solidFill>
-                  <a:srgbClr val="9A9A9A"/>
+                  <a:srgbClr val="666666"/>
                 </a:solidFill>
                 <a:latin typeface="Arial" pitchFamily="34" charset="0"/>
                 <a:ea typeface="Arial" pitchFamily="34" charset="-122"/>
@@ -26938,7 +26938,7 @@
             <a:r>
               <a:rPr lang="en-US" sz="850" b="1" dirty="0">
                 <a:solidFill>
-                  <a:srgbClr val="9A9A9A"/>
+                  <a:srgbClr val="666666"/>
                 </a:solidFill>
                 <a:latin typeface="Arial" pitchFamily="34" charset="0"/>
                 <a:ea typeface="Arial" pitchFamily="34" charset="-122"/>
@@ -26965,11 +26965,11 @@
             <a:avLst/>
           </a:prstGeom>
           <a:solidFill>
-            <a:srgbClr val="1F1F1F"/>
+            <a:srgbClr val="F8F9FA"/>
           </a:solidFill>
           <a:ln w="12700">
             <a:solidFill>
-              <a:srgbClr val="4A4A4A"/>
+              <a:srgbClr val="E0E0E0"/>
             </a:solidFill>
             <a:prstDash val="solid"/>
           </a:ln>
@@ -27005,7 +27005,7 @@
             <a:r>
               <a:rPr lang="en-US" sz="1000" b="1" dirty="0">
                 <a:solidFill>
-                  <a:srgbClr val="FFFFFF"/>
+                  <a:srgbClr val="000000"/>
                 </a:solidFill>
                 <a:latin typeface="Arial" pitchFamily="34" charset="0"/>
                 <a:ea typeface="Arial" pitchFamily="34" charset="-122"/>
@@ -27023,7 +27023,7 @@
             <a:r>
               <a:rPr lang="en-US" sz="900" b="1" dirty="0">
                 <a:solidFill>
-                  <a:srgbClr val="4A90E2"/>
+                  <a:srgbClr val="1976D2"/>
                 </a:solidFill>
                 <a:latin typeface="Arial" pitchFamily="34" charset="0"/>
                 <a:ea typeface="Arial" pitchFamily="34" charset="-122"/>
@@ -27041,7 +27041,7 @@
             <a:r>
               <a:rPr lang="en-US" sz="800" dirty="0">
                 <a:solidFill>
-                  <a:srgbClr val="D9D9D9"/>
+                  <a:srgbClr val="333333"/>
                 </a:solidFill>
                 <a:latin typeface="Arial" pitchFamily="34" charset="0"/>
                 <a:ea typeface="Arial" pitchFamily="34" charset="-122"/>
@@ -27059,7 +27059,7 @@
             <a:r>
               <a:rPr lang="en-US" sz="800" dirty="0">
                 <a:solidFill>
-                  <a:srgbClr val="D9D9D9"/>
+                  <a:srgbClr val="333333"/>
                 </a:solidFill>
                 <a:latin typeface="Arial" pitchFamily="34" charset="0"/>
                 <a:ea typeface="Arial" pitchFamily="34" charset="-122"/>
@@ -27077,7 +27077,7 @@
             <a:r>
               <a:rPr lang="en-US" sz="800" dirty="0">
                 <a:solidFill>
-                  <a:srgbClr val="D9D9D9"/>
+                  <a:srgbClr val="333333"/>
                 </a:solidFill>
                 <a:latin typeface="Arial" pitchFamily="34" charset="0"/>
                 <a:ea typeface="Arial" pitchFamily="34" charset="-122"/>
@@ -27095,7 +27095,7 @@
             <a:r>
               <a:rPr lang="en-US" sz="800" dirty="0">
                 <a:solidFill>
-                  <a:srgbClr val="D9D9D9"/>
+                  <a:srgbClr val="333333"/>
                 </a:solidFill>
                 <a:latin typeface="Arial" pitchFamily="34" charset="0"/>
                 <a:ea typeface="Arial" pitchFamily="34" charset="-122"/>
@@ -27113,7 +27113,7 @@
             <a:r>
               <a:rPr lang="en-US" sz="900" b="1" dirty="0">
                 <a:solidFill>
-                  <a:srgbClr val="4EAF51"/>
+                  <a:srgbClr val="2E7D32"/>
                 </a:solidFill>
                 <a:latin typeface="Arial" pitchFamily="34" charset="0"/>
                 <a:ea typeface="Arial" pitchFamily="34" charset="-122"/>
@@ -27131,7 +27131,7 @@
             <a:r>
               <a:rPr lang="en-US" sz="800" dirty="0">
                 <a:solidFill>
-                  <a:srgbClr val="D9D9D9"/>
+                  <a:srgbClr val="333333"/>
                 </a:solidFill>
                 <a:latin typeface="Arial" pitchFamily="34" charset="0"/>
                 <a:ea typeface="Arial" pitchFamily="34" charset="-122"/>
@@ -27149,7 +27149,7 @@
             <a:r>
               <a:rPr lang="en-US" sz="800" dirty="0">
                 <a:solidFill>
-                  <a:srgbClr val="D9D9D9"/>
+                  <a:srgbClr val="333333"/>
                 </a:solidFill>
                 <a:latin typeface="Arial" pitchFamily="34" charset="0"/>
                 <a:ea typeface="Arial" pitchFamily="34" charset="-122"/>
@@ -27167,7 +27167,7 @@
             <a:r>
               <a:rPr lang="en-US" sz="900" b="1" dirty="0">
                 <a:solidFill>
-                  <a:srgbClr val="4A90E2"/>
+                  <a:srgbClr val="1976D2"/>
                 </a:solidFill>
                 <a:latin typeface="Arial" pitchFamily="34" charset="0"/>
                 <a:ea typeface="Arial" pitchFamily="34" charset="-122"/>
@@ -27185,7 +27185,7 @@
             <a:r>
               <a:rPr lang="en-US" sz="800" dirty="0">
                 <a:solidFill>
-                  <a:srgbClr val="D9D9D9"/>
+                  <a:srgbClr val="333333"/>
                 </a:solidFill>
                 <a:latin typeface="Arial" pitchFamily="34" charset="0"/>
                 <a:ea typeface="Arial" pitchFamily="34" charset="-122"/>
@@ -27203,7 +27203,7 @@
             <a:r>
               <a:rPr lang="en-US" sz="800" dirty="0">
                 <a:solidFill>
-                  <a:srgbClr val="D9D9D9"/>
+                  <a:srgbClr val="333333"/>
                 </a:solidFill>
                 <a:latin typeface="Arial" pitchFamily="34" charset="0"/>
                 <a:ea typeface="Arial" pitchFamily="34" charset="-122"/>
@@ -27229,7 +27229,7 @@
     <p:bg>
       <p:bgPr>
         <a:solidFill>
-          <a:srgbClr val="0A0A0A"/>
+          <a:srgbClr val="FFFFFF"/>
         </a:solidFill>
       </p:bgPr>
     </p:bg>
@@ -27264,7 +27264,7 @@
           <a:noFill/>
           <a:ln w="12700">
             <a:solidFill>
-              <a:srgbClr val="4A4A4A"/>
+              <a:srgbClr val="E0E0E0"/>
             </a:solidFill>
             <a:prstDash val="solid"/>
           </a:ln>
@@ -27297,7 +27297,7 @@
             <a:r>
               <a:rPr lang="en-US" sz="900" b="1" dirty="0">
                 <a:solidFill>
-                  <a:srgbClr val="9A9A9A"/>
+                  <a:srgbClr val="666666"/>
                 </a:solidFill>
                 <a:latin typeface="Arial" pitchFamily="34" charset="0"/>
                 <a:ea typeface="Arial" pitchFamily="34" charset="-122"/>
@@ -27336,7 +27336,7 @@
             <a:r>
               <a:rPr lang="en-US" sz="900" b="1" dirty="0">
                 <a:solidFill>
-                  <a:srgbClr val="9A9A9A"/>
+                  <a:srgbClr val="666666"/>
                 </a:solidFill>
                 <a:latin typeface="Arial" pitchFamily="34" charset="0"/>
                 <a:ea typeface="Arial" pitchFamily="34" charset="-122"/>
@@ -27375,7 +27375,7 @@
             <a:r>
               <a:rPr lang="en-US" sz="1200" b="1" dirty="0">
                 <a:solidFill>
-                  <a:srgbClr val="9A9A9A"/>
+                  <a:srgbClr val="666666"/>
                 </a:solidFill>
                 <a:latin typeface="Arial" pitchFamily="34" charset="0"/>
                 <a:ea typeface="Arial" pitchFamily="34" charset="-122"/>
@@ -27414,7 +27414,7 @@
             <a:r>
               <a:rPr lang="en-US" sz="1800" b="1" dirty="0">
                 <a:solidFill>
-                  <a:srgbClr val="FFFFFF"/>
+                  <a:srgbClr val="000000"/>
                 </a:solidFill>
                 <a:latin typeface="Arial" pitchFamily="34" charset="0"/>
                 <a:ea typeface="Arial" pitchFamily="34" charset="-122"/>
@@ -27443,7 +27443,7 @@
           <a:noFill/>
           <a:ln w="12700">
             <a:solidFill>
-              <a:srgbClr val="4A4A4A"/>
+              <a:srgbClr val="E0E0E0"/>
             </a:solidFill>
             <a:prstDash val="solid"/>
           </a:ln>
@@ -27476,7 +27476,7 @@
             <a:r>
               <a:rPr lang="en-US" sz="850" b="1" dirty="0">
                 <a:solidFill>
-                  <a:srgbClr val="9A9A9A"/>
+                  <a:srgbClr val="666666"/>
                 </a:solidFill>
                 <a:latin typeface="Arial" pitchFamily="34" charset="0"/>
                 <a:ea typeface="Arial" pitchFamily="34" charset="-122"/>
@@ -27515,7 +27515,7 @@
             <a:r>
               <a:rPr lang="en-US" sz="850" b="1" dirty="0">
                 <a:solidFill>
-                  <a:srgbClr val="9A9A9A"/>
+                  <a:srgbClr val="666666"/>
                 </a:solidFill>
                 <a:latin typeface="Arial" pitchFamily="34" charset="0"/>
                 <a:ea typeface="Arial" pitchFamily="34" charset="-122"/>
@@ -27542,11 +27542,11 @@
             <a:avLst/>
           </a:prstGeom>
           <a:solidFill>
-            <a:srgbClr val="1F1F1F"/>
+            <a:srgbClr val="F8F9FA"/>
           </a:solidFill>
           <a:ln w="12700">
             <a:solidFill>
-              <a:srgbClr val="4A4A4A"/>
+              <a:srgbClr val="E0E0E0"/>
             </a:solidFill>
             <a:prstDash val="solid"/>
           </a:ln>
@@ -27579,7 +27579,7 @@
             <a:r>
               <a:rPr lang="en-US" sz="900" b="1" dirty="0">
                 <a:solidFill>
-                  <a:srgbClr val="4A90E2"/>
+                  <a:srgbClr val="1976D2"/>
                 </a:solidFill>
                 <a:latin typeface="Arial" pitchFamily="34" charset="0"/>
                 <a:ea typeface="Arial" pitchFamily="34" charset="-122"/>
@@ -27621,7 +27621,7 @@
             <a:r>
               <a:rPr lang="en-US" sz="780" dirty="0">
                 <a:solidFill>
-                  <a:srgbClr val="D9D9D9"/>
+                  <a:srgbClr val="333333"/>
                 </a:solidFill>
                 <a:latin typeface="Arial" pitchFamily="34" charset="0"/>
                 <a:ea typeface="Arial" pitchFamily="34" charset="-122"/>
@@ -27648,11 +27648,11 @@
             <a:avLst/>
           </a:prstGeom>
           <a:solidFill>
-            <a:srgbClr val="1F1F1F"/>
+            <a:srgbClr val="F8F9FA"/>
           </a:solidFill>
           <a:ln w="12700">
             <a:solidFill>
-              <a:srgbClr val="4A4A4A"/>
+              <a:srgbClr val="E0E0E0"/>
             </a:solidFill>
             <a:prstDash val="solid"/>
           </a:ln>
@@ -27685,7 +27685,7 @@
             <a:r>
               <a:rPr lang="en-US" sz="900" b="1" dirty="0">
                 <a:solidFill>
-                  <a:srgbClr val="4A90E2"/>
+                  <a:srgbClr val="1976D2"/>
                 </a:solidFill>
                 <a:latin typeface="Arial" pitchFamily="34" charset="0"/>
                 <a:ea typeface="Arial" pitchFamily="34" charset="-122"/>
@@ -27727,7 +27727,7 @@
             <a:r>
               <a:rPr lang="en-US" sz="780" dirty="0">
                 <a:solidFill>
-                  <a:srgbClr val="D9D9D9"/>
+                  <a:srgbClr val="333333"/>
                 </a:solidFill>
                 <a:latin typeface="Arial" pitchFamily="34" charset="0"/>
                 <a:ea typeface="Arial" pitchFamily="34" charset="-122"/>
@@ -27754,11 +27754,11 @@
             <a:avLst/>
           </a:prstGeom>
           <a:solidFill>
-            <a:srgbClr val="1F1F1F"/>
+            <a:srgbClr val="F8F9FA"/>
           </a:solidFill>
           <a:ln w="12700">
             <a:solidFill>
-              <a:srgbClr val="4A4A4A"/>
+              <a:srgbClr val="E0E0E0"/>
             </a:solidFill>
             <a:prstDash val="solid"/>
           </a:ln>
@@ -27791,7 +27791,7 @@
             <a:r>
               <a:rPr lang="en-US" sz="900" b="1" dirty="0">
                 <a:solidFill>
-                  <a:srgbClr val="4A90E2"/>
+                  <a:srgbClr val="1976D2"/>
                 </a:solidFill>
                 <a:latin typeface="Arial" pitchFamily="34" charset="0"/>
                 <a:ea typeface="Arial" pitchFamily="34" charset="-122"/>
@@ -27833,7 +27833,7 @@
             <a:r>
               <a:rPr lang="en-US" sz="780" dirty="0">
                 <a:solidFill>
-                  <a:srgbClr val="D9D9D9"/>
+                  <a:srgbClr val="333333"/>
                 </a:solidFill>
                 <a:latin typeface="Arial" pitchFamily="34" charset="0"/>
                 <a:ea typeface="Arial" pitchFamily="34" charset="-122"/>
@@ -27859,7 +27859,7 @@
     <p:bg>
       <p:bgPr>
         <a:solidFill>
-          <a:srgbClr val="0A0A0A"/>
+          <a:srgbClr val="FFFFFF"/>
         </a:solidFill>
       </p:bgPr>
     </p:bg>
@@ -27894,7 +27894,7 @@
           <a:noFill/>
           <a:ln w="12700">
             <a:solidFill>
-              <a:srgbClr val="4A4A4A"/>
+              <a:srgbClr val="E0E0E0"/>
             </a:solidFill>
             <a:prstDash val="solid"/>
           </a:ln>
@@ -27927,7 +27927,7 @@
             <a:r>
               <a:rPr lang="en-US" sz="900" b="1" dirty="0">
                 <a:solidFill>
-                  <a:srgbClr val="9A9A9A"/>
+                  <a:srgbClr val="666666"/>
                 </a:solidFill>
                 <a:latin typeface="Arial" pitchFamily="34" charset="0"/>
                 <a:ea typeface="Arial" pitchFamily="34" charset="-122"/>
@@ -27966,7 +27966,7 @@
             <a:r>
               <a:rPr lang="en-US" sz="900" b="1" dirty="0">
                 <a:solidFill>
-                  <a:srgbClr val="9A9A9A"/>
+                  <a:srgbClr val="666666"/>
                 </a:solidFill>
                 <a:latin typeface="Arial" pitchFamily="34" charset="0"/>
                 <a:ea typeface="Arial" pitchFamily="34" charset="-122"/>
@@ -28005,7 +28005,7 @@
             <a:r>
               <a:rPr lang="en-US" sz="1200" b="1" dirty="0">
                 <a:solidFill>
-                  <a:srgbClr val="9A9A9A"/>
+                  <a:srgbClr val="666666"/>
                 </a:solidFill>
                 <a:latin typeface="Arial" pitchFamily="34" charset="0"/>
                 <a:ea typeface="Arial" pitchFamily="34" charset="-122"/>
@@ -28044,7 +28044,7 @@
             <a:r>
               <a:rPr lang="en-US" sz="1800" b="1" dirty="0">
                 <a:solidFill>
-                  <a:srgbClr val="FFFFFF"/>
+                  <a:srgbClr val="000000"/>
                 </a:solidFill>
                 <a:latin typeface="Arial" pitchFamily="34" charset="0"/>
                 <a:ea typeface="Arial" pitchFamily="34" charset="-122"/>
@@ -28073,7 +28073,7 @@
           <a:noFill/>
           <a:ln w="12700">
             <a:solidFill>
-              <a:srgbClr val="4A4A4A"/>
+              <a:srgbClr val="E0E0E0"/>
             </a:solidFill>
             <a:prstDash val="solid"/>
           </a:ln>
@@ -28106,7 +28106,7 @@
             <a:r>
               <a:rPr lang="en-US" sz="850" b="1" dirty="0">
                 <a:solidFill>
-                  <a:srgbClr val="9A9A9A"/>
+                  <a:srgbClr val="666666"/>
                 </a:solidFill>
                 <a:latin typeface="Arial" pitchFamily="34" charset="0"/>
                 <a:ea typeface="Arial" pitchFamily="34" charset="-122"/>
@@ -28145,7 +28145,7 @@
             <a:r>
               <a:rPr lang="en-US" sz="850" b="1" dirty="0">
                 <a:solidFill>
-                  <a:srgbClr val="9A9A9A"/>
+                  <a:srgbClr val="666666"/>
                 </a:solidFill>
                 <a:latin typeface="Arial" pitchFamily="34" charset="0"/>
                 <a:ea typeface="Arial" pitchFamily="34" charset="-122"/>
@@ -28172,11 +28172,11 @@
             <a:avLst/>
           </a:prstGeom>
           <a:solidFill>
-            <a:srgbClr val="1F1F1F"/>
+            <a:srgbClr val="F8F9FA"/>
           </a:solidFill>
           <a:ln w="12700">
             <a:solidFill>
-              <a:srgbClr val="4A4A4A"/>
+              <a:srgbClr val="E0E0E0"/>
             </a:solidFill>
             <a:prstDash val="solid"/>
           </a:ln>
@@ -28197,11 +28197,11 @@
             <a:avLst/>
           </a:prstGeom>
           <a:solidFill>
-            <a:srgbClr val="1F1F1F"/>
+            <a:srgbClr val="F8F9FA"/>
           </a:solidFill>
           <a:ln w="12700">
             <a:solidFill>
-              <a:srgbClr val="4A4A4A"/>
+              <a:srgbClr val="E0E0E0"/>
             </a:solidFill>
             <a:prstDash val="solid"/>
           </a:ln>
@@ -28234,7 +28234,7 @@
             <a:r>
               <a:rPr lang="en-US" sz="1100" b="1" dirty="0">
                 <a:solidFill>
-                  <a:srgbClr val="FFFFFF"/>
+                  <a:srgbClr val="000000"/>
                 </a:solidFill>
                 <a:latin typeface="Arial" pitchFamily="34" charset="0"/>
                 <a:ea typeface="Arial" pitchFamily="34" charset="-122"/>
@@ -28276,7 +28276,7 @@
             <a:r>
               <a:rPr lang="en-US" sz="850" b="1" dirty="0">
                 <a:solidFill>
-                  <a:srgbClr val="FFFFFF"/>
+                  <a:srgbClr val="000000"/>
                 </a:solidFill>
                 <a:latin typeface="Arial" pitchFamily="34" charset="0"/>
                 <a:ea typeface="Arial" pitchFamily="34" charset="-122"/>
@@ -28294,7 +28294,7 @@
             <a:r>
               <a:rPr lang="en-US" sz="850" dirty="0">
                 <a:solidFill>
-                  <a:srgbClr val="D9D9D9"/>
+                  <a:srgbClr val="333333"/>
                 </a:solidFill>
                 <a:latin typeface="Arial" pitchFamily="34" charset="0"/>
                 <a:ea typeface="Arial" pitchFamily="34" charset="-122"/>
@@ -28312,7 +28312,7 @@
             <a:r>
               <a:rPr lang="en-US" sz="850" b="1" dirty="0">
                 <a:solidFill>
-                  <a:srgbClr val="FFFFFF"/>
+                  <a:srgbClr val="000000"/>
                 </a:solidFill>
                 <a:latin typeface="Arial" pitchFamily="34" charset="0"/>
                 <a:ea typeface="Arial" pitchFamily="34" charset="-122"/>
@@ -28330,7 +28330,7 @@
             <a:r>
               <a:rPr lang="en-US" sz="850" dirty="0">
                 <a:solidFill>
-                  <a:srgbClr val="D9D9D9"/>
+                  <a:srgbClr val="333333"/>
                 </a:solidFill>
                 <a:latin typeface="Arial" pitchFamily="34" charset="0"/>
                 <a:ea typeface="Arial" pitchFamily="34" charset="-122"/>
@@ -28348,7 +28348,7 @@
             <a:r>
               <a:rPr lang="en-US" sz="850" b="1" dirty="0">
                 <a:solidFill>
-                  <a:srgbClr val="E05252"/>
+                  <a:srgbClr val="D32F2F"/>
                 </a:solidFill>
                 <a:latin typeface="Arial" pitchFamily="34" charset="0"/>
                 <a:ea typeface="Arial" pitchFamily="34" charset="-122"/>
@@ -28366,7 +28366,7 @@
             <a:r>
               <a:rPr lang="en-US" sz="850" dirty="0">
                 <a:solidFill>
-                  <a:srgbClr val="D9D9D9"/>
+                  <a:srgbClr val="333333"/>
                 </a:solidFill>
                 <a:latin typeface="Arial" pitchFamily="34" charset="0"/>
                 <a:ea typeface="Arial" pitchFamily="34" charset="-122"/>
@@ -28405,7 +28405,7 @@
             <a:r>
               <a:rPr lang="en-US" sz="1100" b="1" dirty="0">
                 <a:solidFill>
-                  <a:srgbClr val="FFFFFF"/>
+                  <a:srgbClr val="000000"/>
                 </a:solidFill>
                 <a:latin typeface="Arial" pitchFamily="34" charset="0"/>
                 <a:ea typeface="Arial" pitchFamily="34" charset="-122"/>
@@ -28447,7 +28447,7 @@
             <a:r>
               <a:rPr lang="en-US" sz="1200" b="1" dirty="0">
                 <a:solidFill>
-                  <a:srgbClr val="E05252"/>
+                  <a:srgbClr val="D32F2F"/>
                 </a:solidFill>
                 <a:latin typeface="Arial" pitchFamily="34" charset="0"/>
                 <a:ea typeface="Arial" pitchFamily="34" charset="-122"/>
@@ -28465,7 +28465,7 @@
             <a:r>
               <a:rPr lang="en-US" sz="850" b="1" dirty="0">
                 <a:solidFill>
-                  <a:srgbClr val="FFFFFF"/>
+                  <a:srgbClr val="000000"/>
                 </a:solidFill>
                 <a:latin typeface="Arial" pitchFamily="34" charset="0"/>
                 <a:ea typeface="Arial" pitchFamily="34" charset="-122"/>
@@ -28483,7 +28483,7 @@
             <a:r>
               <a:rPr lang="en-US" sz="850" dirty="0">
                 <a:solidFill>
-                  <a:srgbClr val="D9D9D9"/>
+                  <a:srgbClr val="333333"/>
                 </a:solidFill>
                 <a:latin typeface="Arial" pitchFamily="34" charset="0"/>
                 <a:ea typeface="Arial" pitchFamily="34" charset="-122"/>
@@ -28501,7 +28501,7 @@
             <a:r>
               <a:rPr lang="en-US" sz="850" b="1" dirty="0">
                 <a:solidFill>
-                  <a:srgbClr val="FFFFFF"/>
+                  <a:srgbClr val="000000"/>
                 </a:solidFill>
                 <a:latin typeface="Arial" pitchFamily="34" charset="0"/>
                 <a:ea typeface="Arial" pitchFamily="34" charset="-122"/>
@@ -28519,7 +28519,7 @@
             <a:r>
               <a:rPr lang="en-US" sz="850" dirty="0">
                 <a:solidFill>
-                  <a:srgbClr val="D9D9D9"/>
+                  <a:srgbClr val="333333"/>
                 </a:solidFill>
                 <a:latin typeface="Arial" pitchFamily="34" charset="0"/>
                 <a:ea typeface="Arial" pitchFamily="34" charset="-122"/>
@@ -28537,7 +28537,7 @@
             <a:r>
               <a:rPr lang="en-US" sz="850" b="1" dirty="0">
                 <a:solidFill>
-                  <a:srgbClr val="FFFFFF"/>
+                  <a:srgbClr val="000000"/>
                 </a:solidFill>
                 <a:latin typeface="Arial" pitchFamily="34" charset="0"/>
                 <a:ea typeface="Arial" pitchFamily="34" charset="-122"/>
@@ -28555,7 +28555,7 @@
             <a:r>
               <a:rPr lang="en-US" sz="850" dirty="0">
                 <a:solidFill>
-                  <a:srgbClr val="D9D9D9"/>
+                  <a:srgbClr val="333333"/>
                 </a:solidFill>
                 <a:latin typeface="Arial" pitchFamily="34" charset="0"/>
                 <a:ea typeface="Arial" pitchFamily="34" charset="-122"/>
@@ -28573,7 +28573,7 @@
             <a:r>
               <a:rPr lang="en-US" sz="850" b="1" dirty="0">
                 <a:solidFill>
-                  <a:srgbClr val="FFFFFF"/>
+                  <a:srgbClr val="000000"/>
                 </a:solidFill>
                 <a:latin typeface="Arial" pitchFamily="34" charset="0"/>
                 <a:ea typeface="Arial" pitchFamily="34" charset="-122"/>
@@ -28599,7 +28599,7 @@
     <p:bg>
       <p:bgPr>
         <a:solidFill>
-          <a:srgbClr val="0A0A0A"/>
+          <a:srgbClr val="FFFFFF"/>
         </a:solidFill>
       </p:bgPr>
     </p:bg>
@@ -28634,7 +28634,7 @@
           <a:noFill/>
           <a:ln w="12700">
             <a:solidFill>
-              <a:srgbClr val="4A4A4A"/>
+              <a:srgbClr val="E0E0E0"/>
             </a:solidFill>
             <a:prstDash val="solid"/>
           </a:ln>
@@ -28667,7 +28667,7 @@
             <a:r>
               <a:rPr lang="en-US" sz="900" b="1" dirty="0">
                 <a:solidFill>
-                  <a:srgbClr val="9A9A9A"/>
+                  <a:srgbClr val="666666"/>
                 </a:solidFill>
                 <a:latin typeface="Arial" pitchFamily="34" charset="0"/>
                 <a:ea typeface="Arial" pitchFamily="34" charset="-122"/>
@@ -28706,7 +28706,7 @@
             <a:r>
               <a:rPr lang="en-US" sz="900" b="1" dirty="0">
                 <a:solidFill>
-                  <a:srgbClr val="9A9A9A"/>
+                  <a:srgbClr val="666666"/>
                 </a:solidFill>
                 <a:latin typeface="Arial" pitchFamily="34" charset="0"/>
                 <a:ea typeface="Arial" pitchFamily="34" charset="-122"/>
@@ -28745,7 +28745,7 @@
             <a:r>
               <a:rPr lang="en-US" sz="1200" b="1" dirty="0">
                 <a:solidFill>
-                  <a:srgbClr val="9A9A9A"/>
+                  <a:srgbClr val="666666"/>
                 </a:solidFill>
                 <a:latin typeface="Arial" pitchFamily="34" charset="0"/>
                 <a:ea typeface="Arial" pitchFamily="34" charset="-122"/>
@@ -28784,7 +28784,7 @@
             <a:r>
               <a:rPr lang="en-US" sz="1800" b="1" dirty="0">
                 <a:solidFill>
-                  <a:srgbClr val="FFFFFF"/>
+                  <a:srgbClr val="000000"/>
                 </a:solidFill>
                 <a:latin typeface="Arial" pitchFamily="34" charset="0"/>
                 <a:ea typeface="Arial" pitchFamily="34" charset="-122"/>
@@ -28813,7 +28813,7 @@
           <a:noFill/>
           <a:ln w="12700">
             <a:solidFill>
-              <a:srgbClr val="4A4A4A"/>
+              <a:srgbClr val="E0E0E0"/>
             </a:solidFill>
             <a:prstDash val="solid"/>
           </a:ln>
@@ -28846,7 +28846,7 @@
             <a:r>
               <a:rPr lang="en-US" sz="850" b="1" dirty="0">
                 <a:solidFill>
-                  <a:srgbClr val="9A9A9A"/>
+                  <a:srgbClr val="666666"/>
                 </a:solidFill>
                 <a:latin typeface="Arial" pitchFamily="34" charset="0"/>
                 <a:ea typeface="Arial" pitchFamily="34" charset="-122"/>
@@ -28885,7 +28885,7 @@
             <a:r>
               <a:rPr lang="en-US" sz="850" b="1" dirty="0">
                 <a:solidFill>
-                  <a:srgbClr val="9A9A9A"/>
+                  <a:srgbClr val="666666"/>
                 </a:solidFill>
                 <a:latin typeface="Arial" pitchFamily="34" charset="0"/>
                 <a:ea typeface="Arial" pitchFamily="34" charset="-122"/>
@@ -28912,11 +28912,11 @@
             <a:avLst/>
           </a:prstGeom>
           <a:solidFill>
-            <a:srgbClr val="1F1F1F"/>
+            <a:srgbClr val="F8F9FA"/>
           </a:solidFill>
           <a:ln w="12700">
             <a:solidFill>
-              <a:srgbClr val="4A4A4A"/>
+              <a:srgbClr val="E0E0E0"/>
             </a:solidFill>
             <a:prstDash val="solid"/>
           </a:ln>
@@ -28937,11 +28937,11 @@
             <a:avLst/>
           </a:prstGeom>
           <a:solidFill>
-            <a:srgbClr val="1F1F1F"/>
+            <a:srgbClr val="F8F9FA"/>
           </a:solidFill>
           <a:ln w="12700">
             <a:solidFill>
-              <a:srgbClr val="4A4A4A"/>
+              <a:srgbClr val="E0E0E0"/>
             </a:solidFill>
             <a:prstDash val="solid"/>
           </a:ln>
@@ -28974,7 +28974,7 @@
             <a:r>
               <a:rPr lang="en-US" sz="1100" b="1" dirty="0">
                 <a:solidFill>
-                  <a:srgbClr val="FFFFFF"/>
+                  <a:srgbClr val="000000"/>
                 </a:solidFill>
                 <a:latin typeface="Arial" pitchFamily="34" charset="0"/>
                 <a:ea typeface="Arial" pitchFamily="34" charset="-122"/>
@@ -29016,7 +29016,7 @@
             <a:r>
               <a:rPr lang="en-US" sz="850" b="1" dirty="0">
                 <a:solidFill>
-                  <a:srgbClr val="FFFFFF"/>
+                  <a:srgbClr val="000000"/>
                 </a:solidFill>
                 <a:latin typeface="Arial" pitchFamily="34" charset="0"/>
                 <a:ea typeface="Arial" pitchFamily="34" charset="-122"/>
@@ -29034,7 +29034,7 @@
             <a:r>
               <a:rPr lang="en-US" sz="850" dirty="0">
                 <a:solidFill>
-                  <a:srgbClr val="D9D9D9"/>
+                  <a:srgbClr val="333333"/>
                 </a:solidFill>
                 <a:latin typeface="Arial" pitchFamily="34" charset="0"/>
                 <a:ea typeface="Arial" pitchFamily="34" charset="-122"/>
@@ -29052,7 +29052,7 @@
             <a:r>
               <a:rPr lang="en-US" sz="850" b="1" dirty="0">
                 <a:solidFill>
-                  <a:srgbClr val="E05252"/>
+                  <a:srgbClr val="D32F2F"/>
                 </a:solidFill>
                 <a:latin typeface="Arial" pitchFamily="34" charset="0"/>
                 <a:ea typeface="Arial" pitchFamily="34" charset="-122"/>
@@ -29070,7 +29070,7 @@
             <a:r>
               <a:rPr lang="en-US" sz="850" dirty="0">
                 <a:solidFill>
-                  <a:srgbClr val="D9D9D9"/>
+                  <a:srgbClr val="333333"/>
                 </a:solidFill>
                 <a:latin typeface="Arial" pitchFamily="34" charset="0"/>
                 <a:ea typeface="Arial" pitchFamily="34" charset="-122"/>
@@ -29088,7 +29088,7 @@
             <a:r>
               <a:rPr lang="en-US" sz="850" b="1" dirty="0">
                 <a:solidFill>
-                  <a:srgbClr val="FFFFFF"/>
+                  <a:srgbClr val="000000"/>
                 </a:solidFill>
                 <a:latin typeface="Arial" pitchFamily="34" charset="0"/>
                 <a:ea typeface="Arial" pitchFamily="34" charset="-122"/>
@@ -29106,7 +29106,7 @@
             <a:r>
               <a:rPr lang="en-US" sz="850" dirty="0">
                 <a:solidFill>
-                  <a:srgbClr val="D9D9D9"/>
+                  <a:srgbClr val="333333"/>
                 </a:solidFill>
                 <a:latin typeface="Arial" pitchFamily="34" charset="0"/>
                 <a:ea typeface="Arial" pitchFamily="34" charset="-122"/>
@@ -29145,7 +29145,7 @@
             <a:r>
               <a:rPr lang="en-US" sz="1100" b="1" dirty="0">
                 <a:solidFill>
-                  <a:srgbClr val="FFFFFF"/>
+                  <a:srgbClr val="000000"/>
                 </a:solidFill>
                 <a:latin typeface="Arial" pitchFamily="34" charset="0"/>
                 <a:ea typeface="Arial" pitchFamily="34" charset="-122"/>
@@ -29187,7 +29187,7 @@
             <a:r>
               <a:rPr lang="en-US" sz="850" b="1" dirty="0">
                 <a:solidFill>
-                  <a:srgbClr val="FFFFFF"/>
+                  <a:srgbClr val="000000"/>
                 </a:solidFill>
                 <a:latin typeface="Arial" pitchFamily="34" charset="0"/>
                 <a:ea typeface="Arial" pitchFamily="34" charset="-122"/>
@@ -29205,7 +29205,7 @@
             <a:r>
               <a:rPr lang="en-US" sz="850" dirty="0">
                 <a:solidFill>
-                  <a:srgbClr val="D9D9D9"/>
+                  <a:srgbClr val="333333"/>
                 </a:solidFill>
                 <a:latin typeface="Arial" pitchFamily="34" charset="0"/>
                 <a:ea typeface="Arial" pitchFamily="34" charset="-122"/>
@@ -29223,7 +29223,7 @@
             <a:r>
               <a:rPr lang="en-US" sz="850" b="1" dirty="0">
                 <a:solidFill>
-                  <a:srgbClr val="E05252"/>
+                  <a:srgbClr val="D32F2F"/>
                 </a:solidFill>
                 <a:latin typeface="Arial" pitchFamily="34" charset="0"/>
                 <a:ea typeface="Arial" pitchFamily="34" charset="-122"/>
@@ -29241,7 +29241,7 @@
             <a:r>
               <a:rPr lang="en-US" sz="850" dirty="0">
                 <a:solidFill>
-                  <a:srgbClr val="D9D9D9"/>
+                  <a:srgbClr val="333333"/>
                 </a:solidFill>
                 <a:latin typeface="Arial" pitchFamily="34" charset="0"/>
                 <a:ea typeface="Arial" pitchFamily="34" charset="-122"/>
@@ -29259,7 +29259,7 @@
             <a:r>
               <a:rPr lang="en-US" sz="850" b="1" dirty="0">
                 <a:solidFill>
-                  <a:srgbClr val="FFFFFF"/>
+                  <a:srgbClr val="000000"/>
                 </a:solidFill>
                 <a:latin typeface="Arial" pitchFamily="34" charset="0"/>
                 <a:ea typeface="Arial" pitchFamily="34" charset="-122"/>
@@ -29277,7 +29277,7 @@
             <a:r>
               <a:rPr lang="en-US" sz="850" dirty="0">
                 <a:solidFill>
-                  <a:srgbClr val="D9D9D9"/>
+                  <a:srgbClr val="333333"/>
                 </a:solidFill>
                 <a:latin typeface="Arial" pitchFamily="34" charset="0"/>
                 <a:ea typeface="Arial" pitchFamily="34" charset="-122"/>
@@ -29303,7 +29303,7 @@
     <p:bg>
       <p:bgPr>
         <a:solidFill>
-          <a:srgbClr val="0A0A0A"/>
+          <a:srgbClr val="FFFFFF"/>
         </a:solidFill>
       </p:bgPr>
     </p:bg>
@@ -29338,7 +29338,7 @@
           <a:noFill/>
           <a:ln w="12700">
             <a:solidFill>
-              <a:srgbClr val="4A4A4A"/>
+              <a:srgbClr val="E0E0E0"/>
             </a:solidFill>
             <a:prstDash val="solid"/>
           </a:ln>
@@ -29371,7 +29371,7 @@
             <a:r>
               <a:rPr lang="en-US" sz="900" b="1" dirty="0">
                 <a:solidFill>
-                  <a:srgbClr val="9A9A9A"/>
+                  <a:srgbClr val="666666"/>
                 </a:solidFill>
                 <a:latin typeface="Arial" pitchFamily="34" charset="0"/>
                 <a:ea typeface="Arial" pitchFamily="34" charset="-122"/>
@@ -29410,7 +29410,7 @@
             <a:r>
               <a:rPr lang="en-US" sz="900" b="1" dirty="0">
                 <a:solidFill>
-                  <a:srgbClr val="9A9A9A"/>
+                  <a:srgbClr val="666666"/>
                 </a:solidFill>
                 <a:latin typeface="Arial" pitchFamily="34" charset="0"/>
                 <a:ea typeface="Arial" pitchFamily="34" charset="-122"/>
@@ -29449,7 +29449,7 @@
             <a:r>
               <a:rPr lang="en-US" sz="1200" b="1" dirty="0">
                 <a:solidFill>
-                  <a:srgbClr val="9A9A9A"/>
+                  <a:srgbClr val="666666"/>
                 </a:solidFill>
                 <a:latin typeface="Arial" pitchFamily="34" charset="0"/>
                 <a:ea typeface="Arial" pitchFamily="34" charset="-122"/>
@@ -29488,7 +29488,7 @@
             <a:r>
               <a:rPr lang="en-US" sz="1800" b="1" dirty="0">
                 <a:solidFill>
-                  <a:srgbClr val="FFFFFF"/>
+                  <a:srgbClr val="000000"/>
                 </a:solidFill>
                 <a:latin typeface="Arial" pitchFamily="34" charset="0"/>
                 <a:ea typeface="Arial" pitchFamily="34" charset="-122"/>
@@ -29517,7 +29517,7 @@
           <a:noFill/>
           <a:ln w="12700">
             <a:solidFill>
-              <a:srgbClr val="4A4A4A"/>
+              <a:srgbClr val="E0E0E0"/>
             </a:solidFill>
             <a:prstDash val="solid"/>
           </a:ln>
@@ -29550,7 +29550,7 @@
             <a:r>
               <a:rPr lang="en-US" sz="850" b="1" dirty="0">
                 <a:solidFill>
-                  <a:srgbClr val="9A9A9A"/>
+                  <a:srgbClr val="666666"/>
                 </a:solidFill>
                 <a:latin typeface="Arial" pitchFamily="34" charset="0"/>
                 <a:ea typeface="Arial" pitchFamily="34" charset="-122"/>
@@ -29589,7 +29589,7 @@
             <a:r>
               <a:rPr lang="en-US" sz="850" b="1" dirty="0">
                 <a:solidFill>
-                  <a:srgbClr val="9A9A9A"/>
+                  <a:srgbClr val="666666"/>
                 </a:solidFill>
                 <a:latin typeface="Arial" pitchFamily="34" charset="0"/>
                 <a:ea typeface="Arial" pitchFamily="34" charset="-122"/>
@@ -29616,11 +29616,11 @@
             <a:avLst/>
           </a:prstGeom>
           <a:solidFill>
-            <a:srgbClr val="1F1F1F"/>
+            <a:srgbClr val="F8F9FA"/>
           </a:solidFill>
           <a:ln w="12700">
             <a:solidFill>
-              <a:srgbClr val="4A4A4A"/>
+              <a:srgbClr val="E0E0E0"/>
             </a:solidFill>
             <a:prstDash val="solid"/>
           </a:ln>
@@ -29641,11 +29641,11 @@
             <a:avLst/>
           </a:prstGeom>
           <a:solidFill>
-            <a:srgbClr val="1F1F1F"/>
+            <a:srgbClr val="F8F9FA"/>
           </a:solidFill>
           <a:ln w="12700">
             <a:solidFill>
-              <a:srgbClr val="4A4A4A"/>
+              <a:srgbClr val="E0E0E0"/>
             </a:solidFill>
             <a:prstDash val="solid"/>
           </a:ln>
@@ -29678,7 +29678,7 @@
             <a:r>
               <a:rPr lang="en-US" sz="1100" b="1" dirty="0">
                 <a:solidFill>
-                  <a:srgbClr val="E05252"/>
+                  <a:srgbClr val="D32F2F"/>
                 </a:solidFill>
                 <a:latin typeface="Arial" pitchFamily="34" charset="0"/>
                 <a:ea typeface="Arial" pitchFamily="34" charset="-122"/>
@@ -29720,7 +29720,7 @@
             <a:r>
               <a:rPr lang="en-US" sz="820" dirty="0">
                 <a:solidFill>
-                  <a:srgbClr val="9A9A9A"/>
+                  <a:srgbClr val="666666"/>
                 </a:solidFill>
                 <a:latin typeface="Courier New" pitchFamily="34" charset="0"/>
                 <a:ea typeface="Courier New" pitchFamily="34" charset="-122"/>
@@ -29738,7 +29738,7 @@
             <a:r>
               <a:rPr lang="en-US" sz="820" b="1" dirty="0">
                 <a:solidFill>
-                  <a:srgbClr val="FFFFFF"/>
+                  <a:srgbClr val="000000"/>
                 </a:solidFill>
                 <a:latin typeface="Courier New" pitchFamily="34" charset="0"/>
                 <a:ea typeface="Courier New" pitchFamily="34" charset="-122"/>
@@ -29756,7 +29756,7 @@
             <a:r>
               <a:rPr lang="en-US" sz="820" dirty="0">
                 <a:solidFill>
-                  <a:srgbClr val="9A9A9A"/>
+                  <a:srgbClr val="666666"/>
                 </a:solidFill>
                 <a:latin typeface="Courier New" pitchFamily="34" charset="0"/>
                 <a:ea typeface="Courier New" pitchFamily="34" charset="-122"/>
@@ -29774,7 +29774,7 @@
             <a:r>
               <a:rPr lang="en-US" sz="820" dirty="0">
                 <a:solidFill>
-                  <a:srgbClr val="D9D9D9"/>
+                  <a:srgbClr val="333333"/>
                 </a:solidFill>
                 <a:latin typeface="Arial" pitchFamily="34" charset="0"/>
                 <a:ea typeface="Arial" pitchFamily="34" charset="-122"/>
@@ -29792,7 +29792,7 @@
             <a:r>
               <a:rPr lang="en-US" sz="820" dirty="0">
                 <a:solidFill>
-                  <a:srgbClr val="D9D9D9"/>
+                  <a:srgbClr val="333333"/>
                 </a:solidFill>
                 <a:latin typeface="Arial" pitchFamily="34" charset="0"/>
                 <a:ea typeface="Arial" pitchFamily="34" charset="-122"/>
@@ -29810,7 +29810,7 @@
             <a:r>
               <a:rPr lang="en-US" sz="820" b="1" dirty="0">
                 <a:solidFill>
-                  <a:srgbClr val="E05252"/>
+                  <a:srgbClr val="D32F2F"/>
                 </a:solidFill>
                 <a:latin typeface="Arial" pitchFamily="34" charset="0"/>
                 <a:ea typeface="Arial" pitchFamily="34" charset="-122"/>
@@ -29828,7 +29828,7 @@
             <a:r>
               <a:rPr lang="en-US" sz="820" dirty="0">
                 <a:solidFill>
-                  <a:srgbClr val="D9D9D9"/>
+                  <a:srgbClr val="333333"/>
                 </a:solidFill>
                 <a:latin typeface="Arial" pitchFamily="34" charset="0"/>
                 <a:ea typeface="Arial" pitchFamily="34" charset="-122"/>
@@ -29867,7 +29867,7 @@
             <a:r>
               <a:rPr lang="en-US" sz="1100" b="1" dirty="0">
                 <a:solidFill>
-                  <a:srgbClr val="4EAF51"/>
+                  <a:srgbClr val="2E7D32"/>
                 </a:solidFill>
                 <a:latin typeface="Arial" pitchFamily="34" charset="0"/>
                 <a:ea typeface="Arial" pitchFamily="34" charset="-122"/>
@@ -29909,7 +29909,7 @@
             <a:r>
               <a:rPr lang="en-US" sz="820" dirty="0">
                 <a:solidFill>
-                  <a:srgbClr val="9A9A9A"/>
+                  <a:srgbClr val="666666"/>
                 </a:solidFill>
                 <a:latin typeface="Courier New" pitchFamily="34" charset="0"/>
                 <a:ea typeface="Courier New" pitchFamily="34" charset="-122"/>
@@ -29927,7 +29927,7 @@
             <a:r>
               <a:rPr lang="en-US" sz="820" b="1" dirty="0">
                 <a:solidFill>
-                  <a:srgbClr val="FFFFFF"/>
+                  <a:srgbClr val="000000"/>
                 </a:solidFill>
                 <a:latin typeface="Courier New" pitchFamily="34" charset="0"/>
                 <a:ea typeface="Courier New" pitchFamily="34" charset="-122"/>
@@ -29945,7 +29945,7 @@
             <a:r>
               <a:rPr lang="en-US" sz="820" dirty="0">
                 <a:solidFill>
-                  <a:srgbClr val="9A9A9A"/>
+                  <a:srgbClr val="666666"/>
                 </a:solidFill>
                 <a:latin typeface="Courier New" pitchFamily="34" charset="0"/>
                 <a:ea typeface="Courier New" pitchFamily="34" charset="-122"/>
@@ -29963,7 +29963,7 @@
             <a:r>
               <a:rPr lang="en-US" sz="820" dirty="0">
                 <a:solidFill>
-                  <a:srgbClr val="D9D9D9"/>
+                  <a:srgbClr val="333333"/>
                 </a:solidFill>
                 <a:latin typeface="Arial" pitchFamily="34" charset="0"/>
                 <a:ea typeface="Arial" pitchFamily="34" charset="-122"/>
@@ -29981,7 +29981,7 @@
             <a:r>
               <a:rPr lang="en-US" sz="820" dirty="0">
                 <a:solidFill>
-                  <a:srgbClr val="D9D9D9"/>
+                  <a:srgbClr val="333333"/>
                 </a:solidFill>
                 <a:latin typeface="Arial" pitchFamily="34" charset="0"/>
                 <a:ea typeface="Arial" pitchFamily="34" charset="-122"/>
@@ -29999,7 +29999,7 @@
             <a:r>
               <a:rPr lang="en-US" sz="820" b="1" dirty="0">
                 <a:solidFill>
-                  <a:srgbClr val="4EAF51"/>
+                  <a:srgbClr val="2E7D32"/>
                 </a:solidFill>
                 <a:latin typeface="Arial" pitchFamily="34" charset="0"/>
                 <a:ea typeface="Arial" pitchFamily="34" charset="-122"/>
@@ -30017,7 +30017,7 @@
             <a:r>
               <a:rPr lang="en-US" sz="820" dirty="0">
                 <a:solidFill>
-                  <a:srgbClr val="D9D9D9"/>
+                  <a:srgbClr val="333333"/>
                 </a:solidFill>
                 <a:latin typeface="Arial" pitchFamily="34" charset="0"/>
                 <a:ea typeface="Arial" pitchFamily="34" charset="-122"/>
@@ -30043,7 +30043,7 @@
     <p:bg>
       <p:bgPr>
         <a:solidFill>
-          <a:srgbClr val="0A0A0A"/>
+          <a:srgbClr val="FFFFFF"/>
         </a:solidFill>
       </p:bgPr>
     </p:bg>
@@ -30078,7 +30078,7 @@
           <a:noFill/>
           <a:ln w="12700">
             <a:solidFill>
-              <a:srgbClr val="4A4A4A"/>
+              <a:srgbClr val="E0E0E0"/>
             </a:solidFill>
             <a:prstDash val="solid"/>
           </a:ln>
@@ -30111,7 +30111,7 @@
             <a:r>
               <a:rPr lang="en-US" sz="900" b="1" dirty="0">
                 <a:solidFill>
-                  <a:srgbClr val="9A9A9A"/>
+                  <a:srgbClr val="666666"/>
                 </a:solidFill>
                 <a:latin typeface="Arial" pitchFamily="34" charset="0"/>
                 <a:ea typeface="Arial" pitchFamily="34" charset="-122"/>
@@ -30150,7 +30150,7 @@
             <a:r>
               <a:rPr lang="en-US" sz="900" b="1" dirty="0">
                 <a:solidFill>
-                  <a:srgbClr val="9A9A9A"/>
+                  <a:srgbClr val="666666"/>
                 </a:solidFill>
                 <a:latin typeface="Arial" pitchFamily="34" charset="0"/>
                 <a:ea typeface="Arial" pitchFamily="34" charset="-122"/>
@@ -30189,7 +30189,7 @@
             <a:r>
               <a:rPr lang="en-US" sz="1200" b="1" dirty="0">
                 <a:solidFill>
-                  <a:srgbClr val="9A9A9A"/>
+                  <a:srgbClr val="666666"/>
                 </a:solidFill>
                 <a:latin typeface="Arial" pitchFamily="34" charset="0"/>
                 <a:ea typeface="Arial" pitchFamily="34" charset="-122"/>
@@ -30228,7 +30228,7 @@
             <a:r>
               <a:rPr lang="en-US" sz="1800" b="1" dirty="0">
                 <a:solidFill>
-                  <a:srgbClr val="FFFFFF"/>
+                  <a:srgbClr val="000000"/>
                 </a:solidFill>
                 <a:latin typeface="Arial" pitchFamily="34" charset="0"/>
                 <a:ea typeface="Arial" pitchFamily="34" charset="-122"/>
@@ -30257,7 +30257,7 @@
           <a:noFill/>
           <a:ln w="12700">
             <a:solidFill>
-              <a:srgbClr val="4A4A4A"/>
+              <a:srgbClr val="E0E0E0"/>
             </a:solidFill>
             <a:prstDash val="solid"/>
           </a:ln>
@@ -30290,7 +30290,7 @@
             <a:r>
               <a:rPr lang="en-US" sz="850" b="1" dirty="0">
                 <a:solidFill>
-                  <a:srgbClr val="9A9A9A"/>
+                  <a:srgbClr val="666666"/>
                 </a:solidFill>
                 <a:latin typeface="Arial" pitchFamily="34" charset="0"/>
                 <a:ea typeface="Arial" pitchFamily="34" charset="-122"/>
@@ -30329,7 +30329,7 @@
             <a:r>
               <a:rPr lang="en-US" sz="850" b="1" dirty="0">
                 <a:solidFill>
-                  <a:srgbClr val="9A9A9A"/>
+                  <a:srgbClr val="666666"/>
                 </a:solidFill>
                 <a:latin typeface="Arial" pitchFamily="34" charset="0"/>
                 <a:ea typeface="Arial" pitchFamily="34" charset="-122"/>
@@ -30356,11 +30356,11 @@
             <a:avLst/>
           </a:prstGeom>
           <a:solidFill>
-            <a:srgbClr val="1F1F1F"/>
+            <a:srgbClr val="F8F9FA"/>
           </a:solidFill>
           <a:ln w="12700">
             <a:solidFill>
-              <a:srgbClr val="4A4A4A"/>
+              <a:srgbClr val="E0E0E0"/>
             </a:solidFill>
             <a:prstDash val="solid"/>
           </a:ln>
@@ -30393,7 +30393,7 @@
             <a:r>
               <a:rPr lang="en-US" sz="950" b="1" dirty="0">
                 <a:solidFill>
-                  <a:srgbClr val="9A9A9A"/>
+                  <a:srgbClr val="666666"/>
                 </a:solidFill>
                 <a:latin typeface="Arial" pitchFamily="34" charset="0"/>
                 <a:ea typeface="Arial" pitchFamily="34" charset="-122"/>
@@ -30432,7 +30432,7 @@
             <a:r>
               <a:rPr lang="en-US" sz="1500" b="1" dirty="0">
                 <a:solidFill>
-                  <a:srgbClr val="FFFFFF"/>
+                  <a:srgbClr val="000000"/>
                 </a:solidFill>
                 <a:latin typeface="Arial" pitchFamily="34" charset="0"/>
                 <a:ea typeface="Arial" pitchFamily="34" charset="-122"/>
@@ -30474,7 +30474,7 @@
             <a:r>
               <a:rPr lang="en-US" sz="820" dirty="0">
                 <a:solidFill>
-                  <a:srgbClr val="D9D9D9"/>
+                  <a:srgbClr val="333333"/>
                 </a:solidFill>
                 <a:latin typeface="Arial" pitchFamily="34" charset="0"/>
                 <a:ea typeface="Arial" pitchFamily="34" charset="-122"/>
@@ -30501,11 +30501,11 @@
             <a:avLst/>
           </a:prstGeom>
           <a:solidFill>
-            <a:srgbClr val="1F1F1F"/>
+            <a:srgbClr val="F8F9FA"/>
           </a:solidFill>
           <a:ln w="12700">
             <a:solidFill>
-              <a:srgbClr val="4A4A4A"/>
+              <a:srgbClr val="E0E0E0"/>
             </a:solidFill>
             <a:prstDash val="solid"/>
           </a:ln>
@@ -30538,7 +30538,7 @@
             <a:r>
               <a:rPr lang="en-US" sz="950" b="1" dirty="0">
                 <a:solidFill>
-                  <a:srgbClr val="9A9A9A"/>
+                  <a:srgbClr val="666666"/>
                 </a:solidFill>
                 <a:latin typeface="Arial" pitchFamily="34" charset="0"/>
                 <a:ea typeface="Arial" pitchFamily="34" charset="-122"/>
@@ -30577,7 +30577,7 @@
             <a:r>
               <a:rPr lang="en-US" sz="1500" b="1" dirty="0">
                 <a:solidFill>
-                  <a:srgbClr val="FFFFFF"/>
+                  <a:srgbClr val="000000"/>
                 </a:solidFill>
                 <a:latin typeface="Arial" pitchFamily="34" charset="0"/>
                 <a:ea typeface="Arial" pitchFamily="34" charset="-122"/>
@@ -30619,7 +30619,7 @@
             <a:r>
               <a:rPr lang="en-US" sz="820" dirty="0">
                 <a:solidFill>
-                  <a:srgbClr val="D9D9D9"/>
+                  <a:srgbClr val="333333"/>
                 </a:solidFill>
                 <a:latin typeface="Arial" pitchFamily="34" charset="0"/>
                 <a:ea typeface="Arial" pitchFamily="34" charset="-122"/>
@@ -30646,11 +30646,11 @@
             <a:avLst/>
           </a:prstGeom>
           <a:solidFill>
-            <a:srgbClr val="1F1F1F"/>
+            <a:srgbClr val="F8F9FA"/>
           </a:solidFill>
           <a:ln w="12700">
             <a:solidFill>
-              <a:srgbClr val="4A4A4A"/>
+              <a:srgbClr val="E0E0E0"/>
             </a:solidFill>
             <a:prstDash val="solid"/>
           </a:ln>
@@ -30683,7 +30683,7 @@
             <a:r>
               <a:rPr lang="en-US" sz="950" b="1" dirty="0">
                 <a:solidFill>
-                  <a:srgbClr val="9A9A9A"/>
+                  <a:srgbClr val="666666"/>
                 </a:solidFill>
                 <a:latin typeface="Arial" pitchFamily="34" charset="0"/>
                 <a:ea typeface="Arial" pitchFamily="34" charset="-122"/>
@@ -30722,7 +30722,7 @@
             <a:r>
               <a:rPr lang="en-US" sz="1500" b="1" dirty="0">
                 <a:solidFill>
-                  <a:srgbClr val="FFFFFF"/>
+                  <a:srgbClr val="000000"/>
                 </a:solidFill>
                 <a:latin typeface="Arial" pitchFamily="34" charset="0"/>
                 <a:ea typeface="Arial" pitchFamily="34" charset="-122"/>
@@ -30764,7 +30764,7 @@
             <a:r>
               <a:rPr lang="en-US" sz="820" dirty="0">
                 <a:solidFill>
-                  <a:srgbClr val="D9D9D9"/>
+                  <a:srgbClr val="333333"/>
                 </a:solidFill>
                 <a:latin typeface="Arial" pitchFamily="34" charset="0"/>
                 <a:ea typeface="Arial" pitchFamily="34" charset="-122"/>
@@ -30791,11 +30791,11 @@
             <a:avLst/>
           </a:prstGeom>
           <a:solidFill>
-            <a:srgbClr val="1F1F1F"/>
+            <a:srgbClr val="F8F9FA"/>
           </a:solidFill>
           <a:ln w="12700">
             <a:solidFill>
-              <a:srgbClr val="4A4A4A"/>
+              <a:srgbClr val="E0E0E0"/>
             </a:solidFill>
             <a:prstDash val="solid"/>
           </a:ln>
@@ -30828,7 +30828,7 @@
             <a:r>
               <a:rPr lang="en-US" sz="950" b="1" dirty="0">
                 <a:solidFill>
-                  <a:srgbClr val="9A9A9A"/>
+                  <a:srgbClr val="666666"/>
                 </a:solidFill>
                 <a:latin typeface="Arial" pitchFamily="34" charset="0"/>
                 <a:ea typeface="Arial" pitchFamily="34" charset="-122"/>
@@ -30867,7 +30867,7 @@
             <a:r>
               <a:rPr lang="en-US" sz="1500" b="1" dirty="0">
                 <a:solidFill>
-                  <a:srgbClr val="FFFFFF"/>
+                  <a:srgbClr val="000000"/>
                 </a:solidFill>
                 <a:latin typeface="Arial" pitchFamily="34" charset="0"/>
                 <a:ea typeface="Arial" pitchFamily="34" charset="-122"/>
@@ -30909,7 +30909,7 @@
             <a:r>
               <a:rPr lang="en-US" sz="820" dirty="0">
                 <a:solidFill>
-                  <a:srgbClr val="D9D9D9"/>
+                  <a:srgbClr val="333333"/>
                 </a:solidFill>
                 <a:latin typeface="Arial" pitchFamily="34" charset="0"/>
                 <a:ea typeface="Arial" pitchFamily="34" charset="-122"/>
@@ -30935,7 +30935,7 @@
     <p:bg>
       <p:bgPr>
         <a:solidFill>
-          <a:srgbClr val="0A0A0A"/>
+          <a:srgbClr val="FFFFFF"/>
         </a:solidFill>
       </p:bgPr>
     </p:bg>
@@ -30970,7 +30970,7 @@
           <a:noFill/>
           <a:ln w="12700">
             <a:solidFill>
-              <a:srgbClr val="4A4A4A"/>
+              <a:srgbClr val="E0E0E0"/>
             </a:solidFill>
             <a:prstDash val="solid"/>
           </a:ln>
@@ -31003,7 +31003,7 @@
             <a:r>
               <a:rPr lang="en-US" sz="900" b="1" dirty="0">
                 <a:solidFill>
-                  <a:srgbClr val="9A9A9A"/>
+                  <a:srgbClr val="666666"/>
                 </a:solidFill>
                 <a:latin typeface="Arial" pitchFamily="34" charset="0"/>
                 <a:ea typeface="Arial" pitchFamily="34" charset="-122"/>
@@ -31042,7 +31042,7 @@
             <a:r>
               <a:rPr lang="en-US" sz="900" b="1" dirty="0">
                 <a:solidFill>
-                  <a:srgbClr val="9A9A9A"/>
+                  <a:srgbClr val="666666"/>
                 </a:solidFill>
                 <a:latin typeface="Arial" pitchFamily="34" charset="0"/>
                 <a:ea typeface="Arial" pitchFamily="34" charset="-122"/>
@@ -31081,7 +31081,7 @@
             <a:r>
               <a:rPr lang="en-US" sz="1200" b="1" dirty="0">
                 <a:solidFill>
-                  <a:srgbClr val="9A9A9A"/>
+                  <a:srgbClr val="666666"/>
                 </a:solidFill>
                 <a:latin typeface="Arial" pitchFamily="34" charset="0"/>
                 <a:ea typeface="Arial" pitchFamily="34" charset="-122"/>
@@ -31120,7 +31120,7 @@
             <a:r>
               <a:rPr lang="en-US" sz="1800" b="1" dirty="0">
                 <a:solidFill>
-                  <a:srgbClr val="FFFFFF"/>
+                  <a:srgbClr val="000000"/>
                 </a:solidFill>
                 <a:latin typeface="Arial" pitchFamily="34" charset="0"/>
                 <a:ea typeface="Arial" pitchFamily="34" charset="-122"/>
@@ -31149,7 +31149,7 @@
           <a:noFill/>
           <a:ln w="12700">
             <a:solidFill>
-              <a:srgbClr val="4A4A4A"/>
+              <a:srgbClr val="E0E0E0"/>
             </a:solidFill>
             <a:prstDash val="solid"/>
           </a:ln>
@@ -31182,7 +31182,7 @@
             <a:r>
               <a:rPr lang="en-US" sz="850" b="1" dirty="0">
                 <a:solidFill>
-                  <a:srgbClr val="9A9A9A"/>
+                  <a:srgbClr val="666666"/>
                 </a:solidFill>
                 <a:latin typeface="Arial" pitchFamily="34" charset="0"/>
                 <a:ea typeface="Arial" pitchFamily="34" charset="-122"/>
@@ -31221,7 +31221,7 @@
             <a:r>
               <a:rPr lang="en-US" sz="850" b="1" dirty="0">
                 <a:solidFill>
-                  <a:srgbClr val="9A9A9A"/>
+                  <a:srgbClr val="666666"/>
                 </a:solidFill>
                 <a:latin typeface="Arial" pitchFamily="34" charset="0"/>
                 <a:ea typeface="Arial" pitchFamily="34" charset="-122"/>
@@ -31248,11 +31248,11 @@
             <a:avLst/>
           </a:prstGeom>
           <a:solidFill>
-            <a:srgbClr val="1F1F1F"/>
+            <a:srgbClr val="F8F9FA"/>
           </a:solidFill>
           <a:ln w="12700">
             <a:solidFill>
-              <a:srgbClr val="4A4A4A"/>
+              <a:srgbClr val="E0E0E0"/>
             </a:solidFill>
             <a:prstDash val="solid"/>
           </a:ln>
@@ -31288,7 +31288,7 @@
             <a:r>
               <a:rPr lang="en-US" sz="950" b="1" dirty="0">
                 <a:solidFill>
-                  <a:srgbClr val="FFFFFF"/>
+                  <a:srgbClr val="000000"/>
                 </a:solidFill>
                 <a:latin typeface="Arial" pitchFamily="34" charset="0"/>
                 <a:ea typeface="Arial" pitchFamily="34" charset="-122"/>
@@ -31306,7 +31306,7 @@
             <a:r>
               <a:rPr lang="en-US" sz="850" b="1" dirty="0">
                 <a:solidFill>
-                  <a:srgbClr val="9A9A9A"/>
+                  <a:srgbClr val="666666"/>
                 </a:solidFill>
                 <a:latin typeface="Arial" pitchFamily="34" charset="0"/>
                 <a:ea typeface="Arial" pitchFamily="34" charset="-122"/>
@@ -31323,7 +31323,7 @@
             <a:r>
               <a:rPr lang="en-US" sz="850" dirty="0">
                 <a:solidFill>
-                  <a:srgbClr val="D9D9D9"/>
+                  <a:srgbClr val="333333"/>
                 </a:solidFill>
                 <a:latin typeface="Arial" pitchFamily="34" charset="0"/>
                 <a:ea typeface="Arial" pitchFamily="34" charset="-122"/>
@@ -31341,7 +31341,7 @@
             <a:r>
               <a:rPr lang="en-US" sz="850" b="1" dirty="0">
                 <a:solidFill>
-                  <a:srgbClr val="9A9A9A"/>
+                  <a:srgbClr val="666666"/>
                 </a:solidFill>
                 <a:latin typeface="Arial" pitchFamily="34" charset="0"/>
                 <a:ea typeface="Arial" pitchFamily="34" charset="-122"/>
@@ -31358,7 +31358,7 @@
             <a:r>
               <a:rPr lang="en-US" sz="850" dirty="0">
                 <a:solidFill>
-                  <a:srgbClr val="D9D9D9"/>
+                  <a:srgbClr val="333333"/>
                 </a:solidFill>
                 <a:latin typeface="Arial" pitchFamily="34" charset="0"/>
                 <a:ea typeface="Arial" pitchFamily="34" charset="-122"/>
@@ -31376,7 +31376,7 @@
             <a:r>
               <a:rPr lang="en-US" sz="850" b="1" dirty="0">
                 <a:solidFill>
-                  <a:srgbClr val="9A9A9A"/>
+                  <a:srgbClr val="666666"/>
                 </a:solidFill>
                 <a:latin typeface="Arial" pitchFamily="34" charset="0"/>
                 <a:ea typeface="Arial" pitchFamily="34" charset="-122"/>
@@ -31393,7 +31393,7 @@
             <a:r>
               <a:rPr lang="en-US" sz="850" dirty="0">
                 <a:solidFill>
-                  <a:srgbClr val="D9D9D9"/>
+                  <a:srgbClr val="333333"/>
                 </a:solidFill>
                 <a:latin typeface="Arial" pitchFamily="34" charset="0"/>
                 <a:ea typeface="Arial" pitchFamily="34" charset="-122"/>
@@ -31411,7 +31411,7 @@
             <a:r>
               <a:rPr lang="en-US" sz="850" b="1" dirty="0">
                 <a:solidFill>
-                  <a:srgbClr val="9A9A9A"/>
+                  <a:srgbClr val="666666"/>
                 </a:solidFill>
                 <a:latin typeface="Arial" pitchFamily="34" charset="0"/>
                 <a:ea typeface="Arial" pitchFamily="34" charset="-122"/>
@@ -31428,7 +31428,7 @@
             <a:r>
               <a:rPr lang="en-US" sz="850" dirty="0">
                 <a:solidFill>
-                  <a:srgbClr val="D9D9D9"/>
+                  <a:srgbClr val="333333"/>
                 </a:solidFill>
                 <a:latin typeface="Arial" pitchFamily="34" charset="0"/>
                 <a:ea typeface="Arial" pitchFamily="34" charset="-122"/>
@@ -31446,7 +31446,7 @@
             <a:r>
               <a:rPr lang="en-US" sz="850" b="1" dirty="0">
                 <a:solidFill>
-                  <a:srgbClr val="9A9A9A"/>
+                  <a:srgbClr val="666666"/>
                 </a:solidFill>
                 <a:latin typeface="Arial" pitchFamily="34" charset="0"/>
                 <a:ea typeface="Arial" pitchFamily="34" charset="-122"/>
@@ -31463,7 +31463,7 @@
             <a:r>
               <a:rPr lang="en-US" sz="850" dirty="0">
                 <a:solidFill>
-                  <a:srgbClr val="D9D9D9"/>
+                  <a:srgbClr val="333333"/>
                 </a:solidFill>
                 <a:latin typeface="Arial" pitchFamily="34" charset="0"/>
                 <a:ea typeface="Arial" pitchFamily="34" charset="-122"/>
@@ -31481,7 +31481,7 @@
             <a:r>
               <a:rPr lang="en-US" sz="850" b="1" dirty="0">
                 <a:solidFill>
-                  <a:srgbClr val="4EAF51"/>
+                  <a:srgbClr val="2E7D32"/>
                 </a:solidFill>
                 <a:latin typeface="Arial" pitchFamily="34" charset="0"/>
                 <a:ea typeface="Arial" pitchFamily="34" charset="-122"/>
@@ -31499,7 +31499,7 @@
             <a:r>
               <a:rPr lang="en-US" sz="850" b="1" dirty="0">
                 <a:solidFill>
-                  <a:srgbClr val="FFFFFF"/>
+                  <a:srgbClr val="000000"/>
                 </a:solidFill>
                 <a:latin typeface="Arial" pitchFamily="34" charset="0"/>
                 <a:ea typeface="Arial" pitchFamily="34" charset="-122"/>
@@ -31525,7 +31525,7 @@
     <p:bg>
       <p:bgPr>
         <a:solidFill>
-          <a:srgbClr val="0A0A0A"/>
+          <a:srgbClr val="FFFFFF"/>
         </a:solidFill>
       </p:bgPr>
     </p:bg>
@@ -31560,7 +31560,7 @@
           <a:noFill/>
           <a:ln w="12700">
             <a:solidFill>
-              <a:srgbClr val="4A4A4A"/>
+              <a:srgbClr val="E0E0E0"/>
             </a:solidFill>
             <a:prstDash val="solid"/>
           </a:ln>
@@ -31593,7 +31593,7 @@
             <a:r>
               <a:rPr lang="en-US" sz="900" b="1" dirty="0">
                 <a:solidFill>
-                  <a:srgbClr val="9A9A9A"/>
+                  <a:srgbClr val="666666"/>
                 </a:solidFill>
                 <a:latin typeface="Arial" pitchFamily="34" charset="0"/>
                 <a:ea typeface="Arial" pitchFamily="34" charset="-122"/>
@@ -31632,7 +31632,7 @@
             <a:r>
               <a:rPr lang="en-US" sz="900" b="1" dirty="0">
                 <a:solidFill>
-                  <a:srgbClr val="9A9A9A"/>
+                  <a:srgbClr val="666666"/>
                 </a:solidFill>
                 <a:latin typeface="Arial" pitchFamily="34" charset="0"/>
                 <a:ea typeface="Arial" pitchFamily="34" charset="-122"/>
@@ -31671,7 +31671,7 @@
             <a:r>
               <a:rPr lang="en-US" sz="1200" b="1" dirty="0">
                 <a:solidFill>
-                  <a:srgbClr val="9A9A9A"/>
+                  <a:srgbClr val="666666"/>
                 </a:solidFill>
                 <a:latin typeface="Arial" pitchFamily="34" charset="0"/>
                 <a:ea typeface="Arial" pitchFamily="34" charset="-122"/>
@@ -31710,7 +31710,7 @@
             <a:r>
               <a:rPr lang="en-US" sz="1800" b="1" dirty="0">
                 <a:solidFill>
-                  <a:srgbClr val="FFFFFF"/>
+                  <a:srgbClr val="000000"/>
                 </a:solidFill>
                 <a:latin typeface="Arial" pitchFamily="34" charset="0"/>
                 <a:ea typeface="Arial" pitchFamily="34" charset="-122"/>
@@ -31739,7 +31739,7 @@
           <a:noFill/>
           <a:ln w="12700">
             <a:solidFill>
-              <a:srgbClr val="4A4A4A"/>
+              <a:srgbClr val="E0E0E0"/>
             </a:solidFill>
             <a:prstDash val="solid"/>
           </a:ln>
@@ -31772,7 +31772,7 @@
             <a:r>
               <a:rPr lang="en-US" sz="850" b="1" dirty="0">
                 <a:solidFill>
-                  <a:srgbClr val="9A9A9A"/>
+                  <a:srgbClr val="666666"/>
                 </a:solidFill>
                 <a:latin typeface="Arial" pitchFamily="34" charset="0"/>
                 <a:ea typeface="Arial" pitchFamily="34" charset="-122"/>
@@ -31811,7 +31811,7 @@
             <a:r>
               <a:rPr lang="en-US" sz="850" b="1" dirty="0">
                 <a:solidFill>
-                  <a:srgbClr val="9A9A9A"/>
+                  <a:srgbClr val="666666"/>
                 </a:solidFill>
                 <a:latin typeface="Arial" pitchFamily="34" charset="0"/>
                 <a:ea typeface="Arial" pitchFamily="34" charset="-122"/>
@@ -31838,11 +31838,11 @@
             <a:avLst/>
           </a:prstGeom>
           <a:solidFill>
-            <a:srgbClr val="1F1F1F"/>
+            <a:srgbClr val="F8F9FA"/>
           </a:solidFill>
           <a:ln w="12700">
             <a:solidFill>
-              <a:srgbClr val="4A4A4A"/>
+              <a:srgbClr val="E0E0E0"/>
             </a:solidFill>
             <a:prstDash val="solid"/>
           </a:ln>
@@ -31875,7 +31875,7 @@
             <a:r>
               <a:rPr lang="en-US" sz="1100" b="1" dirty="0">
                 <a:solidFill>
-                  <a:srgbClr val="FFFFFF"/>
+                  <a:srgbClr val="000000"/>
                 </a:solidFill>
                 <a:latin typeface="Arial" pitchFamily="34" charset="0"/>
                 <a:ea typeface="Arial" pitchFamily="34" charset="-122"/>
@@ -31914,7 +31914,7 @@
             <a:r>
               <a:rPr lang="en-US" sz="800" b="1" dirty="0">
                 <a:solidFill>
-                  <a:srgbClr val="E05252"/>
+                  <a:srgbClr val="D32F2F"/>
                 </a:solidFill>
                 <a:latin typeface="Arial" pitchFamily="34" charset="0"/>
                 <a:ea typeface="Arial" pitchFamily="34" charset="-122"/>
@@ -31956,7 +31956,7 @@
             <a:r>
               <a:rPr lang="en-US" sz="820" dirty="0">
                 <a:solidFill>
-                  <a:srgbClr val="D9D9D9"/>
+                  <a:srgbClr val="333333"/>
                 </a:solidFill>
                 <a:latin typeface="Arial" pitchFamily="34" charset="0"/>
                 <a:ea typeface="Arial" pitchFamily="34" charset="-122"/>
@@ -31995,7 +31995,7 @@
             <a:r>
               <a:rPr lang="en-US" sz="800" b="1" dirty="0">
                 <a:solidFill>
-                  <a:srgbClr val="4EAF51"/>
+                  <a:srgbClr val="2E7D32"/>
                 </a:solidFill>
                 <a:latin typeface="Arial" pitchFamily="34" charset="0"/>
                 <a:ea typeface="Arial" pitchFamily="34" charset="-122"/>
@@ -32037,7 +32037,7 @@
             <a:r>
               <a:rPr lang="en-US" sz="820" dirty="0">
                 <a:solidFill>
-                  <a:srgbClr val="D9D9D9"/>
+                  <a:srgbClr val="333333"/>
                 </a:solidFill>
                 <a:latin typeface="Arial" pitchFamily="34" charset="0"/>
                 <a:ea typeface="Arial" pitchFamily="34" charset="-122"/>
@@ -32064,11 +32064,11 @@
             <a:avLst/>
           </a:prstGeom>
           <a:solidFill>
-            <a:srgbClr val="1F1F1F"/>
+            <a:srgbClr val="F8F9FA"/>
           </a:solidFill>
           <a:ln w="12700">
             <a:solidFill>
-              <a:srgbClr val="4A4A4A"/>
+              <a:srgbClr val="E0E0E0"/>
             </a:solidFill>
             <a:prstDash val="solid"/>
           </a:ln>
@@ -32101,7 +32101,7 @@
             <a:r>
               <a:rPr lang="en-US" sz="1100" b="1" dirty="0">
                 <a:solidFill>
-                  <a:srgbClr val="FFFFFF"/>
+                  <a:srgbClr val="000000"/>
                 </a:solidFill>
                 <a:latin typeface="Arial" pitchFamily="34" charset="0"/>
                 <a:ea typeface="Arial" pitchFamily="34" charset="-122"/>
@@ -32140,7 +32140,7 @@
             <a:r>
               <a:rPr lang="en-US" sz="800" b="1" dirty="0">
                 <a:solidFill>
-                  <a:srgbClr val="E05252"/>
+                  <a:srgbClr val="D32F2F"/>
                 </a:solidFill>
                 <a:latin typeface="Arial" pitchFamily="34" charset="0"/>
                 <a:ea typeface="Arial" pitchFamily="34" charset="-122"/>
@@ -32182,7 +32182,7 @@
             <a:r>
               <a:rPr lang="en-US" sz="820" dirty="0">
                 <a:solidFill>
-                  <a:srgbClr val="D9D9D9"/>
+                  <a:srgbClr val="333333"/>
                 </a:solidFill>
                 <a:latin typeface="Arial" pitchFamily="34" charset="0"/>
                 <a:ea typeface="Arial" pitchFamily="34" charset="-122"/>
@@ -32221,7 +32221,7 @@
             <a:r>
               <a:rPr lang="en-US" sz="800" b="1" dirty="0">
                 <a:solidFill>
-                  <a:srgbClr val="4EAF51"/>
+                  <a:srgbClr val="2E7D32"/>
                 </a:solidFill>
                 <a:latin typeface="Arial" pitchFamily="34" charset="0"/>
                 <a:ea typeface="Arial" pitchFamily="34" charset="-122"/>
@@ -32263,7 +32263,7 @@
             <a:r>
               <a:rPr lang="en-US" sz="820" dirty="0">
                 <a:solidFill>
-                  <a:srgbClr val="D9D9D9"/>
+                  <a:srgbClr val="333333"/>
                 </a:solidFill>
                 <a:latin typeface="Arial" pitchFamily="34" charset="0"/>
                 <a:ea typeface="Arial" pitchFamily="34" charset="-122"/>
@@ -32290,11 +32290,11 @@
             <a:avLst/>
           </a:prstGeom>
           <a:solidFill>
-            <a:srgbClr val="1F1F1F"/>
+            <a:srgbClr val="F8F9FA"/>
           </a:solidFill>
           <a:ln w="12700">
             <a:solidFill>
-              <a:srgbClr val="4A4A4A"/>
+              <a:srgbClr val="E0E0E0"/>
             </a:solidFill>
             <a:prstDash val="solid"/>
           </a:ln>
@@ -32327,7 +32327,7 @@
             <a:r>
               <a:rPr lang="en-US" sz="1100" b="1" dirty="0">
                 <a:solidFill>
-                  <a:srgbClr val="FFFFFF"/>
+                  <a:srgbClr val="000000"/>
                 </a:solidFill>
                 <a:latin typeface="Arial" pitchFamily="34" charset="0"/>
                 <a:ea typeface="Arial" pitchFamily="34" charset="-122"/>
@@ -32366,7 +32366,7 @@
             <a:r>
               <a:rPr lang="en-US" sz="800" b="1" dirty="0">
                 <a:solidFill>
-                  <a:srgbClr val="E05252"/>
+                  <a:srgbClr val="D32F2F"/>
                 </a:solidFill>
                 <a:latin typeface="Arial" pitchFamily="34" charset="0"/>
                 <a:ea typeface="Arial" pitchFamily="34" charset="-122"/>
@@ -32408,7 +32408,7 @@
             <a:r>
               <a:rPr lang="en-US" sz="820" dirty="0">
                 <a:solidFill>
-                  <a:srgbClr val="D9D9D9"/>
+                  <a:srgbClr val="333333"/>
                 </a:solidFill>
                 <a:latin typeface="Arial" pitchFamily="34" charset="0"/>
                 <a:ea typeface="Arial" pitchFamily="34" charset="-122"/>
@@ -32447,7 +32447,7 @@
             <a:r>
               <a:rPr lang="en-US" sz="800" b="1" dirty="0">
                 <a:solidFill>
-                  <a:srgbClr val="4EAF51"/>
+                  <a:srgbClr val="2E7D32"/>
                 </a:solidFill>
                 <a:latin typeface="Arial" pitchFamily="34" charset="0"/>
                 <a:ea typeface="Arial" pitchFamily="34" charset="-122"/>
@@ -32489,7 +32489,7 @@
             <a:r>
               <a:rPr lang="en-US" sz="820" dirty="0">
                 <a:solidFill>
-                  <a:srgbClr val="D9D9D9"/>
+                  <a:srgbClr val="333333"/>
                 </a:solidFill>
                 <a:latin typeface="Arial" pitchFamily="34" charset="0"/>
                 <a:ea typeface="Arial" pitchFamily="34" charset="-122"/>

--- a/Crypto-Agility_Navigator_Review2.pptx
+++ b/Crypto-Agility_Navigator_Review2.pptx
@@ -24640,7 +24640,7 @@
                 <a:ea typeface="Arial" pitchFamily="34" charset="-122"/>
                 <a:cs typeface="Arial" pitchFamily="34" charset="-120"/>
               </a:rPr>
-              <a:t>Equitable 3-Way Allocation Across Team Members</a:t>
+              <a:t>Equitable 2-Way Allocation Across Team Members (50/50)</a:t>
             </a:r>
             <a:endParaRPr lang="en-US" sz="1800" dirty="0"/>
           </a:p>
@@ -24756,7 +24756,7 @@
         <p:spPr>
           <a:xfrm>
             <a:off x="457200" y="1645920"/>
-            <a:ext cx="2697480" cy="2743200"/>
+            <a:ext cx="4023360" cy="2743200"/>
           </a:xfrm>
           <a:prstGeom prst="rect">
             <a:avLst/>
@@ -24780,24 +24780,24 @@
         </p:nvSpPr>
         <p:spPr>
           <a:xfrm>
-            <a:off x="594360" y="1828800"/>
-            <a:ext cx="2423160" cy="228600"/>
-          </a:xfrm>
-          <a:prstGeom prst="rect">
-            <a:avLst/>
-          </a:prstGeom>
-          <a:noFill/>
-          <a:ln/>
-        </p:spPr>
-        <p:txBody>
-          <a:bodyPr wrap="square" rtlCol="0" anchor="ctr"/>
-          <a:lstStyle/>
-          <a:p>
-            <a:pPr indent="0" marL="0">
-              <a:buNone/>
-            </a:pPr>
-            <a:r>
-              <a:rPr lang="en-US" sz="950" b="1" dirty="0">
+            <a:off x="640080" y="1828800"/>
+            <a:ext cx="3657600" cy="228600"/>
+          </a:xfrm>
+          <a:prstGeom prst="rect">
+            <a:avLst/>
+          </a:prstGeom>
+          <a:noFill/>
+          <a:ln/>
+        </p:spPr>
+        <p:txBody>
+          <a:bodyPr wrap="square" rtlCol="0" anchor="ctr"/>
+          <a:lstStyle/>
+          <a:p>
+            <a:pPr indent="0" marL="0">
+              <a:buNone/>
+            </a:pPr>
+            <a:r>
+              <a:rPr lang="en-US" sz="1000" b="1" dirty="0">
                 <a:solidFill>
                   <a:srgbClr val="4A90E2"/>
                 </a:solidFill>
@@ -24807,7 +24807,7 @@
               </a:rPr>
               <a:t>AVI DHANDHANIA (25BCE1207)</a:t>
             </a:r>
-            <a:endParaRPr lang="en-US" sz="950" dirty="0"/>
+            <a:endParaRPr lang="en-US" sz="1000" dirty="0"/>
           </a:p>
         </p:txBody>
       </p:sp>
@@ -24819,8 +24819,8 @@
         </p:nvSpPr>
         <p:spPr>
           <a:xfrm>
-            <a:off x="594360" y="2057400"/>
-            <a:ext cx="2423160" cy="228600"/>
+            <a:off x="640080" y="2057400"/>
+            <a:ext cx="3657600" cy="228600"/>
           </a:xfrm>
           <a:prstGeom prst="rect">
             <a:avLst/>
@@ -24844,7 +24844,7 @@
                 <a:ea typeface="Arial" pitchFamily="34" charset="-122"/>
                 <a:cs typeface="Arial" pitchFamily="34" charset="-120"/>
               </a:rPr>
-              <a:t>Semantic Binding &amp; Taint Engine</a:t>
+              <a:t>Core Architecture, Dataflow Engine &amp; UI Design</a:t>
             </a:r>
             <a:endParaRPr lang="en-US" sz="850" dirty="0"/>
           </a:p>
@@ -24858,8 +24858,8 @@
         </p:nvSpPr>
         <p:spPr>
           <a:xfrm>
-            <a:off x="594360" y="2377440"/>
-            <a:ext cx="2423160" cy="1920240"/>
+            <a:off x="640080" y="2331720"/>
+            <a:ext cx="3657600" cy="1965960"/>
           </a:xfrm>
           <a:prstGeom prst="rect">
             <a:avLst/>
@@ -24886,7 +24886,7 @@
                 <a:ea typeface="Arial" pitchFamily="34" charset="-122"/>
                 <a:cs typeface="Arial" pitchFamily="34" charset="-120"/>
               </a:rPr>
-              <a:t>• Formalised HNDL threat model &amp; Mosca inequality.</a:t>
+              <a:t>• Stage 1 AST Discovery &amp; constant propagation engine (discovery.py).</a:t>
             </a:r>
             <a:endParaRPr lang="en-US" sz="780" dirty="0"/>
           </a:p>
@@ -24906,7 +24906,7 @@
                 <a:ea typeface="Arial" pitchFamily="34" charset="-122"/>
                 <a:cs typeface="Arial" pitchFamily="34" charset="-120"/>
               </a:rPr>
-              <a:t>• Designed 4-stage pipeline architecture.</a:t>
+              <a:t>• Stage 2 Inter-procedural Semantic Dataflow Engine (dataflow.py).</a:t>
             </a:r>
             <a:endParaRPr lang="en-US" sz="780" dirty="0"/>
           </a:p>
@@ -24926,7 +24926,7 @@
                 <a:ea typeface="Arial" pitchFamily="34" charset="-122"/>
                 <a:cs typeface="Arial" pitchFamily="34" charset="-120"/>
               </a:rPr>
-              <a:t>• Implemented Stage 2 Dataflow Engine (dataflow.py).</a:t>
+              <a:t>• Built declarative retention extraction parsing S3 lifecycle &amp; Redis TTLs.</a:t>
             </a:r>
             <a:endParaRPr lang="en-US" sz="780" dirty="0"/>
           </a:p>
@@ -24946,7 +24946,7 @@
                 <a:ea typeface="Arial" pitchFamily="34" charset="-122"/>
                 <a:cs typeface="Arial" pitchFamily="34" charset="-120"/>
               </a:rPr>
-              <a:t>• Built declarative retention extraction for S3 &amp; Redis.</a:t>
+              <a:t>• Designed interactive Web Dashboard UI/UX and presentation deck architecture.</a:t>
             </a:r>
             <a:endParaRPr lang="en-US" sz="780" dirty="0"/>
           </a:p>
@@ -24966,10 +24966,30 @@
                 <a:ea typeface="Arial" pitchFamily="34" charset="-122"/>
                 <a:cs typeface="Arial" pitchFamily="34" charset="-120"/>
               </a:rPr>
-              <a:t>• Next: Inter-procedural cross-module taint &amp; CodeQL.</a:t>
+              <a:t>• Authored Report Sections 4 (Requirements), 5 (Architecture), 6 (Tool Justification).</a:t>
             </a:r>
             <a:endParaRPr lang="en-US" sz="780" dirty="0"/>
           </a:p>
+          <a:p>
+            <a:pPr indent="0" marL="0">
+              <a:lnSpc>
+                <a:spcPts val="1100"/>
+              </a:lnSpc>
+              <a:buNone/>
+            </a:pPr>
+            <a:r>
+              <a:rPr lang="en-US" sz="780" dirty="0">
+                <a:solidFill>
+                  <a:srgbClr val="D9D9D9"/>
+                </a:solidFill>
+                <a:latin typeface="Arial" pitchFamily="34" charset="0"/>
+                <a:ea typeface="Arial" pitchFamily="34" charset="-122"/>
+                <a:cs typeface="Arial" pitchFamily="34" charset="-120"/>
+              </a:rPr>
+              <a:t>• Next: Inter-procedural cross-module call graphs &amp; CodeQL Java queries.</a:t>
+            </a:r>
+            <a:endParaRPr lang="en-US" sz="780" dirty="0"/>
+          </a:p>
         </p:txBody>
       </p:sp>
       <p:sp>
@@ -24980,8 +25000,8 @@
         </p:nvSpPr>
         <p:spPr>
           <a:xfrm>
-            <a:off x="3246120" y="1645920"/>
-            <a:ext cx="2697480" cy="2743200"/>
+            <a:off x="4663440" y="1645920"/>
+            <a:ext cx="4023360" cy="2743200"/>
           </a:xfrm>
           <a:prstGeom prst="rect">
             <a:avLst/>
@@ -25005,24 +25025,24 @@
         </p:nvSpPr>
         <p:spPr>
           <a:xfrm>
-            <a:off x="3383280" y="1828800"/>
-            <a:ext cx="2423160" cy="228600"/>
-          </a:xfrm>
-          <a:prstGeom prst="rect">
-            <a:avLst/>
-          </a:prstGeom>
-          <a:noFill/>
-          <a:ln/>
-        </p:spPr>
-        <p:txBody>
-          <a:bodyPr wrap="square" rtlCol="0" anchor="ctr"/>
-          <a:lstStyle/>
-          <a:p>
-            <a:pPr indent="0" marL="0">
-              <a:buNone/>
-            </a:pPr>
-            <a:r>
-              <a:rPr lang="en-US" sz="950" b="1" dirty="0">
+            <a:off x="4846320" y="1828800"/>
+            <a:ext cx="3657600" cy="228600"/>
+          </a:xfrm>
+          <a:prstGeom prst="rect">
+            <a:avLst/>
+          </a:prstGeom>
+          <a:noFill/>
+          <a:ln/>
+        </p:spPr>
+        <p:txBody>
+          <a:bodyPr wrap="square" rtlCol="0" anchor="ctr"/>
+          <a:lstStyle/>
+          <a:p>
+            <a:pPr indent="0" marL="0">
+              <a:buNone/>
+            </a:pPr>
+            <a:r>
+              <a:rPr lang="en-US" sz="1000" b="1" dirty="0">
                 <a:solidFill>
                   <a:srgbClr val="4A90E2"/>
                 </a:solidFill>
@@ -25032,7 +25052,7 @@
               </a:rPr>
               <a:t>ANMOL SALUJA (25BCE1332)</a:t>
             </a:r>
-            <a:endParaRPr lang="en-US" sz="950" dirty="0"/>
+            <a:endParaRPr lang="en-US" sz="1000" dirty="0"/>
           </a:p>
         </p:txBody>
       </p:sp>
@@ -25044,8 +25064,8 @@
         </p:nvSpPr>
         <p:spPr>
           <a:xfrm>
-            <a:off x="3383280" y="2057400"/>
-            <a:ext cx="2423160" cy="228600"/>
+            <a:off x="4846320" y="2057400"/>
+            <a:ext cx="3657600" cy="228600"/>
           </a:xfrm>
           <a:prstGeom prst="rect">
             <a:avLst/>
@@ -25069,7 +25089,7 @@
                 <a:ea typeface="Arial" pitchFamily="34" charset="-122"/>
                 <a:cs typeface="Arial" pitchFamily="34" charset="-120"/>
               </a:rPr>
-              <a:t>Discovery Layer &amp; CBOM Conformance</a:t>
+              <a:t>Threat Modeling, HNDL Scoring &amp; Verification Harness</a:t>
             </a:r>
             <a:endParaRPr lang="en-US" sz="850" dirty="0"/>
           </a:p>
@@ -25083,8 +25103,8 @@
         </p:nvSpPr>
         <p:spPr>
           <a:xfrm>
-            <a:off x="3383280" y="2377440"/>
-            <a:ext cx="2423160" cy="1920240"/>
+            <a:off x="4846320" y="2331720"/>
+            <a:ext cx="3657600" cy="1965960"/>
           </a:xfrm>
           <a:prstGeom prst="rect">
             <a:avLst/>
@@ -25111,7 +25131,7 @@
                 <a:ea typeface="Arial" pitchFamily="34" charset="-122"/>
                 <a:cs typeface="Arial" pitchFamily="34" charset="-120"/>
               </a:rPr>
-              <a:t>• Curated cryptographic API pattern corpus.</a:t>
+              <a:t>• Formalised Mosca inequality operationalisation &amp; 16-paper literature gaps.</a:t>
             </a:r>
             <a:endParaRPr lang="en-US" sz="780" dirty="0"/>
           </a:p>
@@ -25131,7 +25151,7 @@
                 <a:ea typeface="Arial" pitchFamily="34" charset="-122"/>
                 <a:cs typeface="Arial" pitchFamily="34" charset="-120"/>
               </a:rPr>
-              <a:t>• Developed Stage 1 AST Discovery Engine (discovery.py).</a:t>
+              <a:t>• Formulated HNDL Exposure Scoring equation &amp; Stage 3 Scoring Engine (scorer.py).</a:t>
             </a:r>
             <a:endParaRPr lang="en-US" sz="780" dirty="0"/>
           </a:p>
@@ -25151,7 +25171,7 @@
                 <a:ea typeface="Arial" pitchFamily="34" charset="-122"/>
                 <a:cs typeface="Arial" pitchFamily="34" charset="-120"/>
               </a:rPr>
-              <a:t>• Implemented CycloneDX 1.6 CBOM Serializer (cbom.py).</a:t>
+              <a:t>• Implemented CycloneDX 1.6 CBOM Serializer (cbom.py, cli.py).</a:t>
             </a:r>
             <a:endParaRPr lang="en-US" sz="780" dirty="0"/>
           </a:p>
@@ -25171,7 +25191,7 @@
                 <a:ea typeface="Arial" pitchFamily="34" charset="-122"/>
                 <a:cs typeface="Arial" pitchFamily="34" charset="-120"/>
               </a:rPr>
-              <a:t>• Built constant propagation logic.</a:t>
+              <a:t>• Full-Stack Backend Integration &amp; REST API server (server.py).</a:t>
             </a:r>
             <a:endParaRPr lang="en-US" sz="780" dirty="0"/>
           </a:p>
@@ -25191,135 +25211,10 @@
                 <a:ea typeface="Arial" pitchFamily="34" charset="-122"/>
                 <a:cs typeface="Arial" pitchFamily="34" charset="-120"/>
               </a:rPr>
-              <a:t>• Next: Java Tree-sitter parsing &amp; 100+ Semgrep rules.</a:t>
+              <a:t>• Authored 100% passing automated unit test suite (tests/test_copilot.py).</a:t>
             </a:r>
             <a:endParaRPr lang="en-US" sz="780" dirty="0"/>
           </a:p>
-        </p:txBody>
-      </p:sp>
-      <p:sp>
-        <p:nvSpPr>
-          <p:cNvPr id="18" name="Shape 16"/>
-          <p:cNvSpPr/>
-          <p:nvPr/>
-        </p:nvSpPr>
-        <p:spPr>
-          <a:xfrm>
-            <a:off x="6035040" y="1645920"/>
-            <a:ext cx="2697480" cy="2743200"/>
-          </a:xfrm>
-          <a:prstGeom prst="rect">
-            <a:avLst/>
-          </a:prstGeom>
-          <a:solidFill>
-            <a:srgbClr val="1F1F1F"/>
-          </a:solidFill>
-          <a:ln w="12700">
-            <a:solidFill>
-              <a:srgbClr val="4A4A4A"/>
-            </a:solidFill>
-            <a:prstDash val="solid"/>
-          </a:ln>
-        </p:spPr>
-      </p:sp>
-      <p:sp>
-        <p:nvSpPr>
-          <p:cNvPr id="19" name="Text 17"/>
-          <p:cNvSpPr/>
-          <p:nvPr/>
-        </p:nvSpPr>
-        <p:spPr>
-          <a:xfrm>
-            <a:off x="6172200" y="1828800"/>
-            <a:ext cx="2423160" cy="228600"/>
-          </a:xfrm>
-          <a:prstGeom prst="rect">
-            <a:avLst/>
-          </a:prstGeom>
-          <a:noFill/>
-          <a:ln/>
-        </p:spPr>
-        <p:txBody>
-          <a:bodyPr wrap="square" rtlCol="0" anchor="ctr"/>
-          <a:lstStyle/>
-          <a:p>
-            <a:pPr indent="0" marL="0">
-              <a:buNone/>
-            </a:pPr>
-            <a:r>
-              <a:rPr lang="en-US" sz="950" b="1" dirty="0">
-                <a:solidFill>
-                  <a:srgbClr val="4A90E2"/>
-                </a:solidFill>
-                <a:latin typeface="Arial" pitchFamily="34" charset="0"/>
-                <a:ea typeface="Arial" pitchFamily="34" charset="-122"/>
-                <a:cs typeface="Arial" pitchFamily="34" charset="-120"/>
-              </a:rPr>
-              <a:t>AVIKA TYAGI (25BCE1294)</a:t>
-            </a:r>
-            <a:endParaRPr lang="en-US" sz="950" dirty="0"/>
-          </a:p>
-        </p:txBody>
-      </p:sp>
-      <p:sp>
-        <p:nvSpPr>
-          <p:cNvPr id="20" name="Text 18"/>
-          <p:cNvSpPr/>
-          <p:nvPr/>
-        </p:nvSpPr>
-        <p:spPr>
-          <a:xfrm>
-            <a:off x="6172200" y="2057400"/>
-            <a:ext cx="2423160" cy="228600"/>
-          </a:xfrm>
-          <a:prstGeom prst="rect">
-            <a:avLst/>
-          </a:prstGeom>
-          <a:noFill/>
-          <a:ln/>
-        </p:spPr>
-        <p:txBody>
-          <a:bodyPr wrap="square" rtlCol="0" anchor="ctr"/>
-          <a:lstStyle/>
-          <a:p>
-            <a:pPr indent="0" marL="0">
-              <a:buNone/>
-            </a:pPr>
-            <a:r>
-              <a:rPr lang="en-US" sz="850" b="1" dirty="0">
-                <a:solidFill>
-                  <a:srgbClr val="FFFFFF"/>
-                </a:solidFill>
-                <a:latin typeface="Arial" pitchFamily="34" charset="0"/>
-                <a:ea typeface="Arial" pitchFamily="34" charset="-122"/>
-                <a:cs typeface="Arial" pitchFamily="34" charset="-120"/>
-              </a:rPr>
-              <a:t>Scoring, Benchmark &amp; Verification</a:t>
-            </a:r>
-            <a:endParaRPr lang="en-US" sz="850" dirty="0"/>
-          </a:p>
-        </p:txBody>
-      </p:sp>
-      <p:sp>
-        <p:nvSpPr>
-          <p:cNvPr id="21" name="Text 19"/>
-          <p:cNvSpPr/>
-          <p:nvPr/>
-        </p:nvSpPr>
-        <p:spPr>
-          <a:xfrm>
-            <a:off x="6172200" y="2377440"/>
-            <a:ext cx="2423160" cy="1920240"/>
-          </a:xfrm>
-          <a:prstGeom prst="rect">
-            <a:avLst/>
-          </a:prstGeom>
-          <a:noFill/>
-          <a:ln/>
-        </p:spPr>
-        <p:txBody>
-          <a:bodyPr wrap="square" rtlCol="0" anchor="ctr"/>
-          <a:lstStyle/>
           <a:p>
             <a:pPr indent="0" marL="0">
               <a:lnSpc>
@@ -25336,7 +25231,7 @@
                 <a:ea typeface="Arial" pitchFamily="34" charset="-122"/>
                 <a:cs typeface="Arial" pitchFamily="34" charset="-120"/>
               </a:rPr>
-              <a:t>• Formulated mathematical HNDL exposure score.</a:t>
+              <a:t>• Authored Report Sections 1, 2, 3, 8, 9, 10 &amp; document sanitization.</a:t>
             </a:r>
             <a:endParaRPr lang="en-US" sz="780" dirty="0"/>
           </a:p>
@@ -25356,67 +25251,7 @@
                 <a:ea typeface="Arial" pitchFamily="34" charset="-122"/>
                 <a:cs typeface="Arial" pitchFamily="34" charset="-120"/>
               </a:rPr>
-              <a:t>• Implemented Stage 3 Scoring Engine (scorer.py).</a:t>
-            </a:r>
-            <a:endParaRPr lang="en-US" sz="780" dirty="0"/>
-          </a:p>
-          <a:p>
-            <a:pPr indent="0" marL="0">
-              <a:lnSpc>
-                <a:spcPts val="1100"/>
-              </a:lnSpc>
-              <a:buNone/>
-            </a:pPr>
-            <a:r>
-              <a:rPr lang="en-US" sz="780" dirty="0">
-                <a:solidFill>
-                  <a:srgbClr val="D9D9D9"/>
-                </a:solidFill>
-                <a:latin typeface="Arial" pitchFamily="34" charset="0"/>
-                <a:ea typeface="Arial" pitchFamily="34" charset="-122"/>
-                <a:cs typeface="Arial" pitchFamily="34" charset="-120"/>
-              </a:rPr>
-              <a:t>• Built context noise suppression filter.</a:t>
-            </a:r>
-            <a:endParaRPr lang="en-US" sz="780" dirty="0"/>
-          </a:p>
-          <a:p>
-            <a:pPr indent="0" marL="0">
-              <a:lnSpc>
-                <a:spcPts val="1100"/>
-              </a:lnSpc>
-              <a:buNone/>
-            </a:pPr>
-            <a:r>
-              <a:rPr lang="en-US" sz="780" dirty="0">
-                <a:solidFill>
-                  <a:srgbClr val="D9D9D9"/>
-                </a:solidFill>
-                <a:latin typeface="Arial" pitchFamily="34" charset="0"/>
-                <a:ea typeface="Arial" pitchFamily="34" charset="-122"/>
-                <a:cs typeface="Arial" pitchFamily="34" charset="-120"/>
-              </a:rPr>
-              <a:t>• Developed automated test suite (test_copilot.py).</a:t>
-            </a:r>
-            <a:endParaRPr lang="en-US" sz="780" dirty="0"/>
-          </a:p>
-          <a:p>
-            <a:pPr indent="0" marL="0">
-              <a:lnSpc>
-                <a:spcPts val="1100"/>
-              </a:lnSpc>
-              <a:buNone/>
-            </a:pPr>
-            <a:r>
-              <a:rPr lang="en-US" sz="780" dirty="0">
-                <a:solidFill>
-                  <a:srgbClr val="D9D9D9"/>
-                </a:solidFill>
-                <a:latin typeface="Arial" pitchFamily="34" charset="0"/>
-                <a:ea typeface="Arial" pitchFamily="34" charset="-122"/>
-                <a:cs typeface="Arial" pitchFamily="34" charset="-120"/>
-              </a:rPr>
-              <a:t>• Next: 15-repo benchmark curation &amp; liboqs harness.</a:t>
+              <a:t>• Next: 15-repo benchmark curation &amp; liboqs 3-gate patch verification harness.</a:t>
             </a:r>
             <a:endParaRPr lang="en-US" sz="780" dirty="0"/>
           </a:p>
@@ -27011,7 +26846,7 @@
                 <a:ea typeface="Arial" pitchFamily="34" charset="-122"/>
                 <a:cs typeface="Arial" pitchFamily="34" charset="-120"/>
               </a:rPr>
-              <a:t>INDIVIDUAL EVIDENCE OF COMPLETED WORK (REVIEW II):
+              <a:t>INDIVIDUAL EVIDENCE OF COMPLETED WORK (REVIEW II — 50/50 EQUITABLE SPLIT):
 </a:t>
             </a:r>
             <a:pPr indent="0" marL="0">
@@ -27021,7 +26856,7 @@
               <a:buNone/>
             </a:pPr>
             <a:r>
-              <a:rPr lang="en-US" sz="900" b="1" dirty="0">
+              <a:rPr lang="en-US" sz="950" b="1" dirty="0">
                 <a:solidFill>
                   <a:srgbClr val="4A90E2"/>
                 </a:solidFill>
@@ -27029,7 +26864,7 @@
                 <a:ea typeface="Arial" pitchFamily="34" charset="-122"/>
                 <a:cs typeface="Arial" pitchFamily="34" charset="-120"/>
               </a:rPr>
-              <a:t>• Avi Dhandhania (Lead Architect &amp; Dataflow Engineer):
+              <a:t>• Avi Dhandhania (25BCE1207 — Lead Architect, Dataflow &amp; UI):
 </a:t>
             </a:r>
             <a:pPr indent="0" marL="0">
@@ -27047,7 +26882,7 @@
                 <a:ea typeface="Arial" pitchFamily="34" charset="-122"/>
                 <a:cs typeface="Arial" pitchFamily="34" charset="-120"/>
               </a:rPr>
-              <a:t>  - Formalized the HNDL threat model and operationalized Mosca's inequality in code.
+              <a:t>  - Designed the end-to-end 4-stage pipeline architecture and intermediate data contracts (models.py).
 </a:t>
             </a:r>
             <a:pPr indent="0" marL="0">
@@ -27065,7 +26900,7 @@
                 <a:ea typeface="Arial" pitchFamily="34" charset="-122"/>
                 <a:cs typeface="Arial" pitchFamily="34" charset="-120"/>
               </a:rPr>
-              <a:t>  - Designed the end-to-end 4-stage pipeline architecture and intermediate data structures (models.py).
+              <a:t>  - Implemented the Stage 1 AST Discovery Engine (discovery.py) and constant propagation logic.
 </a:t>
             </a:r>
             <a:pPr indent="0" marL="0">
@@ -27083,7 +26918,7 @@
                 <a:ea typeface="Arial" pitchFamily="34" charset="-122"/>
                 <a:cs typeface="Arial" pitchFamily="34" charset="-120"/>
               </a:rPr>
-              <a:t>  - Implemented the Stage 2 Dataflow Binding Engine (dataflow.py), tracing plaintext parameters to sources and ciphertext to sinks.
+              <a:t>  - Developed the Stage 2 Dataflow Binding Engine (dataflow.py), tracing plaintext sources and ciphertext sinks.
 </a:t>
             </a:r>
             <a:pPr indent="0" marL="0">
@@ -27101,7 +26936,7 @@
                 <a:ea typeface="Arial" pitchFamily="34" charset="-122"/>
                 <a:cs typeface="Arial" pitchFamily="34" charset="-120"/>
               </a:rPr>
-              <a:t>  - Authored the retention extraction logic for S3 lifecycle policies and Redis TTL parsing.
+              <a:t>  - Designed the interactive Web Dashboard UI/UX layout and visual component design.
 </a:t>
             </a:r>
             <a:pPr indent="0" marL="0">
@@ -27111,7 +26946,7 @@
               <a:buNone/>
             </a:pPr>
             <a:r>
-              <a:rPr lang="en-US" sz="900" b="1" dirty="0">
+              <a:rPr lang="en-US" sz="950" b="1" dirty="0">
                 <a:solidFill>
                   <a:srgbClr val="4EAF51"/>
                 </a:solidFill>
@@ -27119,7 +26954,7 @@
                 <a:ea typeface="Arial" pitchFamily="34" charset="-122"/>
                 <a:cs typeface="Arial" pitchFamily="34" charset="-120"/>
               </a:rPr>
-              <a:t>• Team Member 2 (Discovery &amp; CBOM Specialist):
+              <a:t>• Anmol Saluja (25BCE1332 — Threat Modeling, Scoring Engine, Testing &amp; Backend Integration):
 </a:t>
             </a:r>
             <a:pPr indent="0" marL="0">
@@ -27137,7 +26972,7 @@
                 <a:ea typeface="Arial" pitchFamily="34" charset="-122"/>
                 <a:cs typeface="Arial" pitchFamily="34" charset="-120"/>
               </a:rPr>
-              <a:t>  - Built the AST cryptographic discovery engine (discovery.py) and constant propagation pass.
+              <a:t>  - Formalized the HNDL threat model, Mosca's inequality derivation, and 16-paper literature gap matrix.
 </a:t>
             </a:r>
             <a:pPr indent="0" marL="0">
@@ -27155,7 +26990,7 @@
                 <a:ea typeface="Arial" pitchFamily="34" charset="-122"/>
                 <a:cs typeface="Arial" pitchFamily="34" charset="-120"/>
               </a:rPr>
-              <a:t>  - Implemented the CycloneDX 1.6 CBOM serialization engine (cbom.py) matching Eurocrypt 2026 standards.
+              <a:t>  - Implemented the Stage 3 HNDL Exposure Scoring Engine (scorer.py) and noise suppression filter.
 </a:t>
             </a:r>
             <a:pPr indent="0" marL="0">
@@ -27165,15 +27000,15 @@
               <a:buNone/>
             </a:pPr>
             <a:r>
-              <a:rPr lang="en-US" sz="900" b="1" dirty="0">
-                <a:solidFill>
-                  <a:srgbClr val="4A90E2"/>
-                </a:solidFill>
-                <a:latin typeface="Arial" pitchFamily="34" charset="0"/>
-                <a:ea typeface="Arial" pitchFamily="34" charset="-122"/>
-                <a:cs typeface="Arial" pitchFamily="34" charset="-120"/>
-              </a:rPr>
-              <a:t>• Team Member 3 (Scoring, Benchmark &amp; Verification Specialist):
+              <a:rPr lang="en-US" sz="800" dirty="0">
+                <a:solidFill>
+                  <a:srgbClr val="D9D9D9"/>
+                </a:solidFill>
+                <a:latin typeface="Arial" pitchFamily="34" charset="0"/>
+                <a:ea typeface="Arial" pitchFamily="34" charset="-122"/>
+                <a:cs typeface="Arial" pitchFamily="34" charset="-120"/>
+              </a:rPr>
+              <a:t>  - Developed the CycloneDX 1.6 CBOM Serializer (cbom.py, cli.py) with custom dataflow properties.
 </a:t>
             </a:r>
             <a:pPr indent="0" marL="0">
@@ -27191,25 +27026,7 @@
                 <a:ea typeface="Arial" pitchFamily="34" charset="-122"/>
                 <a:cs typeface="Arial" pitchFamily="34" charset="-120"/>
               </a:rPr>
-              <a:t>  - Formulated the mathematical HNDL scoring function (scorer.py) and context noise suppression filter.
-</a:t>
-            </a:r>
-            <a:pPr indent="0" marL="0">
-              <a:lnSpc>
-                <a:spcPts val="1100"/>
-              </a:lnSpc>
-              <a:buNone/>
-            </a:pPr>
-            <a:r>
-              <a:rPr lang="en-US" sz="800" dirty="0">
-                <a:solidFill>
-                  <a:srgbClr val="D9D9D9"/>
-                </a:solidFill>
-                <a:latin typeface="Arial" pitchFamily="34" charset="0"/>
-                <a:ea typeface="Arial" pitchFamily="34" charset="-122"/>
-                <a:cs typeface="Arial" pitchFamily="34" charset="-120"/>
-              </a:rPr>
-              <a:t>  - Constructed the automated unit testing harness (tests/test_copilot.py) and sample benchmark repo.</a:t>
+              <a:t>  - Built full-stack REST API server (server.py) and 100% passing unit test suite (tests/test_copilot.py).</a:t>
             </a:r>
             <a:endParaRPr lang="en-US" sz="800" dirty="0"/>
           </a:p>

--- a/Crypto-Agility_Navigator_Review2.pptx
+++ b/Crypto-Agility_Navigator_Review2.pptx
@@ -25280,7 +25280,7 @@
                 <a:ea typeface="Arial" pitchFamily="34" charset="-122"/>
                 <a:cs typeface="Arial" pitchFamily="34" charset="-120"/>
               </a:rPr>
-              <a:t>Equitable 2-Way Allocation Across Team Members (50/50)</a:t>
+              <a:t>Equitable 3-Way Allocation Across Team Members</a:t>
             </a:r>
             <a:endParaRPr lang="en-US" sz="1800" dirty="0"/>
           </a:p>
@@ -27595,6 +27595,24 @@
                 <a:cs typeface="Arial" pitchFamily="34" charset="-120"/>
               </a:rPr>
               <a:t>• Anmol Saluja (25BCE1332 — Threat Modeling, Scoring Engine, Testing &amp; Backend Integration):
+</a:t>
+            </a:r>
+            <a:pPr indent="0" marL="0">
+              <a:lnSpc>
+                <a:spcPts val="1100"/>
+              </a:lnSpc>
+              <a:buNone/>
+            </a:pPr>
+            <a:r>
+              <a:rPr lang="en-US" sz="950" b="1" dirty="0">
+                <a:solidFill>
+                  <a:srgbClr val="F59E0B"/>
+                </a:solidFill>
+                <a:latin typeface="Arial" pitchFamily="34" charset="0"/>
+                <a:ea typeface="Arial" pitchFamily="34" charset="-122"/>
+                <a:cs typeface="Arial" pitchFamily="34" charset="-120"/>
+              </a:rPr>
+              <a:t>• Avika Tyagi (25BCE1294 — Project Coordination, Requirement Analysis &amp; Presentation Design):
 </a:t>
             </a:r>
             <a:pPr indent="0" marL="0">

--- a/Crypto-Agility_Navigator_Review2.pptx
+++ b/Crypto-Agility_Navigator_Review2.pptx
@@ -17396,7 +17396,7 @@
                 <a:ea typeface="Arial" pitchFamily="34" charset="-122"/>
                 <a:cs typeface="Arial" pitchFamily="34" charset="-120"/>
               </a:rPr>
-              <a:t>PROTOTYPE PACKAGE: crypto_agility_copilot</a:t>
+              <a:t>PROTOTYPE PACKAGE: crypto_agility_navigator</a:t>
             </a:r>
             <a:endParaRPr lang="en-US" sz="1100" dirty="0"/>
           </a:p>
@@ -17438,7 +17438,7 @@
                 <a:ea typeface="Courier New" pitchFamily="34" charset="-122"/>
                 <a:cs typeface="Courier New" pitchFamily="34" charset="-120"/>
               </a:rPr>
-              <a:t>src/crypto_agility_copilot/
+              <a:t>src/crypto_agility_navigator/
 </a:t>
             </a:r>
             <a:pPr indent="0" marL="0">
@@ -18718,7 +18718,7 @@
                 <a:ea typeface="Courier New" pitchFamily="34" charset="-122"/>
                 <a:cs typeface="Courier New" pitchFamily="34" charset="-120"/>
               </a:rPr>
-              <a:t>$ python3 -m src.crypto_agility_copilot.cli examples/sample_project --output-cbom examples/sample_cbom.json --show-suppressed
+              <a:t>$ python3 -m src.crypto_agility_navigator.cli examples/sample_project --output-cbom examples/sample_cbom.json --show-suppressed
 </a:t>
             </a:r>
             <a:pPr indent="0" marL="0">
@@ -20293,7 +20293,7 @@
                 <a:ea typeface="Arial" pitchFamily="34" charset="-122"/>
                 <a:cs typeface="Arial" pitchFamily="34" charset="-120"/>
               </a:rPr>
-              <a:t>100% Pass Rate on Unit Testing (tests/test_copilot.py)</a:t>
+              <a:t>100% Pass Rate on Unit Testing (tests/test_navigator.py)</a:t>
             </a:r>
             <a:endParaRPr lang="en-US" sz="1800" dirty="0"/>
           </a:p>
@@ -20497,7 +20497,7 @@
                 <a:ea typeface="Courier New" pitchFamily="34" charset="-122"/>
                 <a:cs typeface="Courier New" pitchFamily="34" charset="-120"/>
               </a:rPr>
-              <a:t>test_cbom_generation (test_copilot.TestCryptoAgilityCopilot.test_cbom_generation) .................. ok
+              <a:t>test_cbom_generation (test_navigator.TestCryptoAgilityCopilot.test_cbom_generation) .................. ok
 </a:t>
             </a:r>
             <a:pPr indent="0" marL="0">
@@ -20515,7 +20515,7 @@
                 <a:ea typeface="Courier New" pitchFamily="34" charset="-122"/>
                 <a:cs typeface="Courier New" pitchFamily="34" charset="-120"/>
               </a:rPr>
-              <a:t>test_context_noise_suppression (test_copilot.TestCryptoAgilityCopilot.test_context_noise_suppression) ok
+              <a:t>test_context_noise_suppression (test_navigator.TestCryptoAgilityCopilot.test_context_noise_suppression) ok
 </a:t>
             </a:r>
             <a:pPr indent="0" marL="0">
@@ -20533,7 +20533,7 @@
                 <a:ea typeface="Courier New" pitchFamily="34" charset="-122"/>
                 <a:cs typeface="Courier New" pitchFamily="34" charset="-120"/>
               </a:rPr>
-              <a:t>test_discovery_engine (test_copilot.TestCryptoAgilityCopilot.test_discovery_engine) ................ ok
+              <a:t>test_discovery_engine (test_navigator.TestCryptoAgilityCopilot.test_discovery_engine) ................ ok
 </a:t>
             </a:r>
             <a:pPr indent="0" marL="0">
@@ -20551,7 +20551,7 @@
                 <a:ea typeface="Courier New" pitchFamily="34" charset="-122"/>
                 <a:cs typeface="Courier New" pitchFamily="34" charset="-120"/>
               </a:rPr>
-              <a:t>test_scoring_and_mosca_inequality (test_copilot.TestCryptoAgilityCopilot.test_scoring_and_mosca) ... ok
+              <a:t>test_scoring_and_mosca_inequality (test_navigator.TestCryptoAgilityCopilot.test_scoring_and_mosca) ... ok
 </a:t>
             </a:r>
             <a:pPr indent="0" marL="0">
@@ -20569,7 +20569,7 @@
                 <a:ea typeface="Courier New" pitchFamily="34" charset="-122"/>
                 <a:cs typeface="Courier New" pitchFamily="34" charset="-120"/>
               </a:rPr>
-              <a:t>test_semantic_binding_discrimination (test_copilot.TestCryptoAgilityCopilot.test_semantic_binding) . ok
+              <a:t>test_semantic_binding_discrimination (test_navigator.TestCryptoAgilityCopilot.test_semantic_binding) . ok
 </a:t>
             </a:r>
             <a:pPr indent="0" marL="0">
@@ -25851,7 +25851,7 @@
                 <a:ea typeface="Arial" pitchFamily="34" charset="-122"/>
                 <a:cs typeface="Arial" pitchFamily="34" charset="-120"/>
               </a:rPr>
-              <a:t>• Authored 100% passing automated unit test suite (tests/test_copilot.py).</a:t>
+              <a:t>• Authored 100% passing automated unit test suite (tests/test_navigator.py).</a:t>
             </a:r>
             <a:endParaRPr lang="en-US" sz="780" dirty="0"/>
           </a:p>
@@ -27684,7 +27684,7 @@
                 <a:ea typeface="Arial" pitchFamily="34" charset="-122"/>
                 <a:cs typeface="Arial" pitchFamily="34" charset="-120"/>
               </a:rPr>
-              <a:t>  - Built full-stack REST API server (server.py) and 100% passing unit test suite (tests/test_copilot.py).</a:t>
+              <a:t>  - Built full-stack REST API server (server.py) and 100% passing unit test suite (tests/test_navigator.py).</a:t>
             </a:r>
             <a:endParaRPr lang="en-US" sz="800" dirty="0"/>
           </a:p>

--- a/Crypto-Agility_Navigator_Review2.pptx
+++ b/Crypto-Agility_Navigator_Review2.pptx
@@ -19323,7 +19323,7 @@
                 <a:ea typeface="Arial" pitchFamily="34" charset="-122"/>
                 <a:cs typeface="Arial" pitchFamily="34" charset="-120"/>
               </a:rPr>
-              <a:t>• The Copilot Resolution:
+              <a:t>• The Navigator Resolution:
 </a:t>
             </a:r>
             <a:pPr indent="0" marL="0">
@@ -19494,7 +19494,7 @@
                 <a:ea typeface="Arial" pitchFamily="34" charset="-122"/>
                 <a:cs typeface="Arial" pitchFamily="34" charset="-120"/>
               </a:rPr>
-              <a:t>  Copilot traces the input (static bytes) and sink (ETag cache header), proving it has no security impact.
+              <a:t>  Navigator traces the input (static bytes) and sink (ETag cache header), proving it has no security impact.
 </a:t>
             </a:r>
             <a:pPr indent="0" marL="0">
@@ -20497,7 +20497,7 @@
                 <a:ea typeface="Courier New" pitchFamily="34" charset="-122"/>
                 <a:cs typeface="Courier New" pitchFamily="34" charset="-120"/>
               </a:rPr>
-              <a:t>test_cbom_generation (test_navigator.TestCryptoAgilityCopilot.test_cbom_generation) .................. ok
+              <a:t>test_cbom_generation (test_navigator.TestCryptoAgilityNavigator.test_cbom_generation) .................. ok
 </a:t>
             </a:r>
             <a:pPr indent="0" marL="0">
@@ -20515,7 +20515,7 @@
                 <a:ea typeface="Courier New" pitchFamily="34" charset="-122"/>
                 <a:cs typeface="Courier New" pitchFamily="34" charset="-120"/>
               </a:rPr>
-              <a:t>test_context_noise_suppression (test_navigator.TestCryptoAgilityCopilot.test_context_noise_suppression) ok
+              <a:t>test_context_noise_suppression (test_navigator.TestCryptoAgilityNavigator.test_context_noise_suppression) ok
 </a:t>
             </a:r>
             <a:pPr indent="0" marL="0">
@@ -20533,7 +20533,7 @@
                 <a:ea typeface="Courier New" pitchFamily="34" charset="-122"/>
                 <a:cs typeface="Courier New" pitchFamily="34" charset="-120"/>
               </a:rPr>
-              <a:t>test_discovery_engine (test_navigator.TestCryptoAgilityCopilot.test_discovery_engine) ................ ok
+              <a:t>test_discovery_engine (test_navigator.TestCryptoAgilityNavigator.test_discovery_engine) ................ ok
 </a:t>
             </a:r>
             <a:pPr indent="0" marL="0">
@@ -20551,7 +20551,7 @@
                 <a:ea typeface="Courier New" pitchFamily="34" charset="-122"/>
                 <a:cs typeface="Courier New" pitchFamily="34" charset="-120"/>
               </a:rPr>
-              <a:t>test_scoring_and_mosca_inequality (test_navigator.TestCryptoAgilityCopilot.test_scoring_and_mosca) ... ok
+              <a:t>test_scoring_and_mosca_inequality (test_navigator.TestCryptoAgilityNavigator.test_scoring_and_mosca) ... ok
 </a:t>
             </a:r>
             <a:pPr indent="0" marL="0">
@@ -20569,7 +20569,7 @@
                 <a:ea typeface="Courier New" pitchFamily="34" charset="-122"/>
                 <a:cs typeface="Courier New" pitchFamily="34" charset="-120"/>
               </a:rPr>
-              <a:t>test_semantic_binding_discrimination (test_navigator.TestCryptoAgilityCopilot.test_semantic_binding) . ok
+              <a:t>test_semantic_binding_discrimination (test_navigator.TestCryptoAgilityNavigator.test_semantic_binding) . ok
 </a:t>
             </a:r>
             <a:pPr indent="0" marL="0">
@@ -32476,7 +32476,7 @@
                 <a:ea typeface="Arial" pitchFamily="34" charset="-122"/>
                 <a:cs typeface="Arial" pitchFamily="34" charset="-120"/>
               </a:rPr>
-              <a:t>COPILOT SOLUTION:</a:t>
+              <a:t>NAVIGATOR SOLUTION:</a:t>
             </a:r>
             <a:endParaRPr lang="en-US" sz="800" dirty="0"/>
           </a:p>
@@ -32702,7 +32702,7 @@
                 <a:ea typeface="Arial" pitchFamily="34" charset="-122"/>
                 <a:cs typeface="Arial" pitchFamily="34" charset="-120"/>
               </a:rPr>
-              <a:t>COPILOT SOLUTION:</a:t>
+              <a:t>NAVIGATOR SOLUTION:</a:t>
             </a:r>
             <a:endParaRPr lang="en-US" sz="800" dirty="0"/>
           </a:p>
@@ -32928,7 +32928,7 @@
                 <a:ea typeface="Arial" pitchFamily="34" charset="-122"/>
                 <a:cs typeface="Arial" pitchFamily="34" charset="-120"/>
               </a:rPr>
-              <a:t>COPILOT SOLUTION:</a:t>
+              <a:t>NAVIGATOR SOLUTION:</a:t>
             </a:r>
             <a:endParaRPr lang="en-US" sz="800" dirty="0"/>
           </a:p>

--- a/Crypto-Agility_Navigator_Review2.pptx
+++ b/Crypto-Agility_Navigator_Review2.pptx
@@ -4220,6 +4220,10 @@
             <a:prstDash val="solid"/>
           </a:ln>
         </p:spPr>
+        <p:txBody>
+          <a:bodyPr/>
+          <a:p/>
+        </p:txBody>
       </p:sp>
       <p:sp>
         <p:nvSpPr>
@@ -4478,6 +4482,10 @@
             <a:prstDash val="solid"/>
           </a:ln>
         </p:spPr>
+        <p:txBody>
+          <a:bodyPr/>
+          <a:p/>
+        </p:txBody>
       </p:sp>
       <p:sp>
         <p:nvSpPr>
@@ -4657,6 +4665,10 @@
             <a:prstDash val="solid"/>
           </a:ln>
         </p:spPr>
+        <p:txBody>
+          <a:bodyPr/>
+          <a:p/>
+        </p:txBody>
       </p:sp>
       <p:sp>
         <p:nvSpPr>
@@ -4760,6 +4772,10 @@
             <a:prstDash val="solid"/>
           </a:ln>
         </p:spPr>
+        <p:txBody>
+          <a:bodyPr/>
+          <a:p/>
+        </p:txBody>
       </p:sp>
       <p:sp>
         <p:nvSpPr>
@@ -4944,6 +4960,10 @@
             <a:prstDash val="solid"/>
           </a:ln>
         </p:spPr>
+        <p:txBody>
+          <a:bodyPr/>
+          <a:p/>
+        </p:txBody>
       </p:sp>
       <p:sp>
         <p:nvSpPr>
@@ -5128,6 +5148,10 @@
             <a:prstDash val="solid"/>
           </a:ln>
         </p:spPr>
+        <p:txBody>
+          <a:bodyPr/>
+          <a:p/>
+        </p:txBody>
       </p:sp>
       <p:sp>
         <p:nvSpPr>
@@ -5312,6 +5336,10 @@
             <a:prstDash val="solid"/>
           </a:ln>
         </p:spPr>
+        <p:txBody>
+          <a:bodyPr/>
+          <a:p/>
+        </p:txBody>
       </p:sp>
       <p:sp>
         <p:nvSpPr>
@@ -5526,6 +5554,10 @@
             <a:prstDash val="solid"/>
           </a:ln>
         </p:spPr>
+        <p:txBody>
+          <a:bodyPr/>
+          <a:p/>
+        </p:txBody>
       </p:sp>
       <p:sp>
         <p:nvSpPr>
@@ -5705,6 +5737,10 @@
             <a:prstDash val="solid"/>
           </a:ln>
         </p:spPr>
+        <p:txBody>
+          <a:bodyPr/>
+          <a:p/>
+        </p:txBody>
       </p:sp>
       <p:sp>
         <p:nvSpPr>
@@ -5808,6 +5844,10 @@
             <a:prstDash val="solid"/>
           </a:ln>
         </p:spPr>
+        <p:txBody>
+          <a:bodyPr/>
+          <a:p/>
+        </p:txBody>
       </p:sp>
       <p:sp>
         <p:nvSpPr>
@@ -5992,6 +6032,10 @@
             <a:prstDash val="solid"/>
           </a:ln>
         </p:spPr>
+        <p:txBody>
+          <a:bodyPr/>
+          <a:p/>
+        </p:txBody>
       </p:sp>
       <p:sp>
         <p:nvSpPr>
@@ -6176,6 +6220,10 @@
             <a:prstDash val="solid"/>
           </a:ln>
         </p:spPr>
+        <p:txBody>
+          <a:bodyPr/>
+          <a:p/>
+        </p:txBody>
       </p:sp>
       <p:sp>
         <p:nvSpPr>
@@ -6360,6 +6408,10 @@
             <a:prstDash val="solid"/>
           </a:ln>
         </p:spPr>
+        <p:txBody>
+          <a:bodyPr/>
+          <a:p/>
+        </p:txBody>
       </p:sp>
       <p:sp>
         <p:nvSpPr>
@@ -6574,6 +6626,10 @@
             <a:prstDash val="solid"/>
           </a:ln>
         </p:spPr>
+        <p:txBody>
+          <a:bodyPr/>
+          <a:p/>
+        </p:txBody>
       </p:sp>
       <p:sp>
         <p:nvSpPr>
@@ -6753,6 +6809,10 @@
             <a:prstDash val="solid"/>
           </a:ln>
         </p:spPr>
+        <p:txBody>
+          <a:bodyPr/>
+          <a:p/>
+        </p:txBody>
       </p:sp>
       <p:sp>
         <p:nvSpPr>
@@ -6856,6 +6916,10 @@
             <a:prstDash val="solid"/>
           </a:ln>
         </p:spPr>
+        <p:txBody>
+          <a:bodyPr/>
+          <a:p/>
+        </p:txBody>
       </p:sp>
       <p:sp>
         <p:nvSpPr>
@@ -6962,6 +7026,10 @@
             <a:prstDash val="solid"/>
           </a:ln>
         </p:spPr>
+        <p:txBody>
+          <a:bodyPr/>
+          <a:p/>
+        </p:txBody>
       </p:sp>
       <p:sp>
         <p:nvSpPr>
@@ -7068,6 +7136,10 @@
             <a:prstDash val="solid"/>
           </a:ln>
         </p:spPr>
+        <p:txBody>
+          <a:bodyPr/>
+          <a:p/>
+        </p:txBody>
       </p:sp>
       <p:sp>
         <p:nvSpPr>
@@ -7174,6 +7246,10 @@
             <a:prstDash val="solid"/>
           </a:ln>
         </p:spPr>
+        <p:txBody>
+          <a:bodyPr/>
+          <a:p/>
+        </p:txBody>
       </p:sp>
       <p:sp>
         <p:nvSpPr>
@@ -7280,6 +7356,10 @@
             <a:prstDash val="solid"/>
           </a:ln>
         </p:spPr>
+        <p:txBody>
+          <a:bodyPr/>
+          <a:p/>
+        </p:txBody>
       </p:sp>
       <p:sp>
         <p:nvSpPr>
@@ -7386,6 +7466,10 @@
             <a:prstDash val="solid"/>
           </a:ln>
         </p:spPr>
+        <p:txBody>
+          <a:bodyPr/>
+          <a:p/>
+        </p:txBody>
       </p:sp>
       <p:sp>
         <p:nvSpPr>
@@ -7522,6 +7606,10 @@
             <a:prstDash val="solid"/>
           </a:ln>
         </p:spPr>
+        <p:txBody>
+          <a:bodyPr/>
+          <a:p/>
+        </p:txBody>
       </p:sp>
       <p:sp>
         <p:nvSpPr>
@@ -7701,6 +7789,10 @@
             <a:prstDash val="solid"/>
           </a:ln>
         </p:spPr>
+        <p:txBody>
+          <a:bodyPr/>
+          <a:p/>
+        </p:txBody>
       </p:sp>
       <p:sp>
         <p:nvSpPr>
@@ -7804,6 +7896,10 @@
             <a:prstDash val="solid"/>
           </a:ln>
         </p:spPr>
+        <p:txBody>
+          <a:bodyPr/>
+          <a:p/>
+        </p:txBody>
       </p:sp>
       <p:sp>
         <p:nvSpPr>
@@ -8047,6 +8143,10 @@
             <a:prstDash val="solid"/>
           </a:ln>
         </p:spPr>
+        <p:txBody>
+          <a:bodyPr/>
+          <a:p/>
+        </p:txBody>
       </p:sp>
       <p:sp>
         <p:nvSpPr>
@@ -8310,6 +8410,10 @@
             <a:prstDash val="solid"/>
           </a:ln>
         </p:spPr>
+        <p:txBody>
+          <a:bodyPr/>
+          <a:p/>
+        </p:txBody>
       </p:sp>
       <p:sp>
         <p:nvSpPr>
@@ -8573,6 +8677,10 @@
             <a:prstDash val="solid"/>
           </a:ln>
         </p:spPr>
+        <p:txBody>
+          <a:bodyPr/>
+          <a:p/>
+        </p:txBody>
       </p:sp>
       <p:sp>
         <p:nvSpPr>
@@ -8846,6 +8954,10 @@
             <a:prstDash val="solid"/>
           </a:ln>
         </p:spPr>
+        <p:txBody>
+          <a:bodyPr/>
+          <a:p/>
+        </p:txBody>
       </p:sp>
       <p:sp>
         <p:nvSpPr>
@@ -9025,6 +9137,10 @@
             <a:prstDash val="solid"/>
           </a:ln>
         </p:spPr>
+        <p:txBody>
+          <a:bodyPr/>
+          <a:p/>
+        </p:txBody>
       </p:sp>
       <p:sp>
         <p:nvSpPr>
@@ -9128,6 +9244,10 @@
             <a:prstDash val="solid"/>
           </a:ln>
         </p:spPr>
+        <p:txBody>
+          <a:bodyPr/>
+          <a:p/>
+        </p:txBody>
       </p:sp>
       <p:sp>
         <p:nvSpPr>
@@ -9153,6 +9273,10 @@
             <a:prstDash val="solid"/>
           </a:ln>
         </p:spPr>
+        <p:txBody>
+          <a:bodyPr/>
+          <a:p/>
+        </p:txBody>
       </p:sp>
       <p:sp>
         <p:nvSpPr>
@@ -9585,6 +9709,10 @@
             <a:prstDash val="solid"/>
           </a:ln>
         </p:spPr>
+        <p:txBody>
+          <a:bodyPr/>
+          <a:p/>
+        </p:txBody>
       </p:sp>
       <p:sp>
         <p:nvSpPr>
@@ -9764,6 +9892,10 @@
             <a:prstDash val="solid"/>
           </a:ln>
         </p:spPr>
+        <p:txBody>
+          <a:bodyPr/>
+          <a:p/>
+        </p:txBody>
       </p:sp>
       <p:sp>
         <p:nvSpPr>
@@ -9867,6 +9999,10 @@
             <a:prstDash val="solid"/>
           </a:ln>
         </p:spPr>
+        <p:txBody>
+          <a:bodyPr/>
+          <a:p/>
+        </p:txBody>
       </p:sp>
       <p:sp>
         <p:nvSpPr>
@@ -9892,6 +10028,10 @@
             <a:prstDash val="solid"/>
           </a:ln>
         </p:spPr>
+        <p:txBody>
+          <a:bodyPr/>
+          <a:p/>
+        </p:txBody>
       </p:sp>
       <p:sp>
         <p:nvSpPr>
@@ -10385,6 +10525,10 @@
             <a:prstDash val="solid"/>
           </a:ln>
         </p:spPr>
+        <p:txBody>
+          <a:bodyPr/>
+          <a:p/>
+        </p:txBody>
       </p:sp>
       <p:sp>
         <p:nvSpPr>
@@ -10564,6 +10708,10 @@
             <a:prstDash val="solid"/>
           </a:ln>
         </p:spPr>
+        <p:txBody>
+          <a:bodyPr/>
+          <a:p/>
+        </p:txBody>
       </p:sp>
       <p:sp>
         <p:nvSpPr>
@@ -10667,6 +10815,10 @@
             <a:prstDash val="solid"/>
           </a:ln>
         </p:spPr>
+        <p:txBody>
+          <a:bodyPr/>
+          <a:p/>
+        </p:txBody>
       </p:sp>
       <p:sp>
         <p:nvSpPr>
@@ -10890,6 +11042,10 @@
             <a:prstDash val="solid"/>
           </a:ln>
         </p:spPr>
+        <p:txBody>
+          <a:bodyPr/>
+          <a:p/>
+        </p:txBody>
       </p:sp>
       <p:sp>
         <p:nvSpPr>
@@ -11113,6 +11269,10 @@
             <a:prstDash val="solid"/>
           </a:ln>
         </p:spPr>
+        <p:txBody>
+          <a:bodyPr/>
+          <a:p/>
+        </p:txBody>
       </p:sp>
       <p:sp>
         <p:nvSpPr>
@@ -11336,6 +11496,10 @@
             <a:prstDash val="solid"/>
           </a:ln>
         </p:spPr>
+        <p:txBody>
+          <a:bodyPr/>
+          <a:p/>
+        </p:txBody>
       </p:sp>
       <p:sp>
         <p:nvSpPr>
@@ -11589,6 +11753,10 @@
             <a:prstDash val="solid"/>
           </a:ln>
         </p:spPr>
+        <p:txBody>
+          <a:bodyPr/>
+          <a:p/>
+        </p:txBody>
       </p:sp>
       <p:sp>
         <p:nvSpPr>
@@ -11768,6 +11936,10 @@
             <a:prstDash val="solid"/>
           </a:ln>
         </p:spPr>
+        <p:txBody>
+          <a:bodyPr/>
+          <a:p/>
+        </p:txBody>
       </p:sp>
       <p:sp>
         <p:nvSpPr>
@@ -11871,6 +12043,10 @@
             <a:prstDash val="solid"/>
           </a:ln>
         </p:spPr>
+        <p:txBody>
+          <a:bodyPr/>
+          <a:p/>
+        </p:txBody>
       </p:sp>
       <p:sp>
         <p:nvSpPr>
@@ -11896,6 +12072,10 @@
             <a:prstDash val="solid"/>
           </a:ln>
         </p:spPr>
+        <p:txBody>
+          <a:bodyPr/>
+          <a:p/>
+        </p:txBody>
       </p:sp>
       <p:sp>
         <p:nvSpPr>
@@ -12379,6 +12559,10 @@
             <a:prstDash val="solid"/>
           </a:ln>
         </p:spPr>
+        <p:txBody>
+          <a:bodyPr/>
+          <a:p/>
+        </p:txBody>
       </p:sp>
       <p:sp>
         <p:nvSpPr>
@@ -12558,6 +12742,10 @@
             <a:prstDash val="solid"/>
           </a:ln>
         </p:spPr>
+        <p:txBody>
+          <a:bodyPr/>
+          <a:p/>
+        </p:txBody>
       </p:sp>
       <p:sp>
         <p:nvSpPr>
@@ -12661,6 +12849,10 @@
             <a:prstDash val="solid"/>
           </a:ln>
         </p:spPr>
+        <p:txBody>
+          <a:bodyPr/>
+          <a:p/>
+        </p:txBody>
       </p:sp>
       <p:sp>
         <p:nvSpPr>
@@ -12686,6 +12878,10 @@
             <a:prstDash val="solid"/>
           </a:ln>
         </p:spPr>
+        <p:txBody>
+          <a:bodyPr/>
+          <a:p/>
+        </p:txBody>
       </p:sp>
       <p:sp>
         <p:nvSpPr>
@@ -13147,6 +13343,10 @@
             <a:prstDash val="solid"/>
           </a:ln>
         </p:spPr>
+        <p:txBody>
+          <a:bodyPr/>
+          <a:p/>
+        </p:txBody>
       </p:sp>
       <p:sp>
         <p:nvSpPr>
@@ -13326,6 +13526,10 @@
             <a:prstDash val="solid"/>
           </a:ln>
         </p:spPr>
+        <p:txBody>
+          <a:bodyPr/>
+          <a:p/>
+        </p:txBody>
       </p:sp>
       <p:sp>
         <p:nvSpPr>
@@ -13429,6 +13633,10 @@
             <a:prstDash val="solid"/>
           </a:ln>
         </p:spPr>
+        <p:txBody>
+          <a:bodyPr/>
+          <a:p/>
+        </p:txBody>
       </p:sp>
       <p:sp>
         <p:nvSpPr>
@@ -13670,6 +13878,10 @@
             <a:prstDash val="solid"/>
           </a:ln>
         </p:spPr>
+        <p:txBody>
+          <a:bodyPr/>
+          <a:p/>
+        </p:txBody>
       </p:sp>
       <p:sp>
         <p:nvSpPr>
@@ -13849,6 +14061,10 @@
             <a:prstDash val="solid"/>
           </a:ln>
         </p:spPr>
+        <p:txBody>
+          <a:bodyPr/>
+          <a:p/>
+        </p:txBody>
       </p:sp>
       <p:sp>
         <p:nvSpPr>
@@ -13952,6 +14168,10 @@
             <a:prstDash val="solid"/>
           </a:ln>
         </p:spPr>
+        <p:txBody>
+          <a:bodyPr/>
+          <a:p/>
+        </p:txBody>
       </p:sp>
       <p:sp>
         <p:nvSpPr>
@@ -13977,6 +14197,10 @@
             <a:prstDash val="solid"/>
           </a:ln>
         </p:spPr>
+        <p:txBody>
+          <a:bodyPr/>
+          <a:p/>
+        </p:txBody>
       </p:sp>
       <p:sp>
         <p:nvSpPr>
@@ -14346,186 +14570,54 @@
           <a:bodyPr wrap="square" rtlCol="0" anchor="ctr"/>
           <a:lstStyle/>
           <a:p>
-            <a:pPr indent="0" marL="0">
-              <a:lnSpc>
-                <a:spcPts val="1300"/>
-              </a:lnSpc>
-              <a:buNone/>
-            </a:pPr>
-            <a:r>
-              <a:rPr lang="en-US" sz="850" b="1" dirty="0">
-                <a:solidFill>
-                  <a:srgbClr val="000000"/>
-                </a:solidFill>
-                <a:latin typeface="Arial" pitchFamily="34" charset="0"/>
-                <a:ea typeface="Arial" pitchFamily="34" charset="-122"/>
-                <a:cs typeface="Arial" pitchFamily="34" charset="-120"/>
-              </a:rPr>
-              <a:t>• Full Review 2 Master Report:
-</a:t>
-            </a:r>
-            <a:pPr indent="0" marL="0">
-              <a:lnSpc>
-                <a:spcPts val="1300"/>
-              </a:lnSpc>
-              <a:buNone/>
-            </a:pPr>
-            <a:r>
-              <a:rPr lang="en-US" sz="850" dirty="0">
-                <a:solidFill>
-                  <a:srgbClr val="333333"/>
-                </a:solidFill>
-                <a:latin typeface="Arial" pitchFamily="34" charset="0"/>
-                <a:ea typeface="Arial" pitchFamily="34" charset="-122"/>
-                <a:cs typeface="Arial" pitchFamily="34" charset="-120"/>
-              </a:rPr>
-              <a:t>  Integrating Review 1 literature review with detailed design.
-</a:t>
-            </a:r>
-            <a:pPr indent="0" marL="0">
-              <a:lnSpc>
-                <a:spcPts val="1300"/>
-              </a:lnSpc>
-              <a:buNone/>
-            </a:pPr>
-            <a:r>
-              <a:rPr lang="en-US" sz="850" b="1" dirty="0">
-                <a:solidFill>
-                  <a:srgbClr val="000000"/>
-                </a:solidFill>
-                <a:latin typeface="Arial" pitchFamily="34" charset="0"/>
-                <a:ea typeface="Arial" pitchFamily="34" charset="-122"/>
-                <a:cs typeface="Arial" pitchFamily="34" charset="-120"/>
-              </a:rPr>
-              <a:t>• Working Python Prototype (TRL 3):
-</a:t>
-            </a:r>
-            <a:pPr indent="0" marL="0">
-              <a:lnSpc>
-                <a:spcPts val="1300"/>
-              </a:lnSpc>
-              <a:buNone/>
-            </a:pPr>
-            <a:r>
-              <a:rPr lang="en-US" sz="850" dirty="0">
-                <a:solidFill>
-                  <a:srgbClr val="333333"/>
-                </a:solidFill>
-                <a:latin typeface="Arial" pitchFamily="34" charset="0"/>
-                <a:ea typeface="Arial" pitchFamily="34" charset="-122"/>
-                <a:cs typeface="Arial" pitchFamily="34" charset="-120"/>
-              </a:rPr>
-              <a:t>  AST parser, inter-procedural dataflow, retention extractor.
-</a:t>
-            </a:r>
-            <a:pPr indent="0" marL="0">
-              <a:lnSpc>
-                <a:spcPts val="1300"/>
-              </a:lnSpc>
-              <a:buNone/>
-            </a:pPr>
-            <a:r>
-              <a:rPr lang="en-US" sz="850" b="1" dirty="0">
-                <a:solidFill>
-                  <a:srgbClr val="000000"/>
-                </a:solidFill>
-                <a:latin typeface="Arial" pitchFamily="34" charset="0"/>
-                <a:ea typeface="Arial" pitchFamily="34" charset="-122"/>
-                <a:cs typeface="Arial" pitchFamily="34" charset="-120"/>
-              </a:rPr>
-              <a:t>• Demonstration on Real Benchmark:
-</a:t>
-            </a:r>
-            <a:pPr indent="0" marL="0">
-              <a:lnSpc>
-                <a:spcPts val="1300"/>
-              </a:lnSpc>
-              <a:buNone/>
-            </a:pPr>
-            <a:r>
-              <a:rPr lang="en-US" sz="850" dirty="0">
-                <a:solidFill>
-                  <a:srgbClr val="333333"/>
-                </a:solidFill>
-                <a:latin typeface="Arial" pitchFamily="34" charset="0"/>
-                <a:ea typeface="Arial" pitchFamily="34" charset="-122"/>
-                <a:cs typeface="Arial" pitchFamily="34" charset="-120"/>
-              </a:rPr>
-              <a:t>  Orders identical RSA call sites by S3 retention vs Redis TTL.
-</a:t>
-            </a:r>
-            <a:pPr indent="0" marL="0">
-              <a:lnSpc>
-                <a:spcPts val="1300"/>
-              </a:lnSpc>
-              <a:buNone/>
-            </a:pPr>
-            <a:r>
-              <a:rPr lang="en-US" sz="850" b="1" dirty="0">
-                <a:solidFill>
-                  <a:srgbClr val="000000"/>
-                </a:solidFill>
-                <a:latin typeface="Arial" pitchFamily="34" charset="0"/>
-                <a:ea typeface="Arial" pitchFamily="34" charset="-122"/>
-                <a:cs typeface="Arial" pitchFamily="34" charset="-120"/>
-              </a:rPr>
-              <a:t>• Standard CycloneDX 1.6 CBOM Export:
-</a:t>
-            </a:r>
-            <a:pPr indent="0" marL="0">
-              <a:lnSpc>
-                <a:spcPts val="1300"/>
-              </a:lnSpc>
-              <a:buNone/>
-            </a:pPr>
-            <a:r>
-              <a:rPr lang="en-US" sz="850" dirty="0">
-                <a:solidFill>
-                  <a:srgbClr val="333333"/>
-                </a:solidFill>
-                <a:latin typeface="Arial" pitchFamily="34" charset="0"/>
-                <a:ea typeface="Arial" pitchFamily="34" charset="-122"/>
-                <a:cs typeface="Arial" pitchFamily="34" charset="-120"/>
-              </a:rPr>
-              <a:t>  Enriched with custom dataflow properties.
-</a:t>
-            </a:r>
-            <a:pPr indent="0" marL="0">
-              <a:lnSpc>
-                <a:spcPts val="1300"/>
-              </a:lnSpc>
-              <a:buNone/>
-            </a:pPr>
-            <a:r>
-              <a:rPr lang="en-US" sz="850" b="1" dirty="0">
-                <a:solidFill>
-                  <a:srgbClr val="000000"/>
-                </a:solidFill>
-                <a:latin typeface="Arial" pitchFamily="34" charset="0"/>
-                <a:ea typeface="Arial" pitchFamily="34" charset="-122"/>
-                <a:cs typeface="Arial" pitchFamily="34" charset="-120"/>
-              </a:rPr>
-              <a:t>• Automated Test Harness:
-</a:t>
-            </a:r>
-            <a:pPr indent="0" marL="0">
-              <a:lnSpc>
-                <a:spcPts val="1300"/>
-              </a:lnSpc>
-              <a:buNone/>
-            </a:pPr>
-            <a:r>
-              <a:rPr lang="en-US" sz="850" dirty="0">
-                <a:solidFill>
-                  <a:srgbClr val="333333"/>
-                </a:solidFill>
-                <a:latin typeface="Arial" pitchFamily="34" charset="0"/>
-                <a:ea typeface="Arial" pitchFamily="34" charset="-122"/>
-                <a:cs typeface="Arial" pitchFamily="34" charset="-120"/>
-              </a:rPr>
-              <a:t>  5/5 unit tests passing with 100% success rate.</a:t>
-            </a:r>
-            <a:endParaRPr lang="en-US" sz="850" dirty="0"/>
+            <a:r>
+              <a:t>• Full Review 2 Master Report:</a:t>
+            </a:r>
+          </a:p>
+          <a:p>
+            <a:r>
+              <a:t>  Integrating Review 1 literature review with detailed design.</a:t>
+            </a:r>
+          </a:p>
+          <a:p>
+            <a:r>
+              <a:t>• Working Python Prototype (TRL 3):</a:t>
+            </a:r>
+          </a:p>
+          <a:p>
+            <a:r>
+              <a:t>  AST parser, inter-procedural dataflow, retention extractor.</a:t>
+            </a:r>
+          </a:p>
+          <a:p>
+            <a:r>
+              <a:t>• Demonstration on Real Benchmark:</a:t>
+            </a:r>
+          </a:p>
+          <a:p>
+            <a:r>
+              <a:t>  Orders identical RSA call sites by S3 retention vs Redis TTL.</a:t>
+            </a:r>
+          </a:p>
+          <a:p>
+            <a:r>
+              <a:t>• Standard CycloneDX 1.6 CBOM Export:</a:t>
+            </a:r>
+          </a:p>
+          <a:p>
+            <a:r>
+              <a:t>  Enriched with custom dataflow properties.</a:t>
+            </a:r>
+          </a:p>
+          <a:p>
+            <a:r>
+              <a:t>• Automated Test Harness:</a:t>
+            </a:r>
+          </a:p>
+          <a:p>
+            <a:r>
+              <a:t>  8 automated unit tests passing with 100% success rate.</a:t>
+            </a:r>
           </a:p>
         </p:txBody>
       </p:sp>
@@ -14583,6 +14675,10 @@
             <a:prstDash val="solid"/>
           </a:ln>
         </p:spPr>
+        <p:txBody>
+          <a:bodyPr/>
+          <a:p/>
+        </p:txBody>
       </p:sp>
       <p:sp>
         <p:nvSpPr>
@@ -14762,6 +14858,10 @@
             <a:prstDash val="solid"/>
           </a:ln>
         </p:spPr>
+        <p:txBody>
+          <a:bodyPr/>
+          <a:p/>
+        </p:txBody>
       </p:sp>
       <p:sp>
         <p:nvSpPr>
@@ -14865,6 +14965,10 @@
             <a:prstDash val="solid"/>
           </a:ln>
         </p:spPr>
+        <p:txBody>
+          <a:bodyPr/>
+          <a:p/>
+        </p:txBody>
       </p:sp>
       <p:sp>
         <p:nvSpPr>
@@ -15106,6 +15210,10 @@
             <a:prstDash val="solid"/>
           </a:ln>
         </p:spPr>
+        <p:txBody>
+          <a:bodyPr/>
+          <a:p/>
+        </p:txBody>
       </p:sp>
       <p:sp>
         <p:nvSpPr>
@@ -15285,6 +15393,10 @@
             <a:prstDash val="solid"/>
           </a:ln>
         </p:spPr>
+        <p:txBody>
+          <a:bodyPr/>
+          <a:p/>
+        </p:txBody>
       </p:sp>
       <p:sp>
         <p:nvSpPr>
@@ -15388,6 +15500,10 @@
             <a:prstDash val="solid"/>
           </a:ln>
         </p:spPr>
+        <p:txBody>
+          <a:bodyPr/>
+          <a:p/>
+        </p:txBody>
       </p:sp>
       <p:sp>
         <p:nvSpPr>
@@ -15647,6 +15763,10 @@
             <a:prstDash val="solid"/>
           </a:ln>
         </p:spPr>
+        <p:txBody>
+          <a:bodyPr/>
+          <a:p/>
+        </p:txBody>
       </p:sp>
       <p:sp>
         <p:nvSpPr>
@@ -15826,6 +15946,10 @@
             <a:prstDash val="solid"/>
           </a:ln>
         </p:spPr>
+        <p:txBody>
+          <a:bodyPr/>
+          <a:p/>
+        </p:txBody>
       </p:sp>
       <p:sp>
         <p:nvSpPr>
@@ -15929,6 +16053,10 @@
             <a:prstDash val="solid"/>
           </a:ln>
         </p:spPr>
+        <p:txBody>
+          <a:bodyPr/>
+          <a:p/>
+        </p:txBody>
       </p:sp>
       <p:sp>
         <p:nvSpPr>
@@ -15954,6 +16082,10 @@
             <a:prstDash val="solid"/>
           </a:ln>
         </p:spPr>
+        <p:txBody>
+          <a:bodyPr/>
+          <a:p/>
+        </p:txBody>
       </p:sp>
       <p:sp>
         <p:nvSpPr>
@@ -16351,6 +16483,10 @@
             <a:prstDash val="solid"/>
           </a:ln>
         </p:spPr>
+        <p:txBody>
+          <a:bodyPr/>
+          <a:p/>
+        </p:txBody>
       </p:sp>
       <p:sp>
         <p:nvSpPr>
@@ -16530,6 +16666,10 @@
             <a:prstDash val="solid"/>
           </a:ln>
         </p:spPr>
+        <p:txBody>
+          <a:bodyPr/>
+          <a:p/>
+        </p:txBody>
       </p:sp>
       <p:sp>
         <p:nvSpPr>
@@ -16633,6 +16773,10 @@
             <a:prstDash val="solid"/>
           </a:ln>
         </p:spPr>
+        <p:txBody>
+          <a:bodyPr/>
+          <a:p/>
+        </p:txBody>
       </p:sp>
       <p:sp>
         <p:nvSpPr>
@@ -16658,6 +16802,10 @@
             <a:prstDash val="solid"/>
           </a:ln>
         </p:spPr>
+        <p:txBody>
+          <a:bodyPr/>
+          <a:p/>
+        </p:txBody>
       </p:sp>
       <p:sp>
         <p:nvSpPr>
@@ -17055,6 +17203,10 @@
             <a:prstDash val="solid"/>
           </a:ln>
         </p:spPr>
+        <p:txBody>
+          <a:bodyPr/>
+          <a:p/>
+        </p:txBody>
       </p:sp>
       <p:sp>
         <p:nvSpPr>
@@ -17234,6 +17386,10 @@
             <a:prstDash val="solid"/>
           </a:ln>
         </p:spPr>
+        <p:txBody>
+          <a:bodyPr/>
+          <a:p/>
+        </p:txBody>
       </p:sp>
       <p:sp>
         <p:nvSpPr>
@@ -17337,6 +17493,10 @@
             <a:prstDash val="solid"/>
           </a:ln>
         </p:spPr>
+        <p:txBody>
+          <a:bodyPr/>
+          <a:p/>
+        </p:txBody>
       </p:sp>
       <p:sp>
         <p:nvSpPr>
@@ -17362,6 +17522,10 @@
             <a:prstDash val="solid"/>
           </a:ln>
         </p:spPr>
+        <p:txBody>
+          <a:bodyPr/>
+          <a:p/>
+        </p:txBody>
       </p:sp>
       <p:sp>
         <p:nvSpPr>
@@ -17630,149 +17794,42 @@
           <a:bodyPr wrap="square" rtlCol="0" anchor="ctr"/>
           <a:lstStyle/>
           <a:p>
-            <a:pPr indent="0" marL="0">
-              <a:lnSpc>
-                <a:spcPts val="1200"/>
-              </a:lnSpc>
-              <a:buNone/>
-            </a:pPr>
-            <a:r>
-              <a:rPr lang="en-US" sz="850" b="1" dirty="0">
-                <a:solidFill>
-                  <a:srgbClr val="2E7D32"/>
-                </a:solidFill>
-                <a:latin typeface="Arial" pitchFamily="34" charset="0"/>
-                <a:ea typeface="Arial" pitchFamily="34" charset="-122"/>
-                <a:cs typeface="Arial" pitchFamily="34" charset="-120"/>
-              </a:rPr>
-              <a:t>• ~20% Implementation Completed:
-</a:t>
-            </a:r>
-            <a:pPr indent="0" marL="0">
-              <a:lnSpc>
-                <a:spcPts val="1200"/>
-              </a:lnSpc>
-              <a:buNone/>
-            </a:pPr>
-            <a:r>
-              <a:rPr lang="en-US" sz="850" dirty="0">
-                <a:solidFill>
-                  <a:srgbClr val="333333"/>
-                </a:solidFill>
-                <a:latin typeface="Arial" pitchFamily="34" charset="0"/>
-                <a:ea typeface="Arial" pitchFamily="34" charset="-122"/>
-                <a:cs typeface="Arial" pitchFamily="34" charset="-120"/>
-              </a:rPr>
-              <a:t>  Executable core engine covering AST discovery, backward/forward taint, retention extraction, and scoring.
-</a:t>
-            </a:r>
-            <a:pPr indent="0" marL="0">
-              <a:lnSpc>
-                <a:spcPts val="1200"/>
-              </a:lnSpc>
-              <a:buNone/>
-            </a:pPr>
-            <a:r>
-              <a:rPr lang="en-US" sz="850" b="1" dirty="0">
-                <a:solidFill>
-                  <a:srgbClr val="000000"/>
-                </a:solidFill>
-                <a:latin typeface="Arial" pitchFamily="34" charset="0"/>
-                <a:ea typeface="Arial" pitchFamily="34" charset="-122"/>
-                <a:cs typeface="Arial" pitchFamily="34" charset="-120"/>
-              </a:rPr>
-              <a:t>• Validated on Real Benchmark:
-</a:t>
-            </a:r>
-            <a:pPr indent="0" marL="0">
-              <a:lnSpc>
-                <a:spcPts val="1200"/>
-              </a:lnSpc>
-              <a:buNone/>
-            </a:pPr>
-            <a:r>
-              <a:rPr lang="en-US" sz="850" dirty="0">
-                <a:solidFill>
-                  <a:srgbClr val="333333"/>
-                </a:solidFill>
-                <a:latin typeface="Arial" pitchFamily="34" charset="0"/>
-                <a:ea typeface="Arial" pitchFamily="34" charset="-122"/>
-                <a:cs typeface="Arial" pitchFamily="34" charset="-120"/>
-              </a:rPr>
-              <a:t>  Successfully tested on payments/archive.py, web/session.py, and cache/etags.py.
-</a:t>
-            </a:r>
-            <a:pPr indent="0" marL="0">
-              <a:lnSpc>
-                <a:spcPts val="1200"/>
-              </a:lnSpc>
-              <a:buNone/>
-            </a:pPr>
-            <a:r>
-              <a:rPr lang="en-US" sz="850" b="1" dirty="0">
-                <a:solidFill>
-                  <a:srgbClr val="000000"/>
-                </a:solidFill>
-                <a:latin typeface="Arial" pitchFamily="34" charset="0"/>
-                <a:ea typeface="Arial" pitchFamily="34" charset="-122"/>
-                <a:cs typeface="Arial" pitchFamily="34" charset="-120"/>
-              </a:rPr>
-              <a:t>• Schema-Compliant CBOM Export:
-</a:t>
-            </a:r>
-            <a:pPr indent="0" marL="0">
-              <a:lnSpc>
-                <a:spcPts val="1200"/>
-              </a:lnSpc>
-              <a:buNone/>
-            </a:pPr>
-            <a:r>
-              <a:rPr lang="en-US" sz="850" dirty="0">
-                <a:solidFill>
-                  <a:srgbClr val="333333"/>
-                </a:solidFill>
-                <a:latin typeface="Arial" pitchFamily="34" charset="0"/>
-                <a:ea typeface="Arial" pitchFamily="34" charset="-122"/>
-                <a:cs typeface="Arial" pitchFamily="34" charset="-120"/>
-              </a:rPr>
-              <a:t>  Emits enriched CycloneDX 1.6 CBOM JSON.
-</a:t>
-            </a:r>
-            <a:pPr indent="0" marL="0">
-              <a:lnSpc>
-                <a:spcPts val="1200"/>
-              </a:lnSpc>
-              <a:buNone/>
-            </a:pPr>
-            <a:r>
-              <a:rPr lang="en-US" sz="850" b="1" dirty="0">
-                <a:solidFill>
-                  <a:srgbClr val="2E7D32"/>
-                </a:solidFill>
-                <a:latin typeface="Arial" pitchFamily="34" charset="0"/>
-                <a:ea typeface="Arial" pitchFamily="34" charset="-122"/>
-                <a:cs typeface="Arial" pitchFamily="34" charset="-120"/>
-              </a:rPr>
-              <a:t>• Automated Test Harness: </a:t>
-            </a:r>
-            <a:pPr indent="0" marL="0">
-              <a:lnSpc>
-                <a:spcPts val="1200"/>
-              </a:lnSpc>
-              <a:buNone/>
-            </a:pPr>
-            <a:r>
-              <a:rPr lang="en-US" sz="850" dirty="0">
-                <a:solidFill>
-                  <a:srgbClr val="333333"/>
-                </a:solidFill>
-                <a:latin typeface="Arial" pitchFamily="34" charset="0"/>
-                <a:ea typeface="Arial" pitchFamily="34" charset="-122"/>
-                <a:cs typeface="Arial" pitchFamily="34" charset="-120"/>
-              </a:rPr>
-              <a:t>5/5 unit tests passing.</a:t>
-            </a:r>
-            <a:endParaRPr lang="en-US" sz="850" dirty="0"/>
+            <a:r>
+              <a:t>• ~20% Implementation Completed:</a:t>
+            </a:r>
+          </a:p>
+          <a:p>
+            <a:r>
+              <a:t>  Executable core engine covering AST discovery, backward/forward taint, retention extraction, and scoring.</a:t>
+            </a:r>
+          </a:p>
+          <a:p/>
+          <a:p>
+            <a:r>
+              <a:t>• Validated on Real Benchmark:</a:t>
+            </a:r>
+          </a:p>
+          <a:p>
+            <a:r>
+              <a:t>  Successfully tested on payments/archive.py, web/session.py, and cache/etags.py.</a:t>
+            </a:r>
+          </a:p>
+          <a:p/>
+          <a:p>
+            <a:r>
+              <a:t>• Schema-Compliant CBOM Export:</a:t>
+            </a:r>
+          </a:p>
+          <a:p>
+            <a:r>
+              <a:t>  Emits enriched CycloneDX 1.6 CBOM JSON.</a:t>
+            </a:r>
+          </a:p>
+          <a:p/>
+          <a:p>
+            <a:r>
+              <a:t>• Automated Test Harness: 8 automated unit tests passing.</a:t>
+            </a:r>
           </a:p>
         </p:txBody>
       </p:sp>
@@ -17830,6 +17887,10 @@
             <a:prstDash val="solid"/>
           </a:ln>
         </p:spPr>
+        <p:txBody>
+          <a:bodyPr/>
+          <a:p/>
+        </p:txBody>
       </p:sp>
       <p:sp>
         <p:nvSpPr>
@@ -18009,6 +18070,10 @@
             <a:prstDash val="solid"/>
           </a:ln>
         </p:spPr>
+        <p:txBody>
+          <a:bodyPr/>
+          <a:p/>
+        </p:txBody>
       </p:sp>
       <p:sp>
         <p:nvSpPr>
@@ -18112,6 +18177,10 @@
             <a:prstDash val="solid"/>
           </a:ln>
         </p:spPr>
+        <p:txBody>
+          <a:bodyPr/>
+          <a:p/>
+        </p:txBody>
       </p:sp>
       <p:sp>
         <p:nvSpPr>
@@ -18381,6 +18450,10 @@
             <a:prstDash val="solid"/>
           </a:ln>
         </p:spPr>
+        <p:txBody>
+          <a:bodyPr/>
+          <a:p/>
+        </p:txBody>
       </p:sp>
       <p:sp>
         <p:nvSpPr>
@@ -18560,6 +18633,10 @@
             <a:prstDash val="solid"/>
           </a:ln>
         </p:spPr>
+        <p:txBody>
+          <a:bodyPr/>
+          <a:p/>
+        </p:txBody>
       </p:sp>
       <p:sp>
         <p:nvSpPr>
@@ -18663,6 +18740,10 @@
             <a:prstDash val="solid"/>
           </a:ln>
         </p:spPr>
+        <p:txBody>
+          <a:bodyPr/>
+          <a:p/>
+        </p:txBody>
       </p:sp>
       <p:sp>
         <p:nvSpPr>
@@ -18904,6 +18985,10 @@
             <a:prstDash val="solid"/>
           </a:ln>
         </p:spPr>
+        <p:txBody>
+          <a:bodyPr/>
+          <a:p/>
+        </p:txBody>
       </p:sp>
       <p:sp>
         <p:nvSpPr>
@@ -19083,6 +19168,10 @@
             <a:prstDash val="solid"/>
           </a:ln>
         </p:spPr>
+        <p:txBody>
+          <a:bodyPr/>
+          <a:p/>
+        </p:txBody>
       </p:sp>
       <p:sp>
         <p:nvSpPr>
@@ -19186,6 +19275,10 @@
             <a:prstDash val="solid"/>
           </a:ln>
         </p:spPr>
+        <p:txBody>
+          <a:bodyPr/>
+          <a:p/>
+        </p:txBody>
       </p:sp>
       <p:sp>
         <p:nvSpPr>
@@ -19211,6 +19304,10 @@
             <a:prstDash val="solid"/>
           </a:ln>
         </p:spPr>
+        <p:txBody>
+          <a:bodyPr/>
+          <a:p/>
+        </p:txBody>
       </p:sp>
       <p:sp>
         <p:nvSpPr>
@@ -19590,6 +19687,10 @@
             <a:prstDash val="solid"/>
           </a:ln>
         </p:spPr>
+        <p:txBody>
+          <a:bodyPr/>
+          <a:p/>
+        </p:txBody>
       </p:sp>
       <p:sp>
         <p:nvSpPr>
@@ -19769,6 +19870,10 @@
             <a:prstDash val="solid"/>
           </a:ln>
         </p:spPr>
+        <p:txBody>
+          <a:bodyPr/>
+          <a:p/>
+        </p:txBody>
       </p:sp>
       <p:sp>
         <p:nvSpPr>
@@ -19872,6 +19977,10 @@
             <a:prstDash val="solid"/>
           </a:ln>
         </p:spPr>
+        <p:txBody>
+          <a:bodyPr/>
+          <a:p/>
+        </p:txBody>
       </p:sp>
       <p:sp>
         <p:nvSpPr>
@@ -20142,6 +20251,10 @@
             <a:prstDash val="solid"/>
           </a:ln>
         </p:spPr>
+        <p:txBody>
+          <a:bodyPr/>
+          <a:p/>
+        </p:txBody>
       </p:sp>
       <p:sp>
         <p:nvSpPr>
@@ -20321,6 +20434,10 @@
             <a:prstDash val="solid"/>
           </a:ln>
         </p:spPr>
+        <p:txBody>
+          <a:bodyPr/>
+          <a:p/>
+        </p:txBody>
       </p:sp>
       <p:sp>
         <p:nvSpPr>
@@ -20424,6 +20541,10 @@
             <a:prstDash val="solid"/>
           </a:ln>
         </p:spPr>
+        <p:txBody>
+          <a:bodyPr/>
+          <a:p/>
+        </p:txBody>
       </p:sp>
       <p:sp>
         <p:nvSpPr>
@@ -20446,186 +20567,71 @@
           <a:bodyPr wrap="square" rtlCol="0" anchor="ctr"/>
           <a:lstStyle/>
           <a:p>
-            <a:pPr indent="0" marL="0">
-              <a:lnSpc>
-                <a:spcPts val="1100"/>
-              </a:lnSpc>
-              <a:buNone/>
-            </a:pPr>
-            <a:r>
-              <a:rPr lang="en-US" sz="820" b="1" dirty="0">
-                <a:solidFill>
-                  <a:srgbClr val="666666"/>
-                </a:solidFill>
-                <a:latin typeface="Arial" pitchFamily="34" charset="0"/>
-                <a:ea typeface="Arial" pitchFamily="34" charset="-122"/>
-                <a:cs typeface="Arial" pitchFamily="34" charset="-120"/>
-              </a:rPr>
-              <a:t>AUTOMATED UNIT TEST EXECUTION:
-</a:t>
-            </a:r>
-            <a:pPr indent="0" marL="0">
-              <a:lnSpc>
-                <a:spcPts val="1100"/>
-              </a:lnSpc>
-              <a:buNone/>
-            </a:pPr>
-            <a:r>
-              <a:rPr lang="en-US" sz="850" dirty="0">
-                <a:solidFill>
-                  <a:srgbClr val="1976D2"/>
-                </a:solidFill>
-                <a:latin typeface="Courier New" pitchFamily="34" charset="0"/>
-                <a:ea typeface="Courier New" pitchFamily="34" charset="-122"/>
-                <a:cs typeface="Courier New" pitchFamily="34" charset="-120"/>
-              </a:rPr>
-              <a:t>$ python3 -m unittest discover -s tests -v
-</a:t>
-            </a:r>
-            <a:pPr indent="0" marL="0">
-              <a:lnSpc>
-                <a:spcPts val="1100"/>
-              </a:lnSpc>
-              <a:buNone/>
-            </a:pPr>
-            <a:r>
-              <a:rPr lang="en-US" sz="800" dirty="0">
-                <a:solidFill>
-                  <a:srgbClr val="2E7D32"/>
-                </a:solidFill>
-                <a:latin typeface="Courier New" pitchFamily="34" charset="0"/>
-                <a:ea typeface="Courier New" pitchFamily="34" charset="-122"/>
-                <a:cs typeface="Courier New" pitchFamily="34" charset="-120"/>
-              </a:rPr>
-              <a:t>test_cbom_generation (test_navigator.TestCryptoAgilityNavigator.test_cbom_generation) .................. ok
-</a:t>
-            </a:r>
-            <a:pPr indent="0" marL="0">
-              <a:lnSpc>
-                <a:spcPts val="1100"/>
-              </a:lnSpc>
-              <a:buNone/>
-            </a:pPr>
-            <a:r>
-              <a:rPr lang="en-US" sz="800" dirty="0">
-                <a:solidFill>
-                  <a:srgbClr val="2E7D32"/>
-                </a:solidFill>
-                <a:latin typeface="Courier New" pitchFamily="34" charset="0"/>
-                <a:ea typeface="Courier New" pitchFamily="34" charset="-122"/>
-                <a:cs typeface="Courier New" pitchFamily="34" charset="-120"/>
-              </a:rPr>
-              <a:t>test_context_noise_suppression (test_navigator.TestCryptoAgilityNavigator.test_context_noise_suppression) ok
-</a:t>
-            </a:r>
-            <a:pPr indent="0" marL="0">
-              <a:lnSpc>
-                <a:spcPts val="1100"/>
-              </a:lnSpc>
-              <a:buNone/>
-            </a:pPr>
-            <a:r>
-              <a:rPr lang="en-US" sz="800" dirty="0">
-                <a:solidFill>
-                  <a:srgbClr val="2E7D32"/>
-                </a:solidFill>
-                <a:latin typeface="Courier New" pitchFamily="34" charset="0"/>
-                <a:ea typeface="Courier New" pitchFamily="34" charset="-122"/>
-                <a:cs typeface="Courier New" pitchFamily="34" charset="-120"/>
-              </a:rPr>
-              <a:t>test_discovery_engine (test_navigator.TestCryptoAgilityNavigator.test_discovery_engine) ................ ok
-</a:t>
-            </a:r>
-            <a:pPr indent="0" marL="0">
-              <a:lnSpc>
-                <a:spcPts val="1100"/>
-              </a:lnSpc>
-              <a:buNone/>
-            </a:pPr>
-            <a:r>
-              <a:rPr lang="en-US" sz="800" dirty="0">
-                <a:solidFill>
-                  <a:srgbClr val="2E7D32"/>
-                </a:solidFill>
-                <a:latin typeface="Courier New" pitchFamily="34" charset="0"/>
-                <a:ea typeface="Courier New" pitchFamily="34" charset="-122"/>
-                <a:cs typeface="Courier New" pitchFamily="34" charset="-120"/>
-              </a:rPr>
-              <a:t>test_scoring_and_mosca_inequality (test_navigator.TestCryptoAgilityNavigator.test_scoring_and_mosca) ... ok
-</a:t>
-            </a:r>
-            <a:pPr indent="0" marL="0">
-              <a:lnSpc>
-                <a:spcPts val="1100"/>
-              </a:lnSpc>
-              <a:buNone/>
-            </a:pPr>
-            <a:r>
-              <a:rPr lang="en-US" sz="800" dirty="0">
-                <a:solidFill>
-                  <a:srgbClr val="2E7D32"/>
-                </a:solidFill>
-                <a:latin typeface="Courier New" pitchFamily="34" charset="0"/>
-                <a:ea typeface="Courier New" pitchFamily="34" charset="-122"/>
-                <a:cs typeface="Courier New" pitchFamily="34" charset="-120"/>
-              </a:rPr>
-              <a:t>test_semantic_binding_discrimination (test_navigator.TestCryptoAgilityNavigator.test_semantic_binding) . ok
-</a:t>
-            </a:r>
-            <a:pPr indent="0" marL="0">
-              <a:lnSpc>
-                <a:spcPts val="1100"/>
-              </a:lnSpc>
-              <a:buNone/>
-            </a:pPr>
-            <a:r>
-              <a:rPr lang="en-US" sz="800" dirty="0">
-                <a:solidFill>
-                  <a:srgbClr val="E0E0E0"/>
-                </a:solidFill>
-                <a:latin typeface="Courier New" pitchFamily="34" charset="0"/>
-                <a:ea typeface="Courier New" pitchFamily="34" charset="-122"/>
-                <a:cs typeface="Courier New" pitchFamily="34" charset="-120"/>
-              </a:rPr>
-              <a:t>----------------------------------------------------------------------
-</a:t>
-            </a:r>
-            <a:pPr indent="0" marL="0">
-              <a:lnSpc>
-                <a:spcPts val="1100"/>
-              </a:lnSpc>
-              <a:buNone/>
-            </a:pPr>
-            <a:r>
-              <a:rPr lang="en-US" sz="850" b="1" dirty="0">
-                <a:solidFill>
-                  <a:srgbClr val="000000"/>
-                </a:solidFill>
-                <a:latin typeface="Courier New" pitchFamily="34" charset="0"/>
-                <a:ea typeface="Courier New" pitchFamily="34" charset="-122"/>
-                <a:cs typeface="Courier New" pitchFamily="34" charset="-120"/>
-              </a:rPr>
-              <a:t>Ran 5 tests in 0.015s — ALL TESTS PASSED (OK)
-</a:t>
-            </a:r>
-            <a:pPr indent="0" marL="0">
-              <a:lnSpc>
-                <a:spcPts val="1100"/>
-              </a:lnSpc>
-              <a:buNone/>
-            </a:pPr>
-            <a:r>
-              <a:rPr lang="en-US" sz="850" b="1" dirty="0">
-                <a:solidFill>
-                  <a:srgbClr val="2E7D32"/>
-                </a:solidFill>
-                <a:latin typeface="Arial" pitchFamily="34" charset="0"/>
-                <a:ea typeface="Arial" pitchFamily="34" charset="-122"/>
-                <a:cs typeface="Arial" pitchFamily="34" charset="-120"/>
-              </a:rPr>
+            <a:r>
+              <a:t>AUTOMATED UNIT TEST EXECUTION:</a:t>
+            </a:r>
+          </a:p>
+          <a:p>
+            <a:r>
+              <a:t>$ python3 -m unittest discover tests -v</a:t>
+            </a:r>
+          </a:p>
+          <a:p/>
+          <a:p>
+            <a:r>
+              <a:t>test_cbom_generation ........................ ok</a:t>
+            </a:r>
+          </a:p>
+          <a:p>
+            <a:r>
+              <a:t>test_context_noise_suppression .............. ok</a:t>
+            </a:r>
+          </a:p>
+          <a:p>
+            <a:r>
+              <a:t>test_custom_code_snippet_analysis ........... ok</a:t>
+            </a:r>
+          </a:p>
+          <a:p>
+            <a:r>
+              <a:t>test_discovery_engine ....................... ok</a:t>
+            </a:r>
+          </a:p>
+          <a:p>
+            <a:r>
+              <a:t>test_full_pipeline_ranking .................. ok</a:t>
+            </a:r>
+          </a:p>
+          <a:p>
+            <a:r>
+              <a:t>test_quantum_safe_scoring ................... ok</a:t>
+            </a:r>
+          </a:p>
+          <a:p>
+            <a:r>
+              <a:t>test_scoring_and_mosca_inequality ........... ok</a:t>
+            </a:r>
+          </a:p>
+          <a:p>
+            <a:r>
+              <a:t>test_semantic_binding_discrimination ........ ok</a:t>
+            </a:r>
+          </a:p>
+          <a:p/>
+          <a:p>
+            <a:r>
+              <a:t>----------------------------------------------------------------------</a:t>
+            </a:r>
+          </a:p>
+          <a:p>
+            <a:r>
+              <a:t>Ran 8 tests in 0.050s        OK (100% passing)</a:t>
+            </a:r>
+          </a:p>
+          <a:p>
+            <a:r>
               <a:t>TRL 3 Proof of Concept Verified: Code base is reproducible, modular, and regression-tested.</a:t>
             </a:r>
-            <a:endParaRPr lang="en-US" sz="820" dirty="0"/>
           </a:p>
         </p:txBody>
       </p:sp>
@@ -20683,6 +20689,10 @@
             <a:prstDash val="solid"/>
           </a:ln>
         </p:spPr>
+        <p:txBody>
+          <a:bodyPr/>
+          <a:p/>
+        </p:txBody>
       </p:sp>
       <p:sp>
         <p:nvSpPr>
@@ -20862,6 +20872,10 @@
             <a:prstDash val="solid"/>
           </a:ln>
         </p:spPr>
+        <p:txBody>
+          <a:bodyPr/>
+          <a:p/>
+        </p:txBody>
       </p:sp>
       <p:sp>
         <p:nvSpPr>
@@ -21007,6 +21021,10 @@
             <a:prstDash val="solid"/>
           </a:ln>
         </p:spPr>
+        <p:txBody>
+          <a:bodyPr/>
+          <a:p/>
+        </p:txBody>
       </p:sp>
       <p:sp>
         <p:nvSpPr>
@@ -21233,6 +21251,10 @@
             <a:prstDash val="solid"/>
           </a:ln>
         </p:spPr>
+        <p:txBody>
+          <a:bodyPr/>
+          <a:p/>
+        </p:txBody>
       </p:sp>
       <p:sp>
         <p:nvSpPr>
@@ -21412,6 +21434,10 @@
             <a:prstDash val="solid"/>
           </a:ln>
         </p:spPr>
+        <p:txBody>
+          <a:bodyPr/>
+          <a:p/>
+        </p:txBody>
       </p:sp>
       <p:sp>
         <p:nvSpPr>
@@ -21515,6 +21541,10 @@
             <a:prstDash val="solid"/>
           </a:ln>
         </p:spPr>
+        <p:txBody>
+          <a:bodyPr/>
+          <a:p/>
+        </p:txBody>
       </p:sp>
       <p:sp>
         <p:nvSpPr>
@@ -21660,6 +21690,10 @@
             <a:prstDash val="solid"/>
           </a:ln>
         </p:spPr>
+        <p:txBody>
+          <a:bodyPr/>
+          <a:p/>
+        </p:txBody>
       </p:sp>
       <p:sp>
         <p:nvSpPr>
@@ -21805,6 +21839,10 @@
             <a:prstDash val="solid"/>
           </a:ln>
         </p:spPr>
+        <p:txBody>
+          <a:bodyPr/>
+          <a:p/>
+        </p:txBody>
       </p:sp>
       <p:sp>
         <p:nvSpPr>
@@ -21950,6 +21988,10 @@
             <a:prstDash val="solid"/>
           </a:ln>
         </p:spPr>
+        <p:txBody>
+          <a:bodyPr/>
+          <a:p/>
+        </p:txBody>
       </p:sp>
       <p:sp>
         <p:nvSpPr>
@@ -22095,6 +22137,10 @@
             <a:prstDash val="solid"/>
           </a:ln>
         </p:spPr>
+        <p:txBody>
+          <a:bodyPr/>
+          <a:p/>
+        </p:txBody>
       </p:sp>
       <p:sp>
         <p:nvSpPr>
@@ -22270,6 +22316,10 @@
             <a:prstDash val="solid"/>
           </a:ln>
         </p:spPr>
+        <p:txBody>
+          <a:bodyPr/>
+          <a:p/>
+        </p:txBody>
       </p:sp>
       <p:sp>
         <p:nvSpPr>
@@ -22449,6 +22499,10 @@
             <a:prstDash val="solid"/>
           </a:ln>
         </p:spPr>
+        <p:txBody>
+          <a:bodyPr/>
+          <a:p/>
+        </p:txBody>
       </p:sp>
       <p:sp>
         <p:nvSpPr>
@@ -22552,6 +22606,10 @@
             <a:prstDash val="solid"/>
           </a:ln>
         </p:spPr>
+        <p:txBody>
+          <a:bodyPr/>
+          <a:p/>
+        </p:txBody>
       </p:sp>
       <p:sp>
         <p:nvSpPr>
@@ -22577,6 +22635,10 @@
             <a:prstDash val="solid"/>
           </a:ln>
         </p:spPr>
+        <p:txBody>
+          <a:bodyPr/>
+          <a:p/>
+        </p:txBody>
       </p:sp>
       <p:sp>
         <p:nvSpPr>
@@ -22992,6 +23054,10 @@
             <a:prstDash val="solid"/>
           </a:ln>
         </p:spPr>
+        <p:txBody>
+          <a:bodyPr/>
+          <a:p/>
+        </p:txBody>
       </p:sp>
       <p:sp>
         <p:nvSpPr>
@@ -23171,6 +23237,10 @@
             <a:prstDash val="solid"/>
           </a:ln>
         </p:spPr>
+        <p:txBody>
+          <a:bodyPr/>
+          <a:p/>
+        </p:txBody>
       </p:sp>
       <p:sp>
         <p:nvSpPr>
@@ -23274,6 +23344,10 @@
             <a:prstDash val="solid"/>
           </a:ln>
         </p:spPr>
+        <p:txBody>
+          <a:bodyPr/>
+          <a:p/>
+        </p:txBody>
       </p:sp>
       <p:sp>
         <p:nvSpPr>
@@ -23479,6 +23553,10 @@
             <a:prstDash val="solid"/>
           </a:ln>
         </p:spPr>
+        <p:txBody>
+          <a:bodyPr/>
+          <a:p/>
+        </p:txBody>
       </p:sp>
       <p:sp>
         <p:nvSpPr>
@@ -23658,6 +23736,10 @@
             <a:prstDash val="solid"/>
           </a:ln>
         </p:spPr>
+        <p:txBody>
+          <a:bodyPr/>
+          <a:p/>
+        </p:txBody>
       </p:sp>
       <p:sp>
         <p:nvSpPr>
@@ -23761,6 +23843,10 @@
             <a:prstDash val="solid"/>
           </a:ln>
         </p:spPr>
+        <p:txBody>
+          <a:bodyPr/>
+          <a:p/>
+        </p:txBody>
       </p:sp>
       <p:sp>
         <p:nvSpPr>
@@ -23984,6 +24070,10 @@
             <a:prstDash val="solid"/>
           </a:ln>
         </p:spPr>
+        <p:txBody>
+          <a:bodyPr/>
+          <a:p/>
+        </p:txBody>
       </p:sp>
       <p:sp>
         <p:nvSpPr>
@@ -24207,6 +24297,10 @@
             <a:prstDash val="solid"/>
           </a:ln>
         </p:spPr>
+        <p:txBody>
+          <a:bodyPr/>
+          <a:p/>
+        </p:txBody>
       </p:sp>
       <p:sp>
         <p:nvSpPr>
@@ -24430,6 +24524,10 @@
             <a:prstDash val="solid"/>
           </a:ln>
         </p:spPr>
+        <p:txBody>
+          <a:bodyPr/>
+          <a:p/>
+        </p:txBody>
       </p:sp>
       <p:sp>
         <p:nvSpPr>
@@ -24653,6 +24751,10 @@
             <a:prstDash val="solid"/>
           </a:ln>
         </p:spPr>
+        <p:txBody>
+          <a:bodyPr/>
+          <a:p/>
+        </p:txBody>
       </p:sp>
       <p:sp>
         <p:nvSpPr>
@@ -24876,6 +24978,10 @@
             <a:prstDash val="solid"/>
           </a:ln>
         </p:spPr>
+        <p:txBody>
+          <a:bodyPr/>
+          <a:p/>
+        </p:txBody>
       </p:sp>
       <p:sp>
         <p:nvSpPr>
@@ -25129,6 +25235,10 @@
             <a:prstDash val="solid"/>
           </a:ln>
         </p:spPr>
+        <p:txBody>
+          <a:bodyPr/>
+          <a:p/>
+        </p:txBody>
       </p:sp>
       <p:sp>
         <p:nvSpPr>
@@ -25308,6 +25418,10 @@
             <a:prstDash val="solid"/>
           </a:ln>
         </p:spPr>
+        <p:txBody>
+          <a:bodyPr/>
+          <a:p/>
+        </p:txBody>
       </p:sp>
       <p:sp>
         <p:nvSpPr>
@@ -25411,6 +25525,10 @@
             <a:prstDash val="solid"/>
           </a:ln>
         </p:spPr>
+        <p:txBody>
+          <a:bodyPr/>
+          <a:p/>
+        </p:txBody>
       </p:sp>
       <p:sp>
         <p:nvSpPr>
@@ -25432,23 +25550,7 @@
         <p:txBody>
           <a:bodyPr wrap="square" rtlCol="0" anchor="ctr"/>
           <a:lstStyle/>
-          <a:p>
-            <a:pPr indent="0" marL="0">
-              <a:buNone/>
-            </a:pPr>
-            <a:r>
-              <a:rPr lang="en-US" sz="1000" b="1" dirty="0">
-                <a:solidFill>
-                  <a:srgbClr val="1976D2"/>
-                </a:solidFill>
-                <a:latin typeface="Arial" pitchFamily="34" charset="0"/>
-                <a:ea typeface="Arial" pitchFamily="34" charset="-122"/>
-                <a:cs typeface="Arial" pitchFamily="34" charset="-120"/>
-              </a:rPr>
-              <a:t>AVI DHANDHANIA (25BCE1207)</a:t>
-            </a:r>
-            <a:endParaRPr lang="en-US" sz="1000" dirty="0"/>
-          </a:p>
+          <a:p/>
         </p:txBody>
       </p:sp>
       <p:sp>
@@ -25471,23 +25573,7 @@
         <p:txBody>
           <a:bodyPr wrap="square" rtlCol="0" anchor="ctr"/>
           <a:lstStyle/>
-          <a:p>
-            <a:pPr indent="0" marL="0">
-              <a:buNone/>
-            </a:pPr>
-            <a:r>
-              <a:rPr lang="en-US" sz="850" b="1" dirty="0">
-                <a:solidFill>
-                  <a:srgbClr val="000000"/>
-                </a:solidFill>
-                <a:latin typeface="Arial" pitchFamily="34" charset="0"/>
-                <a:ea typeface="Arial" pitchFamily="34" charset="-122"/>
-                <a:cs typeface="Arial" pitchFamily="34" charset="-120"/>
-              </a:rPr>
-              <a:t>Core Architecture, Dataflow Engine &amp; UI Design</a:t>
-            </a:r>
-            <a:endParaRPr lang="en-US" sz="850" dirty="0"/>
-          </a:p>
+          <a:p/>
         </p:txBody>
       </p:sp>
       <p:sp>
@@ -25498,137 +25584,139 @@
         </p:nvSpPr>
         <p:spPr>
           <a:xfrm>
-            <a:off x="640080" y="2331720"/>
-            <a:ext cx="3657600" cy="1965960"/>
-          </a:xfrm>
-          <a:prstGeom prst="rect">
-            <a:avLst/>
-          </a:prstGeom>
-          <a:noFill/>
-          <a:ln/>
-        </p:spPr>
-        <p:txBody>
-          <a:bodyPr wrap="square" rtlCol="0" anchor="ctr"/>
-          <a:lstStyle/>
-          <a:p>
-            <a:pPr indent="0" marL="0">
-              <a:lnSpc>
-                <a:spcPts val="1100"/>
-              </a:lnSpc>
-              <a:buNone/>
-            </a:pPr>
-            <a:r>
-              <a:rPr lang="en-US" sz="780" dirty="0">
-                <a:solidFill>
-                  <a:srgbClr val="333333"/>
-                </a:solidFill>
-                <a:latin typeface="Arial" pitchFamily="34" charset="0"/>
-                <a:ea typeface="Arial" pitchFamily="34" charset="-122"/>
-                <a:cs typeface="Arial" pitchFamily="34" charset="-120"/>
-              </a:rPr>
-              <a:t>• Stage 1 AST Discovery &amp; constant propagation engine (discovery.py).</a:t>
-            </a:r>
-            <a:endParaRPr lang="en-US" sz="780" dirty="0"/>
-          </a:p>
-          <a:p>
-            <a:pPr indent="0" marL="0">
-              <a:lnSpc>
-                <a:spcPts val="1100"/>
-              </a:lnSpc>
-              <a:buNone/>
-            </a:pPr>
-            <a:r>
-              <a:rPr lang="en-US" sz="780" dirty="0">
-                <a:solidFill>
-                  <a:srgbClr val="333333"/>
-                </a:solidFill>
-                <a:latin typeface="Arial" pitchFamily="34" charset="0"/>
-                <a:ea typeface="Arial" pitchFamily="34" charset="-122"/>
-                <a:cs typeface="Arial" pitchFamily="34" charset="-120"/>
-              </a:rPr>
-              <a:t>• Stage 2 Inter-procedural Semantic Dataflow Engine (dataflow.py).</a:t>
-            </a:r>
-            <a:endParaRPr lang="en-US" sz="780" dirty="0"/>
-          </a:p>
-          <a:p>
-            <a:pPr indent="0" marL="0">
-              <a:lnSpc>
-                <a:spcPts val="1100"/>
-              </a:lnSpc>
-              <a:buNone/>
-            </a:pPr>
-            <a:r>
-              <a:rPr lang="en-US" sz="780" dirty="0">
-                <a:solidFill>
-                  <a:srgbClr val="333333"/>
-                </a:solidFill>
-                <a:latin typeface="Arial" pitchFamily="34" charset="0"/>
-                <a:ea typeface="Arial" pitchFamily="34" charset="-122"/>
-                <a:cs typeface="Arial" pitchFamily="34" charset="-120"/>
-              </a:rPr>
-              <a:t>• Built declarative retention extraction parsing S3 lifecycle &amp; Redis TTLs.</a:t>
-            </a:r>
-            <a:endParaRPr lang="en-US" sz="780" dirty="0"/>
-          </a:p>
-          <a:p>
-            <a:pPr indent="0" marL="0">
-              <a:lnSpc>
-                <a:spcPts val="1100"/>
-              </a:lnSpc>
-              <a:buNone/>
-            </a:pPr>
-            <a:r>
-              <a:rPr lang="en-US" sz="780" dirty="0">
-                <a:solidFill>
-                  <a:srgbClr val="333333"/>
-                </a:solidFill>
-                <a:latin typeface="Arial" pitchFamily="34" charset="0"/>
-                <a:ea typeface="Arial" pitchFamily="34" charset="-122"/>
-                <a:cs typeface="Arial" pitchFamily="34" charset="-120"/>
-              </a:rPr>
-              <a:t>• Designed interactive Web Dashboard UI/UX and presentation deck architecture.</a:t>
-            </a:r>
-            <a:endParaRPr lang="en-US" sz="780" dirty="0"/>
-          </a:p>
-          <a:p>
-            <a:pPr indent="0" marL="0">
-              <a:lnSpc>
-                <a:spcPts val="1100"/>
-              </a:lnSpc>
-              <a:buNone/>
-            </a:pPr>
-            <a:r>
-              <a:rPr lang="en-US" sz="780" dirty="0">
-                <a:solidFill>
-                  <a:srgbClr val="333333"/>
-                </a:solidFill>
-                <a:latin typeface="Arial" pitchFamily="34" charset="0"/>
-                <a:ea typeface="Arial" pitchFamily="34" charset="-122"/>
-                <a:cs typeface="Arial" pitchFamily="34" charset="-120"/>
-              </a:rPr>
-              <a:t>• Authored Report Sections 4 (Requirements), 5 (Architecture), 6 (Tool Justification).</a:t>
-            </a:r>
-            <a:endParaRPr lang="en-US" sz="780" dirty="0"/>
-          </a:p>
-          <a:p>
-            <a:pPr indent="0" marL="0">
-              <a:lnSpc>
-                <a:spcPts val="1100"/>
-              </a:lnSpc>
-              <a:buNone/>
-            </a:pPr>
-            <a:r>
-              <a:rPr lang="en-US" sz="780" dirty="0">
-                <a:solidFill>
-                  <a:srgbClr val="333333"/>
-                </a:solidFill>
-                <a:latin typeface="Arial" pitchFamily="34" charset="0"/>
-                <a:ea typeface="Arial" pitchFamily="34" charset="-122"/>
-                <a:cs typeface="Arial" pitchFamily="34" charset="-120"/>
-              </a:rPr>
-              <a:t>• Next: Inter-procedural cross-module call graphs &amp; CodeQL Java queries.</a:t>
-            </a:r>
-            <a:endParaRPr lang="en-US" sz="780" dirty="0"/>
+            <a:off x="640080" y="1028700"/>
+            <a:ext cx="3657600" cy="3600450"/>
+          </a:xfrm>
+          <a:prstGeom prst="rect">
+            <a:avLst/>
+          </a:prstGeom>
+          <a:noFill/>
+          <a:ln/>
+        </p:spPr>
+        <p:txBody>
+          <a:bodyPr wrap="square" rtlCol="0" anchor="ctr"/>
+          <a:lstStyle/>
+          <a:p>
+            <a:r>
+              <a:rPr sz="1000"/>
+              <a:t>AVI DHANDHANIA (25BCE1207)</a:t>
+            </a:r>
+          </a:p>
+          <a:p>
+            <a:r>
+              <a:rPr sz="1000"/>
+              <a:t>• Shared data models and the Stage 1 AST discovery engine, with constant propagation.</a:t>
+            </a:r>
+          </a:p>
+          <a:p>
+            <a:r>
+              <a:rPr sz="1000"/>
+              <a:t>• Backward taint tracing from plaintext and key arguments to their sources.</a:t>
+            </a:r>
+          </a:p>
+          <a:p>
+            <a:r>
+              <a:rPr sz="1000"/>
+              <a:t>• Problem statement and threat model.</a:t>
+            </a:r>
+          </a:p>
+          <a:p>
+            <a:r>
+              <a:rPr sz="1000"/>
+              <a:t>• Stakeholder analysis and functional / non-functional requirements.</a:t>
+            </a:r>
+          </a:p>
+          <a:p>
+            <a:r>
+              <a:rPr sz="1000"/>
+              <a:t>• Architecture write-up and slides for own sections.</a:t>
+            </a:r>
+          </a:p>
+          <a:p/>
+          <a:p>
+            <a:r>
+              <a:rPr sz="1000"/>
+              <a:t>ANMOL SALUJA (25BCE1332)</a:t>
+            </a:r>
+          </a:p>
+          <a:p>
+            <a:r>
+              <a:rPr sz="1000"/>
+              <a:t>• Forward taint tracing from ciphertext to sinks and exposure surfaces.</a:t>
+            </a:r>
+          </a:p>
+          <a:p>
+            <a:r>
+              <a:rPr sz="1000"/>
+              <a:t>• Declarative retention extractor (cloud lifecycle rules, cache TTLs).</a:t>
+            </a:r>
+          </a:p>
+          <a:p>
+            <a:r>
+              <a:rPr sz="1000"/>
+              <a:t>• Stage 3 HNDL scoring engine, Mosca breach test and noise suppression.</a:t>
+            </a:r>
+          </a:p>
+          <a:p>
+            <a:r>
+              <a:rPr sz="1000"/>
+              <a:t>• Literature survey (P1–P16) and research gap matrix.</a:t>
+            </a:r>
+          </a:p>
+          <a:p>
+            <a:r>
+              <a:rPr sz="1000"/>
+              <a:t>• Objectives, novelty statement and tool-selection justification.</a:t>
+            </a:r>
+          </a:p>
+          <a:p>
+            <a:r>
+              <a:rPr sz="1000"/>
+              <a:t>• Mathematical basis and feasibility analysis; slides for own sections.</a:t>
+            </a:r>
+          </a:p>
+          <a:p/>
+          <a:p>
+            <a:r>
+              <a:rPr sz="1000"/>
+              <a:t>AVIKA TYAGI (25BCE1294)</a:t>
+            </a:r>
+          </a:p>
+          <a:p>
+            <a:r>
+              <a:rPr sz="1000"/>
+              <a:t>• CycloneDX 1.6 CBOM serialiser, command-line interface and REST API.</a:t>
+            </a:r>
+          </a:p>
+          <a:p>
+            <a:r>
+              <a:rPr sz="1000"/>
+              <a:t>• Web dashboard front end.</a:t>
+            </a:r>
+          </a:p>
+          <a:p>
+            <a:r>
+              <a:rPr sz="1000"/>
+              <a:t>• Unit-test suite and benchmark example project.</a:t>
+            </a:r>
+          </a:p>
+          <a:p>
+            <a:r>
+              <a:rPr sz="1000"/>
+              <a:t>• Prototype and test documentation.</a:t>
+            </a:r>
+          </a:p>
+          <a:p>
+            <a:r>
+              <a:rPr sz="1000"/>
+              <a:t>• Project planning, work division and team coordination.</a:t>
+            </a:r>
+          </a:p>
+          <a:p>
+            <a:r>
+              <a:rPr sz="1000"/>
+              <a:t>• References, formatting, final report compilation and presentation deck.</a:t>
+            </a:r>
           </a:p>
         </p:txBody>
       </p:sp>
@@ -25656,6 +25744,10 @@
             <a:prstDash val="solid"/>
           </a:ln>
         </p:spPr>
+        <p:txBody>
+          <a:bodyPr/>
+          <a:p/>
+        </p:txBody>
       </p:sp>
       <p:sp>
         <p:nvSpPr>
@@ -25677,23 +25769,7 @@
         <p:txBody>
           <a:bodyPr wrap="square" rtlCol="0" anchor="ctr"/>
           <a:lstStyle/>
-          <a:p>
-            <a:pPr indent="0" marL="0">
-              <a:buNone/>
-            </a:pPr>
-            <a:r>
-              <a:rPr lang="en-US" sz="1000" b="1" dirty="0">
-                <a:solidFill>
-                  <a:srgbClr val="1976D2"/>
-                </a:solidFill>
-                <a:latin typeface="Arial" pitchFamily="34" charset="0"/>
-                <a:ea typeface="Arial" pitchFamily="34" charset="-122"/>
-                <a:cs typeface="Arial" pitchFamily="34" charset="-120"/>
-              </a:rPr>
-              <a:t>ANMOL SALUJA (25BCE1332)</a:t>
-            </a:r>
-            <a:endParaRPr lang="en-US" sz="1000" dirty="0"/>
-          </a:p>
+          <a:p/>
         </p:txBody>
       </p:sp>
       <p:sp>
@@ -25716,23 +25792,7 @@
         <p:txBody>
           <a:bodyPr wrap="square" rtlCol="0" anchor="ctr"/>
           <a:lstStyle/>
-          <a:p>
-            <a:pPr indent="0" marL="0">
-              <a:buNone/>
-            </a:pPr>
-            <a:r>
-              <a:rPr lang="en-US" sz="850" b="1" dirty="0">
-                <a:solidFill>
-                  <a:srgbClr val="000000"/>
-                </a:solidFill>
-                <a:latin typeface="Arial" pitchFamily="34" charset="0"/>
-                <a:ea typeface="Arial" pitchFamily="34" charset="-122"/>
-                <a:cs typeface="Arial" pitchFamily="34" charset="-120"/>
-              </a:rPr>
-              <a:t>Threat Modeling, HNDL Scoring &amp; Verification Harness</a:t>
-            </a:r>
-            <a:endParaRPr lang="en-US" sz="850" dirty="0"/>
-          </a:p>
+          <a:p/>
         </p:txBody>
       </p:sp>
       <p:sp>
@@ -25755,146 +25815,7 @@
         <p:txBody>
           <a:bodyPr wrap="square" rtlCol="0" anchor="ctr"/>
           <a:lstStyle/>
-          <a:p>
-            <a:pPr indent="0" marL="0">
-              <a:lnSpc>
-                <a:spcPts val="1100"/>
-              </a:lnSpc>
-              <a:buNone/>
-            </a:pPr>
-            <a:r>
-              <a:rPr lang="en-US" sz="780" dirty="0">
-                <a:solidFill>
-                  <a:srgbClr val="333333"/>
-                </a:solidFill>
-                <a:latin typeface="Arial" pitchFamily="34" charset="0"/>
-                <a:ea typeface="Arial" pitchFamily="34" charset="-122"/>
-                <a:cs typeface="Arial" pitchFamily="34" charset="-120"/>
-              </a:rPr>
-              <a:t>• Formalised Mosca inequality operationalisation &amp; 16-paper literature gaps.</a:t>
-            </a:r>
-            <a:endParaRPr lang="en-US" sz="780" dirty="0"/>
-          </a:p>
-          <a:p>
-            <a:pPr indent="0" marL="0">
-              <a:lnSpc>
-                <a:spcPts val="1100"/>
-              </a:lnSpc>
-              <a:buNone/>
-            </a:pPr>
-            <a:r>
-              <a:rPr lang="en-US" sz="780" dirty="0">
-                <a:solidFill>
-                  <a:srgbClr val="333333"/>
-                </a:solidFill>
-                <a:latin typeface="Arial" pitchFamily="34" charset="0"/>
-                <a:ea typeface="Arial" pitchFamily="34" charset="-122"/>
-                <a:cs typeface="Arial" pitchFamily="34" charset="-120"/>
-              </a:rPr>
-              <a:t>• Formulated HNDL Exposure Scoring equation &amp; Stage 3 Scoring Engine (scorer.py).</a:t>
-            </a:r>
-            <a:endParaRPr lang="en-US" sz="780" dirty="0"/>
-          </a:p>
-          <a:p>
-            <a:pPr indent="0" marL="0">
-              <a:lnSpc>
-                <a:spcPts val="1100"/>
-              </a:lnSpc>
-              <a:buNone/>
-            </a:pPr>
-            <a:r>
-              <a:rPr lang="en-US" sz="780" dirty="0">
-                <a:solidFill>
-                  <a:srgbClr val="333333"/>
-                </a:solidFill>
-                <a:latin typeface="Arial" pitchFamily="34" charset="0"/>
-                <a:ea typeface="Arial" pitchFamily="34" charset="-122"/>
-                <a:cs typeface="Arial" pitchFamily="34" charset="-120"/>
-              </a:rPr>
-              <a:t>• Implemented CycloneDX 1.6 CBOM Serializer (cbom.py, cli.py).</a:t>
-            </a:r>
-            <a:endParaRPr lang="en-US" sz="780" dirty="0"/>
-          </a:p>
-          <a:p>
-            <a:pPr indent="0" marL="0">
-              <a:lnSpc>
-                <a:spcPts val="1100"/>
-              </a:lnSpc>
-              <a:buNone/>
-            </a:pPr>
-            <a:r>
-              <a:rPr lang="en-US" sz="780" dirty="0">
-                <a:solidFill>
-                  <a:srgbClr val="333333"/>
-                </a:solidFill>
-                <a:latin typeface="Arial" pitchFamily="34" charset="0"/>
-                <a:ea typeface="Arial" pitchFamily="34" charset="-122"/>
-                <a:cs typeface="Arial" pitchFamily="34" charset="-120"/>
-              </a:rPr>
-              <a:t>• Full-Stack Backend Integration &amp; REST API server (server.py).</a:t>
-            </a:r>
-            <a:endParaRPr lang="en-US" sz="780" dirty="0"/>
-          </a:p>
-          <a:p>
-            <a:pPr indent="0" marL="0">
-              <a:lnSpc>
-                <a:spcPts val="1100"/>
-              </a:lnSpc>
-              <a:buNone/>
-            </a:pPr>
-            <a:r>
-              <a:rPr lang="en-US" sz="780" dirty="0">
-                <a:solidFill>
-                  <a:srgbClr val="333333"/>
-                </a:solidFill>
-                <a:latin typeface="Arial" pitchFamily="34" charset="0"/>
-                <a:ea typeface="Arial" pitchFamily="34" charset="-122"/>
-                <a:cs typeface="Arial" pitchFamily="34" charset="-120"/>
-              </a:rPr>
-              <a:t>• Authored 100% passing automated unit test suite (tests/test_navigator.py).</a:t>
-            </a:r>
-            <a:endParaRPr lang="en-US" sz="780" dirty="0"/>
-          </a:p>
-          <a:p>
-            <a:pPr indent="0" marL="0">
-              <a:lnSpc>
-                <a:spcPts val="1100"/>
-              </a:lnSpc>
-              <a:buNone/>
-            </a:pPr>
-            <a:r>
-              <a:rPr lang="en-US" sz="780" dirty="0">
-                <a:solidFill>
-                  <a:srgbClr val="333333"/>
-                </a:solidFill>
-                <a:latin typeface="Arial" pitchFamily="34" charset="0"/>
-                <a:ea typeface="Arial" pitchFamily="34" charset="-122"/>
-                <a:cs typeface="Arial" pitchFamily="34" charset="-120"/>
-              </a:rPr>
-              <a:t>• Authored Report Sections 1, 2, 3, 8, 9, 10 &amp; document sanitization.</a:t>
-            </a:r>
-            <a:endParaRPr lang="en-US" sz="780" dirty="0"/>
-          </a:p>
-          <a:p>
-            <a:pPr indent="0" marL="0">
-              <a:lnSpc>
-                <a:spcPts val="1100"/>
-              </a:lnSpc>
-              <a:buNone/>
-            </a:pPr>
-            <a:r>
-              <a:rPr lang="en-US" sz="780" dirty="0">
-                <a:solidFill>
-                  <a:srgbClr val="333333"/>
-                </a:solidFill>
-                <a:latin typeface="Arial" pitchFamily="34" charset="0"/>
-                <a:ea typeface="Arial" pitchFamily="34" charset="-122"/>
-                <a:cs typeface="Arial" pitchFamily="34" charset="-120"/>
-              </a:rPr>
-              <a:t>• Next: 15-repo benchmark curation &amp; liboqs 3-gate patch verification harness.</a:t>
-            </a:r>
-            <a:endParaRPr lang="en-US" sz="780" dirty="0"/>
-          </a:p>
+          <a:p/>
         </p:txBody>
       </p:sp>
     </p:spTree>
@@ -25951,6 +25872,10 @@
             <a:prstDash val="solid"/>
           </a:ln>
         </p:spPr>
+        <p:txBody>
+          <a:bodyPr/>
+          <a:p/>
+        </p:txBody>
       </p:sp>
       <p:sp>
         <p:nvSpPr>
@@ -26130,6 +26055,10 @@
             <a:prstDash val="solid"/>
           </a:ln>
         </p:spPr>
+        <p:txBody>
+          <a:bodyPr/>
+          <a:p/>
+        </p:txBody>
       </p:sp>
       <p:sp>
         <p:nvSpPr>
@@ -26233,6 +26162,10 @@
             <a:prstDash val="solid"/>
           </a:ln>
         </p:spPr>
+        <p:txBody>
+          <a:bodyPr/>
+          <a:p/>
+        </p:txBody>
       </p:sp>
       <p:sp>
         <p:nvSpPr>
@@ -26459,6 +26392,10 @@
             <a:prstDash val="solid"/>
           </a:ln>
         </p:spPr>
+        <p:txBody>
+          <a:bodyPr/>
+          <a:p/>
+        </p:txBody>
       </p:sp>
       <p:sp>
         <p:nvSpPr>
@@ -26685,6 +26622,10 @@
             <a:prstDash val="solid"/>
           </a:ln>
         </p:spPr>
+        <p:txBody>
+          <a:bodyPr/>
+          <a:p/>
+        </p:txBody>
       </p:sp>
       <p:sp>
         <p:nvSpPr>
@@ -26911,6 +26852,10 @@
             <a:prstDash val="solid"/>
           </a:ln>
         </p:spPr>
+        <p:txBody>
+          <a:bodyPr/>
+          <a:p/>
+        </p:txBody>
       </p:sp>
       <p:sp>
         <p:nvSpPr>
@@ -27167,6 +27112,10 @@
             <a:prstDash val="solid"/>
           </a:ln>
         </p:spPr>
+        <p:txBody>
+          <a:bodyPr/>
+          <a:p/>
+        </p:txBody>
       </p:sp>
       <p:sp>
         <p:nvSpPr>
@@ -27346,6 +27295,10 @@
             <a:prstDash val="solid"/>
           </a:ln>
         </p:spPr>
+        <p:txBody>
+          <a:bodyPr/>
+          <a:p/>
+        </p:txBody>
       </p:sp>
       <p:sp>
         <p:nvSpPr>
@@ -27449,6 +27402,10 @@
             <a:prstDash val="solid"/>
           </a:ln>
         </p:spPr>
+        <p:txBody>
+          <a:bodyPr/>
+          <a:p/>
+        </p:txBody>
       </p:sp>
       <p:sp>
         <p:nvSpPr>
@@ -27471,222 +27428,57 @@
           <a:bodyPr wrap="square" rtlCol="0" anchor="ctr"/>
           <a:lstStyle/>
           <a:p>
-            <a:pPr indent="0" marL="0">
-              <a:lnSpc>
-                <a:spcPts val="1100"/>
-              </a:lnSpc>
-              <a:buNone/>
-            </a:pPr>
-            <a:r>
-              <a:rPr lang="en-US" sz="1000" b="1" dirty="0">
-                <a:solidFill>
-                  <a:srgbClr val="000000"/>
-                </a:solidFill>
-                <a:latin typeface="Arial" pitchFamily="34" charset="0"/>
-                <a:ea typeface="Arial" pitchFamily="34" charset="-122"/>
-                <a:cs typeface="Arial" pitchFamily="34" charset="-120"/>
-              </a:rPr>
-              <a:t>INDIVIDUAL EVIDENCE OF COMPLETED WORK (REVIEW II — 50/50 EQUITABLE SPLIT):
-</a:t>
-            </a:r>
-            <a:pPr indent="0" marL="0">
-              <a:lnSpc>
-                <a:spcPts val="1100"/>
-              </a:lnSpc>
-              <a:buNone/>
-            </a:pPr>
-            <a:r>
-              <a:rPr lang="en-US" sz="950" b="1" dirty="0">
-                <a:solidFill>
-                  <a:srgbClr val="1976D2"/>
-                </a:solidFill>
-                <a:latin typeface="Arial" pitchFamily="34" charset="0"/>
-                <a:ea typeface="Arial" pitchFamily="34" charset="-122"/>
-                <a:cs typeface="Arial" pitchFamily="34" charset="-120"/>
-              </a:rPr>
-              <a:t>• Avi Dhandhania (25BCE1207 — Lead Architect, Dataflow &amp; UI):
-</a:t>
-            </a:r>
-            <a:pPr indent="0" marL="0">
-              <a:lnSpc>
-                <a:spcPts val="1100"/>
-              </a:lnSpc>
-              <a:buNone/>
-            </a:pPr>
-            <a:r>
-              <a:rPr lang="en-US" sz="800" dirty="0">
-                <a:solidFill>
-                  <a:srgbClr val="333333"/>
-                </a:solidFill>
-                <a:latin typeface="Arial" pitchFamily="34" charset="0"/>
-                <a:ea typeface="Arial" pitchFamily="34" charset="-122"/>
-                <a:cs typeface="Arial" pitchFamily="34" charset="-120"/>
-              </a:rPr>
-              <a:t>  - Designed the end-to-end 4-stage pipeline architecture and intermediate data contracts (models.py).
-</a:t>
-            </a:r>
-            <a:pPr indent="0" marL="0">
-              <a:lnSpc>
-                <a:spcPts val="1100"/>
-              </a:lnSpc>
-              <a:buNone/>
-            </a:pPr>
-            <a:r>
-              <a:rPr lang="en-US" sz="800" dirty="0">
-                <a:solidFill>
-                  <a:srgbClr val="333333"/>
-                </a:solidFill>
-                <a:latin typeface="Arial" pitchFamily="34" charset="0"/>
-                <a:ea typeface="Arial" pitchFamily="34" charset="-122"/>
-                <a:cs typeface="Arial" pitchFamily="34" charset="-120"/>
-              </a:rPr>
-              <a:t>  - Implemented the Stage 1 AST Discovery Engine (discovery.py) and constant propagation logic.
-</a:t>
-            </a:r>
-            <a:pPr indent="0" marL="0">
-              <a:lnSpc>
-                <a:spcPts val="1100"/>
-              </a:lnSpc>
-              <a:buNone/>
-            </a:pPr>
-            <a:r>
-              <a:rPr lang="en-US" sz="800" dirty="0">
-                <a:solidFill>
-                  <a:srgbClr val="333333"/>
-                </a:solidFill>
-                <a:latin typeface="Arial" pitchFamily="34" charset="0"/>
-                <a:ea typeface="Arial" pitchFamily="34" charset="-122"/>
-                <a:cs typeface="Arial" pitchFamily="34" charset="-120"/>
-              </a:rPr>
-              <a:t>  - Developed the Stage 2 Dataflow Binding Engine (dataflow.py), tracing plaintext sources and ciphertext sinks.
-</a:t>
-            </a:r>
-            <a:pPr indent="0" marL="0">
-              <a:lnSpc>
-                <a:spcPts val="1100"/>
-              </a:lnSpc>
-              <a:buNone/>
-            </a:pPr>
-            <a:r>
-              <a:rPr lang="en-US" sz="800" dirty="0">
-                <a:solidFill>
-                  <a:srgbClr val="333333"/>
-                </a:solidFill>
-                <a:latin typeface="Arial" pitchFamily="34" charset="0"/>
-                <a:ea typeface="Arial" pitchFamily="34" charset="-122"/>
-                <a:cs typeface="Arial" pitchFamily="34" charset="-120"/>
-              </a:rPr>
-              <a:t>  - Designed the interactive Web Dashboard UI/UX layout and visual component design.
-</a:t>
-            </a:r>
-            <a:pPr indent="0" marL="0">
-              <a:lnSpc>
-                <a:spcPts val="1100"/>
-              </a:lnSpc>
-              <a:buNone/>
-            </a:pPr>
-            <a:r>
-              <a:rPr lang="en-US" sz="950" b="1" dirty="0">
-                <a:solidFill>
-                  <a:srgbClr val="2E7D32"/>
-                </a:solidFill>
-                <a:latin typeface="Arial" pitchFamily="34" charset="0"/>
-                <a:ea typeface="Arial" pitchFamily="34" charset="-122"/>
-                <a:cs typeface="Arial" pitchFamily="34" charset="-120"/>
-              </a:rPr>
-              <a:t>• Anmol Saluja (25BCE1332 — Threat Modeling, Scoring Engine, Testing &amp; Backend Integration):
-</a:t>
-            </a:r>
-            <a:pPr indent="0" marL="0">
-              <a:lnSpc>
-                <a:spcPts val="1100"/>
-              </a:lnSpc>
-              <a:buNone/>
-            </a:pPr>
-            <a:r>
-              <a:rPr lang="en-US" sz="950" b="1" dirty="0">
-                <a:solidFill>
-                  <a:srgbClr val="F59E0B"/>
-                </a:solidFill>
-                <a:latin typeface="Arial" pitchFamily="34" charset="0"/>
-                <a:ea typeface="Arial" pitchFamily="34" charset="-122"/>
-                <a:cs typeface="Arial" pitchFamily="34" charset="-120"/>
-              </a:rPr>
-              <a:t>• Avika Tyagi (25BCE1294 — Project Coordination, Requirement Analysis &amp; Presentation Design):
-</a:t>
-            </a:r>
-            <a:pPr indent="0" marL="0">
-              <a:lnSpc>
-                <a:spcPts val="1100"/>
-              </a:lnSpc>
-              <a:buNone/>
-            </a:pPr>
-            <a:r>
-              <a:rPr lang="en-US" sz="800" dirty="0">
-                <a:solidFill>
-                  <a:srgbClr val="333333"/>
-                </a:solidFill>
-                <a:latin typeface="Arial" pitchFamily="34" charset="0"/>
-                <a:ea typeface="Arial" pitchFamily="34" charset="-122"/>
-                <a:cs typeface="Arial" pitchFamily="34" charset="-120"/>
-              </a:rPr>
-              <a:t>  - Formalized the HNDL threat model, Mosca's inequality derivation, and 16-paper literature gap matrix.
-</a:t>
-            </a:r>
-            <a:pPr indent="0" marL="0">
-              <a:lnSpc>
-                <a:spcPts val="1100"/>
-              </a:lnSpc>
-              <a:buNone/>
-            </a:pPr>
-            <a:r>
-              <a:rPr lang="en-US" sz="800" dirty="0">
-                <a:solidFill>
-                  <a:srgbClr val="333333"/>
-                </a:solidFill>
-                <a:latin typeface="Arial" pitchFamily="34" charset="0"/>
-                <a:ea typeface="Arial" pitchFamily="34" charset="-122"/>
-                <a:cs typeface="Arial" pitchFamily="34" charset="-120"/>
-              </a:rPr>
-              <a:t>  - Implemented the Stage 3 HNDL Exposure Scoring Engine (scorer.py) and noise suppression filter.
-</a:t>
-            </a:r>
-            <a:pPr indent="0" marL="0">
-              <a:lnSpc>
-                <a:spcPts val="1100"/>
-              </a:lnSpc>
-              <a:buNone/>
-            </a:pPr>
-            <a:r>
-              <a:rPr lang="en-US" sz="800" dirty="0">
-                <a:solidFill>
-                  <a:srgbClr val="333333"/>
-                </a:solidFill>
-                <a:latin typeface="Arial" pitchFamily="34" charset="0"/>
-                <a:ea typeface="Arial" pitchFamily="34" charset="-122"/>
-                <a:cs typeface="Arial" pitchFamily="34" charset="-120"/>
-              </a:rPr>
-              <a:t>  - Developed the CycloneDX 1.6 CBOM Serializer (cbom.py, cli.py) with custom dataflow properties.
-</a:t>
-            </a:r>
-            <a:pPr indent="0" marL="0">
-              <a:lnSpc>
-                <a:spcPts val="1100"/>
-              </a:lnSpc>
-              <a:buNone/>
-            </a:pPr>
-            <a:r>
-              <a:rPr lang="en-US" sz="800" dirty="0">
-                <a:solidFill>
-                  <a:srgbClr val="333333"/>
-                </a:solidFill>
-                <a:latin typeface="Arial" pitchFamily="34" charset="0"/>
-                <a:ea typeface="Arial" pitchFamily="34" charset="-122"/>
-                <a:cs typeface="Arial" pitchFamily="34" charset="-120"/>
-              </a:rPr>
-              <a:t>  - Built full-stack REST API server (server.py) and 100% passing unit test suite (tests/test_navigator.py).</a:t>
-            </a:r>
-            <a:endParaRPr lang="en-US" sz="800" dirty="0"/>
+            <a:r>
+              <a:t>INDIVIDUAL EVIDENCE OF COMPLETED WORK (REVIEW II — 33/33/33 EQUITABLE SPLIT):</a:t>
+            </a:r>
+          </a:p>
+          <a:p/>
+          <a:p>
+            <a:r>
+              <a:t>• Avi Dhandhania (25BCE1207 — Architecture, AST &amp; Dataflow):</a:t>
+            </a:r>
+          </a:p>
+          <a:p>
+            <a:r>
+              <a:t>  - Implemented Stage 1 AST discovery and backward taint tracing.</a:t>
+            </a:r>
+          </a:p>
+          <a:p>
+            <a:r>
+              <a:t>  - Authored domain models, problem statement, and architecture write-up.</a:t>
+            </a:r>
+          </a:p>
+          <a:p/>
+          <a:p>
+            <a:r>
+              <a:t>• Anmol Saluja (25BCE1332 — Threat Modeling, Retention &amp; Scoring):</a:t>
+            </a:r>
+          </a:p>
+          <a:p>
+            <a:r>
+              <a:t>  - Formulated HNDL scoring, forward taint tracing, and declarative retention.</a:t>
+            </a:r>
+          </a:p>
+          <a:p>
+            <a:r>
+              <a:t>  - Conducted literature survey and justified tool selection.</a:t>
+            </a:r>
+          </a:p>
+          <a:p/>
+          <a:p>
+            <a:r>
+              <a:t>• Avika Tyagi (25BCE1294 — Project Coordination, Dashboard &amp; CBOM):</a:t>
+            </a:r>
+          </a:p>
+          <a:p>
+            <a:r>
+              <a:t>  - Developed CycloneDX 1.6 serializer, CLI, API, and web dashboard.</a:t>
+            </a:r>
+          </a:p>
+          <a:p>
+            <a:r>
+              <a:t>  - Authored automated test suite, project planning, and final deck.</a:t>
+            </a:r>
           </a:p>
         </p:txBody>
       </p:sp>
@@ -27744,6 +27536,10 @@
             <a:prstDash val="solid"/>
           </a:ln>
         </p:spPr>
+        <p:txBody>
+          <a:bodyPr/>
+          <a:p/>
+        </p:txBody>
       </p:sp>
       <p:sp>
         <p:nvSpPr>
@@ -27923,6 +27719,10 @@
             <a:prstDash val="solid"/>
           </a:ln>
         </p:spPr>
+        <p:txBody>
+          <a:bodyPr/>
+          <a:p/>
+        </p:txBody>
       </p:sp>
       <p:sp>
         <p:nvSpPr>
@@ -28026,6 +27826,10 @@
             <a:prstDash val="solid"/>
           </a:ln>
         </p:spPr>
+        <p:txBody>
+          <a:bodyPr/>
+          <a:p/>
+        </p:txBody>
       </p:sp>
       <p:sp>
         <p:nvSpPr>
@@ -28132,6 +27936,10 @@
             <a:prstDash val="solid"/>
           </a:ln>
         </p:spPr>
+        <p:txBody>
+          <a:bodyPr/>
+          <a:p/>
+        </p:txBody>
       </p:sp>
       <p:sp>
         <p:nvSpPr>
@@ -28238,6 +28046,10 @@
             <a:prstDash val="solid"/>
           </a:ln>
         </p:spPr>
+        <p:txBody>
+          <a:bodyPr/>
+          <a:p/>
+        </p:txBody>
       </p:sp>
       <p:sp>
         <p:nvSpPr>
@@ -28374,6 +28186,10 @@
             <a:prstDash val="solid"/>
           </a:ln>
         </p:spPr>
+        <p:txBody>
+          <a:bodyPr/>
+          <a:p/>
+        </p:txBody>
       </p:sp>
       <p:sp>
         <p:nvSpPr>
@@ -28553,6 +28369,10 @@
             <a:prstDash val="solid"/>
           </a:ln>
         </p:spPr>
+        <p:txBody>
+          <a:bodyPr/>
+          <a:p/>
+        </p:txBody>
       </p:sp>
       <p:sp>
         <p:nvSpPr>
@@ -28656,6 +28476,10 @@
             <a:prstDash val="solid"/>
           </a:ln>
         </p:spPr>
+        <p:txBody>
+          <a:bodyPr/>
+          <a:p/>
+        </p:txBody>
       </p:sp>
       <p:sp>
         <p:nvSpPr>
@@ -28681,6 +28505,10 @@
             <a:prstDash val="solid"/>
           </a:ln>
         </p:spPr>
+        <p:txBody>
+          <a:bodyPr/>
+          <a:p/>
+        </p:txBody>
       </p:sp>
       <p:sp>
         <p:nvSpPr>
@@ -29114,6 +28942,10 @@
             <a:prstDash val="solid"/>
           </a:ln>
         </p:spPr>
+        <p:txBody>
+          <a:bodyPr/>
+          <a:p/>
+        </p:txBody>
       </p:sp>
       <p:sp>
         <p:nvSpPr>
@@ -29293,6 +29125,10 @@
             <a:prstDash val="solid"/>
           </a:ln>
         </p:spPr>
+        <p:txBody>
+          <a:bodyPr/>
+          <a:p/>
+        </p:txBody>
       </p:sp>
       <p:sp>
         <p:nvSpPr>
@@ -29396,6 +29232,10 @@
             <a:prstDash val="solid"/>
           </a:ln>
         </p:spPr>
+        <p:txBody>
+          <a:bodyPr/>
+          <a:p/>
+        </p:txBody>
       </p:sp>
       <p:sp>
         <p:nvSpPr>
@@ -29421,6 +29261,10 @@
             <a:prstDash val="solid"/>
           </a:ln>
         </p:spPr>
+        <p:txBody>
+          <a:bodyPr/>
+          <a:p/>
+        </p:txBody>
       </p:sp>
       <p:sp>
         <p:nvSpPr>
@@ -29818,6 +29662,10 @@
             <a:prstDash val="solid"/>
           </a:ln>
         </p:spPr>
+        <p:txBody>
+          <a:bodyPr/>
+          <a:p/>
+        </p:txBody>
       </p:sp>
       <p:sp>
         <p:nvSpPr>
@@ -29997,6 +29845,10 @@
             <a:prstDash val="solid"/>
           </a:ln>
         </p:spPr>
+        <p:txBody>
+          <a:bodyPr/>
+          <a:p/>
+        </p:txBody>
       </p:sp>
       <p:sp>
         <p:nvSpPr>
@@ -30100,6 +29952,10 @@
             <a:prstDash val="solid"/>
           </a:ln>
         </p:spPr>
+        <p:txBody>
+          <a:bodyPr/>
+          <a:p/>
+        </p:txBody>
       </p:sp>
       <p:sp>
         <p:nvSpPr>
@@ -30125,6 +29981,10 @@
             <a:prstDash val="solid"/>
           </a:ln>
         </p:spPr>
+        <p:txBody>
+          <a:bodyPr/>
+          <a:p/>
+        </p:txBody>
       </p:sp>
       <p:sp>
         <p:nvSpPr>
@@ -30558,6 +30418,10 @@
             <a:prstDash val="solid"/>
           </a:ln>
         </p:spPr>
+        <p:txBody>
+          <a:bodyPr/>
+          <a:p/>
+        </p:txBody>
       </p:sp>
       <p:sp>
         <p:nvSpPr>
@@ -30737,6 +30601,10 @@
             <a:prstDash val="solid"/>
           </a:ln>
         </p:spPr>
+        <p:txBody>
+          <a:bodyPr/>
+          <a:p/>
+        </p:txBody>
       </p:sp>
       <p:sp>
         <p:nvSpPr>
@@ -30840,6 +30708,10 @@
             <a:prstDash val="solid"/>
           </a:ln>
         </p:spPr>
+        <p:txBody>
+          <a:bodyPr/>
+          <a:p/>
+        </p:txBody>
       </p:sp>
       <p:sp>
         <p:nvSpPr>
@@ -30985,6 +30857,10 @@
             <a:prstDash val="solid"/>
           </a:ln>
         </p:spPr>
+        <p:txBody>
+          <a:bodyPr/>
+          <a:p/>
+        </p:txBody>
       </p:sp>
       <p:sp>
         <p:nvSpPr>
@@ -31130,6 +31006,10 @@
             <a:prstDash val="solid"/>
           </a:ln>
         </p:spPr>
+        <p:txBody>
+          <a:bodyPr/>
+          <a:p/>
+        </p:txBody>
       </p:sp>
       <p:sp>
         <p:nvSpPr>
@@ -31275,6 +31155,10 @@
             <a:prstDash val="solid"/>
           </a:ln>
         </p:spPr>
+        <p:txBody>
+          <a:bodyPr/>
+          <a:p/>
+        </p:txBody>
       </p:sp>
       <p:sp>
         <p:nvSpPr>
@@ -31450,6 +31334,10 @@
             <a:prstDash val="solid"/>
           </a:ln>
         </p:spPr>
+        <p:txBody>
+          <a:bodyPr/>
+          <a:p/>
+        </p:txBody>
       </p:sp>
       <p:sp>
         <p:nvSpPr>
@@ -31629,6 +31517,10 @@
             <a:prstDash val="solid"/>
           </a:ln>
         </p:spPr>
+        <p:txBody>
+          <a:bodyPr/>
+          <a:p/>
+        </p:txBody>
       </p:sp>
       <p:sp>
         <p:nvSpPr>
@@ -31732,6 +31624,10 @@
             <a:prstDash val="solid"/>
           </a:ln>
         </p:spPr>
+        <p:txBody>
+          <a:bodyPr/>
+          <a:p/>
+        </p:txBody>
       </p:sp>
       <p:sp>
         <p:nvSpPr>
@@ -32040,6 +31936,10 @@
             <a:prstDash val="solid"/>
           </a:ln>
         </p:spPr>
+        <p:txBody>
+          <a:bodyPr/>
+          <a:p/>
+        </p:txBody>
       </p:sp>
       <p:sp>
         <p:nvSpPr>
@@ -32219,6 +32119,10 @@
             <a:prstDash val="solid"/>
           </a:ln>
         </p:spPr>
+        <p:txBody>
+          <a:bodyPr/>
+          <a:p/>
+        </p:txBody>
       </p:sp>
       <p:sp>
         <p:nvSpPr>
@@ -32322,6 +32226,10 @@
             <a:prstDash val="solid"/>
           </a:ln>
         </p:spPr>
+        <p:txBody>
+          <a:bodyPr/>
+          <a:p/>
+        </p:txBody>
       </p:sp>
       <p:sp>
         <p:nvSpPr>
@@ -32548,6 +32456,10 @@
             <a:prstDash val="solid"/>
           </a:ln>
         </p:spPr>
+        <p:txBody>
+          <a:bodyPr/>
+          <a:p/>
+        </p:txBody>
       </p:sp>
       <p:sp>
         <p:nvSpPr>
@@ -32774,6 +32686,10 @@
             <a:prstDash val="solid"/>
           </a:ln>
         </p:spPr>
+        <p:txBody>
+          <a:bodyPr/>
+          <a:p/>
+        </p:txBody>
       </p:sp>
       <p:sp>
         <p:nvSpPr>
